--- a/output/Sigma_Summary_Latest.pptx
+++ b/output/Sigma_Summary_Latest.pptx
@@ -11,6 +11,7 @@
     <p:sldId id="259" r:id="rId10"/>
     <p:sldId id="260" r:id="rId11"/>
     <p:sldId id="261" r:id="rId12"/>
+    <p:sldId id="262" r:id="rId13"/>
   </p:sldIdLst>
   <p:sldSz cx="12191695" cy="6858000" type="screen4x3"/>
   <p:notesSz cx="6858000" cy="9144000"/>
@@ -3122,38 +3123,5543 @@
           <a:p>
             <a:r>
               <a:rPr/>
-              <a:t>Sigma Score Summary</a:t>
+              <a:t>Flagged Items Summary (1/2)</a:t>
             </a:r>
           </a:p>
         </p:txBody>
       </p:sp>
-      <p:sp>
-        <p:nvSpPr>
+      <p:graphicFrame>
+        <p:nvGraphicFramePr>
           <p:cNvPr id="3" name="Content Placeholder 2"/>
-          <p:cNvSpPr>
-            <a:spLocks noGrp="1"/>
-          </p:cNvSpPr>
-          <p:nvPr>
-            <p:ph idx="1"/>
-          </p:nvPr>
-        </p:nvSpPr>
-        <p:spPr>
-          <a:xfrm>
-            <a:off x="457200" y="1600200"/>
-            <a:ext cx="8229600" cy="4525963"/>
-          </a:xfrm>
-        </p:spPr>
-        <p:txBody>
-          <a:bodyPr/>
-          <a:lstStyle/>
-          <a:p>
-            <a:r>
-              <a:rPr/>
-              <a:t>All perfectly stable. 0 items flagged.</a:t>
-            </a:r>
-          </a:p>
-        </p:txBody>
-      </p:sp>
+          <p:cNvGraphicFramePr>
+            <a:graphicFrameLocks noGrp="true"/>
+          </p:cNvGraphicFramePr>
+          <p:nvPr/>
+        </p:nvGraphicFramePr>
+        <p:xfrm rot="0">
+          <a:off x="457200" y="1600200"/>
+          <a:ext cx="8229600" cy="4525963"/>
+        </p:xfrm>
+        <a:graphic>
+          <a:graphicData uri="http://schemas.openxmlformats.org/drawingml/2006/table">
+            <a:tbl>
+              <a:tblPr/>
+              <a:tblGrid>
+                <a:gridCol w="610228"/>
+                <a:gridCol w="664253"/>
+                <a:gridCol w="819642"/>
+                <a:gridCol w="1293380"/>
+                <a:gridCol w="649041"/>
+                <a:gridCol w="454839"/>
+              </a:tblGrid>
+              <a:tr h="364252">
+                <a:tc>
+                  <a:txBody>
+                    <a:bodyPr/>
+                    <a:lstStyle/>
+                    <a:p>
+                      <a:pPr algn="ctr" marL="63500" marR="63500">
+                        <a:lnSpc>
+                          <a:spcPct val="100000"/>
+                        </a:lnSpc>
+                        <a:spcBef>
+                          <a:spcPts val="500"/>
+                        </a:spcBef>
+                        <a:spcAft>
+                          <a:spcPts val="500"/>
+                        </a:spcAft>
+                        <a:buNone/>
+                      </a:pPr>
+                      <a:r>
+                        <a:rPr cap="none" sz="1100" i="0" b="1" u="none" strike="noStrike">
+                          <a:solidFill>
+                            <a:srgbClr val="000000">
+                              <a:alpha val="100000"/>
+                            </a:srgbClr>
+                          </a:solidFill>
+                          <a:latin typeface="Arial"/>
+                          <a:cs typeface="Arial"/>
+                          <a:ea typeface="Arial"/>
+                          <a:sym typeface="Arial"/>
+                        </a:rPr>
+                        <a:t>Cat1</a:t>
+                      </a:r>
+                    </a:p>
+                  </a:txBody>
+                  <a:tcPr anchor="ctr" marB="63500" marT="63500" marR="0" marL="0">
+                    <a:lnL algn="ctr" cmpd="sng" cap="flat" w="0">
+                      <a:noFill/>
+                      <a:prstDash val="solid"/>
+                    </a:lnL>
+                    <a:lnR algn="ctr" cmpd="sng" cap="flat" w="0">
+                      <a:noFill/>
+                      <a:prstDash val="solid"/>
+                    </a:lnR>
+                    <a:lnT algn="ctr" cmpd="sng" cap="flat" w="0">
+                      <a:noFill/>
+                      <a:prstDash val="solid"/>
+                    </a:lnT>
+                    <a:lnB algn="ctr" cmpd="sng" cap="flat" w="0">
+                      <a:noFill/>
+                      <a:prstDash val="solid"/>
+                    </a:lnB>
+                    <a:solidFill>
+                      <a:srgbClr val="CFCFCF">
+                        <a:alpha val="100000"/>
+                      </a:srgbClr>
+                    </a:solidFill>
+                  </a:tcPr>
+                </a:tc>
+                <a:tc>
+                  <a:txBody>
+                    <a:bodyPr/>
+                    <a:lstStyle/>
+                    <a:p>
+                      <a:pPr algn="ctr" marL="63500" marR="63500">
+                        <a:lnSpc>
+                          <a:spcPct val="100000"/>
+                        </a:lnSpc>
+                        <a:spcBef>
+                          <a:spcPts val="500"/>
+                        </a:spcBef>
+                        <a:spcAft>
+                          <a:spcPts val="500"/>
+                        </a:spcAft>
+                        <a:buNone/>
+                      </a:pPr>
+                      <a:r>
+                        <a:rPr cap="none" sz="1100" i="0" b="1" u="none" strike="noStrike">
+                          <a:solidFill>
+                            <a:srgbClr val="000000">
+                              <a:alpha val="100000"/>
+                            </a:srgbClr>
+                          </a:solidFill>
+                          <a:latin typeface="Arial"/>
+                          <a:cs typeface="Arial"/>
+                          <a:ea typeface="Arial"/>
+                          <a:sym typeface="Arial"/>
+                        </a:rPr>
+                        <a:t>Cat2</a:t>
+                      </a:r>
+                    </a:p>
+                  </a:txBody>
+                  <a:tcPr anchor="ctr" marB="63500" marT="63500" marR="0" marL="0">
+                    <a:lnL algn="ctr" cmpd="sng" cap="flat" w="0">
+                      <a:noFill/>
+                      <a:prstDash val="solid"/>
+                    </a:lnL>
+                    <a:lnR algn="ctr" cmpd="sng" cap="flat" w="0">
+                      <a:noFill/>
+                      <a:prstDash val="solid"/>
+                    </a:lnR>
+                    <a:lnT algn="ctr" cmpd="sng" cap="flat" w="0">
+                      <a:noFill/>
+                      <a:prstDash val="solid"/>
+                    </a:lnT>
+                    <a:lnB algn="ctr" cmpd="sng" cap="flat" w="0">
+                      <a:noFill/>
+                      <a:prstDash val="solid"/>
+                    </a:lnB>
+                    <a:solidFill>
+                      <a:srgbClr val="CFCFCF">
+                        <a:alpha val="100000"/>
+                      </a:srgbClr>
+                    </a:solidFill>
+                  </a:tcPr>
+                </a:tc>
+                <a:tc>
+                  <a:txBody>
+                    <a:bodyPr/>
+                    <a:lstStyle/>
+                    <a:p>
+                      <a:pPr algn="ctr" marL="63500" marR="63500">
+                        <a:lnSpc>
+                          <a:spcPct val="100000"/>
+                        </a:lnSpc>
+                        <a:spcBef>
+                          <a:spcPts val="500"/>
+                        </a:spcBef>
+                        <a:spcAft>
+                          <a:spcPts val="500"/>
+                        </a:spcAft>
+                        <a:buNone/>
+                      </a:pPr>
+                      <a:r>
+                        <a:rPr cap="none" sz="1100" i="0" b="1" u="none" strike="noStrike">
+                          <a:solidFill>
+                            <a:srgbClr val="000000">
+                              <a:alpha val="100000"/>
+                            </a:srgbClr>
+                          </a:solidFill>
+                          <a:latin typeface="Arial"/>
+                          <a:cs typeface="Arial"/>
+                          <a:ea typeface="Arial"/>
+                          <a:sym typeface="Arial"/>
+                        </a:rPr>
+                        <a:t>Cat3</a:t>
+                      </a:r>
+                    </a:p>
+                  </a:txBody>
+                  <a:tcPr anchor="ctr" marB="63500" marT="63500" marR="0" marL="0">
+                    <a:lnL algn="ctr" cmpd="sng" cap="flat" w="0">
+                      <a:noFill/>
+                      <a:prstDash val="solid"/>
+                    </a:lnL>
+                    <a:lnR algn="ctr" cmpd="sng" cap="flat" w="0">
+                      <a:noFill/>
+                      <a:prstDash val="solid"/>
+                    </a:lnR>
+                    <a:lnT algn="ctr" cmpd="sng" cap="flat" w="0">
+                      <a:noFill/>
+                      <a:prstDash val="solid"/>
+                    </a:lnT>
+                    <a:lnB algn="ctr" cmpd="sng" cap="flat" w="0">
+                      <a:noFill/>
+                      <a:prstDash val="solid"/>
+                    </a:lnB>
+                    <a:solidFill>
+                      <a:srgbClr val="CFCFCF">
+                        <a:alpha val="100000"/>
+                      </a:srgbClr>
+                    </a:solidFill>
+                  </a:tcPr>
+                </a:tc>
+                <a:tc>
+                  <a:txBody>
+                    <a:bodyPr/>
+                    <a:lstStyle/>
+                    <a:p>
+                      <a:pPr algn="ctr" marL="63500" marR="63500">
+                        <a:lnSpc>
+                          <a:spcPct val="100000"/>
+                        </a:lnSpc>
+                        <a:spcBef>
+                          <a:spcPts val="500"/>
+                        </a:spcBef>
+                        <a:spcAft>
+                          <a:spcPts val="500"/>
+                        </a:spcAft>
+                        <a:buNone/>
+                      </a:pPr>
+                      <a:r>
+                        <a:rPr cap="none" sz="1100" i="0" b="1" u="none" strike="noStrike">
+                          <a:solidFill>
+                            <a:srgbClr val="000000">
+                              <a:alpha val="100000"/>
+                            </a:srgbClr>
+                          </a:solidFill>
+                          <a:latin typeface="Arial"/>
+                          <a:cs typeface="Arial"/>
+                          <a:ea typeface="Arial"/>
+                          <a:sym typeface="Arial"/>
+                        </a:rPr>
+                        <a:t>MSR</a:t>
+                      </a:r>
+                    </a:p>
+                  </a:txBody>
+                  <a:tcPr anchor="ctr" marB="63500" marT="63500" marR="0" marL="0">
+                    <a:lnL algn="ctr" cmpd="sng" cap="flat" w="0">
+                      <a:noFill/>
+                      <a:prstDash val="solid"/>
+                    </a:lnL>
+                    <a:lnR algn="ctr" cmpd="sng" cap="flat" w="0">
+                      <a:noFill/>
+                      <a:prstDash val="solid"/>
+                    </a:lnR>
+                    <a:lnT algn="ctr" cmpd="sng" cap="flat" w="0">
+                      <a:noFill/>
+                      <a:prstDash val="solid"/>
+                    </a:lnT>
+                    <a:lnB algn="ctr" cmpd="sng" cap="flat" w="0">
+                      <a:noFill/>
+                      <a:prstDash val="solid"/>
+                    </a:lnB>
+                    <a:solidFill>
+                      <a:srgbClr val="CFCFCF">
+                        <a:alpha val="100000"/>
+                      </a:srgbClr>
+                    </a:solidFill>
+                  </a:tcPr>
+                </a:tc>
+                <a:tc>
+                  <a:txBody>
+                    <a:bodyPr/>
+                    <a:lstStyle/>
+                    <a:p>
+                      <a:pPr algn="ctr" marL="63500" marR="63500">
+                        <a:lnSpc>
+                          <a:spcPct val="100000"/>
+                        </a:lnSpc>
+                        <a:spcBef>
+                          <a:spcPts val="500"/>
+                        </a:spcBef>
+                        <a:spcAft>
+                          <a:spcPts val="500"/>
+                        </a:spcAft>
+                        <a:buNone/>
+                      </a:pPr>
+                      <a:r>
+                        <a:rPr cap="none" sz="1100" i="0" b="1" u="none" strike="noStrike">
+                          <a:solidFill>
+                            <a:srgbClr val="000000">
+                              <a:alpha val="100000"/>
+                            </a:srgbClr>
+                          </a:solidFill>
+                          <a:latin typeface="Arial"/>
+                          <a:cs typeface="Arial"/>
+                          <a:ea typeface="Arial"/>
+                          <a:sym typeface="Arial"/>
+                        </a:rPr>
+                        <a:t>Score</a:t>
+                      </a:r>
+                    </a:p>
+                  </a:txBody>
+                  <a:tcPr anchor="ctr" marB="63500" marT="63500" marR="0" marL="0">
+                    <a:lnL algn="ctr" cmpd="sng" cap="flat" w="0">
+                      <a:noFill/>
+                      <a:prstDash val="solid"/>
+                    </a:lnL>
+                    <a:lnR algn="ctr" cmpd="sng" cap="flat" w="0">
+                      <a:noFill/>
+                      <a:prstDash val="solid"/>
+                    </a:lnR>
+                    <a:lnT algn="ctr" cmpd="sng" cap="flat" w="0">
+                      <a:noFill/>
+                      <a:prstDash val="solid"/>
+                    </a:lnT>
+                    <a:lnB algn="ctr" cmpd="sng" cap="flat" w="0">
+                      <a:noFill/>
+                      <a:prstDash val="solid"/>
+                    </a:lnB>
+                    <a:solidFill>
+                      <a:srgbClr val="CFCFCF">
+                        <a:alpha val="100000"/>
+                      </a:srgbClr>
+                    </a:solidFill>
+                  </a:tcPr>
+                </a:tc>
+                <a:tc>
+                  <a:txBody>
+                    <a:bodyPr/>
+                    <a:lstStyle/>
+                    <a:p>
+                      <a:pPr algn="ctr" marL="63500" marR="63500">
+                        <a:lnSpc>
+                          <a:spcPct val="100000"/>
+                        </a:lnSpc>
+                        <a:spcBef>
+                          <a:spcPts val="500"/>
+                        </a:spcBef>
+                        <a:spcAft>
+                          <a:spcPts val="500"/>
+                        </a:spcAft>
+                        <a:buNone/>
+                      </a:pPr>
+                      <a:r>
+                        <a:rPr cap="none" sz="1100" i="0" b="1" u="none" strike="noStrike">
+                          <a:solidFill>
+                            <a:srgbClr val="000000">
+                              <a:alpha val="100000"/>
+                            </a:srgbClr>
+                          </a:solidFill>
+                          <a:latin typeface="Arial"/>
+                          <a:cs typeface="Arial"/>
+                          <a:ea typeface="Arial"/>
+                          <a:sym typeface="Arial"/>
+                        </a:rPr>
+                        <a:t>Dir</a:t>
+                      </a:r>
+                    </a:p>
+                  </a:txBody>
+                  <a:tcPr anchor="ctr" marB="63500" marT="63500" marR="0" marL="0">
+                    <a:lnL algn="ctr" cmpd="sng" cap="flat" w="0">
+                      <a:noFill/>
+                      <a:prstDash val="solid"/>
+                    </a:lnL>
+                    <a:lnR algn="ctr" cmpd="sng" cap="flat" w="0">
+                      <a:noFill/>
+                      <a:prstDash val="solid"/>
+                    </a:lnR>
+                    <a:lnT algn="ctr" cmpd="sng" cap="flat" w="0">
+                      <a:noFill/>
+                      <a:prstDash val="solid"/>
+                    </a:lnT>
+                    <a:lnB algn="ctr" cmpd="sng" cap="flat" w="0">
+                      <a:noFill/>
+                      <a:prstDash val="solid"/>
+                    </a:lnB>
+                    <a:solidFill>
+                      <a:srgbClr val="CFCFCF">
+                        <a:alpha val="100000"/>
+                      </a:srgbClr>
+                    </a:solidFill>
+                  </a:tcPr>
+                </a:tc>
+              </a:tr>
+              <a:tr h="388945">
+                <a:tc>
+                  <a:txBody>
+                    <a:bodyPr/>
+                    <a:lstStyle/>
+                    <a:p>
+                      <a:pPr algn="ctr" marL="63500" marR="63500">
+                        <a:lnSpc>
+                          <a:spcPct val="100000"/>
+                        </a:lnSpc>
+                        <a:spcBef>
+                          <a:spcPts val="500"/>
+                        </a:spcBef>
+                        <a:spcAft>
+                          <a:spcPts val="500"/>
+                        </a:spcAft>
+                        <a:buNone/>
+                      </a:pPr>
+                      <a:r>
+                        <a:rPr cap="none" sz="1100" i="0" b="0" u="none" strike="noStrike">
+                          <a:solidFill>
+                            <a:srgbClr val="000000">
+                              <a:alpha val="100000"/>
+                            </a:srgbClr>
+                          </a:solidFill>
+                          <a:latin typeface="Arial"/>
+                          <a:cs typeface="Arial"/>
+                          <a:ea typeface="Arial"/>
+                          <a:sym typeface="Arial"/>
+                        </a:rPr>
+                        <a:t>PERI</a:t>
+                      </a:r>
+                    </a:p>
+                  </a:txBody>
+                  <a:tcPr anchor="ctr" marB="63500" marT="63500" marR="0" marL="0">
+                    <a:lnL algn="ctr" cmpd="sng" cap="flat" w="0">
+                      <a:noFill/>
+                      <a:prstDash val="solid"/>
+                    </a:lnL>
+                    <a:lnR algn="ctr" cmpd="sng" cap="flat" w="0">
+                      <a:noFill/>
+                      <a:prstDash val="solid"/>
+                    </a:lnR>
+                    <a:lnT algn="ctr" cmpd="sng" cap="flat" w="0">
+                      <a:noFill/>
+                      <a:prstDash val="solid"/>
+                    </a:lnT>
+                    <a:lnB algn="ctr" cmpd="sng" cap="flat" w="0">
+                      <a:noFill/>
+                      <a:prstDash val="solid"/>
+                    </a:lnB>
+                    <a:solidFill>
+                      <a:srgbClr val="EFEFEF">
+                        <a:alpha val="100000"/>
+                      </a:srgbClr>
+                    </a:solidFill>
+                  </a:tcPr>
+                </a:tc>
+                <a:tc>
+                  <a:txBody>
+                    <a:bodyPr/>
+                    <a:lstStyle/>
+                    <a:p>
+                      <a:pPr algn="ctr" marL="63500" marR="63500">
+                        <a:lnSpc>
+                          <a:spcPct val="100000"/>
+                        </a:lnSpc>
+                        <a:spcBef>
+                          <a:spcPts val="500"/>
+                        </a:spcBef>
+                        <a:spcAft>
+                          <a:spcPts val="500"/>
+                        </a:spcAft>
+                        <a:buNone/>
+                      </a:pPr>
+                      <a:r>
+                        <a:rPr cap="none" sz="1100" i="0" b="0" u="none" strike="noStrike">
+                          <a:solidFill>
+                            <a:srgbClr val="000000">
+                              <a:alpha val="100000"/>
+                            </a:srgbClr>
+                          </a:solidFill>
+                          <a:latin typeface="Arial"/>
+                          <a:cs typeface="Arial"/>
+                          <a:ea typeface="Arial"/>
+                          <a:sym typeface="Arial"/>
+                        </a:rPr>
+                        <a:t>BL</a:t>
+                      </a:r>
+                    </a:p>
+                  </a:txBody>
+                  <a:tcPr anchor="ctr" marB="63500" marT="63500" marR="0" marL="0">
+                    <a:lnL algn="ctr" cmpd="sng" cap="flat" w="0">
+                      <a:noFill/>
+                      <a:prstDash val="solid"/>
+                    </a:lnL>
+                    <a:lnR algn="ctr" cmpd="sng" cap="flat" w="0">
+                      <a:noFill/>
+                      <a:prstDash val="solid"/>
+                    </a:lnR>
+                    <a:lnT algn="ctr" cmpd="sng" cap="flat" w="0">
+                      <a:noFill/>
+                      <a:prstDash val="solid"/>
+                    </a:lnT>
+                    <a:lnB algn="ctr" cmpd="sng" cap="flat" w="0">
+                      <a:noFill/>
+                      <a:prstDash val="solid"/>
+                    </a:lnB>
+                    <a:solidFill>
+                      <a:srgbClr val="EFEFEF">
+                        <a:alpha val="100000"/>
+                      </a:srgbClr>
+                    </a:solidFill>
+                  </a:tcPr>
+                </a:tc>
+                <a:tc>
+                  <a:txBody>
+                    <a:bodyPr/>
+                    <a:lstStyle/>
+                    <a:p>
+                      <a:pPr algn="ctr" marL="63500" marR="63500">
+                        <a:lnSpc>
+                          <a:spcPct val="100000"/>
+                        </a:lnSpc>
+                        <a:spcBef>
+                          <a:spcPts val="500"/>
+                        </a:spcBef>
+                        <a:spcAft>
+                          <a:spcPts val="500"/>
+                        </a:spcAft>
+                        <a:buNone/>
+                      </a:pPr>
+                      <a:r>
+                        <a:rPr cap="none" sz="1100" i="0" b="0" u="none" strike="noStrike">
+                          <a:solidFill>
+                            <a:srgbClr val="000000">
+                              <a:alpha val="100000"/>
+                            </a:srgbClr>
+                          </a:solidFill>
+                          <a:latin typeface="Arial"/>
+                          <a:cs typeface="Arial"/>
+                          <a:ea typeface="Arial"/>
+                          <a:sym typeface="Arial"/>
+                        </a:rPr>
+                        <a:t>BL_2</a:t>
+                      </a:r>
+                    </a:p>
+                  </a:txBody>
+                  <a:tcPr anchor="ctr" marB="63500" marT="63500" marR="0" marL="0">
+                    <a:lnL algn="ctr" cmpd="sng" cap="flat" w="0">
+                      <a:noFill/>
+                      <a:prstDash val="solid"/>
+                    </a:lnL>
+                    <a:lnR algn="ctr" cmpd="sng" cap="flat" w="0">
+                      <a:noFill/>
+                      <a:prstDash val="solid"/>
+                    </a:lnR>
+                    <a:lnT algn="ctr" cmpd="sng" cap="flat" w="0">
+                      <a:noFill/>
+                      <a:prstDash val="solid"/>
+                    </a:lnT>
+                    <a:lnB algn="ctr" cmpd="sng" cap="flat" w="0">
+                      <a:noFill/>
+                      <a:prstDash val="solid"/>
+                    </a:lnB>
+                    <a:solidFill>
+                      <a:srgbClr val="EFEFEF">
+                        <a:alpha val="100000"/>
+                      </a:srgbClr>
+                    </a:solidFill>
+                  </a:tcPr>
+                </a:tc>
+                <a:tc>
+                  <a:txBody>
+                    <a:bodyPr/>
+                    <a:lstStyle/>
+                    <a:p>
+                      <a:pPr algn="ctr" marL="63500" marR="63500">
+                        <a:lnSpc>
+                          <a:spcPct val="100000"/>
+                        </a:lnSpc>
+                        <a:spcBef>
+                          <a:spcPts val="500"/>
+                        </a:spcBef>
+                        <a:spcAft>
+                          <a:spcPts val="500"/>
+                        </a:spcAft>
+                        <a:buNone/>
+                      </a:pPr>
+                      <a:r>
+                        <a:rPr cap="none" sz="1100" i="0" b="0" u="none" strike="noStrike">
+                          <a:solidFill>
+                            <a:srgbClr val="000000">
+                              <a:alpha val="100000"/>
+                            </a:srgbClr>
+                          </a:solidFill>
+                          <a:latin typeface="Arial"/>
+                          <a:cs typeface="Arial"/>
+                          <a:ea typeface="Arial"/>
+                          <a:sym typeface="Arial"/>
+                        </a:rPr>
+                        <a:t>Peri_BL_122</a:t>
+                      </a:r>
+                    </a:p>
+                  </a:txBody>
+                  <a:tcPr anchor="ctr" marB="63500" marT="63500" marR="0" marL="0">
+                    <a:lnL algn="ctr" cmpd="sng" cap="flat" w="0">
+                      <a:noFill/>
+                      <a:prstDash val="solid"/>
+                    </a:lnL>
+                    <a:lnR algn="ctr" cmpd="sng" cap="flat" w="0">
+                      <a:noFill/>
+                      <a:prstDash val="solid"/>
+                    </a:lnR>
+                    <a:lnT algn="ctr" cmpd="sng" cap="flat" w="0">
+                      <a:noFill/>
+                      <a:prstDash val="solid"/>
+                    </a:lnT>
+                    <a:lnB algn="ctr" cmpd="sng" cap="flat" w="0">
+                      <a:noFill/>
+                      <a:prstDash val="solid"/>
+                    </a:lnB>
+                    <a:solidFill>
+                      <a:srgbClr val="EFEFEF">
+                        <a:alpha val="100000"/>
+                      </a:srgbClr>
+                    </a:solidFill>
+                  </a:tcPr>
+                </a:tc>
+                <a:tc>
+                  <a:txBody>
+                    <a:bodyPr/>
+                    <a:lstStyle/>
+                    <a:p>
+                      <a:pPr algn="ctr" marL="63500" marR="63500">
+                        <a:lnSpc>
+                          <a:spcPct val="100000"/>
+                        </a:lnSpc>
+                        <a:spcBef>
+                          <a:spcPts val="500"/>
+                        </a:spcBef>
+                        <a:spcAft>
+                          <a:spcPts val="500"/>
+                        </a:spcAft>
+                        <a:buNone/>
+                      </a:pPr>
+                      <a:r>
+                        <a:rPr cap="none" sz="1100" i="0" b="0" u="none" strike="noStrike">
+                          <a:solidFill>
+                            <a:srgbClr val="000000">
+                              <a:alpha val="100000"/>
+                            </a:srgbClr>
+                          </a:solidFill>
+                          <a:latin typeface="Arial"/>
+                          <a:cs typeface="Arial"/>
+                          <a:ea typeface="Arial"/>
+                          <a:sym typeface="Arial"/>
+                        </a:rPr>
+                        <a:t>0.73</a:t>
+                      </a:r>
+                    </a:p>
+                  </a:txBody>
+                  <a:tcPr anchor="ctr" marB="63500" marT="63500" marR="0" marL="0">
+                    <a:lnL algn="ctr" cmpd="sng" cap="flat" w="0">
+                      <a:noFill/>
+                      <a:prstDash val="solid"/>
+                    </a:lnL>
+                    <a:lnR algn="ctr" cmpd="sng" cap="flat" w="0">
+                      <a:noFill/>
+                      <a:prstDash val="solid"/>
+                    </a:lnR>
+                    <a:lnT algn="ctr" cmpd="sng" cap="flat" w="0">
+                      <a:noFill/>
+                      <a:prstDash val="solid"/>
+                    </a:lnT>
+                    <a:lnB algn="ctr" cmpd="sng" cap="flat" w="0">
+                      <a:noFill/>
+                      <a:prstDash val="solid"/>
+                    </a:lnB>
+                    <a:solidFill>
+                      <a:srgbClr val="EFEFEF">
+                        <a:alpha val="100000"/>
+                      </a:srgbClr>
+                    </a:solidFill>
+                  </a:tcPr>
+                </a:tc>
+                <a:tc>
+                  <a:txBody>
+                    <a:bodyPr/>
+                    <a:lstStyle/>
+                    <a:p>
+                      <a:pPr algn="ctr" marL="63500" marR="63500">
+                        <a:lnSpc>
+                          <a:spcPct val="100000"/>
+                        </a:lnSpc>
+                        <a:spcBef>
+                          <a:spcPts val="500"/>
+                        </a:spcBef>
+                        <a:spcAft>
+                          <a:spcPts val="500"/>
+                        </a:spcAft>
+                        <a:buNone/>
+                      </a:pPr>
+                      <a:r>
+                        <a:rPr cap="none" sz="1100" i="0" b="0" u="none" strike="noStrike">
+                          <a:solidFill>
+                            <a:srgbClr val="FF0000">
+                              <a:alpha val="100000"/>
+                            </a:srgbClr>
+                          </a:solidFill>
+                          <a:latin typeface="Arial"/>
+                          <a:cs typeface="Arial"/>
+                          <a:ea typeface="Arial"/>
+                          <a:sym typeface="Arial"/>
+                        </a:rPr>
+                        <a:t>Up</a:t>
+                      </a:r>
+                    </a:p>
+                  </a:txBody>
+                  <a:tcPr anchor="ctr" marB="63500" marT="63500" marR="0" marL="0">
+                    <a:lnL algn="ctr" cmpd="sng" cap="flat" w="0">
+                      <a:noFill/>
+                      <a:prstDash val="solid"/>
+                    </a:lnL>
+                    <a:lnR algn="ctr" cmpd="sng" cap="flat" w="0">
+                      <a:noFill/>
+                      <a:prstDash val="solid"/>
+                    </a:lnR>
+                    <a:lnT algn="ctr" cmpd="sng" cap="flat" w="0">
+                      <a:noFill/>
+                      <a:prstDash val="solid"/>
+                    </a:lnT>
+                    <a:lnB algn="ctr" cmpd="sng" cap="flat" w="0">
+                      <a:noFill/>
+                      <a:prstDash val="solid"/>
+                    </a:lnB>
+                    <a:solidFill>
+                      <a:srgbClr val="EFEFEF">
+                        <a:alpha val="100000"/>
+                      </a:srgbClr>
+                    </a:solidFill>
+                  </a:tcPr>
+                </a:tc>
+              </a:tr>
+              <a:tr h="390241">
+                <a:tc>
+                  <a:txBody>
+                    <a:bodyPr/>
+                    <a:lstStyle/>
+                    <a:p>
+                      <a:pPr algn="ctr" marL="63500" marR="63500">
+                        <a:lnSpc>
+                          <a:spcPct val="100000"/>
+                        </a:lnSpc>
+                        <a:spcBef>
+                          <a:spcPts val="500"/>
+                        </a:spcBef>
+                        <a:spcAft>
+                          <a:spcPts val="500"/>
+                        </a:spcAft>
+                        <a:buNone/>
+                      </a:pPr>
+                      <a:r>
+                        <a:rPr cap="none" sz="1100" i="0" b="0" u="none" strike="noStrike">
+                          <a:solidFill>
+                            <a:srgbClr val="000000">
+                              <a:alpha val="100000"/>
+                            </a:srgbClr>
+                          </a:solidFill>
+                          <a:latin typeface="Arial"/>
+                          <a:cs typeface="Arial"/>
+                          <a:ea typeface="Arial"/>
+                          <a:sym typeface="Arial"/>
+                        </a:rPr>
+                        <a:t>CELL</a:t>
+                      </a:r>
+                    </a:p>
+                  </a:txBody>
+                  <a:tcPr anchor="ctr" marB="63500" marT="63500" marR="0" marL="0">
+                    <a:lnL algn="ctr" cmpd="sng" cap="flat" w="0">
+                      <a:noFill/>
+                      <a:prstDash val="solid"/>
+                    </a:lnL>
+                    <a:lnR algn="ctr" cmpd="sng" cap="flat" w="0">
+                      <a:noFill/>
+                      <a:prstDash val="solid"/>
+                    </a:lnR>
+                    <a:lnT algn="ctr" cmpd="sng" cap="flat" w="0">
+                      <a:noFill/>
+                      <a:prstDash val="solid"/>
+                    </a:lnT>
+                    <a:lnB algn="ctr" cmpd="sng" cap="flat" w="0">
+                      <a:noFill/>
+                      <a:prstDash val="solid"/>
+                    </a:lnB>
+                    <a:solidFill>
+                      <a:srgbClr val="FFFFFF">
+                        <a:alpha val="0"/>
+                      </a:srgbClr>
+                    </a:solidFill>
+                  </a:tcPr>
+                </a:tc>
+                <a:tc>
+                  <a:txBody>
+                    <a:bodyPr/>
+                    <a:lstStyle/>
+                    <a:p>
+                      <a:pPr algn="ctr" marL="63500" marR="63500">
+                        <a:lnSpc>
+                          <a:spcPct val="100000"/>
+                        </a:lnSpc>
+                        <a:spcBef>
+                          <a:spcPts val="500"/>
+                        </a:spcBef>
+                        <a:spcAft>
+                          <a:spcPts val="500"/>
+                        </a:spcAft>
+                        <a:buNone/>
+                      </a:pPr>
+                      <a:r>
+                        <a:rPr cap="none" sz="1100" i="0" b="0" u="none" strike="noStrike">
+                          <a:solidFill>
+                            <a:srgbClr val="000000">
+                              <a:alpha val="100000"/>
+                            </a:srgbClr>
+                          </a:solidFill>
+                          <a:latin typeface="Arial"/>
+                          <a:cs typeface="Arial"/>
+                          <a:ea typeface="Arial"/>
+                          <a:sym typeface="Arial"/>
+                        </a:rPr>
+                        <a:t>TCMC</a:t>
+                      </a:r>
+                    </a:p>
+                  </a:txBody>
+                  <a:tcPr anchor="ctr" marB="63500" marT="63500" marR="0" marL="0">
+                    <a:lnL algn="ctr" cmpd="sng" cap="flat" w="0">
+                      <a:noFill/>
+                      <a:prstDash val="solid"/>
+                    </a:lnL>
+                    <a:lnR algn="ctr" cmpd="sng" cap="flat" w="0">
+                      <a:noFill/>
+                      <a:prstDash val="solid"/>
+                    </a:lnR>
+                    <a:lnT algn="ctr" cmpd="sng" cap="flat" w="0">
+                      <a:noFill/>
+                      <a:prstDash val="solid"/>
+                    </a:lnT>
+                    <a:lnB algn="ctr" cmpd="sng" cap="flat" w="0">
+                      <a:noFill/>
+                      <a:prstDash val="solid"/>
+                    </a:lnB>
+                    <a:solidFill>
+                      <a:srgbClr val="FFFFFF">
+                        <a:alpha val="0"/>
+                      </a:srgbClr>
+                    </a:solidFill>
+                  </a:tcPr>
+                </a:tc>
+                <a:tc>
+                  <a:txBody>
+                    <a:bodyPr/>
+                    <a:lstStyle/>
+                    <a:p>
+                      <a:pPr algn="ctr" marL="63500" marR="63500">
+                        <a:lnSpc>
+                          <a:spcPct val="100000"/>
+                        </a:lnSpc>
+                        <a:spcBef>
+                          <a:spcPts val="500"/>
+                        </a:spcBef>
+                        <a:spcAft>
+                          <a:spcPts val="500"/>
+                        </a:spcAft>
+                        <a:buNone/>
+                      </a:pPr>
+                      <a:r>
+                        <a:rPr cap="none" sz="1100" i="0" b="0" u="none" strike="noStrike">
+                          <a:solidFill>
+                            <a:srgbClr val="000000">
+                              <a:alpha val="100000"/>
+                            </a:srgbClr>
+                          </a:solidFill>
+                          <a:latin typeface="Arial"/>
+                          <a:cs typeface="Arial"/>
+                          <a:ea typeface="Arial"/>
+                          <a:sym typeface="Arial"/>
+                        </a:rPr>
+                        <a:t>TCMC_1</a:t>
+                      </a:r>
+                    </a:p>
+                  </a:txBody>
+                  <a:tcPr anchor="ctr" marB="63500" marT="63500" marR="0" marL="0">
+                    <a:lnL algn="ctr" cmpd="sng" cap="flat" w="0">
+                      <a:noFill/>
+                      <a:prstDash val="solid"/>
+                    </a:lnL>
+                    <a:lnR algn="ctr" cmpd="sng" cap="flat" w="0">
+                      <a:noFill/>
+                      <a:prstDash val="solid"/>
+                    </a:lnR>
+                    <a:lnT algn="ctr" cmpd="sng" cap="flat" w="0">
+                      <a:noFill/>
+                      <a:prstDash val="solid"/>
+                    </a:lnT>
+                    <a:lnB algn="ctr" cmpd="sng" cap="flat" w="0">
+                      <a:noFill/>
+                      <a:prstDash val="solid"/>
+                    </a:lnB>
+                    <a:solidFill>
+                      <a:srgbClr val="FFFFFF">
+                        <a:alpha val="0"/>
+                      </a:srgbClr>
+                    </a:solidFill>
+                  </a:tcPr>
+                </a:tc>
+                <a:tc>
+                  <a:txBody>
+                    <a:bodyPr/>
+                    <a:lstStyle/>
+                    <a:p>
+                      <a:pPr algn="ctr" marL="63500" marR="63500">
+                        <a:lnSpc>
+                          <a:spcPct val="100000"/>
+                        </a:lnSpc>
+                        <a:spcBef>
+                          <a:spcPts val="500"/>
+                        </a:spcBef>
+                        <a:spcAft>
+                          <a:spcPts val="500"/>
+                        </a:spcAft>
+                        <a:buNone/>
+                      </a:pPr>
+                      <a:r>
+                        <a:rPr cap="none" sz="1100" i="0" b="0" u="none" strike="noStrike">
+                          <a:solidFill>
+                            <a:srgbClr val="000000">
+                              <a:alpha val="100000"/>
+                            </a:srgbClr>
+                          </a:solidFill>
+                          <a:latin typeface="Arial"/>
+                          <a:cs typeface="Arial"/>
+                          <a:ea typeface="Arial"/>
+                          <a:sym typeface="Arial"/>
+                        </a:rPr>
+                        <a:t>Cell_TCMC_207</a:t>
+                      </a:r>
+                    </a:p>
+                  </a:txBody>
+                  <a:tcPr anchor="ctr" marB="63500" marT="63500" marR="0" marL="0">
+                    <a:lnL algn="ctr" cmpd="sng" cap="flat" w="0">
+                      <a:noFill/>
+                      <a:prstDash val="solid"/>
+                    </a:lnL>
+                    <a:lnR algn="ctr" cmpd="sng" cap="flat" w="0">
+                      <a:noFill/>
+                      <a:prstDash val="solid"/>
+                    </a:lnR>
+                    <a:lnT algn="ctr" cmpd="sng" cap="flat" w="0">
+                      <a:noFill/>
+                      <a:prstDash val="solid"/>
+                    </a:lnT>
+                    <a:lnB algn="ctr" cmpd="sng" cap="flat" w="0">
+                      <a:noFill/>
+                      <a:prstDash val="solid"/>
+                    </a:lnB>
+                    <a:solidFill>
+                      <a:srgbClr val="FFFFFF">
+                        <a:alpha val="0"/>
+                      </a:srgbClr>
+                    </a:solidFill>
+                  </a:tcPr>
+                </a:tc>
+                <a:tc>
+                  <a:txBody>
+                    <a:bodyPr/>
+                    <a:lstStyle/>
+                    <a:p>
+                      <a:pPr algn="ctr" marL="63500" marR="63500">
+                        <a:lnSpc>
+                          <a:spcPct val="100000"/>
+                        </a:lnSpc>
+                        <a:spcBef>
+                          <a:spcPts val="500"/>
+                        </a:spcBef>
+                        <a:spcAft>
+                          <a:spcPts val="500"/>
+                        </a:spcAft>
+                        <a:buNone/>
+                      </a:pPr>
+                      <a:r>
+                        <a:rPr cap="none" sz="1100" i="0" b="0" u="none" strike="noStrike">
+                          <a:solidFill>
+                            <a:srgbClr val="000000">
+                              <a:alpha val="100000"/>
+                            </a:srgbClr>
+                          </a:solidFill>
+                          <a:latin typeface="Arial"/>
+                          <a:cs typeface="Arial"/>
+                          <a:ea typeface="Arial"/>
+                          <a:sym typeface="Arial"/>
+                        </a:rPr>
+                        <a:t>0.67</a:t>
+                      </a:r>
+                    </a:p>
+                  </a:txBody>
+                  <a:tcPr anchor="ctr" marB="63500" marT="63500" marR="0" marL="0">
+                    <a:lnL algn="ctr" cmpd="sng" cap="flat" w="0">
+                      <a:noFill/>
+                      <a:prstDash val="solid"/>
+                    </a:lnL>
+                    <a:lnR algn="ctr" cmpd="sng" cap="flat" w="0">
+                      <a:noFill/>
+                      <a:prstDash val="solid"/>
+                    </a:lnR>
+                    <a:lnT algn="ctr" cmpd="sng" cap="flat" w="0">
+                      <a:noFill/>
+                      <a:prstDash val="solid"/>
+                    </a:lnT>
+                    <a:lnB algn="ctr" cmpd="sng" cap="flat" w="0">
+                      <a:noFill/>
+                      <a:prstDash val="solid"/>
+                    </a:lnB>
+                    <a:solidFill>
+                      <a:srgbClr val="FFFFFF">
+                        <a:alpha val="0"/>
+                      </a:srgbClr>
+                    </a:solidFill>
+                  </a:tcPr>
+                </a:tc>
+                <a:tc>
+                  <a:txBody>
+                    <a:bodyPr/>
+                    <a:lstStyle/>
+                    <a:p>
+                      <a:pPr algn="ctr" marL="63500" marR="63500">
+                        <a:lnSpc>
+                          <a:spcPct val="100000"/>
+                        </a:lnSpc>
+                        <a:spcBef>
+                          <a:spcPts val="500"/>
+                        </a:spcBef>
+                        <a:spcAft>
+                          <a:spcPts val="500"/>
+                        </a:spcAft>
+                        <a:buNone/>
+                      </a:pPr>
+                      <a:r>
+                        <a:rPr cap="none" sz="1100" i="0" b="0" u="none" strike="noStrike">
+                          <a:solidFill>
+                            <a:srgbClr val="FF0000">
+                              <a:alpha val="100000"/>
+                            </a:srgbClr>
+                          </a:solidFill>
+                          <a:latin typeface="Arial"/>
+                          <a:cs typeface="Arial"/>
+                          <a:ea typeface="Arial"/>
+                          <a:sym typeface="Arial"/>
+                        </a:rPr>
+                        <a:t>Up</a:t>
+                      </a:r>
+                    </a:p>
+                  </a:txBody>
+                  <a:tcPr anchor="ctr" marB="63500" marT="63500" marR="0" marL="0">
+                    <a:lnL algn="ctr" cmpd="sng" cap="flat" w="0">
+                      <a:noFill/>
+                      <a:prstDash val="solid"/>
+                    </a:lnL>
+                    <a:lnR algn="ctr" cmpd="sng" cap="flat" w="0">
+                      <a:noFill/>
+                      <a:prstDash val="solid"/>
+                    </a:lnR>
+                    <a:lnT algn="ctr" cmpd="sng" cap="flat" w="0">
+                      <a:noFill/>
+                      <a:prstDash val="solid"/>
+                    </a:lnT>
+                    <a:lnB algn="ctr" cmpd="sng" cap="flat" w="0">
+                      <a:noFill/>
+                      <a:prstDash val="solid"/>
+                    </a:lnB>
+                    <a:solidFill>
+                      <a:srgbClr val="FFFFFF">
+                        <a:alpha val="0"/>
+                      </a:srgbClr>
+                    </a:solidFill>
+                  </a:tcPr>
+                </a:tc>
+              </a:tr>
+              <a:tr h="390241">
+                <a:tc>
+                  <a:txBody>
+                    <a:bodyPr/>
+                    <a:lstStyle/>
+                    <a:p>
+                      <a:pPr algn="ctr" marL="63500" marR="63500">
+                        <a:lnSpc>
+                          <a:spcPct val="100000"/>
+                        </a:lnSpc>
+                        <a:spcBef>
+                          <a:spcPts val="500"/>
+                        </a:spcBef>
+                        <a:spcAft>
+                          <a:spcPts val="500"/>
+                        </a:spcAft>
+                        <a:buNone/>
+                      </a:pPr>
+                      <a:r>
+                        <a:rPr cap="none" sz="1100" i="0" b="0" u="none" strike="noStrike">
+                          <a:solidFill>
+                            <a:srgbClr val="000000">
+                              <a:alpha val="100000"/>
+                            </a:srgbClr>
+                          </a:solidFill>
+                          <a:latin typeface="Arial"/>
+                          <a:cs typeface="Arial"/>
+                          <a:ea typeface="Arial"/>
+                          <a:sym typeface="Arial"/>
+                        </a:rPr>
+                        <a:t>CELL</a:t>
+                      </a:r>
+                    </a:p>
+                  </a:txBody>
+                  <a:tcPr anchor="ctr" marB="63500" marT="63500" marR="0" marL="0">
+                    <a:lnL algn="ctr" cmpd="sng" cap="flat" w="0">
+                      <a:noFill/>
+                      <a:prstDash val="solid"/>
+                    </a:lnL>
+                    <a:lnR algn="ctr" cmpd="sng" cap="flat" w="0">
+                      <a:noFill/>
+                      <a:prstDash val="solid"/>
+                    </a:lnR>
+                    <a:lnT algn="ctr" cmpd="sng" cap="flat" w="0">
+                      <a:noFill/>
+                      <a:prstDash val="solid"/>
+                    </a:lnT>
+                    <a:lnB algn="ctr" cmpd="sng" cap="flat" w="0">
+                      <a:noFill/>
+                      <a:prstDash val="solid"/>
+                    </a:lnB>
+                    <a:solidFill>
+                      <a:srgbClr val="EFEFEF">
+                        <a:alpha val="100000"/>
+                      </a:srgbClr>
+                    </a:solidFill>
+                  </a:tcPr>
+                </a:tc>
+                <a:tc>
+                  <a:txBody>
+                    <a:bodyPr/>
+                    <a:lstStyle/>
+                    <a:p>
+                      <a:pPr algn="ctr" marL="63500" marR="63500">
+                        <a:lnSpc>
+                          <a:spcPct val="100000"/>
+                        </a:lnSpc>
+                        <a:spcBef>
+                          <a:spcPts val="500"/>
+                        </a:spcBef>
+                        <a:spcAft>
+                          <a:spcPts val="500"/>
+                        </a:spcAft>
+                        <a:buNone/>
+                      </a:pPr>
+                      <a:r>
+                        <a:rPr cap="none" sz="1100" i="0" b="0" u="none" strike="noStrike">
+                          <a:solidFill>
+                            <a:srgbClr val="000000">
+                              <a:alpha val="100000"/>
+                            </a:srgbClr>
+                          </a:solidFill>
+                          <a:latin typeface="Arial"/>
+                          <a:cs typeface="Arial"/>
+                          <a:ea typeface="Arial"/>
+                          <a:sym typeface="Arial"/>
+                        </a:rPr>
+                        <a:t>TCMC</a:t>
+                      </a:r>
+                    </a:p>
+                  </a:txBody>
+                  <a:tcPr anchor="ctr" marB="63500" marT="63500" marR="0" marL="0">
+                    <a:lnL algn="ctr" cmpd="sng" cap="flat" w="0">
+                      <a:noFill/>
+                      <a:prstDash val="solid"/>
+                    </a:lnL>
+                    <a:lnR algn="ctr" cmpd="sng" cap="flat" w="0">
+                      <a:noFill/>
+                      <a:prstDash val="solid"/>
+                    </a:lnR>
+                    <a:lnT algn="ctr" cmpd="sng" cap="flat" w="0">
+                      <a:noFill/>
+                      <a:prstDash val="solid"/>
+                    </a:lnT>
+                    <a:lnB algn="ctr" cmpd="sng" cap="flat" w="0">
+                      <a:noFill/>
+                      <a:prstDash val="solid"/>
+                    </a:lnB>
+                    <a:solidFill>
+                      <a:srgbClr val="EFEFEF">
+                        <a:alpha val="100000"/>
+                      </a:srgbClr>
+                    </a:solidFill>
+                  </a:tcPr>
+                </a:tc>
+                <a:tc>
+                  <a:txBody>
+                    <a:bodyPr/>
+                    <a:lstStyle/>
+                    <a:p>
+                      <a:pPr algn="ctr" marL="63500" marR="63500">
+                        <a:lnSpc>
+                          <a:spcPct val="100000"/>
+                        </a:lnSpc>
+                        <a:spcBef>
+                          <a:spcPts val="500"/>
+                        </a:spcBef>
+                        <a:spcAft>
+                          <a:spcPts val="500"/>
+                        </a:spcAft>
+                        <a:buNone/>
+                      </a:pPr>
+                      <a:r>
+                        <a:rPr cap="none" sz="1100" i="0" b="0" u="none" strike="noStrike">
+                          <a:solidFill>
+                            <a:srgbClr val="000000">
+                              <a:alpha val="100000"/>
+                            </a:srgbClr>
+                          </a:solidFill>
+                          <a:latin typeface="Arial"/>
+                          <a:cs typeface="Arial"/>
+                          <a:ea typeface="Arial"/>
+                          <a:sym typeface="Arial"/>
+                        </a:rPr>
+                        <a:t>TCMC_1</a:t>
+                      </a:r>
+                    </a:p>
+                  </a:txBody>
+                  <a:tcPr anchor="ctr" marB="63500" marT="63500" marR="0" marL="0">
+                    <a:lnL algn="ctr" cmpd="sng" cap="flat" w="0">
+                      <a:noFill/>
+                      <a:prstDash val="solid"/>
+                    </a:lnL>
+                    <a:lnR algn="ctr" cmpd="sng" cap="flat" w="0">
+                      <a:noFill/>
+                      <a:prstDash val="solid"/>
+                    </a:lnR>
+                    <a:lnT algn="ctr" cmpd="sng" cap="flat" w="0">
+                      <a:noFill/>
+                      <a:prstDash val="solid"/>
+                    </a:lnT>
+                    <a:lnB algn="ctr" cmpd="sng" cap="flat" w="0">
+                      <a:noFill/>
+                      <a:prstDash val="solid"/>
+                    </a:lnB>
+                    <a:solidFill>
+                      <a:srgbClr val="EFEFEF">
+                        <a:alpha val="100000"/>
+                      </a:srgbClr>
+                    </a:solidFill>
+                  </a:tcPr>
+                </a:tc>
+                <a:tc>
+                  <a:txBody>
+                    <a:bodyPr/>
+                    <a:lstStyle/>
+                    <a:p>
+                      <a:pPr algn="ctr" marL="63500" marR="63500">
+                        <a:lnSpc>
+                          <a:spcPct val="100000"/>
+                        </a:lnSpc>
+                        <a:spcBef>
+                          <a:spcPts val="500"/>
+                        </a:spcBef>
+                        <a:spcAft>
+                          <a:spcPts val="500"/>
+                        </a:spcAft>
+                        <a:buNone/>
+                      </a:pPr>
+                      <a:r>
+                        <a:rPr cap="none" sz="1100" i="0" b="0" u="none" strike="noStrike">
+                          <a:solidFill>
+                            <a:srgbClr val="000000">
+                              <a:alpha val="100000"/>
+                            </a:srgbClr>
+                          </a:solidFill>
+                          <a:latin typeface="Arial"/>
+                          <a:cs typeface="Arial"/>
+                          <a:ea typeface="Arial"/>
+                          <a:sym typeface="Arial"/>
+                        </a:rPr>
+                        <a:t>Cell_TCMC_212</a:t>
+                      </a:r>
+                    </a:p>
+                  </a:txBody>
+                  <a:tcPr anchor="ctr" marB="63500" marT="63500" marR="0" marL="0">
+                    <a:lnL algn="ctr" cmpd="sng" cap="flat" w="0">
+                      <a:noFill/>
+                      <a:prstDash val="solid"/>
+                    </a:lnL>
+                    <a:lnR algn="ctr" cmpd="sng" cap="flat" w="0">
+                      <a:noFill/>
+                      <a:prstDash val="solid"/>
+                    </a:lnR>
+                    <a:lnT algn="ctr" cmpd="sng" cap="flat" w="0">
+                      <a:noFill/>
+                      <a:prstDash val="solid"/>
+                    </a:lnT>
+                    <a:lnB algn="ctr" cmpd="sng" cap="flat" w="0">
+                      <a:noFill/>
+                      <a:prstDash val="solid"/>
+                    </a:lnB>
+                    <a:solidFill>
+                      <a:srgbClr val="EFEFEF">
+                        <a:alpha val="100000"/>
+                      </a:srgbClr>
+                    </a:solidFill>
+                  </a:tcPr>
+                </a:tc>
+                <a:tc>
+                  <a:txBody>
+                    <a:bodyPr/>
+                    <a:lstStyle/>
+                    <a:p>
+                      <a:pPr algn="ctr" marL="63500" marR="63500">
+                        <a:lnSpc>
+                          <a:spcPct val="100000"/>
+                        </a:lnSpc>
+                        <a:spcBef>
+                          <a:spcPts val="500"/>
+                        </a:spcBef>
+                        <a:spcAft>
+                          <a:spcPts val="500"/>
+                        </a:spcAft>
+                        <a:buNone/>
+                      </a:pPr>
+                      <a:r>
+                        <a:rPr cap="none" sz="1100" i="0" b="0" u="none" strike="noStrike">
+                          <a:solidFill>
+                            <a:srgbClr val="000000">
+                              <a:alpha val="100000"/>
+                            </a:srgbClr>
+                          </a:solidFill>
+                          <a:latin typeface="Arial"/>
+                          <a:cs typeface="Arial"/>
+                          <a:ea typeface="Arial"/>
+                          <a:sym typeface="Arial"/>
+                        </a:rPr>
+                        <a:t>0.67</a:t>
+                      </a:r>
+                    </a:p>
+                  </a:txBody>
+                  <a:tcPr anchor="ctr" marB="63500" marT="63500" marR="0" marL="0">
+                    <a:lnL algn="ctr" cmpd="sng" cap="flat" w="0">
+                      <a:noFill/>
+                      <a:prstDash val="solid"/>
+                    </a:lnL>
+                    <a:lnR algn="ctr" cmpd="sng" cap="flat" w="0">
+                      <a:noFill/>
+                      <a:prstDash val="solid"/>
+                    </a:lnR>
+                    <a:lnT algn="ctr" cmpd="sng" cap="flat" w="0">
+                      <a:noFill/>
+                      <a:prstDash val="solid"/>
+                    </a:lnT>
+                    <a:lnB algn="ctr" cmpd="sng" cap="flat" w="0">
+                      <a:noFill/>
+                      <a:prstDash val="solid"/>
+                    </a:lnB>
+                    <a:solidFill>
+                      <a:srgbClr val="EFEFEF">
+                        <a:alpha val="100000"/>
+                      </a:srgbClr>
+                    </a:solidFill>
+                  </a:tcPr>
+                </a:tc>
+                <a:tc>
+                  <a:txBody>
+                    <a:bodyPr/>
+                    <a:lstStyle/>
+                    <a:p>
+                      <a:pPr algn="ctr" marL="63500" marR="63500">
+                        <a:lnSpc>
+                          <a:spcPct val="100000"/>
+                        </a:lnSpc>
+                        <a:spcBef>
+                          <a:spcPts val="500"/>
+                        </a:spcBef>
+                        <a:spcAft>
+                          <a:spcPts val="500"/>
+                        </a:spcAft>
+                        <a:buNone/>
+                      </a:pPr>
+                      <a:r>
+                        <a:rPr cap="none" sz="1100" i="0" b="0" u="none" strike="noStrike">
+                          <a:solidFill>
+                            <a:srgbClr val="FF0000">
+                              <a:alpha val="100000"/>
+                            </a:srgbClr>
+                          </a:solidFill>
+                          <a:latin typeface="Arial"/>
+                          <a:cs typeface="Arial"/>
+                          <a:ea typeface="Arial"/>
+                          <a:sym typeface="Arial"/>
+                        </a:rPr>
+                        <a:t>Up</a:t>
+                      </a:r>
+                    </a:p>
+                  </a:txBody>
+                  <a:tcPr anchor="ctr" marB="63500" marT="63500" marR="0" marL="0">
+                    <a:lnL algn="ctr" cmpd="sng" cap="flat" w="0">
+                      <a:noFill/>
+                      <a:prstDash val="solid"/>
+                    </a:lnL>
+                    <a:lnR algn="ctr" cmpd="sng" cap="flat" w="0">
+                      <a:noFill/>
+                      <a:prstDash val="solid"/>
+                    </a:lnR>
+                    <a:lnT algn="ctr" cmpd="sng" cap="flat" w="0">
+                      <a:noFill/>
+                      <a:prstDash val="solid"/>
+                    </a:lnT>
+                    <a:lnB algn="ctr" cmpd="sng" cap="flat" w="0">
+                      <a:noFill/>
+                      <a:prstDash val="solid"/>
+                    </a:lnB>
+                    <a:solidFill>
+                      <a:srgbClr val="EFEFEF">
+                        <a:alpha val="100000"/>
+                      </a:srgbClr>
+                    </a:solidFill>
+                  </a:tcPr>
+                </a:tc>
+              </a:tr>
+              <a:tr h="390241">
+                <a:tc>
+                  <a:txBody>
+                    <a:bodyPr/>
+                    <a:lstStyle/>
+                    <a:p>
+                      <a:pPr algn="ctr" marL="63500" marR="63500">
+                        <a:lnSpc>
+                          <a:spcPct val="100000"/>
+                        </a:lnSpc>
+                        <a:spcBef>
+                          <a:spcPts val="500"/>
+                        </a:spcBef>
+                        <a:spcAft>
+                          <a:spcPts val="500"/>
+                        </a:spcAft>
+                        <a:buNone/>
+                      </a:pPr>
+                      <a:r>
+                        <a:rPr cap="none" sz="1100" i="0" b="0" u="none" strike="noStrike">
+                          <a:solidFill>
+                            <a:srgbClr val="000000">
+                              <a:alpha val="100000"/>
+                            </a:srgbClr>
+                          </a:solidFill>
+                          <a:latin typeface="Arial"/>
+                          <a:cs typeface="Arial"/>
+                          <a:ea typeface="Arial"/>
+                          <a:sym typeface="Arial"/>
+                        </a:rPr>
+                        <a:t>CELL</a:t>
+                      </a:r>
+                    </a:p>
+                  </a:txBody>
+                  <a:tcPr anchor="ctr" marB="63500" marT="63500" marR="0" marL="0">
+                    <a:lnL algn="ctr" cmpd="sng" cap="flat" w="0">
+                      <a:noFill/>
+                      <a:prstDash val="solid"/>
+                    </a:lnL>
+                    <a:lnR algn="ctr" cmpd="sng" cap="flat" w="0">
+                      <a:noFill/>
+                      <a:prstDash val="solid"/>
+                    </a:lnR>
+                    <a:lnT algn="ctr" cmpd="sng" cap="flat" w="0">
+                      <a:noFill/>
+                      <a:prstDash val="solid"/>
+                    </a:lnT>
+                    <a:lnB algn="ctr" cmpd="sng" cap="flat" w="0">
+                      <a:noFill/>
+                      <a:prstDash val="solid"/>
+                    </a:lnB>
+                    <a:solidFill>
+                      <a:srgbClr val="FFFFFF">
+                        <a:alpha val="0"/>
+                      </a:srgbClr>
+                    </a:solidFill>
+                  </a:tcPr>
+                </a:tc>
+                <a:tc>
+                  <a:txBody>
+                    <a:bodyPr/>
+                    <a:lstStyle/>
+                    <a:p>
+                      <a:pPr algn="ctr" marL="63500" marR="63500">
+                        <a:lnSpc>
+                          <a:spcPct val="100000"/>
+                        </a:lnSpc>
+                        <a:spcBef>
+                          <a:spcPts val="500"/>
+                        </a:spcBef>
+                        <a:spcAft>
+                          <a:spcPts val="500"/>
+                        </a:spcAft>
+                        <a:buNone/>
+                      </a:pPr>
+                      <a:r>
+                        <a:rPr cap="none" sz="1100" i="0" b="0" u="none" strike="noStrike">
+                          <a:solidFill>
+                            <a:srgbClr val="000000">
+                              <a:alpha val="100000"/>
+                            </a:srgbClr>
+                          </a:solidFill>
+                          <a:latin typeface="Arial"/>
+                          <a:cs typeface="Arial"/>
+                          <a:ea typeface="Arial"/>
+                          <a:sym typeface="Arial"/>
+                        </a:rPr>
+                        <a:t>TCMC</a:t>
+                      </a:r>
+                    </a:p>
+                  </a:txBody>
+                  <a:tcPr anchor="ctr" marB="63500" marT="63500" marR="0" marL="0">
+                    <a:lnL algn="ctr" cmpd="sng" cap="flat" w="0">
+                      <a:noFill/>
+                      <a:prstDash val="solid"/>
+                    </a:lnL>
+                    <a:lnR algn="ctr" cmpd="sng" cap="flat" w="0">
+                      <a:noFill/>
+                      <a:prstDash val="solid"/>
+                    </a:lnR>
+                    <a:lnT algn="ctr" cmpd="sng" cap="flat" w="0">
+                      <a:noFill/>
+                      <a:prstDash val="solid"/>
+                    </a:lnT>
+                    <a:lnB algn="ctr" cmpd="sng" cap="flat" w="0">
+                      <a:noFill/>
+                      <a:prstDash val="solid"/>
+                    </a:lnB>
+                    <a:solidFill>
+                      <a:srgbClr val="FFFFFF">
+                        <a:alpha val="0"/>
+                      </a:srgbClr>
+                    </a:solidFill>
+                  </a:tcPr>
+                </a:tc>
+                <a:tc>
+                  <a:txBody>
+                    <a:bodyPr/>
+                    <a:lstStyle/>
+                    <a:p>
+                      <a:pPr algn="ctr" marL="63500" marR="63500">
+                        <a:lnSpc>
+                          <a:spcPct val="100000"/>
+                        </a:lnSpc>
+                        <a:spcBef>
+                          <a:spcPts val="500"/>
+                        </a:spcBef>
+                        <a:spcAft>
+                          <a:spcPts val="500"/>
+                        </a:spcAft>
+                        <a:buNone/>
+                      </a:pPr>
+                      <a:r>
+                        <a:rPr cap="none" sz="1100" i="0" b="0" u="none" strike="noStrike">
+                          <a:solidFill>
+                            <a:srgbClr val="000000">
+                              <a:alpha val="100000"/>
+                            </a:srgbClr>
+                          </a:solidFill>
+                          <a:latin typeface="Arial"/>
+                          <a:cs typeface="Arial"/>
+                          <a:ea typeface="Arial"/>
+                          <a:sym typeface="Arial"/>
+                        </a:rPr>
+                        <a:t>TCMC_2</a:t>
+                      </a:r>
+                    </a:p>
+                  </a:txBody>
+                  <a:tcPr anchor="ctr" marB="63500" marT="63500" marR="0" marL="0">
+                    <a:lnL algn="ctr" cmpd="sng" cap="flat" w="0">
+                      <a:noFill/>
+                      <a:prstDash val="solid"/>
+                    </a:lnL>
+                    <a:lnR algn="ctr" cmpd="sng" cap="flat" w="0">
+                      <a:noFill/>
+                      <a:prstDash val="solid"/>
+                    </a:lnR>
+                    <a:lnT algn="ctr" cmpd="sng" cap="flat" w="0">
+                      <a:noFill/>
+                      <a:prstDash val="solid"/>
+                    </a:lnT>
+                    <a:lnB algn="ctr" cmpd="sng" cap="flat" w="0">
+                      <a:noFill/>
+                      <a:prstDash val="solid"/>
+                    </a:lnB>
+                    <a:solidFill>
+                      <a:srgbClr val="FFFFFF">
+                        <a:alpha val="0"/>
+                      </a:srgbClr>
+                    </a:solidFill>
+                  </a:tcPr>
+                </a:tc>
+                <a:tc>
+                  <a:txBody>
+                    <a:bodyPr/>
+                    <a:lstStyle/>
+                    <a:p>
+                      <a:pPr algn="ctr" marL="63500" marR="63500">
+                        <a:lnSpc>
+                          <a:spcPct val="100000"/>
+                        </a:lnSpc>
+                        <a:spcBef>
+                          <a:spcPts val="500"/>
+                        </a:spcBef>
+                        <a:spcAft>
+                          <a:spcPts val="500"/>
+                        </a:spcAft>
+                        <a:buNone/>
+                      </a:pPr>
+                      <a:r>
+                        <a:rPr cap="none" sz="1100" i="0" b="0" u="none" strike="noStrike">
+                          <a:solidFill>
+                            <a:srgbClr val="000000">
+                              <a:alpha val="100000"/>
+                            </a:srgbClr>
+                          </a:solidFill>
+                          <a:latin typeface="Arial"/>
+                          <a:cs typeface="Arial"/>
+                          <a:ea typeface="Arial"/>
+                          <a:sym typeface="Arial"/>
+                        </a:rPr>
+                        <a:t>Cell_TCMC_234</a:t>
+                      </a:r>
+                    </a:p>
+                  </a:txBody>
+                  <a:tcPr anchor="ctr" marB="63500" marT="63500" marR="0" marL="0">
+                    <a:lnL algn="ctr" cmpd="sng" cap="flat" w="0">
+                      <a:noFill/>
+                      <a:prstDash val="solid"/>
+                    </a:lnL>
+                    <a:lnR algn="ctr" cmpd="sng" cap="flat" w="0">
+                      <a:noFill/>
+                      <a:prstDash val="solid"/>
+                    </a:lnR>
+                    <a:lnT algn="ctr" cmpd="sng" cap="flat" w="0">
+                      <a:noFill/>
+                      <a:prstDash val="solid"/>
+                    </a:lnT>
+                    <a:lnB algn="ctr" cmpd="sng" cap="flat" w="0">
+                      <a:noFill/>
+                      <a:prstDash val="solid"/>
+                    </a:lnB>
+                    <a:solidFill>
+                      <a:srgbClr val="FFFFFF">
+                        <a:alpha val="0"/>
+                      </a:srgbClr>
+                    </a:solidFill>
+                  </a:tcPr>
+                </a:tc>
+                <a:tc>
+                  <a:txBody>
+                    <a:bodyPr/>
+                    <a:lstStyle/>
+                    <a:p>
+                      <a:pPr algn="ctr" marL="63500" marR="63500">
+                        <a:lnSpc>
+                          <a:spcPct val="100000"/>
+                        </a:lnSpc>
+                        <a:spcBef>
+                          <a:spcPts val="500"/>
+                        </a:spcBef>
+                        <a:spcAft>
+                          <a:spcPts val="500"/>
+                        </a:spcAft>
+                        <a:buNone/>
+                      </a:pPr>
+                      <a:r>
+                        <a:rPr cap="none" sz="1100" i="0" b="0" u="none" strike="noStrike">
+                          <a:solidFill>
+                            <a:srgbClr val="000000">
+                              <a:alpha val="100000"/>
+                            </a:srgbClr>
+                          </a:solidFill>
+                          <a:latin typeface="Arial"/>
+                          <a:cs typeface="Arial"/>
+                          <a:ea typeface="Arial"/>
+                          <a:sym typeface="Arial"/>
+                        </a:rPr>
+                        <a:t>0.67</a:t>
+                      </a:r>
+                    </a:p>
+                  </a:txBody>
+                  <a:tcPr anchor="ctr" marB="63500" marT="63500" marR="0" marL="0">
+                    <a:lnL algn="ctr" cmpd="sng" cap="flat" w="0">
+                      <a:noFill/>
+                      <a:prstDash val="solid"/>
+                    </a:lnL>
+                    <a:lnR algn="ctr" cmpd="sng" cap="flat" w="0">
+                      <a:noFill/>
+                      <a:prstDash val="solid"/>
+                    </a:lnR>
+                    <a:lnT algn="ctr" cmpd="sng" cap="flat" w="0">
+                      <a:noFill/>
+                      <a:prstDash val="solid"/>
+                    </a:lnT>
+                    <a:lnB algn="ctr" cmpd="sng" cap="flat" w="0">
+                      <a:noFill/>
+                      <a:prstDash val="solid"/>
+                    </a:lnB>
+                    <a:solidFill>
+                      <a:srgbClr val="FFFFFF">
+                        <a:alpha val="0"/>
+                      </a:srgbClr>
+                    </a:solidFill>
+                  </a:tcPr>
+                </a:tc>
+                <a:tc>
+                  <a:txBody>
+                    <a:bodyPr/>
+                    <a:lstStyle/>
+                    <a:p>
+                      <a:pPr algn="ctr" marL="63500" marR="63500">
+                        <a:lnSpc>
+                          <a:spcPct val="100000"/>
+                        </a:lnSpc>
+                        <a:spcBef>
+                          <a:spcPts val="500"/>
+                        </a:spcBef>
+                        <a:spcAft>
+                          <a:spcPts val="500"/>
+                        </a:spcAft>
+                        <a:buNone/>
+                      </a:pPr>
+                      <a:r>
+                        <a:rPr cap="none" sz="1100" i="0" b="0" u="none" strike="noStrike">
+                          <a:solidFill>
+                            <a:srgbClr val="FF0000">
+                              <a:alpha val="100000"/>
+                            </a:srgbClr>
+                          </a:solidFill>
+                          <a:latin typeface="Arial"/>
+                          <a:cs typeface="Arial"/>
+                          <a:ea typeface="Arial"/>
+                          <a:sym typeface="Arial"/>
+                        </a:rPr>
+                        <a:t>Up</a:t>
+                      </a:r>
+                    </a:p>
+                  </a:txBody>
+                  <a:tcPr anchor="ctr" marB="63500" marT="63500" marR="0" marL="0">
+                    <a:lnL algn="ctr" cmpd="sng" cap="flat" w="0">
+                      <a:noFill/>
+                      <a:prstDash val="solid"/>
+                    </a:lnL>
+                    <a:lnR algn="ctr" cmpd="sng" cap="flat" w="0">
+                      <a:noFill/>
+                      <a:prstDash val="solid"/>
+                    </a:lnR>
+                    <a:lnT algn="ctr" cmpd="sng" cap="flat" w="0">
+                      <a:noFill/>
+                      <a:prstDash val="solid"/>
+                    </a:lnT>
+                    <a:lnB algn="ctr" cmpd="sng" cap="flat" w="0">
+                      <a:noFill/>
+                      <a:prstDash val="solid"/>
+                    </a:lnB>
+                    <a:solidFill>
+                      <a:srgbClr val="FFFFFF">
+                        <a:alpha val="0"/>
+                      </a:srgbClr>
+                    </a:solidFill>
+                  </a:tcPr>
+                </a:tc>
+              </a:tr>
+              <a:tr h="390241">
+                <a:tc>
+                  <a:txBody>
+                    <a:bodyPr/>
+                    <a:lstStyle/>
+                    <a:p>
+                      <a:pPr algn="ctr" marL="63500" marR="63500">
+                        <a:lnSpc>
+                          <a:spcPct val="100000"/>
+                        </a:lnSpc>
+                        <a:spcBef>
+                          <a:spcPts val="500"/>
+                        </a:spcBef>
+                        <a:spcAft>
+                          <a:spcPts val="500"/>
+                        </a:spcAft>
+                        <a:buNone/>
+                      </a:pPr>
+                      <a:r>
+                        <a:rPr cap="none" sz="1100" i="0" b="0" u="none" strike="noStrike">
+                          <a:solidFill>
+                            <a:srgbClr val="000000">
+                              <a:alpha val="100000"/>
+                            </a:srgbClr>
+                          </a:solidFill>
+                          <a:latin typeface="Arial"/>
+                          <a:cs typeface="Arial"/>
+                          <a:ea typeface="Arial"/>
+                          <a:sym typeface="Arial"/>
+                        </a:rPr>
+                        <a:t>CELL</a:t>
+                      </a:r>
+                    </a:p>
+                  </a:txBody>
+                  <a:tcPr anchor="ctr" marB="63500" marT="63500" marR="0" marL="0">
+                    <a:lnL algn="ctr" cmpd="sng" cap="flat" w="0">
+                      <a:noFill/>
+                      <a:prstDash val="solid"/>
+                    </a:lnL>
+                    <a:lnR algn="ctr" cmpd="sng" cap="flat" w="0">
+                      <a:noFill/>
+                      <a:prstDash val="solid"/>
+                    </a:lnR>
+                    <a:lnT algn="ctr" cmpd="sng" cap="flat" w="0">
+                      <a:noFill/>
+                      <a:prstDash val="solid"/>
+                    </a:lnT>
+                    <a:lnB algn="ctr" cmpd="sng" cap="flat" w="0">
+                      <a:noFill/>
+                      <a:prstDash val="solid"/>
+                    </a:lnB>
+                    <a:solidFill>
+                      <a:srgbClr val="EFEFEF">
+                        <a:alpha val="100000"/>
+                      </a:srgbClr>
+                    </a:solidFill>
+                  </a:tcPr>
+                </a:tc>
+                <a:tc>
+                  <a:txBody>
+                    <a:bodyPr/>
+                    <a:lstStyle/>
+                    <a:p>
+                      <a:pPr algn="ctr" marL="63500" marR="63500">
+                        <a:lnSpc>
+                          <a:spcPct val="100000"/>
+                        </a:lnSpc>
+                        <a:spcBef>
+                          <a:spcPts val="500"/>
+                        </a:spcBef>
+                        <a:spcAft>
+                          <a:spcPts val="500"/>
+                        </a:spcAft>
+                        <a:buNone/>
+                      </a:pPr>
+                      <a:r>
+                        <a:rPr cap="none" sz="1100" i="0" b="0" u="none" strike="noStrike">
+                          <a:solidFill>
+                            <a:srgbClr val="000000">
+                              <a:alpha val="100000"/>
+                            </a:srgbClr>
+                          </a:solidFill>
+                          <a:latin typeface="Arial"/>
+                          <a:cs typeface="Arial"/>
+                          <a:ea typeface="Arial"/>
+                          <a:sym typeface="Arial"/>
+                        </a:rPr>
+                        <a:t>TCMC</a:t>
+                      </a:r>
+                    </a:p>
+                  </a:txBody>
+                  <a:tcPr anchor="ctr" marB="63500" marT="63500" marR="0" marL="0">
+                    <a:lnL algn="ctr" cmpd="sng" cap="flat" w="0">
+                      <a:noFill/>
+                      <a:prstDash val="solid"/>
+                    </a:lnL>
+                    <a:lnR algn="ctr" cmpd="sng" cap="flat" w="0">
+                      <a:noFill/>
+                      <a:prstDash val="solid"/>
+                    </a:lnR>
+                    <a:lnT algn="ctr" cmpd="sng" cap="flat" w="0">
+                      <a:noFill/>
+                      <a:prstDash val="solid"/>
+                    </a:lnT>
+                    <a:lnB algn="ctr" cmpd="sng" cap="flat" w="0">
+                      <a:noFill/>
+                      <a:prstDash val="solid"/>
+                    </a:lnB>
+                    <a:solidFill>
+                      <a:srgbClr val="EFEFEF">
+                        <a:alpha val="100000"/>
+                      </a:srgbClr>
+                    </a:solidFill>
+                  </a:tcPr>
+                </a:tc>
+                <a:tc>
+                  <a:txBody>
+                    <a:bodyPr/>
+                    <a:lstStyle/>
+                    <a:p>
+                      <a:pPr algn="ctr" marL="63500" marR="63500">
+                        <a:lnSpc>
+                          <a:spcPct val="100000"/>
+                        </a:lnSpc>
+                        <a:spcBef>
+                          <a:spcPts val="500"/>
+                        </a:spcBef>
+                        <a:spcAft>
+                          <a:spcPts val="500"/>
+                        </a:spcAft>
+                        <a:buNone/>
+                      </a:pPr>
+                      <a:r>
+                        <a:rPr cap="none" sz="1100" i="0" b="0" u="none" strike="noStrike">
+                          <a:solidFill>
+                            <a:srgbClr val="000000">
+                              <a:alpha val="100000"/>
+                            </a:srgbClr>
+                          </a:solidFill>
+                          <a:latin typeface="Arial"/>
+                          <a:cs typeface="Arial"/>
+                          <a:ea typeface="Arial"/>
+                          <a:sym typeface="Arial"/>
+                        </a:rPr>
+                        <a:t>TCMC_2</a:t>
+                      </a:r>
+                    </a:p>
+                  </a:txBody>
+                  <a:tcPr anchor="ctr" marB="63500" marT="63500" marR="0" marL="0">
+                    <a:lnL algn="ctr" cmpd="sng" cap="flat" w="0">
+                      <a:noFill/>
+                      <a:prstDash val="solid"/>
+                    </a:lnL>
+                    <a:lnR algn="ctr" cmpd="sng" cap="flat" w="0">
+                      <a:noFill/>
+                      <a:prstDash val="solid"/>
+                    </a:lnR>
+                    <a:lnT algn="ctr" cmpd="sng" cap="flat" w="0">
+                      <a:noFill/>
+                      <a:prstDash val="solid"/>
+                    </a:lnT>
+                    <a:lnB algn="ctr" cmpd="sng" cap="flat" w="0">
+                      <a:noFill/>
+                      <a:prstDash val="solid"/>
+                    </a:lnB>
+                    <a:solidFill>
+                      <a:srgbClr val="EFEFEF">
+                        <a:alpha val="100000"/>
+                      </a:srgbClr>
+                    </a:solidFill>
+                  </a:tcPr>
+                </a:tc>
+                <a:tc>
+                  <a:txBody>
+                    <a:bodyPr/>
+                    <a:lstStyle/>
+                    <a:p>
+                      <a:pPr algn="ctr" marL="63500" marR="63500">
+                        <a:lnSpc>
+                          <a:spcPct val="100000"/>
+                        </a:lnSpc>
+                        <a:spcBef>
+                          <a:spcPts val="500"/>
+                        </a:spcBef>
+                        <a:spcAft>
+                          <a:spcPts val="500"/>
+                        </a:spcAft>
+                        <a:buNone/>
+                      </a:pPr>
+                      <a:r>
+                        <a:rPr cap="none" sz="1100" i="0" b="0" u="none" strike="noStrike">
+                          <a:solidFill>
+                            <a:srgbClr val="000000">
+                              <a:alpha val="100000"/>
+                            </a:srgbClr>
+                          </a:solidFill>
+                          <a:latin typeface="Arial"/>
+                          <a:cs typeface="Arial"/>
+                          <a:ea typeface="Arial"/>
+                          <a:sym typeface="Arial"/>
+                        </a:rPr>
+                        <a:t>Cell_TCMC_235</a:t>
+                      </a:r>
+                    </a:p>
+                  </a:txBody>
+                  <a:tcPr anchor="ctr" marB="63500" marT="63500" marR="0" marL="0">
+                    <a:lnL algn="ctr" cmpd="sng" cap="flat" w="0">
+                      <a:noFill/>
+                      <a:prstDash val="solid"/>
+                    </a:lnL>
+                    <a:lnR algn="ctr" cmpd="sng" cap="flat" w="0">
+                      <a:noFill/>
+                      <a:prstDash val="solid"/>
+                    </a:lnR>
+                    <a:lnT algn="ctr" cmpd="sng" cap="flat" w="0">
+                      <a:noFill/>
+                      <a:prstDash val="solid"/>
+                    </a:lnT>
+                    <a:lnB algn="ctr" cmpd="sng" cap="flat" w="0">
+                      <a:noFill/>
+                      <a:prstDash val="solid"/>
+                    </a:lnB>
+                    <a:solidFill>
+                      <a:srgbClr val="EFEFEF">
+                        <a:alpha val="100000"/>
+                      </a:srgbClr>
+                    </a:solidFill>
+                  </a:tcPr>
+                </a:tc>
+                <a:tc>
+                  <a:txBody>
+                    <a:bodyPr/>
+                    <a:lstStyle/>
+                    <a:p>
+                      <a:pPr algn="ctr" marL="63500" marR="63500">
+                        <a:lnSpc>
+                          <a:spcPct val="100000"/>
+                        </a:lnSpc>
+                        <a:spcBef>
+                          <a:spcPts val="500"/>
+                        </a:spcBef>
+                        <a:spcAft>
+                          <a:spcPts val="500"/>
+                        </a:spcAft>
+                        <a:buNone/>
+                      </a:pPr>
+                      <a:r>
+                        <a:rPr cap="none" sz="1100" i="0" b="0" u="none" strike="noStrike">
+                          <a:solidFill>
+                            <a:srgbClr val="000000">
+                              <a:alpha val="100000"/>
+                            </a:srgbClr>
+                          </a:solidFill>
+                          <a:latin typeface="Arial"/>
+                          <a:cs typeface="Arial"/>
+                          <a:ea typeface="Arial"/>
+                          <a:sym typeface="Arial"/>
+                        </a:rPr>
+                        <a:t>0.67</a:t>
+                      </a:r>
+                    </a:p>
+                  </a:txBody>
+                  <a:tcPr anchor="ctr" marB="63500" marT="63500" marR="0" marL="0">
+                    <a:lnL algn="ctr" cmpd="sng" cap="flat" w="0">
+                      <a:noFill/>
+                      <a:prstDash val="solid"/>
+                    </a:lnL>
+                    <a:lnR algn="ctr" cmpd="sng" cap="flat" w="0">
+                      <a:noFill/>
+                      <a:prstDash val="solid"/>
+                    </a:lnR>
+                    <a:lnT algn="ctr" cmpd="sng" cap="flat" w="0">
+                      <a:noFill/>
+                      <a:prstDash val="solid"/>
+                    </a:lnT>
+                    <a:lnB algn="ctr" cmpd="sng" cap="flat" w="0">
+                      <a:noFill/>
+                      <a:prstDash val="solid"/>
+                    </a:lnB>
+                    <a:solidFill>
+                      <a:srgbClr val="EFEFEF">
+                        <a:alpha val="100000"/>
+                      </a:srgbClr>
+                    </a:solidFill>
+                  </a:tcPr>
+                </a:tc>
+                <a:tc>
+                  <a:txBody>
+                    <a:bodyPr/>
+                    <a:lstStyle/>
+                    <a:p>
+                      <a:pPr algn="ctr" marL="63500" marR="63500">
+                        <a:lnSpc>
+                          <a:spcPct val="100000"/>
+                        </a:lnSpc>
+                        <a:spcBef>
+                          <a:spcPts val="500"/>
+                        </a:spcBef>
+                        <a:spcAft>
+                          <a:spcPts val="500"/>
+                        </a:spcAft>
+                        <a:buNone/>
+                      </a:pPr>
+                      <a:r>
+                        <a:rPr cap="none" sz="1100" i="0" b="0" u="none" strike="noStrike">
+                          <a:solidFill>
+                            <a:srgbClr val="FF0000">
+                              <a:alpha val="100000"/>
+                            </a:srgbClr>
+                          </a:solidFill>
+                          <a:latin typeface="Arial"/>
+                          <a:cs typeface="Arial"/>
+                          <a:ea typeface="Arial"/>
+                          <a:sym typeface="Arial"/>
+                        </a:rPr>
+                        <a:t>Up</a:t>
+                      </a:r>
+                    </a:p>
+                  </a:txBody>
+                  <a:tcPr anchor="ctr" marB="63500" marT="63500" marR="0" marL="0">
+                    <a:lnL algn="ctr" cmpd="sng" cap="flat" w="0">
+                      <a:noFill/>
+                      <a:prstDash val="solid"/>
+                    </a:lnL>
+                    <a:lnR algn="ctr" cmpd="sng" cap="flat" w="0">
+                      <a:noFill/>
+                      <a:prstDash val="solid"/>
+                    </a:lnR>
+                    <a:lnT algn="ctr" cmpd="sng" cap="flat" w="0">
+                      <a:noFill/>
+                      <a:prstDash val="solid"/>
+                    </a:lnT>
+                    <a:lnB algn="ctr" cmpd="sng" cap="flat" w="0">
+                      <a:noFill/>
+                      <a:prstDash val="solid"/>
+                    </a:lnB>
+                    <a:solidFill>
+                      <a:srgbClr val="EFEFEF">
+                        <a:alpha val="100000"/>
+                      </a:srgbClr>
+                    </a:solidFill>
+                  </a:tcPr>
+                </a:tc>
+              </a:tr>
+              <a:tr h="388945">
+                <a:tc>
+                  <a:txBody>
+                    <a:bodyPr/>
+                    <a:lstStyle/>
+                    <a:p>
+                      <a:pPr algn="ctr" marL="63500" marR="63500">
+                        <a:lnSpc>
+                          <a:spcPct val="100000"/>
+                        </a:lnSpc>
+                        <a:spcBef>
+                          <a:spcPts val="500"/>
+                        </a:spcBef>
+                        <a:spcAft>
+                          <a:spcPts val="500"/>
+                        </a:spcAft>
+                        <a:buNone/>
+                      </a:pPr>
+                      <a:r>
+                        <a:rPr cap="none" sz="1100" i="0" b="0" u="none" strike="noStrike">
+                          <a:solidFill>
+                            <a:srgbClr val="000000">
+                              <a:alpha val="100000"/>
+                            </a:srgbClr>
+                          </a:solidFill>
+                          <a:latin typeface="Arial"/>
+                          <a:cs typeface="Arial"/>
+                          <a:ea typeface="Arial"/>
+                          <a:sym typeface="Arial"/>
+                        </a:rPr>
+                        <a:t>PERI</a:t>
+                      </a:r>
+                    </a:p>
+                  </a:txBody>
+                  <a:tcPr anchor="ctr" marB="63500" marT="63500" marR="0" marL="0">
+                    <a:lnL algn="ctr" cmpd="sng" cap="flat" w="0">
+                      <a:noFill/>
+                      <a:prstDash val="solid"/>
+                    </a:lnL>
+                    <a:lnR algn="ctr" cmpd="sng" cap="flat" w="0">
+                      <a:noFill/>
+                      <a:prstDash val="solid"/>
+                    </a:lnR>
+                    <a:lnT algn="ctr" cmpd="sng" cap="flat" w="0">
+                      <a:noFill/>
+                      <a:prstDash val="solid"/>
+                    </a:lnT>
+                    <a:lnB algn="ctr" cmpd="sng" cap="flat" w="0">
+                      <a:noFill/>
+                      <a:prstDash val="solid"/>
+                    </a:lnB>
+                    <a:solidFill>
+                      <a:srgbClr val="FFFFFF">
+                        <a:alpha val="0"/>
+                      </a:srgbClr>
+                    </a:solidFill>
+                  </a:tcPr>
+                </a:tc>
+                <a:tc>
+                  <a:txBody>
+                    <a:bodyPr/>
+                    <a:lstStyle/>
+                    <a:p>
+                      <a:pPr algn="ctr" marL="63500" marR="63500">
+                        <a:lnSpc>
+                          <a:spcPct val="100000"/>
+                        </a:lnSpc>
+                        <a:spcBef>
+                          <a:spcPts val="500"/>
+                        </a:spcBef>
+                        <a:spcAft>
+                          <a:spcPts val="500"/>
+                        </a:spcAft>
+                        <a:buNone/>
+                      </a:pPr>
+                      <a:r>
+                        <a:rPr cap="none" sz="1100" i="0" b="0" u="none" strike="noStrike">
+                          <a:solidFill>
+                            <a:srgbClr val="000000">
+                              <a:alpha val="100000"/>
+                            </a:srgbClr>
+                          </a:solidFill>
+                          <a:latin typeface="Arial"/>
+                          <a:cs typeface="Arial"/>
+                          <a:ea typeface="Arial"/>
+                          <a:sym typeface="Arial"/>
+                        </a:rPr>
+                        <a:t>PB</a:t>
+                      </a:r>
+                    </a:p>
+                  </a:txBody>
+                  <a:tcPr anchor="ctr" marB="63500" marT="63500" marR="0" marL="0">
+                    <a:lnL algn="ctr" cmpd="sng" cap="flat" w="0">
+                      <a:noFill/>
+                      <a:prstDash val="solid"/>
+                    </a:lnL>
+                    <a:lnR algn="ctr" cmpd="sng" cap="flat" w="0">
+                      <a:noFill/>
+                      <a:prstDash val="solid"/>
+                    </a:lnR>
+                    <a:lnT algn="ctr" cmpd="sng" cap="flat" w="0">
+                      <a:noFill/>
+                      <a:prstDash val="solid"/>
+                    </a:lnT>
+                    <a:lnB algn="ctr" cmpd="sng" cap="flat" w="0">
+                      <a:noFill/>
+                      <a:prstDash val="solid"/>
+                    </a:lnB>
+                    <a:solidFill>
+                      <a:srgbClr val="FFFFFF">
+                        <a:alpha val="0"/>
+                      </a:srgbClr>
+                    </a:solidFill>
+                  </a:tcPr>
+                </a:tc>
+                <a:tc>
+                  <a:txBody>
+                    <a:bodyPr/>
+                    <a:lstStyle/>
+                    <a:p>
+                      <a:pPr algn="ctr" marL="63500" marR="63500">
+                        <a:lnSpc>
+                          <a:spcPct val="100000"/>
+                        </a:lnSpc>
+                        <a:spcBef>
+                          <a:spcPts val="500"/>
+                        </a:spcBef>
+                        <a:spcAft>
+                          <a:spcPts val="500"/>
+                        </a:spcAft>
+                        <a:buNone/>
+                      </a:pPr>
+                      <a:r>
+                        <a:rPr cap="none" sz="1100" i="0" b="0" u="none" strike="noStrike">
+                          <a:solidFill>
+                            <a:srgbClr val="000000">
+                              <a:alpha val="100000"/>
+                            </a:srgbClr>
+                          </a:solidFill>
+                          <a:latin typeface="Arial"/>
+                          <a:cs typeface="Arial"/>
+                          <a:ea typeface="Arial"/>
+                          <a:sym typeface="Arial"/>
+                        </a:rPr>
+                        <a:t>PB_1</a:t>
+                      </a:r>
+                    </a:p>
+                  </a:txBody>
+                  <a:tcPr anchor="ctr" marB="63500" marT="63500" marR="0" marL="0">
+                    <a:lnL algn="ctr" cmpd="sng" cap="flat" w="0">
+                      <a:noFill/>
+                      <a:prstDash val="solid"/>
+                    </a:lnL>
+                    <a:lnR algn="ctr" cmpd="sng" cap="flat" w="0">
+                      <a:noFill/>
+                      <a:prstDash val="solid"/>
+                    </a:lnR>
+                    <a:lnT algn="ctr" cmpd="sng" cap="flat" w="0">
+                      <a:noFill/>
+                      <a:prstDash val="solid"/>
+                    </a:lnT>
+                    <a:lnB algn="ctr" cmpd="sng" cap="flat" w="0">
+                      <a:noFill/>
+                      <a:prstDash val="solid"/>
+                    </a:lnB>
+                    <a:solidFill>
+                      <a:srgbClr val="FFFFFF">
+                        <a:alpha val="0"/>
+                      </a:srgbClr>
+                    </a:solidFill>
+                  </a:tcPr>
+                </a:tc>
+                <a:tc>
+                  <a:txBody>
+                    <a:bodyPr/>
+                    <a:lstStyle/>
+                    <a:p>
+                      <a:pPr algn="ctr" marL="63500" marR="63500">
+                        <a:lnSpc>
+                          <a:spcPct val="100000"/>
+                        </a:lnSpc>
+                        <a:spcBef>
+                          <a:spcPts val="500"/>
+                        </a:spcBef>
+                        <a:spcAft>
+                          <a:spcPts val="500"/>
+                        </a:spcAft>
+                        <a:buNone/>
+                      </a:pPr>
+                      <a:r>
+                        <a:rPr cap="none" sz="1100" i="0" b="0" u="none" strike="noStrike">
+                          <a:solidFill>
+                            <a:srgbClr val="000000">
+                              <a:alpha val="100000"/>
+                            </a:srgbClr>
+                          </a:solidFill>
+                          <a:latin typeface="Arial"/>
+                          <a:cs typeface="Arial"/>
+                          <a:ea typeface="Arial"/>
+                          <a:sym typeface="Arial"/>
+                        </a:rPr>
+                        <a:t>Peri_PB_004</a:t>
+                      </a:r>
+                    </a:p>
+                  </a:txBody>
+                  <a:tcPr anchor="ctr" marB="63500" marT="63500" marR="0" marL="0">
+                    <a:lnL algn="ctr" cmpd="sng" cap="flat" w="0">
+                      <a:noFill/>
+                      <a:prstDash val="solid"/>
+                    </a:lnL>
+                    <a:lnR algn="ctr" cmpd="sng" cap="flat" w="0">
+                      <a:noFill/>
+                      <a:prstDash val="solid"/>
+                    </a:lnR>
+                    <a:lnT algn="ctr" cmpd="sng" cap="flat" w="0">
+                      <a:noFill/>
+                      <a:prstDash val="solid"/>
+                    </a:lnT>
+                    <a:lnB algn="ctr" cmpd="sng" cap="flat" w="0">
+                      <a:noFill/>
+                      <a:prstDash val="solid"/>
+                    </a:lnB>
+                    <a:solidFill>
+                      <a:srgbClr val="FFFFFF">
+                        <a:alpha val="0"/>
+                      </a:srgbClr>
+                    </a:solidFill>
+                  </a:tcPr>
+                </a:tc>
+                <a:tc>
+                  <a:txBody>
+                    <a:bodyPr/>
+                    <a:lstStyle/>
+                    <a:p>
+                      <a:pPr algn="ctr" marL="63500" marR="63500">
+                        <a:lnSpc>
+                          <a:spcPct val="100000"/>
+                        </a:lnSpc>
+                        <a:spcBef>
+                          <a:spcPts val="500"/>
+                        </a:spcBef>
+                        <a:spcAft>
+                          <a:spcPts val="500"/>
+                        </a:spcAft>
+                        <a:buNone/>
+                      </a:pPr>
+                      <a:r>
+                        <a:rPr cap="none" sz="1100" i="0" b="0" u="none" strike="noStrike">
+                          <a:solidFill>
+                            <a:srgbClr val="000000">
+                              <a:alpha val="100000"/>
+                            </a:srgbClr>
+                          </a:solidFill>
+                          <a:latin typeface="Arial"/>
+                          <a:cs typeface="Arial"/>
+                          <a:ea typeface="Arial"/>
+                          <a:sym typeface="Arial"/>
+                        </a:rPr>
+                        <a:t>0.63</a:t>
+                      </a:r>
+                    </a:p>
+                  </a:txBody>
+                  <a:tcPr anchor="ctr" marB="63500" marT="63500" marR="0" marL="0">
+                    <a:lnL algn="ctr" cmpd="sng" cap="flat" w="0">
+                      <a:noFill/>
+                      <a:prstDash val="solid"/>
+                    </a:lnL>
+                    <a:lnR algn="ctr" cmpd="sng" cap="flat" w="0">
+                      <a:noFill/>
+                      <a:prstDash val="solid"/>
+                    </a:lnR>
+                    <a:lnT algn="ctr" cmpd="sng" cap="flat" w="0">
+                      <a:noFill/>
+                      <a:prstDash val="solid"/>
+                    </a:lnT>
+                    <a:lnB algn="ctr" cmpd="sng" cap="flat" w="0">
+                      <a:noFill/>
+                      <a:prstDash val="solid"/>
+                    </a:lnB>
+                    <a:solidFill>
+                      <a:srgbClr val="FFFFFF">
+                        <a:alpha val="0"/>
+                      </a:srgbClr>
+                    </a:solidFill>
+                  </a:tcPr>
+                </a:tc>
+                <a:tc>
+                  <a:txBody>
+                    <a:bodyPr/>
+                    <a:lstStyle/>
+                    <a:p>
+                      <a:pPr algn="ctr" marL="63500" marR="63500">
+                        <a:lnSpc>
+                          <a:spcPct val="100000"/>
+                        </a:lnSpc>
+                        <a:spcBef>
+                          <a:spcPts val="500"/>
+                        </a:spcBef>
+                        <a:spcAft>
+                          <a:spcPts val="500"/>
+                        </a:spcAft>
+                        <a:buNone/>
+                      </a:pPr>
+                      <a:r>
+                        <a:rPr cap="none" sz="1100" i="0" b="0" u="none" strike="noStrike">
+                          <a:solidFill>
+                            <a:srgbClr val="FF0000">
+                              <a:alpha val="100000"/>
+                            </a:srgbClr>
+                          </a:solidFill>
+                          <a:latin typeface="Arial"/>
+                          <a:cs typeface="Arial"/>
+                          <a:ea typeface="Arial"/>
+                          <a:sym typeface="Arial"/>
+                        </a:rPr>
+                        <a:t>Up</a:t>
+                      </a:r>
+                    </a:p>
+                  </a:txBody>
+                  <a:tcPr anchor="ctr" marB="63500" marT="63500" marR="0" marL="0">
+                    <a:lnL algn="ctr" cmpd="sng" cap="flat" w="0">
+                      <a:noFill/>
+                      <a:prstDash val="solid"/>
+                    </a:lnL>
+                    <a:lnR algn="ctr" cmpd="sng" cap="flat" w="0">
+                      <a:noFill/>
+                      <a:prstDash val="solid"/>
+                    </a:lnR>
+                    <a:lnT algn="ctr" cmpd="sng" cap="flat" w="0">
+                      <a:noFill/>
+                      <a:prstDash val="solid"/>
+                    </a:lnT>
+                    <a:lnB algn="ctr" cmpd="sng" cap="flat" w="0">
+                      <a:noFill/>
+                      <a:prstDash val="solid"/>
+                    </a:lnB>
+                    <a:solidFill>
+                      <a:srgbClr val="FFFFFF">
+                        <a:alpha val="0"/>
+                      </a:srgbClr>
+                    </a:solidFill>
+                  </a:tcPr>
+                </a:tc>
+              </a:tr>
+              <a:tr h="390241">
+                <a:tc>
+                  <a:txBody>
+                    <a:bodyPr/>
+                    <a:lstStyle/>
+                    <a:p>
+                      <a:pPr algn="ctr" marL="63500" marR="63500">
+                        <a:lnSpc>
+                          <a:spcPct val="100000"/>
+                        </a:lnSpc>
+                        <a:spcBef>
+                          <a:spcPts val="500"/>
+                        </a:spcBef>
+                        <a:spcAft>
+                          <a:spcPts val="500"/>
+                        </a:spcAft>
+                        <a:buNone/>
+                      </a:pPr>
+                      <a:r>
+                        <a:rPr cap="none" sz="1100" i="0" b="0" u="none" strike="noStrike">
+                          <a:solidFill>
+                            <a:srgbClr val="000000">
+                              <a:alpha val="100000"/>
+                            </a:srgbClr>
+                          </a:solidFill>
+                          <a:latin typeface="Arial"/>
+                          <a:cs typeface="Arial"/>
+                          <a:ea typeface="Arial"/>
+                          <a:sym typeface="Arial"/>
+                        </a:rPr>
+                        <a:t>CELL</a:t>
+                      </a:r>
+                    </a:p>
+                  </a:txBody>
+                  <a:tcPr anchor="ctr" marB="63500" marT="63500" marR="0" marL="0">
+                    <a:lnL algn="ctr" cmpd="sng" cap="flat" w="0">
+                      <a:noFill/>
+                      <a:prstDash val="solid"/>
+                    </a:lnL>
+                    <a:lnR algn="ctr" cmpd="sng" cap="flat" w="0">
+                      <a:noFill/>
+                      <a:prstDash val="solid"/>
+                    </a:lnR>
+                    <a:lnT algn="ctr" cmpd="sng" cap="flat" w="0">
+                      <a:noFill/>
+                      <a:prstDash val="solid"/>
+                    </a:lnT>
+                    <a:lnB algn="ctr" cmpd="sng" cap="flat" w="0">
+                      <a:noFill/>
+                      <a:prstDash val="solid"/>
+                    </a:lnB>
+                    <a:solidFill>
+                      <a:srgbClr val="EFEFEF">
+                        <a:alpha val="100000"/>
+                      </a:srgbClr>
+                    </a:solidFill>
+                  </a:tcPr>
+                </a:tc>
+                <a:tc>
+                  <a:txBody>
+                    <a:bodyPr/>
+                    <a:lstStyle/>
+                    <a:p>
+                      <a:pPr algn="ctr" marL="63500" marR="63500">
+                        <a:lnSpc>
+                          <a:spcPct val="100000"/>
+                        </a:lnSpc>
+                        <a:spcBef>
+                          <a:spcPts val="500"/>
+                        </a:spcBef>
+                        <a:spcAft>
+                          <a:spcPts val="500"/>
+                        </a:spcAft>
+                        <a:buNone/>
+                      </a:pPr>
+                      <a:r>
+                        <a:rPr cap="none" sz="1100" i="0" b="0" u="none" strike="noStrike">
+                          <a:solidFill>
+                            <a:srgbClr val="000000">
+                              <a:alpha val="100000"/>
+                            </a:srgbClr>
+                          </a:solidFill>
+                          <a:latin typeface="Arial"/>
+                          <a:cs typeface="Arial"/>
+                          <a:ea typeface="Arial"/>
+                          <a:sym typeface="Arial"/>
+                        </a:rPr>
+                        <a:t>TCMC</a:t>
+                      </a:r>
+                    </a:p>
+                  </a:txBody>
+                  <a:tcPr anchor="ctr" marB="63500" marT="63500" marR="0" marL="0">
+                    <a:lnL algn="ctr" cmpd="sng" cap="flat" w="0">
+                      <a:noFill/>
+                      <a:prstDash val="solid"/>
+                    </a:lnL>
+                    <a:lnR algn="ctr" cmpd="sng" cap="flat" w="0">
+                      <a:noFill/>
+                      <a:prstDash val="solid"/>
+                    </a:lnR>
+                    <a:lnT algn="ctr" cmpd="sng" cap="flat" w="0">
+                      <a:noFill/>
+                      <a:prstDash val="solid"/>
+                    </a:lnT>
+                    <a:lnB algn="ctr" cmpd="sng" cap="flat" w="0">
+                      <a:noFill/>
+                      <a:prstDash val="solid"/>
+                    </a:lnB>
+                    <a:solidFill>
+                      <a:srgbClr val="EFEFEF">
+                        <a:alpha val="100000"/>
+                      </a:srgbClr>
+                    </a:solidFill>
+                  </a:tcPr>
+                </a:tc>
+                <a:tc>
+                  <a:txBody>
+                    <a:bodyPr/>
+                    <a:lstStyle/>
+                    <a:p>
+                      <a:pPr algn="ctr" marL="63500" marR="63500">
+                        <a:lnSpc>
+                          <a:spcPct val="100000"/>
+                        </a:lnSpc>
+                        <a:spcBef>
+                          <a:spcPts val="500"/>
+                        </a:spcBef>
+                        <a:spcAft>
+                          <a:spcPts val="500"/>
+                        </a:spcAft>
+                        <a:buNone/>
+                      </a:pPr>
+                      <a:r>
+                        <a:rPr cap="none" sz="1100" i="0" b="0" u="none" strike="noStrike">
+                          <a:solidFill>
+                            <a:srgbClr val="000000">
+                              <a:alpha val="100000"/>
+                            </a:srgbClr>
+                          </a:solidFill>
+                          <a:latin typeface="Arial"/>
+                          <a:cs typeface="Arial"/>
+                          <a:ea typeface="Arial"/>
+                          <a:sym typeface="Arial"/>
+                        </a:rPr>
+                        <a:t>TCMC_1</a:t>
+                      </a:r>
+                    </a:p>
+                  </a:txBody>
+                  <a:tcPr anchor="ctr" marB="63500" marT="63500" marR="0" marL="0">
+                    <a:lnL algn="ctr" cmpd="sng" cap="flat" w="0">
+                      <a:noFill/>
+                      <a:prstDash val="solid"/>
+                    </a:lnL>
+                    <a:lnR algn="ctr" cmpd="sng" cap="flat" w="0">
+                      <a:noFill/>
+                      <a:prstDash val="solid"/>
+                    </a:lnR>
+                    <a:lnT algn="ctr" cmpd="sng" cap="flat" w="0">
+                      <a:noFill/>
+                      <a:prstDash val="solid"/>
+                    </a:lnT>
+                    <a:lnB algn="ctr" cmpd="sng" cap="flat" w="0">
+                      <a:noFill/>
+                      <a:prstDash val="solid"/>
+                    </a:lnB>
+                    <a:solidFill>
+                      <a:srgbClr val="EFEFEF">
+                        <a:alpha val="100000"/>
+                      </a:srgbClr>
+                    </a:solidFill>
+                  </a:tcPr>
+                </a:tc>
+                <a:tc>
+                  <a:txBody>
+                    <a:bodyPr/>
+                    <a:lstStyle/>
+                    <a:p>
+                      <a:pPr algn="ctr" marL="63500" marR="63500">
+                        <a:lnSpc>
+                          <a:spcPct val="100000"/>
+                        </a:lnSpc>
+                        <a:spcBef>
+                          <a:spcPts val="500"/>
+                        </a:spcBef>
+                        <a:spcAft>
+                          <a:spcPts val="500"/>
+                        </a:spcAft>
+                        <a:buNone/>
+                      </a:pPr>
+                      <a:r>
+                        <a:rPr cap="none" sz="1100" i="0" b="0" u="none" strike="noStrike">
+                          <a:solidFill>
+                            <a:srgbClr val="000000">
+                              <a:alpha val="100000"/>
+                            </a:srgbClr>
+                          </a:solidFill>
+                          <a:latin typeface="Arial"/>
+                          <a:cs typeface="Arial"/>
+                          <a:ea typeface="Arial"/>
+                          <a:sym typeface="Arial"/>
+                        </a:rPr>
+                        <a:t>Cell_TCMC_203</a:t>
+                      </a:r>
+                    </a:p>
+                  </a:txBody>
+                  <a:tcPr anchor="ctr" marB="63500" marT="63500" marR="0" marL="0">
+                    <a:lnL algn="ctr" cmpd="sng" cap="flat" w="0">
+                      <a:noFill/>
+                      <a:prstDash val="solid"/>
+                    </a:lnL>
+                    <a:lnR algn="ctr" cmpd="sng" cap="flat" w="0">
+                      <a:noFill/>
+                      <a:prstDash val="solid"/>
+                    </a:lnR>
+                    <a:lnT algn="ctr" cmpd="sng" cap="flat" w="0">
+                      <a:noFill/>
+                      <a:prstDash val="solid"/>
+                    </a:lnT>
+                    <a:lnB algn="ctr" cmpd="sng" cap="flat" w="0">
+                      <a:noFill/>
+                      <a:prstDash val="solid"/>
+                    </a:lnB>
+                    <a:solidFill>
+                      <a:srgbClr val="EFEFEF">
+                        <a:alpha val="100000"/>
+                      </a:srgbClr>
+                    </a:solidFill>
+                  </a:tcPr>
+                </a:tc>
+                <a:tc>
+                  <a:txBody>
+                    <a:bodyPr/>
+                    <a:lstStyle/>
+                    <a:p>
+                      <a:pPr algn="ctr" marL="63500" marR="63500">
+                        <a:lnSpc>
+                          <a:spcPct val="100000"/>
+                        </a:lnSpc>
+                        <a:spcBef>
+                          <a:spcPts val="500"/>
+                        </a:spcBef>
+                        <a:spcAft>
+                          <a:spcPts val="500"/>
+                        </a:spcAft>
+                        <a:buNone/>
+                      </a:pPr>
+                      <a:r>
+                        <a:rPr cap="none" sz="1100" i="0" b="0" u="none" strike="noStrike">
+                          <a:solidFill>
+                            <a:srgbClr val="000000">
+                              <a:alpha val="100000"/>
+                            </a:srgbClr>
+                          </a:solidFill>
+                          <a:latin typeface="Arial"/>
+                          <a:cs typeface="Arial"/>
+                          <a:ea typeface="Arial"/>
+                          <a:sym typeface="Arial"/>
+                        </a:rPr>
+                        <a:t>0.59</a:t>
+                      </a:r>
+                    </a:p>
+                  </a:txBody>
+                  <a:tcPr anchor="ctr" marB="63500" marT="63500" marR="0" marL="0">
+                    <a:lnL algn="ctr" cmpd="sng" cap="flat" w="0">
+                      <a:noFill/>
+                      <a:prstDash val="solid"/>
+                    </a:lnL>
+                    <a:lnR algn="ctr" cmpd="sng" cap="flat" w="0">
+                      <a:noFill/>
+                      <a:prstDash val="solid"/>
+                    </a:lnR>
+                    <a:lnT algn="ctr" cmpd="sng" cap="flat" w="0">
+                      <a:noFill/>
+                      <a:prstDash val="solid"/>
+                    </a:lnT>
+                    <a:lnB algn="ctr" cmpd="sng" cap="flat" w="0">
+                      <a:noFill/>
+                      <a:prstDash val="solid"/>
+                    </a:lnB>
+                    <a:solidFill>
+                      <a:srgbClr val="EFEFEF">
+                        <a:alpha val="100000"/>
+                      </a:srgbClr>
+                    </a:solidFill>
+                  </a:tcPr>
+                </a:tc>
+                <a:tc>
+                  <a:txBody>
+                    <a:bodyPr/>
+                    <a:lstStyle/>
+                    <a:p>
+                      <a:pPr algn="ctr" marL="63500" marR="63500">
+                        <a:lnSpc>
+                          <a:spcPct val="100000"/>
+                        </a:lnSpc>
+                        <a:spcBef>
+                          <a:spcPts val="500"/>
+                        </a:spcBef>
+                        <a:spcAft>
+                          <a:spcPts val="500"/>
+                        </a:spcAft>
+                        <a:buNone/>
+                      </a:pPr>
+                      <a:r>
+                        <a:rPr cap="none" sz="1100" i="0" b="0" u="none" strike="noStrike">
+                          <a:solidFill>
+                            <a:srgbClr val="FF0000">
+                              <a:alpha val="100000"/>
+                            </a:srgbClr>
+                          </a:solidFill>
+                          <a:latin typeface="Arial"/>
+                          <a:cs typeface="Arial"/>
+                          <a:ea typeface="Arial"/>
+                          <a:sym typeface="Arial"/>
+                        </a:rPr>
+                        <a:t>Up</a:t>
+                      </a:r>
+                    </a:p>
+                  </a:txBody>
+                  <a:tcPr anchor="ctr" marB="63500" marT="63500" marR="0" marL="0">
+                    <a:lnL algn="ctr" cmpd="sng" cap="flat" w="0">
+                      <a:noFill/>
+                      <a:prstDash val="solid"/>
+                    </a:lnL>
+                    <a:lnR algn="ctr" cmpd="sng" cap="flat" w="0">
+                      <a:noFill/>
+                      <a:prstDash val="solid"/>
+                    </a:lnR>
+                    <a:lnT algn="ctr" cmpd="sng" cap="flat" w="0">
+                      <a:noFill/>
+                      <a:prstDash val="solid"/>
+                    </a:lnT>
+                    <a:lnB algn="ctr" cmpd="sng" cap="flat" w="0">
+                      <a:noFill/>
+                      <a:prstDash val="solid"/>
+                    </a:lnB>
+                    <a:solidFill>
+                      <a:srgbClr val="EFEFEF">
+                        <a:alpha val="100000"/>
+                      </a:srgbClr>
+                    </a:solidFill>
+                  </a:tcPr>
+                </a:tc>
+              </a:tr>
+              <a:tr h="390241">
+                <a:tc>
+                  <a:txBody>
+                    <a:bodyPr/>
+                    <a:lstStyle/>
+                    <a:p>
+                      <a:pPr algn="ctr" marL="63500" marR="63500">
+                        <a:lnSpc>
+                          <a:spcPct val="100000"/>
+                        </a:lnSpc>
+                        <a:spcBef>
+                          <a:spcPts val="500"/>
+                        </a:spcBef>
+                        <a:spcAft>
+                          <a:spcPts val="500"/>
+                        </a:spcAft>
+                        <a:buNone/>
+                      </a:pPr>
+                      <a:r>
+                        <a:rPr cap="none" sz="1100" i="0" b="0" u="none" strike="noStrike">
+                          <a:solidFill>
+                            <a:srgbClr val="000000">
+                              <a:alpha val="100000"/>
+                            </a:srgbClr>
+                          </a:solidFill>
+                          <a:latin typeface="Arial"/>
+                          <a:cs typeface="Arial"/>
+                          <a:ea typeface="Arial"/>
+                          <a:sym typeface="Arial"/>
+                        </a:rPr>
+                        <a:t>CELL</a:t>
+                      </a:r>
+                    </a:p>
+                  </a:txBody>
+                  <a:tcPr anchor="ctr" marB="63500" marT="63500" marR="0" marL="0">
+                    <a:lnL algn="ctr" cmpd="sng" cap="flat" w="0">
+                      <a:noFill/>
+                      <a:prstDash val="solid"/>
+                    </a:lnL>
+                    <a:lnR algn="ctr" cmpd="sng" cap="flat" w="0">
+                      <a:noFill/>
+                      <a:prstDash val="solid"/>
+                    </a:lnR>
+                    <a:lnT algn="ctr" cmpd="sng" cap="flat" w="0">
+                      <a:noFill/>
+                      <a:prstDash val="solid"/>
+                    </a:lnT>
+                    <a:lnB algn="ctr" cmpd="sng" cap="flat" w="0">
+                      <a:noFill/>
+                      <a:prstDash val="solid"/>
+                    </a:lnB>
+                    <a:solidFill>
+                      <a:srgbClr val="FFFFFF">
+                        <a:alpha val="0"/>
+                      </a:srgbClr>
+                    </a:solidFill>
+                  </a:tcPr>
+                </a:tc>
+                <a:tc>
+                  <a:txBody>
+                    <a:bodyPr/>
+                    <a:lstStyle/>
+                    <a:p>
+                      <a:pPr algn="ctr" marL="63500" marR="63500">
+                        <a:lnSpc>
+                          <a:spcPct val="100000"/>
+                        </a:lnSpc>
+                        <a:spcBef>
+                          <a:spcPts val="500"/>
+                        </a:spcBef>
+                        <a:spcAft>
+                          <a:spcPts val="500"/>
+                        </a:spcAft>
+                        <a:buNone/>
+                      </a:pPr>
+                      <a:r>
+                        <a:rPr cap="none" sz="1100" i="0" b="0" u="none" strike="noStrike">
+                          <a:solidFill>
+                            <a:srgbClr val="000000">
+                              <a:alpha val="100000"/>
+                            </a:srgbClr>
+                          </a:solidFill>
+                          <a:latin typeface="Arial"/>
+                          <a:cs typeface="Arial"/>
+                          <a:ea typeface="Arial"/>
+                          <a:sym typeface="Arial"/>
+                        </a:rPr>
+                        <a:t>WLS</a:t>
+                      </a:r>
+                    </a:p>
+                  </a:txBody>
+                  <a:tcPr anchor="ctr" marB="63500" marT="63500" marR="0" marL="0">
+                    <a:lnL algn="ctr" cmpd="sng" cap="flat" w="0">
+                      <a:noFill/>
+                      <a:prstDash val="solid"/>
+                    </a:lnL>
+                    <a:lnR algn="ctr" cmpd="sng" cap="flat" w="0">
+                      <a:noFill/>
+                      <a:prstDash val="solid"/>
+                    </a:lnR>
+                    <a:lnT algn="ctr" cmpd="sng" cap="flat" w="0">
+                      <a:noFill/>
+                      <a:prstDash val="solid"/>
+                    </a:lnT>
+                    <a:lnB algn="ctr" cmpd="sng" cap="flat" w="0">
+                      <a:noFill/>
+                      <a:prstDash val="solid"/>
+                    </a:lnB>
+                    <a:solidFill>
+                      <a:srgbClr val="FFFFFF">
+                        <a:alpha val="0"/>
+                      </a:srgbClr>
+                    </a:solidFill>
+                  </a:tcPr>
+                </a:tc>
+                <a:tc>
+                  <a:txBody>
+                    <a:bodyPr/>
+                    <a:lstStyle/>
+                    <a:p>
+                      <a:pPr algn="ctr" marL="63500" marR="63500">
+                        <a:lnSpc>
+                          <a:spcPct val="100000"/>
+                        </a:lnSpc>
+                        <a:spcBef>
+                          <a:spcPts val="500"/>
+                        </a:spcBef>
+                        <a:spcAft>
+                          <a:spcPts val="500"/>
+                        </a:spcAft>
+                        <a:buNone/>
+                      </a:pPr>
+                      <a:r>
+                        <a:rPr cap="none" sz="1100" i="0" b="0" u="none" strike="noStrike">
+                          <a:solidFill>
+                            <a:srgbClr val="000000">
+                              <a:alpha val="100000"/>
+                            </a:srgbClr>
+                          </a:solidFill>
+                          <a:latin typeface="Arial"/>
+                          <a:cs typeface="Arial"/>
+                          <a:ea typeface="Arial"/>
+                          <a:sym typeface="Arial"/>
+                        </a:rPr>
+                        <a:t>WLS_2</a:t>
+                      </a:r>
+                    </a:p>
+                  </a:txBody>
+                  <a:tcPr anchor="ctr" marB="63500" marT="63500" marR="0" marL="0">
+                    <a:lnL algn="ctr" cmpd="sng" cap="flat" w="0">
+                      <a:noFill/>
+                      <a:prstDash val="solid"/>
+                    </a:lnL>
+                    <a:lnR algn="ctr" cmpd="sng" cap="flat" w="0">
+                      <a:noFill/>
+                      <a:prstDash val="solid"/>
+                    </a:lnR>
+                    <a:lnT algn="ctr" cmpd="sng" cap="flat" w="0">
+                      <a:noFill/>
+                      <a:prstDash val="solid"/>
+                    </a:lnT>
+                    <a:lnB algn="ctr" cmpd="sng" cap="flat" w="0">
+                      <a:noFill/>
+                      <a:prstDash val="solid"/>
+                    </a:lnB>
+                    <a:solidFill>
+                      <a:srgbClr val="FFFFFF">
+                        <a:alpha val="0"/>
+                      </a:srgbClr>
+                    </a:solidFill>
+                  </a:tcPr>
+                </a:tc>
+                <a:tc>
+                  <a:txBody>
+                    <a:bodyPr/>
+                    <a:lstStyle/>
+                    <a:p>
+                      <a:pPr algn="ctr" marL="63500" marR="63500">
+                        <a:lnSpc>
+                          <a:spcPct val="100000"/>
+                        </a:lnSpc>
+                        <a:spcBef>
+                          <a:spcPts val="500"/>
+                        </a:spcBef>
+                        <a:spcAft>
+                          <a:spcPts val="500"/>
+                        </a:spcAft>
+                        <a:buNone/>
+                      </a:pPr>
+                      <a:r>
+                        <a:rPr cap="none" sz="1100" i="0" b="0" u="none" strike="noStrike">
+                          <a:solidFill>
+                            <a:srgbClr val="000000">
+                              <a:alpha val="100000"/>
+                            </a:srgbClr>
+                          </a:solidFill>
+                          <a:latin typeface="Arial"/>
+                          <a:cs typeface="Arial"/>
+                          <a:ea typeface="Arial"/>
+                          <a:sym typeface="Arial"/>
+                        </a:rPr>
+                        <a:t>Cell_WLS_196</a:t>
+                      </a:r>
+                    </a:p>
+                  </a:txBody>
+                  <a:tcPr anchor="ctr" marB="63500" marT="63500" marR="0" marL="0">
+                    <a:lnL algn="ctr" cmpd="sng" cap="flat" w="0">
+                      <a:noFill/>
+                      <a:prstDash val="solid"/>
+                    </a:lnL>
+                    <a:lnR algn="ctr" cmpd="sng" cap="flat" w="0">
+                      <a:noFill/>
+                      <a:prstDash val="solid"/>
+                    </a:lnR>
+                    <a:lnT algn="ctr" cmpd="sng" cap="flat" w="0">
+                      <a:noFill/>
+                      <a:prstDash val="solid"/>
+                    </a:lnT>
+                    <a:lnB algn="ctr" cmpd="sng" cap="flat" w="0">
+                      <a:noFill/>
+                      <a:prstDash val="solid"/>
+                    </a:lnB>
+                    <a:solidFill>
+                      <a:srgbClr val="FFFFFF">
+                        <a:alpha val="0"/>
+                      </a:srgbClr>
+                    </a:solidFill>
+                  </a:tcPr>
+                </a:tc>
+                <a:tc>
+                  <a:txBody>
+                    <a:bodyPr/>
+                    <a:lstStyle/>
+                    <a:p>
+                      <a:pPr algn="ctr" marL="63500" marR="63500">
+                        <a:lnSpc>
+                          <a:spcPct val="100000"/>
+                        </a:lnSpc>
+                        <a:spcBef>
+                          <a:spcPts val="500"/>
+                        </a:spcBef>
+                        <a:spcAft>
+                          <a:spcPts val="500"/>
+                        </a:spcAft>
+                        <a:buNone/>
+                      </a:pPr>
+                      <a:r>
+                        <a:rPr cap="none" sz="1100" i="0" b="0" u="none" strike="noStrike">
+                          <a:solidFill>
+                            <a:srgbClr val="000000">
+                              <a:alpha val="100000"/>
+                            </a:srgbClr>
+                          </a:solidFill>
+                          <a:latin typeface="Arial"/>
+                          <a:cs typeface="Arial"/>
+                          <a:ea typeface="Arial"/>
+                          <a:sym typeface="Arial"/>
+                        </a:rPr>
+                        <a:t>0.55</a:t>
+                      </a:r>
+                    </a:p>
+                  </a:txBody>
+                  <a:tcPr anchor="ctr" marB="63500" marT="63500" marR="0" marL="0">
+                    <a:lnL algn="ctr" cmpd="sng" cap="flat" w="0">
+                      <a:noFill/>
+                      <a:prstDash val="solid"/>
+                    </a:lnL>
+                    <a:lnR algn="ctr" cmpd="sng" cap="flat" w="0">
+                      <a:noFill/>
+                      <a:prstDash val="solid"/>
+                    </a:lnR>
+                    <a:lnT algn="ctr" cmpd="sng" cap="flat" w="0">
+                      <a:noFill/>
+                      <a:prstDash val="solid"/>
+                    </a:lnT>
+                    <a:lnB algn="ctr" cmpd="sng" cap="flat" w="0">
+                      <a:noFill/>
+                      <a:prstDash val="solid"/>
+                    </a:lnB>
+                    <a:solidFill>
+                      <a:srgbClr val="FFFFFF">
+                        <a:alpha val="0"/>
+                      </a:srgbClr>
+                    </a:solidFill>
+                  </a:tcPr>
+                </a:tc>
+                <a:tc>
+                  <a:txBody>
+                    <a:bodyPr/>
+                    <a:lstStyle/>
+                    <a:p>
+                      <a:pPr algn="ctr" marL="63500" marR="63500">
+                        <a:lnSpc>
+                          <a:spcPct val="100000"/>
+                        </a:lnSpc>
+                        <a:spcBef>
+                          <a:spcPts val="500"/>
+                        </a:spcBef>
+                        <a:spcAft>
+                          <a:spcPts val="500"/>
+                        </a:spcAft>
+                        <a:buNone/>
+                      </a:pPr>
+                      <a:r>
+                        <a:rPr cap="none" sz="1100" i="0" b="0" u="none" strike="noStrike">
+                          <a:solidFill>
+                            <a:srgbClr val="FF0000">
+                              <a:alpha val="100000"/>
+                            </a:srgbClr>
+                          </a:solidFill>
+                          <a:latin typeface="Arial"/>
+                          <a:cs typeface="Arial"/>
+                          <a:ea typeface="Arial"/>
+                          <a:sym typeface="Arial"/>
+                        </a:rPr>
+                        <a:t>Up</a:t>
+                      </a:r>
+                    </a:p>
+                  </a:txBody>
+                  <a:tcPr anchor="ctr" marB="63500" marT="63500" marR="0" marL="0">
+                    <a:lnL algn="ctr" cmpd="sng" cap="flat" w="0">
+                      <a:noFill/>
+                      <a:prstDash val="solid"/>
+                    </a:lnL>
+                    <a:lnR algn="ctr" cmpd="sng" cap="flat" w="0">
+                      <a:noFill/>
+                      <a:prstDash val="solid"/>
+                    </a:lnR>
+                    <a:lnT algn="ctr" cmpd="sng" cap="flat" w="0">
+                      <a:noFill/>
+                      <a:prstDash val="solid"/>
+                    </a:lnT>
+                    <a:lnB algn="ctr" cmpd="sng" cap="flat" w="0">
+                      <a:noFill/>
+                      <a:prstDash val="solid"/>
+                    </a:lnB>
+                    <a:solidFill>
+                      <a:srgbClr val="FFFFFF">
+                        <a:alpha val="0"/>
+                      </a:srgbClr>
+                    </a:solidFill>
+                  </a:tcPr>
+                </a:tc>
+              </a:tr>
+              <a:tr h="388945">
+                <a:tc>
+                  <a:txBody>
+                    <a:bodyPr/>
+                    <a:lstStyle/>
+                    <a:p>
+                      <a:pPr algn="ctr" marL="63500" marR="63500">
+                        <a:lnSpc>
+                          <a:spcPct val="100000"/>
+                        </a:lnSpc>
+                        <a:spcBef>
+                          <a:spcPts val="500"/>
+                        </a:spcBef>
+                        <a:spcAft>
+                          <a:spcPts val="500"/>
+                        </a:spcAft>
+                        <a:buNone/>
+                      </a:pPr>
+                      <a:r>
+                        <a:rPr cap="none" sz="1100" i="0" b="0" u="none" strike="noStrike">
+                          <a:solidFill>
+                            <a:srgbClr val="000000">
+                              <a:alpha val="100000"/>
+                            </a:srgbClr>
+                          </a:solidFill>
+                          <a:latin typeface="Arial"/>
+                          <a:cs typeface="Arial"/>
+                          <a:ea typeface="Arial"/>
+                          <a:sym typeface="Arial"/>
+                        </a:rPr>
+                        <a:t>PERI</a:t>
+                      </a:r>
+                    </a:p>
+                  </a:txBody>
+                  <a:tcPr anchor="ctr" marB="63500" marT="63500" marR="0" marL="0">
+                    <a:lnL algn="ctr" cmpd="sng" cap="flat" w="0">
+                      <a:noFill/>
+                      <a:prstDash val="solid"/>
+                    </a:lnL>
+                    <a:lnR algn="ctr" cmpd="sng" cap="flat" w="0">
+                      <a:noFill/>
+                      <a:prstDash val="solid"/>
+                    </a:lnR>
+                    <a:lnT algn="ctr" cmpd="sng" cap="flat" w="0">
+                      <a:noFill/>
+                      <a:prstDash val="solid"/>
+                    </a:lnT>
+                    <a:lnB algn="ctr" cmpd="sng" cap="flat" w="0">
+                      <a:noFill/>
+                      <a:prstDash val="solid"/>
+                    </a:lnB>
+                    <a:solidFill>
+                      <a:srgbClr val="EFEFEF">
+                        <a:alpha val="100000"/>
+                      </a:srgbClr>
+                    </a:solidFill>
+                  </a:tcPr>
+                </a:tc>
+                <a:tc>
+                  <a:txBody>
+                    <a:bodyPr/>
+                    <a:lstStyle/>
+                    <a:p>
+                      <a:pPr algn="ctr" marL="63500" marR="63500">
+                        <a:lnSpc>
+                          <a:spcPct val="100000"/>
+                        </a:lnSpc>
+                        <a:spcBef>
+                          <a:spcPts val="500"/>
+                        </a:spcBef>
+                        <a:spcAft>
+                          <a:spcPts val="500"/>
+                        </a:spcAft>
+                        <a:buNone/>
+                      </a:pPr>
+                      <a:r>
+                        <a:rPr cap="none" sz="1100" i="0" b="0" u="none" strike="noStrike">
+                          <a:solidFill>
+                            <a:srgbClr val="000000">
+                              <a:alpha val="100000"/>
+                            </a:srgbClr>
+                          </a:solidFill>
+                          <a:latin typeface="Arial"/>
+                          <a:cs typeface="Arial"/>
+                          <a:ea typeface="Arial"/>
+                          <a:sym typeface="Arial"/>
+                        </a:rPr>
+                        <a:t>BL</a:t>
+                      </a:r>
+                    </a:p>
+                  </a:txBody>
+                  <a:tcPr anchor="ctr" marB="63500" marT="63500" marR="0" marL="0">
+                    <a:lnL algn="ctr" cmpd="sng" cap="flat" w="0">
+                      <a:noFill/>
+                      <a:prstDash val="solid"/>
+                    </a:lnL>
+                    <a:lnR algn="ctr" cmpd="sng" cap="flat" w="0">
+                      <a:noFill/>
+                      <a:prstDash val="solid"/>
+                    </a:lnR>
+                    <a:lnT algn="ctr" cmpd="sng" cap="flat" w="0">
+                      <a:noFill/>
+                      <a:prstDash val="solid"/>
+                    </a:lnT>
+                    <a:lnB algn="ctr" cmpd="sng" cap="flat" w="0">
+                      <a:noFill/>
+                      <a:prstDash val="solid"/>
+                    </a:lnB>
+                    <a:solidFill>
+                      <a:srgbClr val="EFEFEF">
+                        <a:alpha val="100000"/>
+                      </a:srgbClr>
+                    </a:solidFill>
+                  </a:tcPr>
+                </a:tc>
+                <a:tc>
+                  <a:txBody>
+                    <a:bodyPr/>
+                    <a:lstStyle/>
+                    <a:p>
+                      <a:pPr algn="ctr" marL="63500" marR="63500">
+                        <a:lnSpc>
+                          <a:spcPct val="100000"/>
+                        </a:lnSpc>
+                        <a:spcBef>
+                          <a:spcPts val="500"/>
+                        </a:spcBef>
+                        <a:spcAft>
+                          <a:spcPts val="500"/>
+                        </a:spcAft>
+                        <a:buNone/>
+                      </a:pPr>
+                      <a:r>
+                        <a:rPr cap="none" sz="1100" i="0" b="0" u="none" strike="noStrike">
+                          <a:solidFill>
+                            <a:srgbClr val="000000">
+                              <a:alpha val="100000"/>
+                            </a:srgbClr>
+                          </a:solidFill>
+                          <a:latin typeface="Arial"/>
+                          <a:cs typeface="Arial"/>
+                          <a:ea typeface="Arial"/>
+                          <a:sym typeface="Arial"/>
+                        </a:rPr>
+                        <a:t>BL_3</a:t>
+                      </a:r>
+                    </a:p>
+                  </a:txBody>
+                  <a:tcPr anchor="ctr" marB="63500" marT="63500" marR="0" marL="0">
+                    <a:lnL algn="ctr" cmpd="sng" cap="flat" w="0">
+                      <a:noFill/>
+                      <a:prstDash val="solid"/>
+                    </a:lnL>
+                    <a:lnR algn="ctr" cmpd="sng" cap="flat" w="0">
+                      <a:noFill/>
+                      <a:prstDash val="solid"/>
+                    </a:lnR>
+                    <a:lnT algn="ctr" cmpd="sng" cap="flat" w="0">
+                      <a:noFill/>
+                      <a:prstDash val="solid"/>
+                    </a:lnT>
+                    <a:lnB algn="ctr" cmpd="sng" cap="flat" w="0">
+                      <a:noFill/>
+                      <a:prstDash val="solid"/>
+                    </a:lnB>
+                    <a:solidFill>
+                      <a:srgbClr val="EFEFEF">
+                        <a:alpha val="100000"/>
+                      </a:srgbClr>
+                    </a:solidFill>
+                  </a:tcPr>
+                </a:tc>
+                <a:tc>
+                  <a:txBody>
+                    <a:bodyPr/>
+                    <a:lstStyle/>
+                    <a:p>
+                      <a:pPr algn="ctr" marL="63500" marR="63500">
+                        <a:lnSpc>
+                          <a:spcPct val="100000"/>
+                        </a:lnSpc>
+                        <a:spcBef>
+                          <a:spcPts val="500"/>
+                        </a:spcBef>
+                        <a:spcAft>
+                          <a:spcPts val="500"/>
+                        </a:spcAft>
+                        <a:buNone/>
+                      </a:pPr>
+                      <a:r>
+                        <a:rPr cap="none" sz="1100" i="0" b="0" u="none" strike="noStrike">
+                          <a:solidFill>
+                            <a:srgbClr val="000000">
+                              <a:alpha val="100000"/>
+                            </a:srgbClr>
+                          </a:solidFill>
+                          <a:latin typeface="Arial"/>
+                          <a:cs typeface="Arial"/>
+                          <a:ea typeface="Arial"/>
+                          <a:sym typeface="Arial"/>
+                        </a:rPr>
+                        <a:t>Peri_BL_139</a:t>
+                      </a:r>
+                    </a:p>
+                  </a:txBody>
+                  <a:tcPr anchor="ctr" marB="63500" marT="63500" marR="0" marL="0">
+                    <a:lnL algn="ctr" cmpd="sng" cap="flat" w="0">
+                      <a:noFill/>
+                      <a:prstDash val="solid"/>
+                    </a:lnL>
+                    <a:lnR algn="ctr" cmpd="sng" cap="flat" w="0">
+                      <a:noFill/>
+                      <a:prstDash val="solid"/>
+                    </a:lnR>
+                    <a:lnT algn="ctr" cmpd="sng" cap="flat" w="0">
+                      <a:noFill/>
+                      <a:prstDash val="solid"/>
+                    </a:lnT>
+                    <a:lnB algn="ctr" cmpd="sng" cap="flat" w="0">
+                      <a:noFill/>
+                      <a:prstDash val="solid"/>
+                    </a:lnB>
+                    <a:solidFill>
+                      <a:srgbClr val="EFEFEF">
+                        <a:alpha val="100000"/>
+                      </a:srgbClr>
+                    </a:solidFill>
+                  </a:tcPr>
+                </a:tc>
+                <a:tc>
+                  <a:txBody>
+                    <a:bodyPr/>
+                    <a:lstStyle/>
+                    <a:p>
+                      <a:pPr algn="ctr" marL="63500" marR="63500">
+                        <a:lnSpc>
+                          <a:spcPct val="100000"/>
+                        </a:lnSpc>
+                        <a:spcBef>
+                          <a:spcPts val="500"/>
+                        </a:spcBef>
+                        <a:spcAft>
+                          <a:spcPts val="500"/>
+                        </a:spcAft>
+                        <a:buNone/>
+                      </a:pPr>
+                      <a:r>
+                        <a:rPr cap="none" sz="1100" i="0" b="0" u="none" strike="noStrike">
+                          <a:solidFill>
+                            <a:srgbClr val="000000">
+                              <a:alpha val="100000"/>
+                            </a:srgbClr>
+                          </a:solidFill>
+                          <a:latin typeface="Arial"/>
+                          <a:cs typeface="Arial"/>
+                          <a:ea typeface="Arial"/>
+                          <a:sym typeface="Arial"/>
+                        </a:rPr>
+                        <a:t>0.55</a:t>
+                      </a:r>
+                    </a:p>
+                  </a:txBody>
+                  <a:tcPr anchor="ctr" marB="63500" marT="63500" marR="0" marL="0">
+                    <a:lnL algn="ctr" cmpd="sng" cap="flat" w="0">
+                      <a:noFill/>
+                      <a:prstDash val="solid"/>
+                    </a:lnL>
+                    <a:lnR algn="ctr" cmpd="sng" cap="flat" w="0">
+                      <a:noFill/>
+                      <a:prstDash val="solid"/>
+                    </a:lnR>
+                    <a:lnT algn="ctr" cmpd="sng" cap="flat" w="0">
+                      <a:noFill/>
+                      <a:prstDash val="solid"/>
+                    </a:lnT>
+                    <a:lnB algn="ctr" cmpd="sng" cap="flat" w="0">
+                      <a:noFill/>
+                      <a:prstDash val="solid"/>
+                    </a:lnB>
+                    <a:solidFill>
+                      <a:srgbClr val="EFEFEF">
+                        <a:alpha val="100000"/>
+                      </a:srgbClr>
+                    </a:solidFill>
+                  </a:tcPr>
+                </a:tc>
+                <a:tc>
+                  <a:txBody>
+                    <a:bodyPr/>
+                    <a:lstStyle/>
+                    <a:p>
+                      <a:pPr algn="ctr" marL="63500" marR="63500">
+                        <a:lnSpc>
+                          <a:spcPct val="100000"/>
+                        </a:lnSpc>
+                        <a:spcBef>
+                          <a:spcPts val="500"/>
+                        </a:spcBef>
+                        <a:spcAft>
+                          <a:spcPts val="500"/>
+                        </a:spcAft>
+                        <a:buNone/>
+                      </a:pPr>
+                      <a:r>
+                        <a:rPr cap="none" sz="1100" i="0" b="0" u="none" strike="noStrike">
+                          <a:solidFill>
+                            <a:srgbClr val="FF0000">
+                              <a:alpha val="100000"/>
+                            </a:srgbClr>
+                          </a:solidFill>
+                          <a:latin typeface="Arial"/>
+                          <a:cs typeface="Arial"/>
+                          <a:ea typeface="Arial"/>
+                          <a:sym typeface="Arial"/>
+                        </a:rPr>
+                        <a:t>Up</a:t>
+                      </a:r>
+                    </a:p>
+                  </a:txBody>
+                  <a:tcPr anchor="ctr" marB="63500" marT="63500" marR="0" marL="0">
+                    <a:lnL algn="ctr" cmpd="sng" cap="flat" w="0">
+                      <a:noFill/>
+                      <a:prstDash val="solid"/>
+                    </a:lnL>
+                    <a:lnR algn="ctr" cmpd="sng" cap="flat" w="0">
+                      <a:noFill/>
+                      <a:prstDash val="solid"/>
+                    </a:lnR>
+                    <a:lnT algn="ctr" cmpd="sng" cap="flat" w="0">
+                      <a:noFill/>
+                      <a:prstDash val="solid"/>
+                    </a:lnT>
+                    <a:lnB algn="ctr" cmpd="sng" cap="flat" w="0">
+                      <a:noFill/>
+                      <a:prstDash val="solid"/>
+                    </a:lnB>
+                    <a:solidFill>
+                      <a:srgbClr val="EFEFEF">
+                        <a:alpha val="100000"/>
+                      </a:srgbClr>
+                    </a:solidFill>
+                  </a:tcPr>
+                </a:tc>
+              </a:tr>
+              <a:tr h="388945">
+                <a:tc>
+                  <a:txBody>
+                    <a:bodyPr/>
+                    <a:lstStyle/>
+                    <a:p>
+                      <a:pPr algn="ctr" marL="63500" marR="63500">
+                        <a:lnSpc>
+                          <a:spcPct val="100000"/>
+                        </a:lnSpc>
+                        <a:spcBef>
+                          <a:spcPts val="500"/>
+                        </a:spcBef>
+                        <a:spcAft>
+                          <a:spcPts val="500"/>
+                        </a:spcAft>
+                        <a:buNone/>
+                      </a:pPr>
+                      <a:r>
+                        <a:rPr cap="none" sz="1100" i="0" b="0" u="none" strike="noStrike">
+                          <a:solidFill>
+                            <a:srgbClr val="000000">
+                              <a:alpha val="100000"/>
+                            </a:srgbClr>
+                          </a:solidFill>
+                          <a:latin typeface="Arial"/>
+                          <a:cs typeface="Arial"/>
+                          <a:ea typeface="Arial"/>
+                          <a:sym typeface="Arial"/>
+                        </a:rPr>
+                        <a:t>PERI</a:t>
+                      </a:r>
+                    </a:p>
+                  </a:txBody>
+                  <a:tcPr anchor="ctr" marB="63500" marT="63500" marR="0" marL="0">
+                    <a:lnL algn="ctr" cmpd="sng" cap="flat" w="0">
+                      <a:noFill/>
+                      <a:prstDash val="solid"/>
+                    </a:lnL>
+                    <a:lnR algn="ctr" cmpd="sng" cap="flat" w="0">
+                      <a:noFill/>
+                      <a:prstDash val="solid"/>
+                    </a:lnR>
+                    <a:lnT algn="ctr" cmpd="sng" cap="flat" w="0">
+                      <a:noFill/>
+                      <a:prstDash val="solid"/>
+                    </a:lnT>
+                    <a:lnB algn="ctr" cmpd="sng" cap="flat" w="0">
+                      <a:noFill/>
+                      <a:prstDash val="solid"/>
+                    </a:lnB>
+                    <a:solidFill>
+                      <a:srgbClr val="FFFFFF">
+                        <a:alpha val="0"/>
+                      </a:srgbClr>
+                    </a:solidFill>
+                  </a:tcPr>
+                </a:tc>
+                <a:tc>
+                  <a:txBody>
+                    <a:bodyPr/>
+                    <a:lstStyle/>
+                    <a:p>
+                      <a:pPr algn="ctr" marL="63500" marR="63500">
+                        <a:lnSpc>
+                          <a:spcPct val="100000"/>
+                        </a:lnSpc>
+                        <a:spcBef>
+                          <a:spcPts val="500"/>
+                        </a:spcBef>
+                        <a:spcAft>
+                          <a:spcPts val="500"/>
+                        </a:spcAft>
+                        <a:buNone/>
+                      </a:pPr>
+                      <a:r>
+                        <a:rPr cap="none" sz="1100" i="0" b="0" u="none" strike="noStrike">
+                          <a:solidFill>
+                            <a:srgbClr val="000000">
+                              <a:alpha val="100000"/>
+                            </a:srgbClr>
+                          </a:solidFill>
+                          <a:latin typeface="Arial"/>
+                          <a:cs typeface="Arial"/>
+                          <a:ea typeface="Arial"/>
+                          <a:sym typeface="Arial"/>
+                        </a:rPr>
+                        <a:t>BL</a:t>
+                      </a:r>
+                    </a:p>
+                  </a:txBody>
+                  <a:tcPr anchor="ctr" marB="63500" marT="63500" marR="0" marL="0">
+                    <a:lnL algn="ctr" cmpd="sng" cap="flat" w="0">
+                      <a:noFill/>
+                      <a:prstDash val="solid"/>
+                    </a:lnL>
+                    <a:lnR algn="ctr" cmpd="sng" cap="flat" w="0">
+                      <a:noFill/>
+                      <a:prstDash val="solid"/>
+                    </a:lnR>
+                    <a:lnT algn="ctr" cmpd="sng" cap="flat" w="0">
+                      <a:noFill/>
+                      <a:prstDash val="solid"/>
+                    </a:lnT>
+                    <a:lnB algn="ctr" cmpd="sng" cap="flat" w="0">
+                      <a:noFill/>
+                      <a:prstDash val="solid"/>
+                    </a:lnB>
+                    <a:solidFill>
+                      <a:srgbClr val="FFFFFF">
+                        <a:alpha val="0"/>
+                      </a:srgbClr>
+                    </a:solidFill>
+                  </a:tcPr>
+                </a:tc>
+                <a:tc>
+                  <a:txBody>
+                    <a:bodyPr/>
+                    <a:lstStyle/>
+                    <a:p>
+                      <a:pPr algn="ctr" marL="63500" marR="63500">
+                        <a:lnSpc>
+                          <a:spcPct val="100000"/>
+                        </a:lnSpc>
+                        <a:spcBef>
+                          <a:spcPts val="500"/>
+                        </a:spcBef>
+                        <a:spcAft>
+                          <a:spcPts val="500"/>
+                        </a:spcAft>
+                        <a:buNone/>
+                      </a:pPr>
+                      <a:r>
+                        <a:rPr cap="none" sz="1100" i="0" b="0" u="none" strike="noStrike">
+                          <a:solidFill>
+                            <a:srgbClr val="000000">
+                              <a:alpha val="100000"/>
+                            </a:srgbClr>
+                          </a:solidFill>
+                          <a:latin typeface="Arial"/>
+                          <a:cs typeface="Arial"/>
+                          <a:ea typeface="Arial"/>
+                          <a:sym typeface="Arial"/>
+                        </a:rPr>
+                        <a:t>BL_3</a:t>
+                      </a:r>
+                    </a:p>
+                  </a:txBody>
+                  <a:tcPr anchor="ctr" marB="63500" marT="63500" marR="0" marL="0">
+                    <a:lnL algn="ctr" cmpd="sng" cap="flat" w="0">
+                      <a:noFill/>
+                      <a:prstDash val="solid"/>
+                    </a:lnL>
+                    <a:lnR algn="ctr" cmpd="sng" cap="flat" w="0">
+                      <a:noFill/>
+                      <a:prstDash val="solid"/>
+                    </a:lnR>
+                    <a:lnT algn="ctr" cmpd="sng" cap="flat" w="0">
+                      <a:noFill/>
+                      <a:prstDash val="solid"/>
+                    </a:lnT>
+                    <a:lnB algn="ctr" cmpd="sng" cap="flat" w="0">
+                      <a:noFill/>
+                      <a:prstDash val="solid"/>
+                    </a:lnB>
+                    <a:solidFill>
+                      <a:srgbClr val="FFFFFF">
+                        <a:alpha val="0"/>
+                      </a:srgbClr>
+                    </a:solidFill>
+                  </a:tcPr>
+                </a:tc>
+                <a:tc>
+                  <a:txBody>
+                    <a:bodyPr/>
+                    <a:lstStyle/>
+                    <a:p>
+                      <a:pPr algn="ctr" marL="63500" marR="63500">
+                        <a:lnSpc>
+                          <a:spcPct val="100000"/>
+                        </a:lnSpc>
+                        <a:spcBef>
+                          <a:spcPts val="500"/>
+                        </a:spcBef>
+                        <a:spcAft>
+                          <a:spcPts val="500"/>
+                        </a:spcAft>
+                        <a:buNone/>
+                      </a:pPr>
+                      <a:r>
+                        <a:rPr cap="none" sz="1100" i="0" b="0" u="none" strike="noStrike">
+                          <a:solidFill>
+                            <a:srgbClr val="000000">
+                              <a:alpha val="100000"/>
+                            </a:srgbClr>
+                          </a:solidFill>
+                          <a:latin typeface="Arial"/>
+                          <a:cs typeface="Arial"/>
+                          <a:ea typeface="Arial"/>
+                          <a:sym typeface="Arial"/>
+                        </a:rPr>
+                        <a:t>Peri_BL_141</a:t>
+                      </a:r>
+                    </a:p>
+                  </a:txBody>
+                  <a:tcPr anchor="ctr" marB="63500" marT="63500" marR="0" marL="0">
+                    <a:lnL algn="ctr" cmpd="sng" cap="flat" w="0">
+                      <a:noFill/>
+                      <a:prstDash val="solid"/>
+                    </a:lnL>
+                    <a:lnR algn="ctr" cmpd="sng" cap="flat" w="0">
+                      <a:noFill/>
+                      <a:prstDash val="solid"/>
+                    </a:lnR>
+                    <a:lnT algn="ctr" cmpd="sng" cap="flat" w="0">
+                      <a:noFill/>
+                      <a:prstDash val="solid"/>
+                    </a:lnT>
+                    <a:lnB algn="ctr" cmpd="sng" cap="flat" w="0">
+                      <a:noFill/>
+                      <a:prstDash val="solid"/>
+                    </a:lnB>
+                    <a:solidFill>
+                      <a:srgbClr val="FFFFFF">
+                        <a:alpha val="0"/>
+                      </a:srgbClr>
+                    </a:solidFill>
+                  </a:tcPr>
+                </a:tc>
+                <a:tc>
+                  <a:txBody>
+                    <a:bodyPr/>
+                    <a:lstStyle/>
+                    <a:p>
+                      <a:pPr algn="ctr" marL="63500" marR="63500">
+                        <a:lnSpc>
+                          <a:spcPct val="100000"/>
+                        </a:lnSpc>
+                        <a:spcBef>
+                          <a:spcPts val="500"/>
+                        </a:spcBef>
+                        <a:spcAft>
+                          <a:spcPts val="500"/>
+                        </a:spcAft>
+                        <a:buNone/>
+                      </a:pPr>
+                      <a:r>
+                        <a:rPr cap="none" sz="1100" i="0" b="0" u="none" strike="noStrike">
+                          <a:solidFill>
+                            <a:srgbClr val="000000">
+                              <a:alpha val="100000"/>
+                            </a:srgbClr>
+                          </a:solidFill>
+                          <a:latin typeface="Arial"/>
+                          <a:cs typeface="Arial"/>
+                          <a:ea typeface="Arial"/>
+                          <a:sym typeface="Arial"/>
+                        </a:rPr>
+                        <a:t>0.54</a:t>
+                      </a:r>
+                    </a:p>
+                  </a:txBody>
+                  <a:tcPr anchor="ctr" marB="63500" marT="63500" marR="0" marL="0">
+                    <a:lnL algn="ctr" cmpd="sng" cap="flat" w="0">
+                      <a:noFill/>
+                      <a:prstDash val="solid"/>
+                    </a:lnL>
+                    <a:lnR algn="ctr" cmpd="sng" cap="flat" w="0">
+                      <a:noFill/>
+                      <a:prstDash val="solid"/>
+                    </a:lnR>
+                    <a:lnT algn="ctr" cmpd="sng" cap="flat" w="0">
+                      <a:noFill/>
+                      <a:prstDash val="solid"/>
+                    </a:lnT>
+                    <a:lnB algn="ctr" cmpd="sng" cap="flat" w="0">
+                      <a:noFill/>
+                      <a:prstDash val="solid"/>
+                    </a:lnB>
+                    <a:solidFill>
+                      <a:srgbClr val="FFFFFF">
+                        <a:alpha val="0"/>
+                      </a:srgbClr>
+                    </a:solidFill>
+                  </a:tcPr>
+                </a:tc>
+                <a:tc>
+                  <a:txBody>
+                    <a:bodyPr/>
+                    <a:lstStyle/>
+                    <a:p>
+                      <a:pPr algn="ctr" marL="63500" marR="63500">
+                        <a:lnSpc>
+                          <a:spcPct val="100000"/>
+                        </a:lnSpc>
+                        <a:spcBef>
+                          <a:spcPts val="500"/>
+                        </a:spcBef>
+                        <a:spcAft>
+                          <a:spcPts val="500"/>
+                        </a:spcAft>
+                        <a:buNone/>
+                      </a:pPr>
+                      <a:r>
+                        <a:rPr cap="none" sz="1100" i="0" b="0" u="none" strike="noStrike">
+                          <a:solidFill>
+                            <a:srgbClr val="FF0000">
+                              <a:alpha val="100000"/>
+                            </a:srgbClr>
+                          </a:solidFill>
+                          <a:latin typeface="Arial"/>
+                          <a:cs typeface="Arial"/>
+                          <a:ea typeface="Arial"/>
+                          <a:sym typeface="Arial"/>
+                        </a:rPr>
+                        <a:t>Up</a:t>
+                      </a:r>
+                    </a:p>
+                  </a:txBody>
+                  <a:tcPr anchor="ctr" marB="63500" marT="63500" marR="0" marL="0">
+                    <a:lnL algn="ctr" cmpd="sng" cap="flat" w="0">
+                      <a:noFill/>
+                      <a:prstDash val="solid"/>
+                    </a:lnL>
+                    <a:lnR algn="ctr" cmpd="sng" cap="flat" w="0">
+                      <a:noFill/>
+                      <a:prstDash val="solid"/>
+                    </a:lnR>
+                    <a:lnT algn="ctr" cmpd="sng" cap="flat" w="0">
+                      <a:noFill/>
+                      <a:prstDash val="solid"/>
+                    </a:lnT>
+                    <a:lnB algn="ctr" cmpd="sng" cap="flat" w="0">
+                      <a:noFill/>
+                      <a:prstDash val="solid"/>
+                    </a:lnB>
+                    <a:solidFill>
+                      <a:srgbClr val="FFFFFF">
+                        <a:alpha val="0"/>
+                      </a:srgbClr>
+                    </a:solidFill>
+                  </a:tcPr>
+                </a:tc>
+              </a:tr>
+              <a:tr h="388945">
+                <a:tc>
+                  <a:txBody>
+                    <a:bodyPr/>
+                    <a:lstStyle/>
+                    <a:p>
+                      <a:pPr algn="ctr" marL="63500" marR="63500">
+                        <a:lnSpc>
+                          <a:spcPct val="100000"/>
+                        </a:lnSpc>
+                        <a:spcBef>
+                          <a:spcPts val="500"/>
+                        </a:spcBef>
+                        <a:spcAft>
+                          <a:spcPts val="500"/>
+                        </a:spcAft>
+                        <a:buNone/>
+                      </a:pPr>
+                      <a:r>
+                        <a:rPr cap="none" sz="1100" i="0" b="0" u="none" strike="noStrike">
+                          <a:solidFill>
+                            <a:srgbClr val="000000">
+                              <a:alpha val="100000"/>
+                            </a:srgbClr>
+                          </a:solidFill>
+                          <a:latin typeface="Arial"/>
+                          <a:cs typeface="Arial"/>
+                          <a:ea typeface="Arial"/>
+                          <a:sym typeface="Arial"/>
+                        </a:rPr>
+                        <a:t>PERI</a:t>
+                      </a:r>
+                    </a:p>
+                  </a:txBody>
+                  <a:tcPr anchor="ctr" marB="63500" marT="63500" marR="0" marL="0">
+                    <a:lnL algn="ctr" cmpd="sng" cap="flat" w="0">
+                      <a:noFill/>
+                      <a:prstDash val="solid"/>
+                    </a:lnL>
+                    <a:lnR algn="ctr" cmpd="sng" cap="flat" w="0">
+                      <a:noFill/>
+                      <a:prstDash val="solid"/>
+                    </a:lnR>
+                    <a:lnT algn="ctr" cmpd="sng" cap="flat" w="0">
+                      <a:noFill/>
+                      <a:prstDash val="solid"/>
+                    </a:lnT>
+                    <a:lnB algn="ctr" cmpd="sng" cap="flat" w="0">
+                      <a:noFill/>
+                      <a:prstDash val="solid"/>
+                    </a:lnB>
+                    <a:solidFill>
+                      <a:srgbClr val="EFEFEF">
+                        <a:alpha val="100000"/>
+                      </a:srgbClr>
+                    </a:solidFill>
+                  </a:tcPr>
+                </a:tc>
+                <a:tc>
+                  <a:txBody>
+                    <a:bodyPr/>
+                    <a:lstStyle/>
+                    <a:p>
+                      <a:pPr algn="ctr" marL="63500" marR="63500">
+                        <a:lnSpc>
+                          <a:spcPct val="100000"/>
+                        </a:lnSpc>
+                        <a:spcBef>
+                          <a:spcPts val="500"/>
+                        </a:spcBef>
+                        <a:spcAft>
+                          <a:spcPts val="500"/>
+                        </a:spcAft>
+                        <a:buNone/>
+                      </a:pPr>
+                      <a:r>
+                        <a:rPr cap="none" sz="1100" i="0" b="0" u="none" strike="noStrike">
+                          <a:solidFill>
+                            <a:srgbClr val="000000">
+                              <a:alpha val="100000"/>
+                            </a:srgbClr>
+                          </a:solidFill>
+                          <a:latin typeface="Arial"/>
+                          <a:cs typeface="Arial"/>
+                          <a:ea typeface="Arial"/>
+                          <a:sym typeface="Arial"/>
+                        </a:rPr>
+                        <a:t>PB</a:t>
+                      </a:r>
+                    </a:p>
+                  </a:txBody>
+                  <a:tcPr anchor="ctr" marB="63500" marT="63500" marR="0" marL="0">
+                    <a:lnL algn="ctr" cmpd="sng" cap="flat" w="0">
+                      <a:noFill/>
+                      <a:prstDash val="solid"/>
+                    </a:lnL>
+                    <a:lnR algn="ctr" cmpd="sng" cap="flat" w="0">
+                      <a:noFill/>
+                      <a:prstDash val="solid"/>
+                    </a:lnR>
+                    <a:lnT algn="ctr" cmpd="sng" cap="flat" w="0">
+                      <a:noFill/>
+                      <a:prstDash val="solid"/>
+                    </a:lnT>
+                    <a:lnB algn="ctr" cmpd="sng" cap="flat" w="0">
+                      <a:noFill/>
+                      <a:prstDash val="solid"/>
+                    </a:lnB>
+                    <a:solidFill>
+                      <a:srgbClr val="EFEFEF">
+                        <a:alpha val="100000"/>
+                      </a:srgbClr>
+                    </a:solidFill>
+                  </a:tcPr>
+                </a:tc>
+                <a:tc>
+                  <a:txBody>
+                    <a:bodyPr/>
+                    <a:lstStyle/>
+                    <a:p>
+                      <a:pPr algn="ctr" marL="63500" marR="63500">
+                        <a:lnSpc>
+                          <a:spcPct val="100000"/>
+                        </a:lnSpc>
+                        <a:spcBef>
+                          <a:spcPts val="500"/>
+                        </a:spcBef>
+                        <a:spcAft>
+                          <a:spcPts val="500"/>
+                        </a:spcAft>
+                        <a:buNone/>
+                      </a:pPr>
+                      <a:r>
+                        <a:rPr cap="none" sz="1100" i="0" b="0" u="none" strike="noStrike">
+                          <a:solidFill>
+                            <a:srgbClr val="000000">
+                              <a:alpha val="100000"/>
+                            </a:srgbClr>
+                          </a:solidFill>
+                          <a:latin typeface="Arial"/>
+                          <a:cs typeface="Arial"/>
+                          <a:ea typeface="Arial"/>
+                          <a:sym typeface="Arial"/>
+                        </a:rPr>
+                        <a:t>PB_2</a:t>
+                      </a:r>
+                    </a:p>
+                  </a:txBody>
+                  <a:tcPr anchor="ctr" marB="63500" marT="63500" marR="0" marL="0">
+                    <a:lnL algn="ctr" cmpd="sng" cap="flat" w="0">
+                      <a:noFill/>
+                      <a:prstDash val="solid"/>
+                    </a:lnL>
+                    <a:lnR algn="ctr" cmpd="sng" cap="flat" w="0">
+                      <a:noFill/>
+                      <a:prstDash val="solid"/>
+                    </a:lnR>
+                    <a:lnT algn="ctr" cmpd="sng" cap="flat" w="0">
+                      <a:noFill/>
+                      <a:prstDash val="solid"/>
+                    </a:lnT>
+                    <a:lnB algn="ctr" cmpd="sng" cap="flat" w="0">
+                      <a:noFill/>
+                      <a:prstDash val="solid"/>
+                    </a:lnB>
+                    <a:solidFill>
+                      <a:srgbClr val="EFEFEF">
+                        <a:alpha val="100000"/>
+                      </a:srgbClr>
+                    </a:solidFill>
+                  </a:tcPr>
+                </a:tc>
+                <a:tc>
+                  <a:txBody>
+                    <a:bodyPr/>
+                    <a:lstStyle/>
+                    <a:p>
+                      <a:pPr algn="ctr" marL="63500" marR="63500">
+                        <a:lnSpc>
+                          <a:spcPct val="100000"/>
+                        </a:lnSpc>
+                        <a:spcBef>
+                          <a:spcPts val="500"/>
+                        </a:spcBef>
+                        <a:spcAft>
+                          <a:spcPts val="500"/>
+                        </a:spcAft>
+                        <a:buNone/>
+                      </a:pPr>
+                      <a:r>
+                        <a:rPr cap="none" sz="1100" i="0" b="0" u="none" strike="noStrike">
+                          <a:solidFill>
+                            <a:srgbClr val="000000">
+                              <a:alpha val="100000"/>
+                            </a:srgbClr>
+                          </a:solidFill>
+                          <a:latin typeface="Arial"/>
+                          <a:cs typeface="Arial"/>
+                          <a:ea typeface="Arial"/>
+                          <a:sym typeface="Arial"/>
+                        </a:rPr>
+                        <a:t>Peri_PB_034</a:t>
+                      </a:r>
+                    </a:p>
+                  </a:txBody>
+                  <a:tcPr anchor="ctr" marB="63500" marT="63500" marR="0" marL="0">
+                    <a:lnL algn="ctr" cmpd="sng" cap="flat" w="0">
+                      <a:noFill/>
+                      <a:prstDash val="solid"/>
+                    </a:lnL>
+                    <a:lnR algn="ctr" cmpd="sng" cap="flat" w="0">
+                      <a:noFill/>
+                      <a:prstDash val="solid"/>
+                    </a:lnR>
+                    <a:lnT algn="ctr" cmpd="sng" cap="flat" w="0">
+                      <a:noFill/>
+                      <a:prstDash val="solid"/>
+                    </a:lnT>
+                    <a:lnB algn="ctr" cmpd="sng" cap="flat" w="0">
+                      <a:noFill/>
+                      <a:prstDash val="solid"/>
+                    </a:lnB>
+                    <a:solidFill>
+                      <a:srgbClr val="EFEFEF">
+                        <a:alpha val="100000"/>
+                      </a:srgbClr>
+                    </a:solidFill>
+                  </a:tcPr>
+                </a:tc>
+                <a:tc>
+                  <a:txBody>
+                    <a:bodyPr/>
+                    <a:lstStyle/>
+                    <a:p>
+                      <a:pPr algn="ctr" marL="63500" marR="63500">
+                        <a:lnSpc>
+                          <a:spcPct val="100000"/>
+                        </a:lnSpc>
+                        <a:spcBef>
+                          <a:spcPts val="500"/>
+                        </a:spcBef>
+                        <a:spcAft>
+                          <a:spcPts val="500"/>
+                        </a:spcAft>
+                        <a:buNone/>
+                      </a:pPr>
+                      <a:r>
+                        <a:rPr cap="none" sz="1100" i="0" b="0" u="none" strike="noStrike">
+                          <a:solidFill>
+                            <a:srgbClr val="000000">
+                              <a:alpha val="100000"/>
+                            </a:srgbClr>
+                          </a:solidFill>
+                          <a:latin typeface="Arial"/>
+                          <a:cs typeface="Arial"/>
+                          <a:ea typeface="Arial"/>
+                          <a:sym typeface="Arial"/>
+                        </a:rPr>
+                        <a:t>0.54</a:t>
+                      </a:r>
+                    </a:p>
+                  </a:txBody>
+                  <a:tcPr anchor="ctr" marB="63500" marT="63500" marR="0" marL="0">
+                    <a:lnL algn="ctr" cmpd="sng" cap="flat" w="0">
+                      <a:noFill/>
+                      <a:prstDash val="solid"/>
+                    </a:lnL>
+                    <a:lnR algn="ctr" cmpd="sng" cap="flat" w="0">
+                      <a:noFill/>
+                      <a:prstDash val="solid"/>
+                    </a:lnR>
+                    <a:lnT algn="ctr" cmpd="sng" cap="flat" w="0">
+                      <a:noFill/>
+                      <a:prstDash val="solid"/>
+                    </a:lnT>
+                    <a:lnB algn="ctr" cmpd="sng" cap="flat" w="0">
+                      <a:noFill/>
+                      <a:prstDash val="solid"/>
+                    </a:lnB>
+                    <a:solidFill>
+                      <a:srgbClr val="EFEFEF">
+                        <a:alpha val="100000"/>
+                      </a:srgbClr>
+                    </a:solidFill>
+                  </a:tcPr>
+                </a:tc>
+                <a:tc>
+                  <a:txBody>
+                    <a:bodyPr/>
+                    <a:lstStyle/>
+                    <a:p>
+                      <a:pPr algn="ctr" marL="63500" marR="63500">
+                        <a:lnSpc>
+                          <a:spcPct val="100000"/>
+                        </a:lnSpc>
+                        <a:spcBef>
+                          <a:spcPts val="500"/>
+                        </a:spcBef>
+                        <a:spcAft>
+                          <a:spcPts val="500"/>
+                        </a:spcAft>
+                        <a:buNone/>
+                      </a:pPr>
+                      <a:r>
+                        <a:rPr cap="none" sz="1100" i="0" b="0" u="none" strike="noStrike">
+                          <a:solidFill>
+                            <a:srgbClr val="FF0000">
+                              <a:alpha val="100000"/>
+                            </a:srgbClr>
+                          </a:solidFill>
+                          <a:latin typeface="Arial"/>
+                          <a:cs typeface="Arial"/>
+                          <a:ea typeface="Arial"/>
+                          <a:sym typeface="Arial"/>
+                        </a:rPr>
+                        <a:t>Up</a:t>
+                      </a:r>
+                    </a:p>
+                  </a:txBody>
+                  <a:tcPr anchor="ctr" marB="63500" marT="63500" marR="0" marL="0">
+                    <a:lnL algn="ctr" cmpd="sng" cap="flat" w="0">
+                      <a:noFill/>
+                      <a:prstDash val="solid"/>
+                    </a:lnL>
+                    <a:lnR algn="ctr" cmpd="sng" cap="flat" w="0">
+                      <a:noFill/>
+                      <a:prstDash val="solid"/>
+                    </a:lnR>
+                    <a:lnT algn="ctr" cmpd="sng" cap="flat" w="0">
+                      <a:noFill/>
+                      <a:prstDash val="solid"/>
+                    </a:lnT>
+                    <a:lnB algn="ctr" cmpd="sng" cap="flat" w="0">
+                      <a:noFill/>
+                      <a:prstDash val="solid"/>
+                    </a:lnB>
+                    <a:solidFill>
+                      <a:srgbClr val="EFEFEF">
+                        <a:alpha val="100000"/>
+                      </a:srgbClr>
+                    </a:solidFill>
+                  </a:tcPr>
+                </a:tc>
+              </a:tr>
+              <a:tr h="388945">
+                <a:tc>
+                  <a:txBody>
+                    <a:bodyPr/>
+                    <a:lstStyle/>
+                    <a:p>
+                      <a:pPr algn="ctr" marL="63500" marR="63500">
+                        <a:lnSpc>
+                          <a:spcPct val="100000"/>
+                        </a:lnSpc>
+                        <a:spcBef>
+                          <a:spcPts val="500"/>
+                        </a:spcBef>
+                        <a:spcAft>
+                          <a:spcPts val="500"/>
+                        </a:spcAft>
+                        <a:buNone/>
+                      </a:pPr>
+                      <a:r>
+                        <a:rPr cap="none" sz="1100" i="0" b="0" u="none" strike="noStrike">
+                          <a:solidFill>
+                            <a:srgbClr val="000000">
+                              <a:alpha val="100000"/>
+                            </a:srgbClr>
+                          </a:solidFill>
+                          <a:latin typeface="Arial"/>
+                          <a:cs typeface="Arial"/>
+                          <a:ea typeface="Arial"/>
+                          <a:sym typeface="Arial"/>
+                        </a:rPr>
+                        <a:t>PERI</a:t>
+                      </a:r>
+                    </a:p>
+                  </a:txBody>
+                  <a:tcPr anchor="ctr" marB="63500" marT="63500" marR="0" marL="0">
+                    <a:lnL algn="ctr" cmpd="sng" cap="flat" w="0">
+                      <a:noFill/>
+                      <a:prstDash val="solid"/>
+                    </a:lnL>
+                    <a:lnR algn="ctr" cmpd="sng" cap="flat" w="0">
+                      <a:noFill/>
+                      <a:prstDash val="solid"/>
+                    </a:lnR>
+                    <a:lnT algn="ctr" cmpd="sng" cap="flat" w="0">
+                      <a:noFill/>
+                      <a:prstDash val="solid"/>
+                    </a:lnT>
+                    <a:lnB algn="ctr" cmpd="sng" cap="flat" w="0">
+                      <a:noFill/>
+                      <a:prstDash val="solid"/>
+                    </a:lnB>
+                    <a:solidFill>
+                      <a:srgbClr val="FFFFFF">
+                        <a:alpha val="0"/>
+                      </a:srgbClr>
+                    </a:solidFill>
+                  </a:tcPr>
+                </a:tc>
+                <a:tc>
+                  <a:txBody>
+                    <a:bodyPr/>
+                    <a:lstStyle/>
+                    <a:p>
+                      <a:pPr algn="ctr" marL="63500" marR="63500">
+                        <a:lnSpc>
+                          <a:spcPct val="100000"/>
+                        </a:lnSpc>
+                        <a:spcBef>
+                          <a:spcPts val="500"/>
+                        </a:spcBef>
+                        <a:spcAft>
+                          <a:spcPts val="500"/>
+                        </a:spcAft>
+                        <a:buNone/>
+                      </a:pPr>
+                      <a:r>
+                        <a:rPr cap="none" sz="1100" i="0" b="0" u="none" strike="noStrike">
+                          <a:solidFill>
+                            <a:srgbClr val="000000">
+                              <a:alpha val="100000"/>
+                            </a:srgbClr>
+                          </a:solidFill>
+                          <a:latin typeface="Arial"/>
+                          <a:cs typeface="Arial"/>
+                          <a:ea typeface="Arial"/>
+                          <a:sym typeface="Arial"/>
+                        </a:rPr>
+                        <a:t>BL</a:t>
+                      </a:r>
+                    </a:p>
+                  </a:txBody>
+                  <a:tcPr anchor="ctr" marB="63500" marT="63500" marR="0" marL="0">
+                    <a:lnL algn="ctr" cmpd="sng" cap="flat" w="0">
+                      <a:noFill/>
+                      <a:prstDash val="solid"/>
+                    </a:lnL>
+                    <a:lnR algn="ctr" cmpd="sng" cap="flat" w="0">
+                      <a:noFill/>
+                      <a:prstDash val="solid"/>
+                    </a:lnR>
+                    <a:lnT algn="ctr" cmpd="sng" cap="flat" w="0">
+                      <a:noFill/>
+                      <a:prstDash val="solid"/>
+                    </a:lnT>
+                    <a:lnB algn="ctr" cmpd="sng" cap="flat" w="0">
+                      <a:noFill/>
+                      <a:prstDash val="solid"/>
+                    </a:lnB>
+                    <a:solidFill>
+                      <a:srgbClr val="FFFFFF">
+                        <a:alpha val="0"/>
+                      </a:srgbClr>
+                    </a:solidFill>
+                  </a:tcPr>
+                </a:tc>
+                <a:tc>
+                  <a:txBody>
+                    <a:bodyPr/>
+                    <a:lstStyle/>
+                    <a:p>
+                      <a:pPr algn="ctr" marL="63500" marR="63500">
+                        <a:lnSpc>
+                          <a:spcPct val="100000"/>
+                        </a:lnSpc>
+                        <a:spcBef>
+                          <a:spcPts val="500"/>
+                        </a:spcBef>
+                        <a:spcAft>
+                          <a:spcPts val="500"/>
+                        </a:spcAft>
+                        <a:buNone/>
+                      </a:pPr>
+                      <a:r>
+                        <a:rPr cap="none" sz="1100" i="0" b="0" u="none" strike="noStrike">
+                          <a:solidFill>
+                            <a:srgbClr val="000000">
+                              <a:alpha val="100000"/>
+                            </a:srgbClr>
+                          </a:solidFill>
+                          <a:latin typeface="Arial"/>
+                          <a:cs typeface="Arial"/>
+                          <a:ea typeface="Arial"/>
+                          <a:sym typeface="Arial"/>
+                        </a:rPr>
+                        <a:t>BL_2</a:t>
+                      </a:r>
+                    </a:p>
+                  </a:txBody>
+                  <a:tcPr anchor="ctr" marB="63500" marT="63500" marR="0" marL="0">
+                    <a:lnL algn="ctr" cmpd="sng" cap="flat" w="0">
+                      <a:noFill/>
+                      <a:prstDash val="solid"/>
+                    </a:lnL>
+                    <a:lnR algn="ctr" cmpd="sng" cap="flat" w="0">
+                      <a:noFill/>
+                      <a:prstDash val="solid"/>
+                    </a:lnR>
+                    <a:lnT algn="ctr" cmpd="sng" cap="flat" w="0">
+                      <a:noFill/>
+                      <a:prstDash val="solid"/>
+                    </a:lnT>
+                    <a:lnB algn="ctr" cmpd="sng" cap="flat" w="0">
+                      <a:noFill/>
+                      <a:prstDash val="solid"/>
+                    </a:lnB>
+                    <a:solidFill>
+                      <a:srgbClr val="FFFFFF">
+                        <a:alpha val="0"/>
+                      </a:srgbClr>
+                    </a:solidFill>
+                  </a:tcPr>
+                </a:tc>
+                <a:tc>
+                  <a:txBody>
+                    <a:bodyPr/>
+                    <a:lstStyle/>
+                    <a:p>
+                      <a:pPr algn="ctr" marL="63500" marR="63500">
+                        <a:lnSpc>
+                          <a:spcPct val="100000"/>
+                        </a:lnSpc>
+                        <a:spcBef>
+                          <a:spcPts val="500"/>
+                        </a:spcBef>
+                        <a:spcAft>
+                          <a:spcPts val="500"/>
+                        </a:spcAft>
+                        <a:buNone/>
+                      </a:pPr>
+                      <a:r>
+                        <a:rPr cap="none" sz="1100" i="0" b="0" u="none" strike="noStrike">
+                          <a:solidFill>
+                            <a:srgbClr val="000000">
+                              <a:alpha val="100000"/>
+                            </a:srgbClr>
+                          </a:solidFill>
+                          <a:latin typeface="Arial"/>
+                          <a:cs typeface="Arial"/>
+                          <a:ea typeface="Arial"/>
+                          <a:sym typeface="Arial"/>
+                        </a:rPr>
+                        <a:t>Peri_BL_121</a:t>
+                      </a:r>
+                    </a:p>
+                  </a:txBody>
+                  <a:tcPr anchor="ctr" marB="63500" marT="63500" marR="0" marL="0">
+                    <a:lnL algn="ctr" cmpd="sng" cap="flat" w="0">
+                      <a:noFill/>
+                      <a:prstDash val="solid"/>
+                    </a:lnL>
+                    <a:lnR algn="ctr" cmpd="sng" cap="flat" w="0">
+                      <a:noFill/>
+                      <a:prstDash val="solid"/>
+                    </a:lnR>
+                    <a:lnT algn="ctr" cmpd="sng" cap="flat" w="0">
+                      <a:noFill/>
+                      <a:prstDash val="solid"/>
+                    </a:lnT>
+                    <a:lnB algn="ctr" cmpd="sng" cap="flat" w="0">
+                      <a:noFill/>
+                      <a:prstDash val="solid"/>
+                    </a:lnB>
+                    <a:solidFill>
+                      <a:srgbClr val="FFFFFF">
+                        <a:alpha val="0"/>
+                      </a:srgbClr>
+                    </a:solidFill>
+                  </a:tcPr>
+                </a:tc>
+                <a:tc>
+                  <a:txBody>
+                    <a:bodyPr/>
+                    <a:lstStyle/>
+                    <a:p>
+                      <a:pPr algn="ctr" marL="63500" marR="63500">
+                        <a:lnSpc>
+                          <a:spcPct val="100000"/>
+                        </a:lnSpc>
+                        <a:spcBef>
+                          <a:spcPts val="500"/>
+                        </a:spcBef>
+                        <a:spcAft>
+                          <a:spcPts val="500"/>
+                        </a:spcAft>
+                        <a:buNone/>
+                      </a:pPr>
+                      <a:r>
+                        <a:rPr cap="none" sz="1100" i="0" b="0" u="none" strike="noStrike">
+                          <a:solidFill>
+                            <a:srgbClr val="000000">
+                              <a:alpha val="100000"/>
+                            </a:srgbClr>
+                          </a:solidFill>
+                          <a:latin typeface="Arial"/>
+                          <a:cs typeface="Arial"/>
+                          <a:ea typeface="Arial"/>
+                          <a:sym typeface="Arial"/>
+                        </a:rPr>
+                        <a:t>0.54</a:t>
+                      </a:r>
+                    </a:p>
+                  </a:txBody>
+                  <a:tcPr anchor="ctr" marB="63500" marT="63500" marR="0" marL="0">
+                    <a:lnL algn="ctr" cmpd="sng" cap="flat" w="0">
+                      <a:noFill/>
+                      <a:prstDash val="solid"/>
+                    </a:lnL>
+                    <a:lnR algn="ctr" cmpd="sng" cap="flat" w="0">
+                      <a:noFill/>
+                      <a:prstDash val="solid"/>
+                    </a:lnR>
+                    <a:lnT algn="ctr" cmpd="sng" cap="flat" w="0">
+                      <a:noFill/>
+                      <a:prstDash val="solid"/>
+                    </a:lnT>
+                    <a:lnB algn="ctr" cmpd="sng" cap="flat" w="0">
+                      <a:noFill/>
+                      <a:prstDash val="solid"/>
+                    </a:lnB>
+                    <a:solidFill>
+                      <a:srgbClr val="FFFFFF">
+                        <a:alpha val="0"/>
+                      </a:srgbClr>
+                    </a:solidFill>
+                  </a:tcPr>
+                </a:tc>
+                <a:tc>
+                  <a:txBody>
+                    <a:bodyPr/>
+                    <a:lstStyle/>
+                    <a:p>
+                      <a:pPr algn="ctr" marL="63500" marR="63500">
+                        <a:lnSpc>
+                          <a:spcPct val="100000"/>
+                        </a:lnSpc>
+                        <a:spcBef>
+                          <a:spcPts val="500"/>
+                        </a:spcBef>
+                        <a:spcAft>
+                          <a:spcPts val="500"/>
+                        </a:spcAft>
+                        <a:buNone/>
+                      </a:pPr>
+                      <a:r>
+                        <a:rPr cap="none" sz="1100" i="0" b="0" u="none" strike="noStrike">
+                          <a:solidFill>
+                            <a:srgbClr val="FF0000">
+                              <a:alpha val="100000"/>
+                            </a:srgbClr>
+                          </a:solidFill>
+                          <a:latin typeface="Arial"/>
+                          <a:cs typeface="Arial"/>
+                          <a:ea typeface="Arial"/>
+                          <a:sym typeface="Arial"/>
+                        </a:rPr>
+                        <a:t>Up</a:t>
+                      </a:r>
+                    </a:p>
+                  </a:txBody>
+                  <a:tcPr anchor="ctr" marB="63500" marT="63500" marR="0" marL="0">
+                    <a:lnL algn="ctr" cmpd="sng" cap="flat" w="0">
+                      <a:noFill/>
+                      <a:prstDash val="solid"/>
+                    </a:lnL>
+                    <a:lnR algn="ctr" cmpd="sng" cap="flat" w="0">
+                      <a:noFill/>
+                      <a:prstDash val="solid"/>
+                    </a:lnR>
+                    <a:lnT algn="ctr" cmpd="sng" cap="flat" w="0">
+                      <a:noFill/>
+                      <a:prstDash val="solid"/>
+                    </a:lnT>
+                    <a:lnB algn="ctr" cmpd="sng" cap="flat" w="0">
+                      <a:noFill/>
+                      <a:prstDash val="solid"/>
+                    </a:lnB>
+                    <a:solidFill>
+                      <a:srgbClr val="FFFFFF">
+                        <a:alpha val="0"/>
+                      </a:srgbClr>
+                    </a:solidFill>
+                  </a:tcPr>
+                </a:tc>
+              </a:tr>
+              <a:tr h="390241">
+                <a:tc>
+                  <a:txBody>
+                    <a:bodyPr/>
+                    <a:lstStyle/>
+                    <a:p>
+                      <a:pPr algn="ctr" marL="63500" marR="63500">
+                        <a:lnSpc>
+                          <a:spcPct val="100000"/>
+                        </a:lnSpc>
+                        <a:spcBef>
+                          <a:spcPts val="500"/>
+                        </a:spcBef>
+                        <a:spcAft>
+                          <a:spcPts val="500"/>
+                        </a:spcAft>
+                        <a:buNone/>
+                      </a:pPr>
+                      <a:r>
+                        <a:rPr cap="none" sz="1100" i="0" b="0" u="none" strike="noStrike">
+                          <a:solidFill>
+                            <a:srgbClr val="000000">
+                              <a:alpha val="100000"/>
+                            </a:srgbClr>
+                          </a:solidFill>
+                          <a:latin typeface="Arial"/>
+                          <a:cs typeface="Arial"/>
+                          <a:ea typeface="Arial"/>
+                          <a:sym typeface="Arial"/>
+                        </a:rPr>
+                        <a:t>CELL</a:t>
+                      </a:r>
+                    </a:p>
+                  </a:txBody>
+                  <a:tcPr anchor="ctr" marB="63500" marT="63500" marR="0" marL="0">
+                    <a:lnL algn="ctr" cmpd="sng" cap="flat" w="0">
+                      <a:noFill/>
+                      <a:prstDash val="solid"/>
+                    </a:lnL>
+                    <a:lnR algn="ctr" cmpd="sng" cap="flat" w="0">
+                      <a:noFill/>
+                      <a:prstDash val="solid"/>
+                    </a:lnR>
+                    <a:lnT algn="ctr" cmpd="sng" cap="flat" w="0">
+                      <a:noFill/>
+                      <a:prstDash val="solid"/>
+                    </a:lnT>
+                    <a:lnB algn="ctr" cmpd="sng" cap="flat" w="0">
+                      <a:noFill/>
+                      <a:prstDash val="solid"/>
+                    </a:lnB>
+                    <a:solidFill>
+                      <a:srgbClr val="EFEFEF">
+                        <a:alpha val="100000"/>
+                      </a:srgbClr>
+                    </a:solidFill>
+                  </a:tcPr>
+                </a:tc>
+                <a:tc>
+                  <a:txBody>
+                    <a:bodyPr/>
+                    <a:lstStyle/>
+                    <a:p>
+                      <a:pPr algn="ctr" marL="63500" marR="63500">
+                        <a:lnSpc>
+                          <a:spcPct val="100000"/>
+                        </a:lnSpc>
+                        <a:spcBef>
+                          <a:spcPts val="500"/>
+                        </a:spcBef>
+                        <a:spcAft>
+                          <a:spcPts val="500"/>
+                        </a:spcAft>
+                        <a:buNone/>
+                      </a:pPr>
+                      <a:r>
+                        <a:rPr cap="none" sz="1100" i="0" b="0" u="none" strike="noStrike">
+                          <a:solidFill>
+                            <a:srgbClr val="000000">
+                              <a:alpha val="100000"/>
+                            </a:srgbClr>
+                          </a:solidFill>
+                          <a:latin typeface="Arial"/>
+                          <a:cs typeface="Arial"/>
+                          <a:ea typeface="Arial"/>
+                          <a:sym typeface="Arial"/>
+                        </a:rPr>
+                        <a:t>TCMC</a:t>
+                      </a:r>
+                    </a:p>
+                  </a:txBody>
+                  <a:tcPr anchor="ctr" marB="63500" marT="63500" marR="0" marL="0">
+                    <a:lnL algn="ctr" cmpd="sng" cap="flat" w="0">
+                      <a:noFill/>
+                      <a:prstDash val="solid"/>
+                    </a:lnL>
+                    <a:lnR algn="ctr" cmpd="sng" cap="flat" w="0">
+                      <a:noFill/>
+                      <a:prstDash val="solid"/>
+                    </a:lnR>
+                    <a:lnT algn="ctr" cmpd="sng" cap="flat" w="0">
+                      <a:noFill/>
+                      <a:prstDash val="solid"/>
+                    </a:lnT>
+                    <a:lnB algn="ctr" cmpd="sng" cap="flat" w="0">
+                      <a:noFill/>
+                      <a:prstDash val="solid"/>
+                    </a:lnB>
+                    <a:solidFill>
+                      <a:srgbClr val="EFEFEF">
+                        <a:alpha val="100000"/>
+                      </a:srgbClr>
+                    </a:solidFill>
+                  </a:tcPr>
+                </a:tc>
+                <a:tc>
+                  <a:txBody>
+                    <a:bodyPr/>
+                    <a:lstStyle/>
+                    <a:p>
+                      <a:pPr algn="ctr" marL="63500" marR="63500">
+                        <a:lnSpc>
+                          <a:spcPct val="100000"/>
+                        </a:lnSpc>
+                        <a:spcBef>
+                          <a:spcPts val="500"/>
+                        </a:spcBef>
+                        <a:spcAft>
+                          <a:spcPts val="500"/>
+                        </a:spcAft>
+                        <a:buNone/>
+                      </a:pPr>
+                      <a:r>
+                        <a:rPr cap="none" sz="1100" i="0" b="0" u="none" strike="noStrike">
+                          <a:solidFill>
+                            <a:srgbClr val="000000">
+                              <a:alpha val="100000"/>
+                            </a:srgbClr>
+                          </a:solidFill>
+                          <a:latin typeface="Arial"/>
+                          <a:cs typeface="Arial"/>
+                          <a:ea typeface="Arial"/>
+                          <a:sym typeface="Arial"/>
+                        </a:rPr>
+                        <a:t>TCMC_1</a:t>
+                      </a:r>
+                    </a:p>
+                  </a:txBody>
+                  <a:tcPr anchor="ctr" marB="63500" marT="63500" marR="0" marL="0">
+                    <a:lnL algn="ctr" cmpd="sng" cap="flat" w="0">
+                      <a:noFill/>
+                      <a:prstDash val="solid"/>
+                    </a:lnL>
+                    <a:lnR algn="ctr" cmpd="sng" cap="flat" w="0">
+                      <a:noFill/>
+                      <a:prstDash val="solid"/>
+                    </a:lnR>
+                    <a:lnT algn="ctr" cmpd="sng" cap="flat" w="0">
+                      <a:noFill/>
+                      <a:prstDash val="solid"/>
+                    </a:lnT>
+                    <a:lnB algn="ctr" cmpd="sng" cap="flat" w="0">
+                      <a:noFill/>
+                      <a:prstDash val="solid"/>
+                    </a:lnB>
+                    <a:solidFill>
+                      <a:srgbClr val="EFEFEF">
+                        <a:alpha val="100000"/>
+                      </a:srgbClr>
+                    </a:solidFill>
+                  </a:tcPr>
+                </a:tc>
+                <a:tc>
+                  <a:txBody>
+                    <a:bodyPr/>
+                    <a:lstStyle/>
+                    <a:p>
+                      <a:pPr algn="ctr" marL="63500" marR="63500">
+                        <a:lnSpc>
+                          <a:spcPct val="100000"/>
+                        </a:lnSpc>
+                        <a:spcBef>
+                          <a:spcPts val="500"/>
+                        </a:spcBef>
+                        <a:spcAft>
+                          <a:spcPts val="500"/>
+                        </a:spcAft>
+                        <a:buNone/>
+                      </a:pPr>
+                      <a:r>
+                        <a:rPr cap="none" sz="1100" i="0" b="0" u="none" strike="noStrike">
+                          <a:solidFill>
+                            <a:srgbClr val="000000">
+                              <a:alpha val="100000"/>
+                            </a:srgbClr>
+                          </a:solidFill>
+                          <a:latin typeface="Arial"/>
+                          <a:cs typeface="Arial"/>
+                          <a:ea typeface="Arial"/>
+                          <a:sym typeface="Arial"/>
+                        </a:rPr>
+                        <a:t>Cell_TCMC_219</a:t>
+                      </a:r>
+                    </a:p>
+                  </a:txBody>
+                  <a:tcPr anchor="ctr" marB="63500" marT="63500" marR="0" marL="0">
+                    <a:lnL algn="ctr" cmpd="sng" cap="flat" w="0">
+                      <a:noFill/>
+                      <a:prstDash val="solid"/>
+                    </a:lnL>
+                    <a:lnR algn="ctr" cmpd="sng" cap="flat" w="0">
+                      <a:noFill/>
+                      <a:prstDash val="solid"/>
+                    </a:lnR>
+                    <a:lnT algn="ctr" cmpd="sng" cap="flat" w="0">
+                      <a:noFill/>
+                      <a:prstDash val="solid"/>
+                    </a:lnT>
+                    <a:lnB algn="ctr" cmpd="sng" cap="flat" w="0">
+                      <a:noFill/>
+                      <a:prstDash val="solid"/>
+                    </a:lnB>
+                    <a:solidFill>
+                      <a:srgbClr val="EFEFEF">
+                        <a:alpha val="100000"/>
+                      </a:srgbClr>
+                    </a:solidFill>
+                  </a:tcPr>
+                </a:tc>
+                <a:tc>
+                  <a:txBody>
+                    <a:bodyPr/>
+                    <a:lstStyle/>
+                    <a:p>
+                      <a:pPr algn="ctr" marL="63500" marR="63500">
+                        <a:lnSpc>
+                          <a:spcPct val="100000"/>
+                        </a:lnSpc>
+                        <a:spcBef>
+                          <a:spcPts val="500"/>
+                        </a:spcBef>
+                        <a:spcAft>
+                          <a:spcPts val="500"/>
+                        </a:spcAft>
+                        <a:buNone/>
+                      </a:pPr>
+                      <a:r>
+                        <a:rPr cap="none" sz="1100" i="0" b="0" u="none" strike="noStrike">
+                          <a:solidFill>
+                            <a:srgbClr val="000000">
+                              <a:alpha val="100000"/>
+                            </a:srgbClr>
+                          </a:solidFill>
+                          <a:latin typeface="Arial"/>
+                          <a:cs typeface="Arial"/>
+                          <a:ea typeface="Arial"/>
+                          <a:sym typeface="Arial"/>
+                        </a:rPr>
+                        <a:t>0.53</a:t>
+                      </a:r>
+                    </a:p>
+                  </a:txBody>
+                  <a:tcPr anchor="ctr" marB="63500" marT="63500" marR="0" marL="0">
+                    <a:lnL algn="ctr" cmpd="sng" cap="flat" w="0">
+                      <a:noFill/>
+                      <a:prstDash val="solid"/>
+                    </a:lnL>
+                    <a:lnR algn="ctr" cmpd="sng" cap="flat" w="0">
+                      <a:noFill/>
+                      <a:prstDash val="solid"/>
+                    </a:lnR>
+                    <a:lnT algn="ctr" cmpd="sng" cap="flat" w="0">
+                      <a:noFill/>
+                      <a:prstDash val="solid"/>
+                    </a:lnT>
+                    <a:lnB algn="ctr" cmpd="sng" cap="flat" w="0">
+                      <a:noFill/>
+                      <a:prstDash val="solid"/>
+                    </a:lnB>
+                    <a:solidFill>
+                      <a:srgbClr val="EFEFEF">
+                        <a:alpha val="100000"/>
+                      </a:srgbClr>
+                    </a:solidFill>
+                  </a:tcPr>
+                </a:tc>
+                <a:tc>
+                  <a:txBody>
+                    <a:bodyPr/>
+                    <a:lstStyle/>
+                    <a:p>
+                      <a:pPr algn="ctr" marL="63500" marR="63500">
+                        <a:lnSpc>
+                          <a:spcPct val="100000"/>
+                        </a:lnSpc>
+                        <a:spcBef>
+                          <a:spcPts val="500"/>
+                        </a:spcBef>
+                        <a:spcAft>
+                          <a:spcPts val="500"/>
+                        </a:spcAft>
+                        <a:buNone/>
+                      </a:pPr>
+                      <a:r>
+                        <a:rPr cap="none" sz="1100" i="0" b="0" u="none" strike="noStrike">
+                          <a:solidFill>
+                            <a:srgbClr val="FF0000">
+                              <a:alpha val="100000"/>
+                            </a:srgbClr>
+                          </a:solidFill>
+                          <a:latin typeface="Arial"/>
+                          <a:cs typeface="Arial"/>
+                          <a:ea typeface="Arial"/>
+                          <a:sym typeface="Arial"/>
+                        </a:rPr>
+                        <a:t>Up</a:t>
+                      </a:r>
+                    </a:p>
+                  </a:txBody>
+                  <a:tcPr anchor="ctr" marB="63500" marT="63500" marR="0" marL="0">
+                    <a:lnL algn="ctr" cmpd="sng" cap="flat" w="0">
+                      <a:noFill/>
+                      <a:prstDash val="solid"/>
+                    </a:lnL>
+                    <a:lnR algn="ctr" cmpd="sng" cap="flat" w="0">
+                      <a:noFill/>
+                      <a:prstDash val="solid"/>
+                    </a:lnR>
+                    <a:lnT algn="ctr" cmpd="sng" cap="flat" w="0">
+                      <a:noFill/>
+                      <a:prstDash val="solid"/>
+                    </a:lnT>
+                    <a:lnB algn="ctr" cmpd="sng" cap="flat" w="0">
+                      <a:noFill/>
+                      <a:prstDash val="solid"/>
+                    </a:lnB>
+                    <a:solidFill>
+                      <a:srgbClr val="EFEFEF">
+                        <a:alpha val="100000"/>
+                      </a:srgbClr>
+                    </a:solidFill>
+                  </a:tcPr>
+                </a:tc>
+              </a:tr>
+              <a:tr h="390241">
+                <a:tc>
+                  <a:txBody>
+                    <a:bodyPr/>
+                    <a:lstStyle/>
+                    <a:p>
+                      <a:pPr algn="ctr" marL="63500" marR="63500">
+                        <a:lnSpc>
+                          <a:spcPct val="100000"/>
+                        </a:lnSpc>
+                        <a:spcBef>
+                          <a:spcPts val="500"/>
+                        </a:spcBef>
+                        <a:spcAft>
+                          <a:spcPts val="500"/>
+                        </a:spcAft>
+                        <a:buNone/>
+                      </a:pPr>
+                      <a:r>
+                        <a:rPr cap="none" sz="1100" i="0" b="0" u="none" strike="noStrike">
+                          <a:solidFill>
+                            <a:srgbClr val="000000">
+                              <a:alpha val="100000"/>
+                            </a:srgbClr>
+                          </a:solidFill>
+                          <a:latin typeface="Arial"/>
+                          <a:cs typeface="Arial"/>
+                          <a:ea typeface="Arial"/>
+                          <a:sym typeface="Arial"/>
+                        </a:rPr>
+                        <a:t>CELL</a:t>
+                      </a:r>
+                    </a:p>
+                  </a:txBody>
+                  <a:tcPr anchor="ctr" marB="63500" marT="63500" marR="0" marL="0">
+                    <a:lnL algn="ctr" cmpd="sng" cap="flat" w="0">
+                      <a:noFill/>
+                      <a:prstDash val="solid"/>
+                    </a:lnL>
+                    <a:lnR algn="ctr" cmpd="sng" cap="flat" w="0">
+                      <a:noFill/>
+                      <a:prstDash val="solid"/>
+                    </a:lnR>
+                    <a:lnT algn="ctr" cmpd="sng" cap="flat" w="0">
+                      <a:noFill/>
+                      <a:prstDash val="solid"/>
+                    </a:lnT>
+                    <a:lnB algn="ctr" cmpd="sng" cap="flat" w="0">
+                      <a:noFill/>
+                      <a:prstDash val="solid"/>
+                    </a:lnB>
+                    <a:solidFill>
+                      <a:srgbClr val="FFFFFF">
+                        <a:alpha val="0"/>
+                      </a:srgbClr>
+                    </a:solidFill>
+                  </a:tcPr>
+                </a:tc>
+                <a:tc>
+                  <a:txBody>
+                    <a:bodyPr/>
+                    <a:lstStyle/>
+                    <a:p>
+                      <a:pPr algn="ctr" marL="63500" marR="63500">
+                        <a:lnSpc>
+                          <a:spcPct val="100000"/>
+                        </a:lnSpc>
+                        <a:spcBef>
+                          <a:spcPts val="500"/>
+                        </a:spcBef>
+                        <a:spcAft>
+                          <a:spcPts val="500"/>
+                        </a:spcAft>
+                        <a:buNone/>
+                      </a:pPr>
+                      <a:r>
+                        <a:rPr cap="none" sz="1100" i="0" b="0" u="none" strike="noStrike">
+                          <a:solidFill>
+                            <a:srgbClr val="000000">
+                              <a:alpha val="100000"/>
+                            </a:srgbClr>
+                          </a:solidFill>
+                          <a:latin typeface="Arial"/>
+                          <a:cs typeface="Arial"/>
+                          <a:ea typeface="Arial"/>
+                          <a:sym typeface="Arial"/>
+                        </a:rPr>
+                        <a:t>WTC</a:t>
+                      </a:r>
+                    </a:p>
+                  </a:txBody>
+                  <a:tcPr anchor="ctr" marB="63500" marT="63500" marR="0" marL="0">
+                    <a:lnL algn="ctr" cmpd="sng" cap="flat" w="0">
+                      <a:noFill/>
+                      <a:prstDash val="solid"/>
+                    </a:lnL>
+                    <a:lnR algn="ctr" cmpd="sng" cap="flat" w="0">
+                      <a:noFill/>
+                      <a:prstDash val="solid"/>
+                    </a:lnR>
+                    <a:lnT algn="ctr" cmpd="sng" cap="flat" w="0">
+                      <a:noFill/>
+                      <a:prstDash val="solid"/>
+                    </a:lnT>
+                    <a:lnB algn="ctr" cmpd="sng" cap="flat" w="0">
+                      <a:noFill/>
+                      <a:prstDash val="solid"/>
+                    </a:lnB>
+                    <a:solidFill>
+                      <a:srgbClr val="FFFFFF">
+                        <a:alpha val="0"/>
+                      </a:srgbClr>
+                    </a:solidFill>
+                  </a:tcPr>
+                </a:tc>
+                <a:tc>
+                  <a:txBody>
+                    <a:bodyPr/>
+                    <a:lstStyle/>
+                    <a:p>
+                      <a:pPr algn="ctr" marL="63500" marR="63500">
+                        <a:lnSpc>
+                          <a:spcPct val="100000"/>
+                        </a:lnSpc>
+                        <a:spcBef>
+                          <a:spcPts val="500"/>
+                        </a:spcBef>
+                        <a:spcAft>
+                          <a:spcPts val="500"/>
+                        </a:spcAft>
+                        <a:buNone/>
+                      </a:pPr>
+                      <a:r>
+                        <a:rPr cap="none" sz="1100" i="0" b="0" u="none" strike="noStrike">
+                          <a:solidFill>
+                            <a:srgbClr val="000000">
+                              <a:alpha val="100000"/>
+                            </a:srgbClr>
+                          </a:solidFill>
+                          <a:latin typeface="Arial"/>
+                          <a:cs typeface="Arial"/>
+                          <a:ea typeface="Arial"/>
+                          <a:sym typeface="Arial"/>
+                        </a:rPr>
+                        <a:t>WTC_2</a:t>
+                      </a:r>
+                    </a:p>
+                  </a:txBody>
+                  <a:tcPr anchor="ctr" marB="63500" marT="63500" marR="0" marL="0">
+                    <a:lnL algn="ctr" cmpd="sng" cap="flat" w="0">
+                      <a:noFill/>
+                      <a:prstDash val="solid"/>
+                    </a:lnL>
+                    <a:lnR algn="ctr" cmpd="sng" cap="flat" w="0">
+                      <a:noFill/>
+                      <a:prstDash val="solid"/>
+                    </a:lnR>
+                    <a:lnT algn="ctr" cmpd="sng" cap="flat" w="0">
+                      <a:noFill/>
+                      <a:prstDash val="solid"/>
+                    </a:lnT>
+                    <a:lnB algn="ctr" cmpd="sng" cap="flat" w="0">
+                      <a:noFill/>
+                      <a:prstDash val="solid"/>
+                    </a:lnB>
+                    <a:solidFill>
+                      <a:srgbClr val="FFFFFF">
+                        <a:alpha val="0"/>
+                      </a:srgbClr>
+                    </a:solidFill>
+                  </a:tcPr>
+                </a:tc>
+                <a:tc>
+                  <a:txBody>
+                    <a:bodyPr/>
+                    <a:lstStyle/>
+                    <a:p>
+                      <a:pPr algn="ctr" marL="63500" marR="63500">
+                        <a:lnSpc>
+                          <a:spcPct val="100000"/>
+                        </a:lnSpc>
+                        <a:spcBef>
+                          <a:spcPts val="500"/>
+                        </a:spcBef>
+                        <a:spcAft>
+                          <a:spcPts val="500"/>
+                        </a:spcAft>
+                        <a:buNone/>
+                      </a:pPr>
+                      <a:r>
+                        <a:rPr cap="none" sz="1100" i="0" b="0" u="none" strike="noStrike">
+                          <a:solidFill>
+                            <a:srgbClr val="000000">
+                              <a:alpha val="100000"/>
+                            </a:srgbClr>
+                          </a:solidFill>
+                          <a:latin typeface="Arial"/>
+                          <a:cs typeface="Arial"/>
+                          <a:ea typeface="Arial"/>
+                          <a:sym typeface="Arial"/>
+                        </a:rPr>
+                        <a:t>Cell_WTC_290</a:t>
+                      </a:r>
+                    </a:p>
+                  </a:txBody>
+                  <a:tcPr anchor="ctr" marB="63500" marT="63500" marR="0" marL="0">
+                    <a:lnL algn="ctr" cmpd="sng" cap="flat" w="0">
+                      <a:noFill/>
+                      <a:prstDash val="solid"/>
+                    </a:lnL>
+                    <a:lnR algn="ctr" cmpd="sng" cap="flat" w="0">
+                      <a:noFill/>
+                      <a:prstDash val="solid"/>
+                    </a:lnR>
+                    <a:lnT algn="ctr" cmpd="sng" cap="flat" w="0">
+                      <a:noFill/>
+                      <a:prstDash val="solid"/>
+                    </a:lnT>
+                    <a:lnB algn="ctr" cmpd="sng" cap="flat" w="0">
+                      <a:noFill/>
+                      <a:prstDash val="solid"/>
+                    </a:lnB>
+                    <a:solidFill>
+                      <a:srgbClr val="FFFFFF">
+                        <a:alpha val="0"/>
+                      </a:srgbClr>
+                    </a:solidFill>
+                  </a:tcPr>
+                </a:tc>
+                <a:tc>
+                  <a:txBody>
+                    <a:bodyPr/>
+                    <a:lstStyle/>
+                    <a:p>
+                      <a:pPr algn="ctr" marL="63500" marR="63500">
+                        <a:lnSpc>
+                          <a:spcPct val="100000"/>
+                        </a:lnSpc>
+                        <a:spcBef>
+                          <a:spcPts val="500"/>
+                        </a:spcBef>
+                        <a:spcAft>
+                          <a:spcPts val="500"/>
+                        </a:spcAft>
+                        <a:buNone/>
+                      </a:pPr>
+                      <a:r>
+                        <a:rPr cap="none" sz="1100" i="0" b="0" u="none" strike="noStrike">
+                          <a:solidFill>
+                            <a:srgbClr val="000000">
+                              <a:alpha val="100000"/>
+                            </a:srgbClr>
+                          </a:solidFill>
+                          <a:latin typeface="Arial"/>
+                          <a:cs typeface="Arial"/>
+                          <a:ea typeface="Arial"/>
+                          <a:sym typeface="Arial"/>
+                        </a:rPr>
+                        <a:t>0.53</a:t>
+                      </a:r>
+                    </a:p>
+                  </a:txBody>
+                  <a:tcPr anchor="ctr" marB="63500" marT="63500" marR="0" marL="0">
+                    <a:lnL algn="ctr" cmpd="sng" cap="flat" w="0">
+                      <a:noFill/>
+                      <a:prstDash val="solid"/>
+                    </a:lnL>
+                    <a:lnR algn="ctr" cmpd="sng" cap="flat" w="0">
+                      <a:noFill/>
+                      <a:prstDash val="solid"/>
+                    </a:lnR>
+                    <a:lnT algn="ctr" cmpd="sng" cap="flat" w="0">
+                      <a:noFill/>
+                      <a:prstDash val="solid"/>
+                    </a:lnT>
+                    <a:lnB algn="ctr" cmpd="sng" cap="flat" w="0">
+                      <a:noFill/>
+                      <a:prstDash val="solid"/>
+                    </a:lnB>
+                    <a:solidFill>
+                      <a:srgbClr val="FFFFFF">
+                        <a:alpha val="0"/>
+                      </a:srgbClr>
+                    </a:solidFill>
+                  </a:tcPr>
+                </a:tc>
+                <a:tc>
+                  <a:txBody>
+                    <a:bodyPr/>
+                    <a:lstStyle/>
+                    <a:p>
+                      <a:pPr algn="ctr" marL="63500" marR="63500">
+                        <a:lnSpc>
+                          <a:spcPct val="100000"/>
+                        </a:lnSpc>
+                        <a:spcBef>
+                          <a:spcPts val="500"/>
+                        </a:spcBef>
+                        <a:spcAft>
+                          <a:spcPts val="500"/>
+                        </a:spcAft>
+                        <a:buNone/>
+                      </a:pPr>
+                      <a:r>
+                        <a:rPr cap="none" sz="1100" i="0" b="0" u="none" strike="noStrike">
+                          <a:solidFill>
+                            <a:srgbClr val="FF0000">
+                              <a:alpha val="100000"/>
+                            </a:srgbClr>
+                          </a:solidFill>
+                          <a:latin typeface="Arial"/>
+                          <a:cs typeface="Arial"/>
+                          <a:ea typeface="Arial"/>
+                          <a:sym typeface="Arial"/>
+                        </a:rPr>
+                        <a:t>Up</a:t>
+                      </a:r>
+                    </a:p>
+                  </a:txBody>
+                  <a:tcPr anchor="ctr" marB="63500" marT="63500" marR="0" marL="0">
+                    <a:lnL algn="ctr" cmpd="sng" cap="flat" w="0">
+                      <a:noFill/>
+                      <a:prstDash val="solid"/>
+                    </a:lnL>
+                    <a:lnR algn="ctr" cmpd="sng" cap="flat" w="0">
+                      <a:noFill/>
+                      <a:prstDash val="solid"/>
+                    </a:lnR>
+                    <a:lnT algn="ctr" cmpd="sng" cap="flat" w="0">
+                      <a:noFill/>
+                      <a:prstDash val="solid"/>
+                    </a:lnT>
+                    <a:lnB algn="ctr" cmpd="sng" cap="flat" w="0">
+                      <a:noFill/>
+                      <a:prstDash val="solid"/>
+                    </a:lnB>
+                    <a:solidFill>
+                      <a:srgbClr val="FFFFFF">
+                        <a:alpha val="0"/>
+                      </a:srgbClr>
+                    </a:solidFill>
+                  </a:tcPr>
+                </a:tc>
+              </a:tr>
+              <a:tr h="390241">
+                <a:tc>
+                  <a:txBody>
+                    <a:bodyPr/>
+                    <a:lstStyle/>
+                    <a:p>
+                      <a:pPr algn="ctr" marL="63500" marR="63500">
+                        <a:lnSpc>
+                          <a:spcPct val="100000"/>
+                        </a:lnSpc>
+                        <a:spcBef>
+                          <a:spcPts val="500"/>
+                        </a:spcBef>
+                        <a:spcAft>
+                          <a:spcPts val="500"/>
+                        </a:spcAft>
+                        <a:buNone/>
+                      </a:pPr>
+                      <a:r>
+                        <a:rPr cap="none" sz="1100" i="0" b="0" u="none" strike="noStrike">
+                          <a:solidFill>
+                            <a:srgbClr val="000000">
+                              <a:alpha val="100000"/>
+                            </a:srgbClr>
+                          </a:solidFill>
+                          <a:latin typeface="Arial"/>
+                          <a:cs typeface="Arial"/>
+                          <a:ea typeface="Arial"/>
+                          <a:sym typeface="Arial"/>
+                        </a:rPr>
+                        <a:t>CELL</a:t>
+                      </a:r>
+                    </a:p>
+                  </a:txBody>
+                  <a:tcPr anchor="ctr" marB="63500" marT="63500" marR="0" marL="0">
+                    <a:lnL algn="ctr" cmpd="sng" cap="flat" w="0">
+                      <a:noFill/>
+                      <a:prstDash val="solid"/>
+                    </a:lnL>
+                    <a:lnR algn="ctr" cmpd="sng" cap="flat" w="0">
+                      <a:noFill/>
+                      <a:prstDash val="solid"/>
+                    </a:lnR>
+                    <a:lnT algn="ctr" cmpd="sng" cap="flat" w="0">
+                      <a:noFill/>
+                      <a:prstDash val="solid"/>
+                    </a:lnT>
+                    <a:lnB algn="ctr" cmpd="sng" cap="flat" w="0">
+                      <a:noFill/>
+                      <a:prstDash val="solid"/>
+                    </a:lnB>
+                    <a:solidFill>
+                      <a:srgbClr val="EFEFEF">
+                        <a:alpha val="100000"/>
+                      </a:srgbClr>
+                    </a:solidFill>
+                  </a:tcPr>
+                </a:tc>
+                <a:tc>
+                  <a:txBody>
+                    <a:bodyPr/>
+                    <a:lstStyle/>
+                    <a:p>
+                      <a:pPr algn="ctr" marL="63500" marR="63500">
+                        <a:lnSpc>
+                          <a:spcPct val="100000"/>
+                        </a:lnSpc>
+                        <a:spcBef>
+                          <a:spcPts val="500"/>
+                        </a:spcBef>
+                        <a:spcAft>
+                          <a:spcPts val="500"/>
+                        </a:spcAft>
+                        <a:buNone/>
+                      </a:pPr>
+                      <a:r>
+                        <a:rPr cap="none" sz="1100" i="0" b="0" u="none" strike="noStrike">
+                          <a:solidFill>
+                            <a:srgbClr val="000000">
+                              <a:alpha val="100000"/>
+                            </a:srgbClr>
+                          </a:solidFill>
+                          <a:latin typeface="Arial"/>
+                          <a:cs typeface="Arial"/>
+                          <a:ea typeface="Arial"/>
+                          <a:sym typeface="Arial"/>
+                        </a:rPr>
+                        <a:t>WTC</a:t>
+                      </a:r>
+                    </a:p>
+                  </a:txBody>
+                  <a:tcPr anchor="ctr" marB="63500" marT="63500" marR="0" marL="0">
+                    <a:lnL algn="ctr" cmpd="sng" cap="flat" w="0">
+                      <a:noFill/>
+                      <a:prstDash val="solid"/>
+                    </a:lnL>
+                    <a:lnR algn="ctr" cmpd="sng" cap="flat" w="0">
+                      <a:noFill/>
+                      <a:prstDash val="solid"/>
+                    </a:lnR>
+                    <a:lnT algn="ctr" cmpd="sng" cap="flat" w="0">
+                      <a:noFill/>
+                      <a:prstDash val="solid"/>
+                    </a:lnT>
+                    <a:lnB algn="ctr" cmpd="sng" cap="flat" w="0">
+                      <a:noFill/>
+                      <a:prstDash val="solid"/>
+                    </a:lnB>
+                    <a:solidFill>
+                      <a:srgbClr val="EFEFEF">
+                        <a:alpha val="100000"/>
+                      </a:srgbClr>
+                    </a:solidFill>
+                  </a:tcPr>
+                </a:tc>
+                <a:tc>
+                  <a:txBody>
+                    <a:bodyPr/>
+                    <a:lstStyle/>
+                    <a:p>
+                      <a:pPr algn="ctr" marL="63500" marR="63500">
+                        <a:lnSpc>
+                          <a:spcPct val="100000"/>
+                        </a:lnSpc>
+                        <a:spcBef>
+                          <a:spcPts val="500"/>
+                        </a:spcBef>
+                        <a:spcAft>
+                          <a:spcPts val="500"/>
+                        </a:spcAft>
+                        <a:buNone/>
+                      </a:pPr>
+                      <a:r>
+                        <a:rPr cap="none" sz="1100" i="0" b="0" u="none" strike="noStrike">
+                          <a:solidFill>
+                            <a:srgbClr val="000000">
+                              <a:alpha val="100000"/>
+                            </a:srgbClr>
+                          </a:solidFill>
+                          <a:latin typeface="Arial"/>
+                          <a:cs typeface="Arial"/>
+                          <a:ea typeface="Arial"/>
+                          <a:sym typeface="Arial"/>
+                        </a:rPr>
+                        <a:t>WTC_1</a:t>
+                      </a:r>
+                    </a:p>
+                  </a:txBody>
+                  <a:tcPr anchor="ctr" marB="63500" marT="63500" marR="0" marL="0">
+                    <a:lnL algn="ctr" cmpd="sng" cap="flat" w="0">
+                      <a:noFill/>
+                      <a:prstDash val="solid"/>
+                    </a:lnL>
+                    <a:lnR algn="ctr" cmpd="sng" cap="flat" w="0">
+                      <a:noFill/>
+                      <a:prstDash val="solid"/>
+                    </a:lnR>
+                    <a:lnT algn="ctr" cmpd="sng" cap="flat" w="0">
+                      <a:noFill/>
+                      <a:prstDash val="solid"/>
+                    </a:lnT>
+                    <a:lnB algn="ctr" cmpd="sng" cap="flat" w="0">
+                      <a:noFill/>
+                      <a:prstDash val="solid"/>
+                    </a:lnB>
+                    <a:solidFill>
+                      <a:srgbClr val="EFEFEF">
+                        <a:alpha val="100000"/>
+                      </a:srgbClr>
+                    </a:solidFill>
+                  </a:tcPr>
+                </a:tc>
+                <a:tc>
+                  <a:txBody>
+                    <a:bodyPr/>
+                    <a:lstStyle/>
+                    <a:p>
+                      <a:pPr algn="ctr" marL="63500" marR="63500">
+                        <a:lnSpc>
+                          <a:spcPct val="100000"/>
+                        </a:lnSpc>
+                        <a:spcBef>
+                          <a:spcPts val="500"/>
+                        </a:spcBef>
+                        <a:spcAft>
+                          <a:spcPts val="500"/>
+                        </a:spcAft>
+                        <a:buNone/>
+                      </a:pPr>
+                      <a:r>
+                        <a:rPr cap="none" sz="1100" i="0" b="0" u="none" strike="noStrike">
+                          <a:solidFill>
+                            <a:srgbClr val="000000">
+                              <a:alpha val="100000"/>
+                            </a:srgbClr>
+                          </a:solidFill>
+                          <a:latin typeface="Arial"/>
+                          <a:cs typeface="Arial"/>
+                          <a:ea typeface="Arial"/>
+                          <a:sym typeface="Arial"/>
+                        </a:rPr>
+                        <a:t>Cell_WTC_271</a:t>
+                      </a:r>
+                    </a:p>
+                  </a:txBody>
+                  <a:tcPr anchor="ctr" marB="63500" marT="63500" marR="0" marL="0">
+                    <a:lnL algn="ctr" cmpd="sng" cap="flat" w="0">
+                      <a:noFill/>
+                      <a:prstDash val="solid"/>
+                    </a:lnL>
+                    <a:lnR algn="ctr" cmpd="sng" cap="flat" w="0">
+                      <a:noFill/>
+                      <a:prstDash val="solid"/>
+                    </a:lnR>
+                    <a:lnT algn="ctr" cmpd="sng" cap="flat" w="0">
+                      <a:noFill/>
+                      <a:prstDash val="solid"/>
+                    </a:lnT>
+                    <a:lnB algn="ctr" cmpd="sng" cap="flat" w="0">
+                      <a:noFill/>
+                      <a:prstDash val="solid"/>
+                    </a:lnB>
+                    <a:solidFill>
+                      <a:srgbClr val="EFEFEF">
+                        <a:alpha val="100000"/>
+                      </a:srgbClr>
+                    </a:solidFill>
+                  </a:tcPr>
+                </a:tc>
+                <a:tc>
+                  <a:txBody>
+                    <a:bodyPr/>
+                    <a:lstStyle/>
+                    <a:p>
+                      <a:pPr algn="ctr" marL="63500" marR="63500">
+                        <a:lnSpc>
+                          <a:spcPct val="100000"/>
+                        </a:lnSpc>
+                        <a:spcBef>
+                          <a:spcPts val="500"/>
+                        </a:spcBef>
+                        <a:spcAft>
+                          <a:spcPts val="500"/>
+                        </a:spcAft>
+                        <a:buNone/>
+                      </a:pPr>
+                      <a:r>
+                        <a:rPr cap="none" sz="1100" i="0" b="0" u="none" strike="noStrike">
+                          <a:solidFill>
+                            <a:srgbClr val="000000">
+                              <a:alpha val="100000"/>
+                            </a:srgbClr>
+                          </a:solidFill>
+                          <a:latin typeface="Arial"/>
+                          <a:cs typeface="Arial"/>
+                          <a:ea typeface="Arial"/>
+                          <a:sym typeface="Arial"/>
+                        </a:rPr>
+                        <a:t>0.52</a:t>
+                      </a:r>
+                    </a:p>
+                  </a:txBody>
+                  <a:tcPr anchor="ctr" marB="63500" marT="63500" marR="0" marL="0">
+                    <a:lnL algn="ctr" cmpd="sng" cap="flat" w="0">
+                      <a:noFill/>
+                      <a:prstDash val="solid"/>
+                    </a:lnL>
+                    <a:lnR algn="ctr" cmpd="sng" cap="flat" w="0">
+                      <a:noFill/>
+                      <a:prstDash val="solid"/>
+                    </a:lnR>
+                    <a:lnT algn="ctr" cmpd="sng" cap="flat" w="0">
+                      <a:noFill/>
+                      <a:prstDash val="solid"/>
+                    </a:lnT>
+                    <a:lnB algn="ctr" cmpd="sng" cap="flat" w="0">
+                      <a:noFill/>
+                      <a:prstDash val="solid"/>
+                    </a:lnB>
+                    <a:solidFill>
+                      <a:srgbClr val="EFEFEF">
+                        <a:alpha val="100000"/>
+                      </a:srgbClr>
+                    </a:solidFill>
+                  </a:tcPr>
+                </a:tc>
+                <a:tc>
+                  <a:txBody>
+                    <a:bodyPr/>
+                    <a:lstStyle/>
+                    <a:p>
+                      <a:pPr algn="ctr" marL="63500" marR="63500">
+                        <a:lnSpc>
+                          <a:spcPct val="100000"/>
+                        </a:lnSpc>
+                        <a:spcBef>
+                          <a:spcPts val="500"/>
+                        </a:spcBef>
+                        <a:spcAft>
+                          <a:spcPts val="500"/>
+                        </a:spcAft>
+                        <a:buNone/>
+                      </a:pPr>
+                      <a:r>
+                        <a:rPr cap="none" sz="1100" i="0" b="0" u="none" strike="noStrike">
+                          <a:solidFill>
+                            <a:srgbClr val="FF0000">
+                              <a:alpha val="100000"/>
+                            </a:srgbClr>
+                          </a:solidFill>
+                          <a:latin typeface="Arial"/>
+                          <a:cs typeface="Arial"/>
+                          <a:ea typeface="Arial"/>
+                          <a:sym typeface="Arial"/>
+                        </a:rPr>
+                        <a:t>Up</a:t>
+                      </a:r>
+                    </a:p>
+                  </a:txBody>
+                  <a:tcPr anchor="ctr" marB="63500" marT="63500" marR="0" marL="0">
+                    <a:lnL algn="ctr" cmpd="sng" cap="flat" w="0">
+                      <a:noFill/>
+                      <a:prstDash val="solid"/>
+                    </a:lnL>
+                    <a:lnR algn="ctr" cmpd="sng" cap="flat" w="0">
+                      <a:noFill/>
+                      <a:prstDash val="solid"/>
+                    </a:lnR>
+                    <a:lnT algn="ctr" cmpd="sng" cap="flat" w="0">
+                      <a:noFill/>
+                      <a:prstDash val="solid"/>
+                    </a:lnT>
+                    <a:lnB algn="ctr" cmpd="sng" cap="flat" w="0">
+                      <a:noFill/>
+                      <a:prstDash val="solid"/>
+                    </a:lnB>
+                    <a:solidFill>
+                      <a:srgbClr val="EFEFEF">
+                        <a:alpha val="100000"/>
+                      </a:srgbClr>
+                    </a:solidFill>
+                  </a:tcPr>
+                </a:tc>
+              </a:tr>
+            </a:tbl>
+          </a:graphicData>
+        </a:graphic>
+      </p:graphicFrame>
     </p:spTree>
   </p:cSld>
   <p:clrMapOvr>
@@ -3163,6 +8669,1118 @@
 </file>
 
 <file path=ppt/slides/slide2.xml><?xml version="1.0" encoding="utf-8"?>
+<p:sld xmlns:a="http://schemas.openxmlformats.org/drawingml/2006/main" xmlns:r="http://schemas.openxmlformats.org/officeDocument/2006/relationships" xmlns:p="http://schemas.openxmlformats.org/presentationml/2006/main">
+  <p:cSld>
+    <p:spTree>
+      <p:nvGrpSpPr>
+        <p:cNvPr id="1" name=""/>
+        <p:cNvGrpSpPr/>
+        <p:nvPr/>
+      </p:nvGrpSpPr>
+      <p:grpSpPr>
+        <a:xfrm>
+          <a:off x="0" y="0"/>
+          <a:ext cx="0" cy="0"/>
+          <a:chOff x="0" y="0"/>
+          <a:chExt cx="0" cy="0"/>
+        </a:xfrm>
+      </p:grpSpPr>
+      <p:sp>
+        <p:nvSpPr>
+          <p:cNvPr id="2" name="Title 1"/>
+          <p:cNvSpPr>
+            <a:spLocks noGrp="1"/>
+          </p:cNvSpPr>
+          <p:nvPr>
+            <p:ph type="title"/>
+          </p:nvPr>
+        </p:nvSpPr>
+        <p:spPr>
+          <a:xfrm>
+            <a:off x="457200" y="274638"/>
+            <a:ext cx="8229600" cy="1143000"/>
+          </a:xfrm>
+        </p:spPr>
+        <p:txBody>
+          <a:bodyPr/>
+          <a:lstStyle/>
+          <a:p>
+            <a:r>
+              <a:rPr/>
+              <a:t>Flagged Items Summary (2/2)</a:t>
+            </a:r>
+          </a:p>
+        </p:txBody>
+      </p:sp>
+      <p:graphicFrame>
+        <p:nvGraphicFramePr>
+          <p:cNvPr id="3" name="Content Placeholder 2"/>
+          <p:cNvGraphicFramePr>
+            <a:graphicFrameLocks noGrp="true"/>
+          </p:cNvGraphicFramePr>
+          <p:nvPr/>
+        </p:nvGraphicFramePr>
+        <p:xfrm rot="0">
+          <a:off x="457200" y="1600200"/>
+          <a:ext cx="8229600" cy="4525963"/>
+        </p:xfrm>
+        <a:graphic>
+          <a:graphicData uri="http://schemas.openxmlformats.org/drawingml/2006/table">
+            <a:tbl>
+              <a:tblPr/>
+              <a:tblGrid>
+                <a:gridCol w="610228"/>
+                <a:gridCol w="563570"/>
+                <a:gridCol w="718891"/>
+                <a:gridCol w="1192630"/>
+                <a:gridCol w="649041"/>
+                <a:gridCol w="454839"/>
+              </a:tblGrid>
+              <a:tr h="364252">
+                <a:tc>
+                  <a:txBody>
+                    <a:bodyPr/>
+                    <a:lstStyle/>
+                    <a:p>
+                      <a:pPr algn="ctr" marL="63500" marR="63500">
+                        <a:lnSpc>
+                          <a:spcPct val="100000"/>
+                        </a:lnSpc>
+                        <a:spcBef>
+                          <a:spcPts val="500"/>
+                        </a:spcBef>
+                        <a:spcAft>
+                          <a:spcPts val="500"/>
+                        </a:spcAft>
+                        <a:buNone/>
+                      </a:pPr>
+                      <a:r>
+                        <a:rPr cap="none" sz="1100" i="0" b="1" u="none" strike="noStrike">
+                          <a:solidFill>
+                            <a:srgbClr val="000000">
+                              <a:alpha val="100000"/>
+                            </a:srgbClr>
+                          </a:solidFill>
+                          <a:latin typeface="Arial"/>
+                          <a:cs typeface="Arial"/>
+                          <a:ea typeface="Arial"/>
+                          <a:sym typeface="Arial"/>
+                        </a:rPr>
+                        <a:t>Cat1</a:t>
+                      </a:r>
+                    </a:p>
+                  </a:txBody>
+                  <a:tcPr anchor="ctr" marB="63500" marT="63500" marR="0" marL="0">
+                    <a:lnL algn="ctr" cmpd="sng" cap="flat" w="0">
+                      <a:noFill/>
+                      <a:prstDash val="solid"/>
+                    </a:lnL>
+                    <a:lnR algn="ctr" cmpd="sng" cap="flat" w="0">
+                      <a:noFill/>
+                      <a:prstDash val="solid"/>
+                    </a:lnR>
+                    <a:lnT algn="ctr" cmpd="sng" cap="flat" w="0">
+                      <a:noFill/>
+                      <a:prstDash val="solid"/>
+                    </a:lnT>
+                    <a:lnB algn="ctr" cmpd="sng" cap="flat" w="0">
+                      <a:noFill/>
+                      <a:prstDash val="solid"/>
+                    </a:lnB>
+                    <a:solidFill>
+                      <a:srgbClr val="CFCFCF">
+                        <a:alpha val="100000"/>
+                      </a:srgbClr>
+                    </a:solidFill>
+                  </a:tcPr>
+                </a:tc>
+                <a:tc>
+                  <a:txBody>
+                    <a:bodyPr/>
+                    <a:lstStyle/>
+                    <a:p>
+                      <a:pPr algn="ctr" marL="63500" marR="63500">
+                        <a:lnSpc>
+                          <a:spcPct val="100000"/>
+                        </a:lnSpc>
+                        <a:spcBef>
+                          <a:spcPts val="500"/>
+                        </a:spcBef>
+                        <a:spcAft>
+                          <a:spcPts val="500"/>
+                        </a:spcAft>
+                        <a:buNone/>
+                      </a:pPr>
+                      <a:r>
+                        <a:rPr cap="none" sz="1100" i="0" b="1" u="none" strike="noStrike">
+                          <a:solidFill>
+                            <a:srgbClr val="000000">
+                              <a:alpha val="100000"/>
+                            </a:srgbClr>
+                          </a:solidFill>
+                          <a:latin typeface="Arial"/>
+                          <a:cs typeface="Arial"/>
+                          <a:ea typeface="Arial"/>
+                          <a:sym typeface="Arial"/>
+                        </a:rPr>
+                        <a:t>Cat2</a:t>
+                      </a:r>
+                    </a:p>
+                  </a:txBody>
+                  <a:tcPr anchor="ctr" marB="63500" marT="63500" marR="0" marL="0">
+                    <a:lnL algn="ctr" cmpd="sng" cap="flat" w="0">
+                      <a:noFill/>
+                      <a:prstDash val="solid"/>
+                    </a:lnL>
+                    <a:lnR algn="ctr" cmpd="sng" cap="flat" w="0">
+                      <a:noFill/>
+                      <a:prstDash val="solid"/>
+                    </a:lnR>
+                    <a:lnT algn="ctr" cmpd="sng" cap="flat" w="0">
+                      <a:noFill/>
+                      <a:prstDash val="solid"/>
+                    </a:lnT>
+                    <a:lnB algn="ctr" cmpd="sng" cap="flat" w="0">
+                      <a:noFill/>
+                      <a:prstDash val="solid"/>
+                    </a:lnB>
+                    <a:solidFill>
+                      <a:srgbClr val="CFCFCF">
+                        <a:alpha val="100000"/>
+                      </a:srgbClr>
+                    </a:solidFill>
+                  </a:tcPr>
+                </a:tc>
+                <a:tc>
+                  <a:txBody>
+                    <a:bodyPr/>
+                    <a:lstStyle/>
+                    <a:p>
+                      <a:pPr algn="ctr" marL="63500" marR="63500">
+                        <a:lnSpc>
+                          <a:spcPct val="100000"/>
+                        </a:lnSpc>
+                        <a:spcBef>
+                          <a:spcPts val="500"/>
+                        </a:spcBef>
+                        <a:spcAft>
+                          <a:spcPts val="500"/>
+                        </a:spcAft>
+                        <a:buNone/>
+                      </a:pPr>
+                      <a:r>
+                        <a:rPr cap="none" sz="1100" i="0" b="1" u="none" strike="noStrike">
+                          <a:solidFill>
+                            <a:srgbClr val="000000">
+                              <a:alpha val="100000"/>
+                            </a:srgbClr>
+                          </a:solidFill>
+                          <a:latin typeface="Arial"/>
+                          <a:cs typeface="Arial"/>
+                          <a:ea typeface="Arial"/>
+                          <a:sym typeface="Arial"/>
+                        </a:rPr>
+                        <a:t>Cat3</a:t>
+                      </a:r>
+                    </a:p>
+                  </a:txBody>
+                  <a:tcPr anchor="ctr" marB="63500" marT="63500" marR="0" marL="0">
+                    <a:lnL algn="ctr" cmpd="sng" cap="flat" w="0">
+                      <a:noFill/>
+                      <a:prstDash val="solid"/>
+                    </a:lnL>
+                    <a:lnR algn="ctr" cmpd="sng" cap="flat" w="0">
+                      <a:noFill/>
+                      <a:prstDash val="solid"/>
+                    </a:lnR>
+                    <a:lnT algn="ctr" cmpd="sng" cap="flat" w="0">
+                      <a:noFill/>
+                      <a:prstDash val="solid"/>
+                    </a:lnT>
+                    <a:lnB algn="ctr" cmpd="sng" cap="flat" w="0">
+                      <a:noFill/>
+                      <a:prstDash val="solid"/>
+                    </a:lnB>
+                    <a:solidFill>
+                      <a:srgbClr val="CFCFCF">
+                        <a:alpha val="100000"/>
+                      </a:srgbClr>
+                    </a:solidFill>
+                  </a:tcPr>
+                </a:tc>
+                <a:tc>
+                  <a:txBody>
+                    <a:bodyPr/>
+                    <a:lstStyle/>
+                    <a:p>
+                      <a:pPr algn="ctr" marL="63500" marR="63500">
+                        <a:lnSpc>
+                          <a:spcPct val="100000"/>
+                        </a:lnSpc>
+                        <a:spcBef>
+                          <a:spcPts val="500"/>
+                        </a:spcBef>
+                        <a:spcAft>
+                          <a:spcPts val="500"/>
+                        </a:spcAft>
+                        <a:buNone/>
+                      </a:pPr>
+                      <a:r>
+                        <a:rPr cap="none" sz="1100" i="0" b="1" u="none" strike="noStrike">
+                          <a:solidFill>
+                            <a:srgbClr val="000000">
+                              <a:alpha val="100000"/>
+                            </a:srgbClr>
+                          </a:solidFill>
+                          <a:latin typeface="Arial"/>
+                          <a:cs typeface="Arial"/>
+                          <a:ea typeface="Arial"/>
+                          <a:sym typeface="Arial"/>
+                        </a:rPr>
+                        <a:t>MSR</a:t>
+                      </a:r>
+                    </a:p>
+                  </a:txBody>
+                  <a:tcPr anchor="ctr" marB="63500" marT="63500" marR="0" marL="0">
+                    <a:lnL algn="ctr" cmpd="sng" cap="flat" w="0">
+                      <a:noFill/>
+                      <a:prstDash val="solid"/>
+                    </a:lnL>
+                    <a:lnR algn="ctr" cmpd="sng" cap="flat" w="0">
+                      <a:noFill/>
+                      <a:prstDash val="solid"/>
+                    </a:lnR>
+                    <a:lnT algn="ctr" cmpd="sng" cap="flat" w="0">
+                      <a:noFill/>
+                      <a:prstDash val="solid"/>
+                    </a:lnT>
+                    <a:lnB algn="ctr" cmpd="sng" cap="flat" w="0">
+                      <a:noFill/>
+                      <a:prstDash val="solid"/>
+                    </a:lnB>
+                    <a:solidFill>
+                      <a:srgbClr val="CFCFCF">
+                        <a:alpha val="100000"/>
+                      </a:srgbClr>
+                    </a:solidFill>
+                  </a:tcPr>
+                </a:tc>
+                <a:tc>
+                  <a:txBody>
+                    <a:bodyPr/>
+                    <a:lstStyle/>
+                    <a:p>
+                      <a:pPr algn="ctr" marL="63500" marR="63500">
+                        <a:lnSpc>
+                          <a:spcPct val="100000"/>
+                        </a:lnSpc>
+                        <a:spcBef>
+                          <a:spcPts val="500"/>
+                        </a:spcBef>
+                        <a:spcAft>
+                          <a:spcPts val="500"/>
+                        </a:spcAft>
+                        <a:buNone/>
+                      </a:pPr>
+                      <a:r>
+                        <a:rPr cap="none" sz="1100" i="0" b="1" u="none" strike="noStrike">
+                          <a:solidFill>
+                            <a:srgbClr val="000000">
+                              <a:alpha val="100000"/>
+                            </a:srgbClr>
+                          </a:solidFill>
+                          <a:latin typeface="Arial"/>
+                          <a:cs typeface="Arial"/>
+                          <a:ea typeface="Arial"/>
+                          <a:sym typeface="Arial"/>
+                        </a:rPr>
+                        <a:t>Score</a:t>
+                      </a:r>
+                    </a:p>
+                  </a:txBody>
+                  <a:tcPr anchor="ctr" marB="63500" marT="63500" marR="0" marL="0">
+                    <a:lnL algn="ctr" cmpd="sng" cap="flat" w="0">
+                      <a:noFill/>
+                      <a:prstDash val="solid"/>
+                    </a:lnL>
+                    <a:lnR algn="ctr" cmpd="sng" cap="flat" w="0">
+                      <a:noFill/>
+                      <a:prstDash val="solid"/>
+                    </a:lnR>
+                    <a:lnT algn="ctr" cmpd="sng" cap="flat" w="0">
+                      <a:noFill/>
+                      <a:prstDash val="solid"/>
+                    </a:lnT>
+                    <a:lnB algn="ctr" cmpd="sng" cap="flat" w="0">
+                      <a:noFill/>
+                      <a:prstDash val="solid"/>
+                    </a:lnB>
+                    <a:solidFill>
+                      <a:srgbClr val="CFCFCF">
+                        <a:alpha val="100000"/>
+                      </a:srgbClr>
+                    </a:solidFill>
+                  </a:tcPr>
+                </a:tc>
+                <a:tc>
+                  <a:txBody>
+                    <a:bodyPr/>
+                    <a:lstStyle/>
+                    <a:p>
+                      <a:pPr algn="ctr" marL="63500" marR="63500">
+                        <a:lnSpc>
+                          <a:spcPct val="100000"/>
+                        </a:lnSpc>
+                        <a:spcBef>
+                          <a:spcPts val="500"/>
+                        </a:spcBef>
+                        <a:spcAft>
+                          <a:spcPts val="500"/>
+                        </a:spcAft>
+                        <a:buNone/>
+                      </a:pPr>
+                      <a:r>
+                        <a:rPr cap="none" sz="1100" i="0" b="1" u="none" strike="noStrike">
+                          <a:solidFill>
+                            <a:srgbClr val="000000">
+                              <a:alpha val="100000"/>
+                            </a:srgbClr>
+                          </a:solidFill>
+                          <a:latin typeface="Arial"/>
+                          <a:cs typeface="Arial"/>
+                          <a:ea typeface="Arial"/>
+                          <a:sym typeface="Arial"/>
+                        </a:rPr>
+                        <a:t>Dir</a:t>
+                      </a:r>
+                    </a:p>
+                  </a:txBody>
+                  <a:tcPr anchor="ctr" marB="63500" marT="63500" marR="0" marL="0">
+                    <a:lnL algn="ctr" cmpd="sng" cap="flat" w="0">
+                      <a:noFill/>
+                      <a:prstDash val="solid"/>
+                    </a:lnL>
+                    <a:lnR algn="ctr" cmpd="sng" cap="flat" w="0">
+                      <a:noFill/>
+                      <a:prstDash val="solid"/>
+                    </a:lnR>
+                    <a:lnT algn="ctr" cmpd="sng" cap="flat" w="0">
+                      <a:noFill/>
+                      <a:prstDash val="solid"/>
+                    </a:lnT>
+                    <a:lnB algn="ctr" cmpd="sng" cap="flat" w="0">
+                      <a:noFill/>
+                      <a:prstDash val="solid"/>
+                    </a:lnB>
+                    <a:solidFill>
+                      <a:srgbClr val="CFCFCF">
+                        <a:alpha val="100000"/>
+                      </a:srgbClr>
+                    </a:solidFill>
+                  </a:tcPr>
+                </a:tc>
+              </a:tr>
+              <a:tr h="390241">
+                <a:tc>
+                  <a:txBody>
+                    <a:bodyPr/>
+                    <a:lstStyle/>
+                    <a:p>
+                      <a:pPr algn="ctr" marL="63500" marR="63500">
+                        <a:lnSpc>
+                          <a:spcPct val="100000"/>
+                        </a:lnSpc>
+                        <a:spcBef>
+                          <a:spcPts val="500"/>
+                        </a:spcBef>
+                        <a:spcAft>
+                          <a:spcPts val="500"/>
+                        </a:spcAft>
+                        <a:buNone/>
+                      </a:pPr>
+                      <a:r>
+                        <a:rPr cap="none" sz="1100" i="0" b="0" u="none" strike="noStrike">
+                          <a:solidFill>
+                            <a:srgbClr val="000000">
+                              <a:alpha val="100000"/>
+                            </a:srgbClr>
+                          </a:solidFill>
+                          <a:latin typeface="Arial"/>
+                          <a:cs typeface="Arial"/>
+                          <a:ea typeface="Arial"/>
+                          <a:sym typeface="Arial"/>
+                        </a:rPr>
+                        <a:t>CELL</a:t>
+                      </a:r>
+                    </a:p>
+                  </a:txBody>
+                  <a:tcPr anchor="ctr" marB="63500" marT="63500" marR="0" marL="0">
+                    <a:lnL algn="ctr" cmpd="sng" cap="flat" w="0">
+                      <a:noFill/>
+                      <a:prstDash val="solid"/>
+                    </a:lnL>
+                    <a:lnR algn="ctr" cmpd="sng" cap="flat" w="0">
+                      <a:noFill/>
+                      <a:prstDash val="solid"/>
+                    </a:lnR>
+                    <a:lnT algn="ctr" cmpd="sng" cap="flat" w="0">
+                      <a:noFill/>
+                      <a:prstDash val="solid"/>
+                    </a:lnT>
+                    <a:lnB algn="ctr" cmpd="sng" cap="flat" w="0">
+                      <a:noFill/>
+                      <a:prstDash val="solid"/>
+                    </a:lnB>
+                    <a:solidFill>
+                      <a:srgbClr val="EFEFEF">
+                        <a:alpha val="100000"/>
+                      </a:srgbClr>
+                    </a:solidFill>
+                  </a:tcPr>
+                </a:tc>
+                <a:tc>
+                  <a:txBody>
+                    <a:bodyPr/>
+                    <a:lstStyle/>
+                    <a:p>
+                      <a:pPr algn="ctr" marL="63500" marR="63500">
+                        <a:lnSpc>
+                          <a:spcPct val="100000"/>
+                        </a:lnSpc>
+                        <a:spcBef>
+                          <a:spcPts val="500"/>
+                        </a:spcBef>
+                        <a:spcAft>
+                          <a:spcPts val="500"/>
+                        </a:spcAft>
+                        <a:buNone/>
+                      </a:pPr>
+                      <a:r>
+                        <a:rPr cap="none" sz="1100" i="0" b="0" u="none" strike="noStrike">
+                          <a:solidFill>
+                            <a:srgbClr val="000000">
+                              <a:alpha val="100000"/>
+                            </a:srgbClr>
+                          </a:solidFill>
+                          <a:latin typeface="Arial"/>
+                          <a:cs typeface="Arial"/>
+                          <a:ea typeface="Arial"/>
+                          <a:sym typeface="Arial"/>
+                        </a:rPr>
+                        <a:t>WLS</a:t>
+                      </a:r>
+                    </a:p>
+                  </a:txBody>
+                  <a:tcPr anchor="ctr" marB="63500" marT="63500" marR="0" marL="0">
+                    <a:lnL algn="ctr" cmpd="sng" cap="flat" w="0">
+                      <a:noFill/>
+                      <a:prstDash val="solid"/>
+                    </a:lnL>
+                    <a:lnR algn="ctr" cmpd="sng" cap="flat" w="0">
+                      <a:noFill/>
+                      <a:prstDash val="solid"/>
+                    </a:lnR>
+                    <a:lnT algn="ctr" cmpd="sng" cap="flat" w="0">
+                      <a:noFill/>
+                      <a:prstDash val="solid"/>
+                    </a:lnT>
+                    <a:lnB algn="ctr" cmpd="sng" cap="flat" w="0">
+                      <a:noFill/>
+                      <a:prstDash val="solid"/>
+                    </a:lnB>
+                    <a:solidFill>
+                      <a:srgbClr val="EFEFEF">
+                        <a:alpha val="100000"/>
+                      </a:srgbClr>
+                    </a:solidFill>
+                  </a:tcPr>
+                </a:tc>
+                <a:tc>
+                  <a:txBody>
+                    <a:bodyPr/>
+                    <a:lstStyle/>
+                    <a:p>
+                      <a:pPr algn="ctr" marL="63500" marR="63500">
+                        <a:lnSpc>
+                          <a:spcPct val="100000"/>
+                        </a:lnSpc>
+                        <a:spcBef>
+                          <a:spcPts val="500"/>
+                        </a:spcBef>
+                        <a:spcAft>
+                          <a:spcPts val="500"/>
+                        </a:spcAft>
+                        <a:buNone/>
+                      </a:pPr>
+                      <a:r>
+                        <a:rPr cap="none" sz="1100" i="0" b="0" u="none" strike="noStrike">
+                          <a:solidFill>
+                            <a:srgbClr val="000000">
+                              <a:alpha val="100000"/>
+                            </a:srgbClr>
+                          </a:solidFill>
+                          <a:latin typeface="Arial"/>
+                          <a:cs typeface="Arial"/>
+                          <a:ea typeface="Arial"/>
+                          <a:sym typeface="Arial"/>
+                        </a:rPr>
+                        <a:t>WLS_2</a:t>
+                      </a:r>
+                    </a:p>
+                  </a:txBody>
+                  <a:tcPr anchor="ctr" marB="63500" marT="63500" marR="0" marL="0">
+                    <a:lnL algn="ctr" cmpd="sng" cap="flat" w="0">
+                      <a:noFill/>
+                      <a:prstDash val="solid"/>
+                    </a:lnL>
+                    <a:lnR algn="ctr" cmpd="sng" cap="flat" w="0">
+                      <a:noFill/>
+                      <a:prstDash val="solid"/>
+                    </a:lnR>
+                    <a:lnT algn="ctr" cmpd="sng" cap="flat" w="0">
+                      <a:noFill/>
+                      <a:prstDash val="solid"/>
+                    </a:lnT>
+                    <a:lnB algn="ctr" cmpd="sng" cap="flat" w="0">
+                      <a:noFill/>
+                      <a:prstDash val="solid"/>
+                    </a:lnB>
+                    <a:solidFill>
+                      <a:srgbClr val="EFEFEF">
+                        <a:alpha val="100000"/>
+                      </a:srgbClr>
+                    </a:solidFill>
+                  </a:tcPr>
+                </a:tc>
+                <a:tc>
+                  <a:txBody>
+                    <a:bodyPr/>
+                    <a:lstStyle/>
+                    <a:p>
+                      <a:pPr algn="ctr" marL="63500" marR="63500">
+                        <a:lnSpc>
+                          <a:spcPct val="100000"/>
+                        </a:lnSpc>
+                        <a:spcBef>
+                          <a:spcPts val="500"/>
+                        </a:spcBef>
+                        <a:spcAft>
+                          <a:spcPts val="500"/>
+                        </a:spcAft>
+                        <a:buNone/>
+                      </a:pPr>
+                      <a:r>
+                        <a:rPr cap="none" sz="1100" i="0" b="0" u="none" strike="noStrike">
+                          <a:solidFill>
+                            <a:srgbClr val="000000">
+                              <a:alpha val="100000"/>
+                            </a:srgbClr>
+                          </a:solidFill>
+                          <a:latin typeface="Arial"/>
+                          <a:cs typeface="Arial"/>
+                          <a:ea typeface="Arial"/>
+                          <a:sym typeface="Arial"/>
+                        </a:rPr>
+                        <a:t>Cell_WLS_193</a:t>
+                      </a:r>
+                    </a:p>
+                  </a:txBody>
+                  <a:tcPr anchor="ctr" marB="63500" marT="63500" marR="0" marL="0">
+                    <a:lnL algn="ctr" cmpd="sng" cap="flat" w="0">
+                      <a:noFill/>
+                      <a:prstDash val="solid"/>
+                    </a:lnL>
+                    <a:lnR algn="ctr" cmpd="sng" cap="flat" w="0">
+                      <a:noFill/>
+                      <a:prstDash val="solid"/>
+                    </a:lnR>
+                    <a:lnT algn="ctr" cmpd="sng" cap="flat" w="0">
+                      <a:noFill/>
+                      <a:prstDash val="solid"/>
+                    </a:lnT>
+                    <a:lnB algn="ctr" cmpd="sng" cap="flat" w="0">
+                      <a:noFill/>
+                      <a:prstDash val="solid"/>
+                    </a:lnB>
+                    <a:solidFill>
+                      <a:srgbClr val="EFEFEF">
+                        <a:alpha val="100000"/>
+                      </a:srgbClr>
+                    </a:solidFill>
+                  </a:tcPr>
+                </a:tc>
+                <a:tc>
+                  <a:txBody>
+                    <a:bodyPr/>
+                    <a:lstStyle/>
+                    <a:p>
+                      <a:pPr algn="ctr" marL="63500" marR="63500">
+                        <a:lnSpc>
+                          <a:spcPct val="100000"/>
+                        </a:lnSpc>
+                        <a:spcBef>
+                          <a:spcPts val="500"/>
+                        </a:spcBef>
+                        <a:spcAft>
+                          <a:spcPts val="500"/>
+                        </a:spcAft>
+                        <a:buNone/>
+                      </a:pPr>
+                      <a:r>
+                        <a:rPr cap="none" sz="1100" i="0" b="0" u="none" strike="noStrike">
+                          <a:solidFill>
+                            <a:srgbClr val="000000">
+                              <a:alpha val="100000"/>
+                            </a:srgbClr>
+                          </a:solidFill>
+                          <a:latin typeface="Arial"/>
+                          <a:cs typeface="Arial"/>
+                          <a:ea typeface="Arial"/>
+                          <a:sym typeface="Arial"/>
+                        </a:rPr>
+                        <a:t>0.52</a:t>
+                      </a:r>
+                    </a:p>
+                  </a:txBody>
+                  <a:tcPr anchor="ctr" marB="63500" marT="63500" marR="0" marL="0">
+                    <a:lnL algn="ctr" cmpd="sng" cap="flat" w="0">
+                      <a:noFill/>
+                      <a:prstDash val="solid"/>
+                    </a:lnL>
+                    <a:lnR algn="ctr" cmpd="sng" cap="flat" w="0">
+                      <a:noFill/>
+                      <a:prstDash val="solid"/>
+                    </a:lnR>
+                    <a:lnT algn="ctr" cmpd="sng" cap="flat" w="0">
+                      <a:noFill/>
+                      <a:prstDash val="solid"/>
+                    </a:lnT>
+                    <a:lnB algn="ctr" cmpd="sng" cap="flat" w="0">
+                      <a:noFill/>
+                      <a:prstDash val="solid"/>
+                    </a:lnB>
+                    <a:solidFill>
+                      <a:srgbClr val="EFEFEF">
+                        <a:alpha val="100000"/>
+                      </a:srgbClr>
+                    </a:solidFill>
+                  </a:tcPr>
+                </a:tc>
+                <a:tc>
+                  <a:txBody>
+                    <a:bodyPr/>
+                    <a:lstStyle/>
+                    <a:p>
+                      <a:pPr algn="ctr" marL="63500" marR="63500">
+                        <a:lnSpc>
+                          <a:spcPct val="100000"/>
+                        </a:lnSpc>
+                        <a:spcBef>
+                          <a:spcPts val="500"/>
+                        </a:spcBef>
+                        <a:spcAft>
+                          <a:spcPts val="500"/>
+                        </a:spcAft>
+                        <a:buNone/>
+                      </a:pPr>
+                      <a:r>
+                        <a:rPr cap="none" sz="1100" i="0" b="0" u="none" strike="noStrike">
+                          <a:solidFill>
+                            <a:srgbClr val="FF0000">
+                              <a:alpha val="100000"/>
+                            </a:srgbClr>
+                          </a:solidFill>
+                          <a:latin typeface="Arial"/>
+                          <a:cs typeface="Arial"/>
+                          <a:ea typeface="Arial"/>
+                          <a:sym typeface="Arial"/>
+                        </a:rPr>
+                        <a:t>Up</a:t>
+                      </a:r>
+                    </a:p>
+                  </a:txBody>
+                  <a:tcPr anchor="ctr" marB="63500" marT="63500" marR="0" marL="0">
+                    <a:lnL algn="ctr" cmpd="sng" cap="flat" w="0">
+                      <a:noFill/>
+                      <a:prstDash val="solid"/>
+                    </a:lnL>
+                    <a:lnR algn="ctr" cmpd="sng" cap="flat" w="0">
+                      <a:noFill/>
+                      <a:prstDash val="solid"/>
+                    </a:lnR>
+                    <a:lnT algn="ctr" cmpd="sng" cap="flat" w="0">
+                      <a:noFill/>
+                      <a:prstDash val="solid"/>
+                    </a:lnT>
+                    <a:lnB algn="ctr" cmpd="sng" cap="flat" w="0">
+                      <a:noFill/>
+                      <a:prstDash val="solid"/>
+                    </a:lnB>
+                    <a:solidFill>
+                      <a:srgbClr val="EFEFEF">
+                        <a:alpha val="100000"/>
+                      </a:srgbClr>
+                    </a:solidFill>
+                  </a:tcPr>
+                </a:tc>
+              </a:tr>
+              <a:tr h="388945">
+                <a:tc>
+                  <a:txBody>
+                    <a:bodyPr/>
+                    <a:lstStyle/>
+                    <a:p>
+                      <a:pPr algn="ctr" marL="63500" marR="63500">
+                        <a:lnSpc>
+                          <a:spcPct val="100000"/>
+                        </a:lnSpc>
+                        <a:spcBef>
+                          <a:spcPts val="500"/>
+                        </a:spcBef>
+                        <a:spcAft>
+                          <a:spcPts val="500"/>
+                        </a:spcAft>
+                        <a:buNone/>
+                      </a:pPr>
+                      <a:r>
+                        <a:rPr cap="none" sz="1100" i="0" b="0" u="none" strike="noStrike">
+                          <a:solidFill>
+                            <a:srgbClr val="000000">
+                              <a:alpha val="100000"/>
+                            </a:srgbClr>
+                          </a:solidFill>
+                          <a:latin typeface="Arial"/>
+                          <a:cs typeface="Arial"/>
+                          <a:ea typeface="Arial"/>
+                          <a:sym typeface="Arial"/>
+                        </a:rPr>
+                        <a:t>PERI</a:t>
+                      </a:r>
+                    </a:p>
+                  </a:txBody>
+                  <a:tcPr anchor="ctr" marB="63500" marT="63500" marR="0" marL="0">
+                    <a:lnL algn="ctr" cmpd="sng" cap="flat" w="0">
+                      <a:noFill/>
+                      <a:prstDash val="solid"/>
+                    </a:lnL>
+                    <a:lnR algn="ctr" cmpd="sng" cap="flat" w="0">
+                      <a:noFill/>
+                      <a:prstDash val="solid"/>
+                    </a:lnR>
+                    <a:lnT algn="ctr" cmpd="sng" cap="flat" w="0">
+                      <a:noFill/>
+                      <a:prstDash val="solid"/>
+                    </a:lnT>
+                    <a:lnB algn="ctr" cmpd="sng" cap="flat" w="0">
+                      <a:noFill/>
+                      <a:prstDash val="solid"/>
+                    </a:lnB>
+                    <a:solidFill>
+                      <a:srgbClr val="FFFFFF">
+                        <a:alpha val="0"/>
+                      </a:srgbClr>
+                    </a:solidFill>
+                  </a:tcPr>
+                </a:tc>
+                <a:tc>
+                  <a:txBody>
+                    <a:bodyPr/>
+                    <a:lstStyle/>
+                    <a:p>
+                      <a:pPr algn="ctr" marL="63500" marR="63500">
+                        <a:lnSpc>
+                          <a:spcPct val="100000"/>
+                        </a:lnSpc>
+                        <a:spcBef>
+                          <a:spcPts val="500"/>
+                        </a:spcBef>
+                        <a:spcAft>
+                          <a:spcPts val="500"/>
+                        </a:spcAft>
+                        <a:buNone/>
+                      </a:pPr>
+                      <a:r>
+                        <a:rPr cap="none" sz="1100" i="0" b="0" u="none" strike="noStrike">
+                          <a:solidFill>
+                            <a:srgbClr val="000000">
+                              <a:alpha val="100000"/>
+                            </a:srgbClr>
+                          </a:solidFill>
+                          <a:latin typeface="Arial"/>
+                          <a:cs typeface="Arial"/>
+                          <a:ea typeface="Arial"/>
+                          <a:sym typeface="Arial"/>
+                        </a:rPr>
+                        <a:t>BL</a:t>
+                      </a:r>
+                    </a:p>
+                  </a:txBody>
+                  <a:tcPr anchor="ctr" marB="63500" marT="63500" marR="0" marL="0">
+                    <a:lnL algn="ctr" cmpd="sng" cap="flat" w="0">
+                      <a:noFill/>
+                      <a:prstDash val="solid"/>
+                    </a:lnL>
+                    <a:lnR algn="ctr" cmpd="sng" cap="flat" w="0">
+                      <a:noFill/>
+                      <a:prstDash val="solid"/>
+                    </a:lnR>
+                    <a:lnT algn="ctr" cmpd="sng" cap="flat" w="0">
+                      <a:noFill/>
+                      <a:prstDash val="solid"/>
+                    </a:lnT>
+                    <a:lnB algn="ctr" cmpd="sng" cap="flat" w="0">
+                      <a:noFill/>
+                      <a:prstDash val="solid"/>
+                    </a:lnB>
+                    <a:solidFill>
+                      <a:srgbClr val="FFFFFF">
+                        <a:alpha val="0"/>
+                      </a:srgbClr>
+                    </a:solidFill>
+                  </a:tcPr>
+                </a:tc>
+                <a:tc>
+                  <a:txBody>
+                    <a:bodyPr/>
+                    <a:lstStyle/>
+                    <a:p>
+                      <a:pPr algn="ctr" marL="63500" marR="63500">
+                        <a:lnSpc>
+                          <a:spcPct val="100000"/>
+                        </a:lnSpc>
+                        <a:spcBef>
+                          <a:spcPts val="500"/>
+                        </a:spcBef>
+                        <a:spcAft>
+                          <a:spcPts val="500"/>
+                        </a:spcAft>
+                        <a:buNone/>
+                      </a:pPr>
+                      <a:r>
+                        <a:rPr cap="none" sz="1100" i="0" b="0" u="none" strike="noStrike">
+                          <a:solidFill>
+                            <a:srgbClr val="000000">
+                              <a:alpha val="100000"/>
+                            </a:srgbClr>
+                          </a:solidFill>
+                          <a:latin typeface="Arial"/>
+                          <a:cs typeface="Arial"/>
+                          <a:ea typeface="Arial"/>
+                          <a:sym typeface="Arial"/>
+                        </a:rPr>
+                        <a:t>BL_2</a:t>
+                      </a:r>
+                    </a:p>
+                  </a:txBody>
+                  <a:tcPr anchor="ctr" marB="63500" marT="63500" marR="0" marL="0">
+                    <a:lnL algn="ctr" cmpd="sng" cap="flat" w="0">
+                      <a:noFill/>
+                      <a:prstDash val="solid"/>
+                    </a:lnL>
+                    <a:lnR algn="ctr" cmpd="sng" cap="flat" w="0">
+                      <a:noFill/>
+                      <a:prstDash val="solid"/>
+                    </a:lnR>
+                    <a:lnT algn="ctr" cmpd="sng" cap="flat" w="0">
+                      <a:noFill/>
+                      <a:prstDash val="solid"/>
+                    </a:lnT>
+                    <a:lnB algn="ctr" cmpd="sng" cap="flat" w="0">
+                      <a:noFill/>
+                      <a:prstDash val="solid"/>
+                    </a:lnB>
+                    <a:solidFill>
+                      <a:srgbClr val="FFFFFF">
+                        <a:alpha val="0"/>
+                      </a:srgbClr>
+                    </a:solidFill>
+                  </a:tcPr>
+                </a:tc>
+                <a:tc>
+                  <a:txBody>
+                    <a:bodyPr/>
+                    <a:lstStyle/>
+                    <a:p>
+                      <a:pPr algn="ctr" marL="63500" marR="63500">
+                        <a:lnSpc>
+                          <a:spcPct val="100000"/>
+                        </a:lnSpc>
+                        <a:spcBef>
+                          <a:spcPts val="500"/>
+                        </a:spcBef>
+                        <a:spcAft>
+                          <a:spcPts val="500"/>
+                        </a:spcAft>
+                        <a:buNone/>
+                      </a:pPr>
+                      <a:r>
+                        <a:rPr cap="none" sz="1100" i="0" b="0" u="none" strike="noStrike">
+                          <a:solidFill>
+                            <a:srgbClr val="000000">
+                              <a:alpha val="100000"/>
+                            </a:srgbClr>
+                          </a:solidFill>
+                          <a:latin typeface="Arial"/>
+                          <a:cs typeface="Arial"/>
+                          <a:ea typeface="Arial"/>
+                          <a:sym typeface="Arial"/>
+                        </a:rPr>
+                        <a:t>Peri_BL_101</a:t>
+                      </a:r>
+                    </a:p>
+                  </a:txBody>
+                  <a:tcPr anchor="ctr" marB="63500" marT="63500" marR="0" marL="0">
+                    <a:lnL algn="ctr" cmpd="sng" cap="flat" w="0">
+                      <a:noFill/>
+                      <a:prstDash val="solid"/>
+                    </a:lnL>
+                    <a:lnR algn="ctr" cmpd="sng" cap="flat" w="0">
+                      <a:noFill/>
+                      <a:prstDash val="solid"/>
+                    </a:lnR>
+                    <a:lnT algn="ctr" cmpd="sng" cap="flat" w="0">
+                      <a:noFill/>
+                      <a:prstDash val="solid"/>
+                    </a:lnT>
+                    <a:lnB algn="ctr" cmpd="sng" cap="flat" w="0">
+                      <a:noFill/>
+                      <a:prstDash val="solid"/>
+                    </a:lnB>
+                    <a:solidFill>
+                      <a:srgbClr val="FFFFFF">
+                        <a:alpha val="0"/>
+                      </a:srgbClr>
+                    </a:solidFill>
+                  </a:tcPr>
+                </a:tc>
+                <a:tc>
+                  <a:txBody>
+                    <a:bodyPr/>
+                    <a:lstStyle/>
+                    <a:p>
+                      <a:pPr algn="ctr" marL="63500" marR="63500">
+                        <a:lnSpc>
+                          <a:spcPct val="100000"/>
+                        </a:lnSpc>
+                        <a:spcBef>
+                          <a:spcPts val="500"/>
+                        </a:spcBef>
+                        <a:spcAft>
+                          <a:spcPts val="500"/>
+                        </a:spcAft>
+                        <a:buNone/>
+                      </a:pPr>
+                      <a:r>
+                        <a:rPr cap="none" sz="1100" i="0" b="0" u="none" strike="noStrike">
+                          <a:solidFill>
+                            <a:srgbClr val="000000">
+                              <a:alpha val="100000"/>
+                            </a:srgbClr>
+                          </a:solidFill>
+                          <a:latin typeface="Arial"/>
+                          <a:cs typeface="Arial"/>
+                          <a:ea typeface="Arial"/>
+                          <a:sym typeface="Arial"/>
+                        </a:rPr>
+                        <a:t>0.50</a:t>
+                      </a:r>
+                    </a:p>
+                  </a:txBody>
+                  <a:tcPr anchor="ctr" marB="63500" marT="63500" marR="0" marL="0">
+                    <a:lnL algn="ctr" cmpd="sng" cap="flat" w="0">
+                      <a:noFill/>
+                      <a:prstDash val="solid"/>
+                    </a:lnL>
+                    <a:lnR algn="ctr" cmpd="sng" cap="flat" w="0">
+                      <a:noFill/>
+                      <a:prstDash val="solid"/>
+                    </a:lnR>
+                    <a:lnT algn="ctr" cmpd="sng" cap="flat" w="0">
+                      <a:noFill/>
+                      <a:prstDash val="solid"/>
+                    </a:lnT>
+                    <a:lnB algn="ctr" cmpd="sng" cap="flat" w="0">
+                      <a:noFill/>
+                      <a:prstDash val="solid"/>
+                    </a:lnB>
+                    <a:solidFill>
+                      <a:srgbClr val="FFFFFF">
+                        <a:alpha val="0"/>
+                      </a:srgbClr>
+                    </a:solidFill>
+                  </a:tcPr>
+                </a:tc>
+                <a:tc>
+                  <a:txBody>
+                    <a:bodyPr/>
+                    <a:lstStyle/>
+                    <a:p>
+                      <a:pPr algn="ctr" marL="63500" marR="63500">
+                        <a:lnSpc>
+                          <a:spcPct val="100000"/>
+                        </a:lnSpc>
+                        <a:spcBef>
+                          <a:spcPts val="500"/>
+                        </a:spcBef>
+                        <a:spcAft>
+                          <a:spcPts val="500"/>
+                        </a:spcAft>
+                        <a:buNone/>
+                      </a:pPr>
+                      <a:r>
+                        <a:rPr cap="none" sz="1100" i="0" b="0" u="none" strike="noStrike">
+                          <a:solidFill>
+                            <a:srgbClr val="FF0000">
+                              <a:alpha val="100000"/>
+                            </a:srgbClr>
+                          </a:solidFill>
+                          <a:latin typeface="Arial"/>
+                          <a:cs typeface="Arial"/>
+                          <a:ea typeface="Arial"/>
+                          <a:sym typeface="Arial"/>
+                        </a:rPr>
+                        <a:t>Up</a:t>
+                      </a:r>
+                    </a:p>
+                  </a:txBody>
+                  <a:tcPr anchor="ctr" marB="63500" marT="63500" marR="0" marL="0">
+                    <a:lnL algn="ctr" cmpd="sng" cap="flat" w="0">
+                      <a:noFill/>
+                      <a:prstDash val="solid"/>
+                    </a:lnL>
+                    <a:lnR algn="ctr" cmpd="sng" cap="flat" w="0">
+                      <a:noFill/>
+                      <a:prstDash val="solid"/>
+                    </a:lnR>
+                    <a:lnT algn="ctr" cmpd="sng" cap="flat" w="0">
+                      <a:noFill/>
+                      <a:prstDash val="solid"/>
+                    </a:lnT>
+                    <a:lnB algn="ctr" cmpd="sng" cap="flat" w="0">
+                      <a:noFill/>
+                      <a:prstDash val="solid"/>
+                    </a:lnB>
+                    <a:solidFill>
+                      <a:srgbClr val="FFFFFF">
+                        <a:alpha val="0"/>
+                      </a:srgbClr>
+                    </a:solidFill>
+                  </a:tcPr>
+                </a:tc>
+              </a:tr>
+            </a:tbl>
+          </a:graphicData>
+        </a:graphic>
+      </p:graphicFrame>
+    </p:spTree>
+  </p:cSld>
+  <p:clrMapOvr>
+    <a:masterClrMapping/>
+  </p:clrMapOvr>
+</p:sld>
+</file>
+
+<file path=ppt/slides/slide3.xml><?xml version="1.0" encoding="utf-8"?>
 <p:sld xmlns:a="http://schemas.openxmlformats.org/drawingml/2006/main" xmlns:r="http://schemas.openxmlformats.org/officeDocument/2006/relationships" xmlns:p="http://schemas.openxmlformats.org/presentationml/2006/main">
   <p:cSld>
     <p:spTree>
@@ -3422,7 +10040,7 @@
 </p:sld>
 </file>
 
-<file path=ppt/slides/slide3.xml><?xml version="1.0" encoding="utf-8"?>
+<file path=ppt/slides/slide4.xml><?xml version="1.0" encoding="utf-8"?>
 <p:sld xmlns:a="http://schemas.openxmlformats.org/drawingml/2006/main" xmlns:r="http://schemas.openxmlformats.org/officeDocument/2006/relationships" xmlns:p="http://schemas.openxmlformats.org/presentationml/2006/main">
   <p:cSld>
     <p:spTree>
@@ -3682,7 +10300,7 @@
 </p:sld>
 </file>
 
-<file path=ppt/slides/slide4.xml><?xml version="1.0" encoding="utf-8"?>
+<file path=ppt/slides/slide5.xml><?xml version="1.0" encoding="utf-8"?>
 <p:sld xmlns:a="http://schemas.openxmlformats.org/drawingml/2006/main" xmlns:r="http://schemas.openxmlformats.org/officeDocument/2006/relationships" xmlns:p="http://schemas.openxmlformats.org/presentationml/2006/main">
   <p:cSld>
     <p:spTree>
@@ -3942,7 +10560,7 @@
 </p:sld>
 </file>
 
-<file path=ppt/slides/slide5.xml><?xml version="1.0" encoding="utf-8"?>
+<file path=ppt/slides/slide6.xml><?xml version="1.0" encoding="utf-8"?>
 <p:sld xmlns:a="http://schemas.openxmlformats.org/drawingml/2006/main" xmlns:r="http://schemas.openxmlformats.org/officeDocument/2006/relationships" xmlns:p="http://schemas.openxmlformats.org/presentationml/2006/main">
   <p:cSld>
     <p:spTree>
@@ -4202,7 +10820,7 @@
 </p:sld>
 </file>
 
-<file path=ppt/slides/slide6.xml><?xml version="1.0" encoding="utf-8"?>
+<file path=ppt/slides/slide7.xml><?xml version="1.0" encoding="utf-8"?>
 <p:sld xmlns:a="http://schemas.openxmlformats.org/drawingml/2006/main" xmlns:r="http://schemas.openxmlformats.org/officeDocument/2006/relationships" xmlns:p="http://schemas.openxmlformats.org/presentationml/2006/main">
   <p:cSld>
     <p:spTree>

--- a/output/Sigma_Summary_Latest.pptx
+++ b/output/Sigma_Summary_Latest.pptx
@@ -9842,8 +9842,8 @@
         </p:blipFill>
         <p:spPr>
           <a:xfrm>
-            <a:off x="457200" y="1097280"/>
-            <a:ext cx="2818638" cy="2651760"/>
+            <a:off x="868680" y="2240280"/>
+            <a:ext cx="2558034" cy="1975104"/>
           </a:xfrm>
           <a:prstGeom prst="rect">
             <a:avLst/>
@@ -9868,8 +9868,8 @@
         </p:blipFill>
         <p:spPr>
           <a:xfrm>
-            <a:off x="3275838" y="1097280"/>
-            <a:ext cx="2818638" cy="2651760"/>
+            <a:off x="3499866" y="2240280"/>
+            <a:ext cx="2558034" cy="1975104"/>
           </a:xfrm>
           <a:prstGeom prst="rect">
             <a:avLst/>
@@ -9894,8 +9894,8 @@
         </p:blipFill>
         <p:spPr>
           <a:xfrm>
-            <a:off x="6094476" y="1097280"/>
-            <a:ext cx="2818638" cy="2651760"/>
+            <a:off x="6131052" y="2240280"/>
+            <a:ext cx="2558034" cy="1975104"/>
           </a:xfrm>
           <a:prstGeom prst="rect">
             <a:avLst/>
@@ -9920,8 +9920,8 @@
         </p:blipFill>
         <p:spPr>
           <a:xfrm>
-            <a:off x="8913114" y="1097280"/>
-            <a:ext cx="2818638" cy="2651760"/>
+            <a:off x="8762238" y="2240280"/>
+            <a:ext cx="2558034" cy="1975104"/>
           </a:xfrm>
           <a:prstGeom prst="rect">
             <a:avLst/>
@@ -9946,8 +9946,8 @@
         </p:blipFill>
         <p:spPr>
           <a:xfrm>
-            <a:off x="457200" y="3749040"/>
-            <a:ext cx="2818638" cy="2651760"/>
+            <a:off x="868680" y="4288536"/>
+            <a:ext cx="2558034" cy="1975104"/>
           </a:xfrm>
           <a:prstGeom prst="rect">
             <a:avLst/>
@@ -9972,8 +9972,8 @@
         </p:blipFill>
         <p:spPr>
           <a:xfrm>
-            <a:off x="3275838" y="3749040"/>
-            <a:ext cx="2818638" cy="2651760"/>
+            <a:off x="3499866" y="4288536"/>
+            <a:ext cx="2558034" cy="1975104"/>
           </a:xfrm>
           <a:prstGeom prst="rect">
             <a:avLst/>
@@ -9998,8 +9998,8 @@
         </p:blipFill>
         <p:spPr>
           <a:xfrm>
-            <a:off x="6094476" y="3749040"/>
-            <a:ext cx="2818638" cy="2651760"/>
+            <a:off x="6131052" y="4288536"/>
+            <a:ext cx="2558034" cy="1975104"/>
           </a:xfrm>
           <a:prstGeom prst="rect">
             <a:avLst/>
@@ -10024,8 +10024,8 @@
         </p:blipFill>
         <p:spPr>
           <a:xfrm>
-            <a:off x="8913114" y="3749040"/>
-            <a:ext cx="2818638" cy="2651760"/>
+            <a:off x="8762238" y="4288536"/>
+            <a:ext cx="2558034" cy="1975104"/>
           </a:xfrm>
           <a:prstGeom prst="rect">
             <a:avLst/>
@@ -10102,8 +10102,8 @@
         </p:blipFill>
         <p:spPr>
           <a:xfrm>
-            <a:off x="457200" y="1097280"/>
-            <a:ext cx="2818638" cy="2651760"/>
+            <a:off x="868680" y="2240280"/>
+            <a:ext cx="2558034" cy="1975104"/>
           </a:xfrm>
           <a:prstGeom prst="rect">
             <a:avLst/>
@@ -10128,8 +10128,8 @@
         </p:blipFill>
         <p:spPr>
           <a:xfrm>
-            <a:off x="3275838" y="1097280"/>
-            <a:ext cx="2818638" cy="2651760"/>
+            <a:off x="3499866" y="2240280"/>
+            <a:ext cx="2558034" cy="1975104"/>
           </a:xfrm>
           <a:prstGeom prst="rect">
             <a:avLst/>
@@ -10154,8 +10154,8 @@
         </p:blipFill>
         <p:spPr>
           <a:xfrm>
-            <a:off x="6094476" y="1097280"/>
-            <a:ext cx="2818638" cy="2651760"/>
+            <a:off x="6131052" y="2240280"/>
+            <a:ext cx="2558034" cy="1975104"/>
           </a:xfrm>
           <a:prstGeom prst="rect">
             <a:avLst/>
@@ -10180,8 +10180,8 @@
         </p:blipFill>
         <p:spPr>
           <a:xfrm>
-            <a:off x="8913114" y="1097280"/>
-            <a:ext cx="2818638" cy="2651760"/>
+            <a:off x="8762238" y="2240280"/>
+            <a:ext cx="2558034" cy="1975104"/>
           </a:xfrm>
           <a:prstGeom prst="rect">
             <a:avLst/>
@@ -10206,8 +10206,8 @@
         </p:blipFill>
         <p:spPr>
           <a:xfrm>
-            <a:off x="457200" y="3749040"/>
-            <a:ext cx="2818638" cy="2651760"/>
+            <a:off x="868680" y="4288536"/>
+            <a:ext cx="2558034" cy="1975104"/>
           </a:xfrm>
           <a:prstGeom prst="rect">
             <a:avLst/>
@@ -10232,8 +10232,8 @@
         </p:blipFill>
         <p:spPr>
           <a:xfrm>
-            <a:off x="3275838" y="3749040"/>
-            <a:ext cx="2818638" cy="2651760"/>
+            <a:off x="3499866" y="4288536"/>
+            <a:ext cx="2558034" cy="1975104"/>
           </a:xfrm>
           <a:prstGeom prst="rect">
             <a:avLst/>
@@ -10258,8 +10258,8 @@
         </p:blipFill>
         <p:spPr>
           <a:xfrm>
-            <a:off x="6094476" y="3749040"/>
-            <a:ext cx="2818638" cy="2651760"/>
+            <a:off x="6131052" y="4288536"/>
+            <a:ext cx="2558034" cy="1975104"/>
           </a:xfrm>
           <a:prstGeom prst="rect">
             <a:avLst/>
@@ -10284,8 +10284,8 @@
         </p:blipFill>
         <p:spPr>
           <a:xfrm>
-            <a:off x="8913114" y="3749040"/>
-            <a:ext cx="2818638" cy="2651760"/>
+            <a:off x="8762238" y="4288536"/>
+            <a:ext cx="2558034" cy="1975104"/>
           </a:xfrm>
           <a:prstGeom prst="rect">
             <a:avLst/>
@@ -10362,8 +10362,8 @@
         </p:blipFill>
         <p:spPr>
           <a:xfrm>
-            <a:off x="457200" y="1097280"/>
-            <a:ext cx="2818638" cy="2651760"/>
+            <a:off x="868680" y="2240280"/>
+            <a:ext cx="2558034" cy="1975104"/>
           </a:xfrm>
           <a:prstGeom prst="rect">
             <a:avLst/>
@@ -10388,8 +10388,8 @@
         </p:blipFill>
         <p:spPr>
           <a:xfrm>
-            <a:off x="3275838" y="1097280"/>
-            <a:ext cx="2818638" cy="2651760"/>
+            <a:off x="3499866" y="2240280"/>
+            <a:ext cx="2558034" cy="1975104"/>
           </a:xfrm>
           <a:prstGeom prst="rect">
             <a:avLst/>
@@ -10414,8 +10414,8 @@
         </p:blipFill>
         <p:spPr>
           <a:xfrm>
-            <a:off x="6094476" y="1097280"/>
-            <a:ext cx="2818638" cy="2651760"/>
+            <a:off x="6131052" y="2240280"/>
+            <a:ext cx="2558034" cy="1975104"/>
           </a:xfrm>
           <a:prstGeom prst="rect">
             <a:avLst/>
@@ -10440,8 +10440,8 @@
         </p:blipFill>
         <p:spPr>
           <a:xfrm>
-            <a:off x="8913114" y="1097280"/>
-            <a:ext cx="2818638" cy="2651760"/>
+            <a:off x="8762238" y="2240280"/>
+            <a:ext cx="2558034" cy="1975104"/>
           </a:xfrm>
           <a:prstGeom prst="rect">
             <a:avLst/>
@@ -10466,8 +10466,8 @@
         </p:blipFill>
         <p:spPr>
           <a:xfrm>
-            <a:off x="457200" y="3749040"/>
-            <a:ext cx="2818638" cy="2651760"/>
+            <a:off x="868680" y="4288536"/>
+            <a:ext cx="2558034" cy="1975104"/>
           </a:xfrm>
           <a:prstGeom prst="rect">
             <a:avLst/>
@@ -10492,8 +10492,8 @@
         </p:blipFill>
         <p:spPr>
           <a:xfrm>
-            <a:off x="3275838" y="3749040"/>
-            <a:ext cx="2818638" cy="2651760"/>
+            <a:off x="3499866" y="4288536"/>
+            <a:ext cx="2558034" cy="1975104"/>
           </a:xfrm>
           <a:prstGeom prst="rect">
             <a:avLst/>
@@ -10518,8 +10518,8 @@
         </p:blipFill>
         <p:spPr>
           <a:xfrm>
-            <a:off x="6094476" y="3749040"/>
-            <a:ext cx="2818638" cy="2651760"/>
+            <a:off x="6131052" y="4288536"/>
+            <a:ext cx="2558034" cy="1975104"/>
           </a:xfrm>
           <a:prstGeom prst="rect">
             <a:avLst/>
@@ -10544,8 +10544,8 @@
         </p:blipFill>
         <p:spPr>
           <a:xfrm>
-            <a:off x="8913114" y="3749040"/>
-            <a:ext cx="2818638" cy="2651760"/>
+            <a:off x="8762238" y="4288536"/>
+            <a:ext cx="2558034" cy="1975104"/>
           </a:xfrm>
           <a:prstGeom prst="rect">
             <a:avLst/>
@@ -10622,8 +10622,8 @@
         </p:blipFill>
         <p:spPr>
           <a:xfrm>
-            <a:off x="457200" y="1097280"/>
-            <a:ext cx="2818638" cy="2651760"/>
+            <a:off x="868680" y="2240280"/>
+            <a:ext cx="2558034" cy="1975104"/>
           </a:xfrm>
           <a:prstGeom prst="rect">
             <a:avLst/>
@@ -10648,8 +10648,8 @@
         </p:blipFill>
         <p:spPr>
           <a:xfrm>
-            <a:off x="3275838" y="1097280"/>
-            <a:ext cx="2818638" cy="2651760"/>
+            <a:off x="3499866" y="2240280"/>
+            <a:ext cx="2558034" cy="1975104"/>
           </a:xfrm>
           <a:prstGeom prst="rect">
             <a:avLst/>
@@ -10674,8 +10674,8 @@
         </p:blipFill>
         <p:spPr>
           <a:xfrm>
-            <a:off x="6094476" y="1097280"/>
-            <a:ext cx="2818638" cy="2651760"/>
+            <a:off x="6131052" y="2240280"/>
+            <a:ext cx="2558034" cy="1975104"/>
           </a:xfrm>
           <a:prstGeom prst="rect">
             <a:avLst/>
@@ -10700,8 +10700,8 @@
         </p:blipFill>
         <p:spPr>
           <a:xfrm>
-            <a:off x="8913114" y="1097280"/>
-            <a:ext cx="2818638" cy="2651760"/>
+            <a:off x="8762238" y="2240280"/>
+            <a:ext cx="2558034" cy="1975104"/>
           </a:xfrm>
           <a:prstGeom prst="rect">
             <a:avLst/>
@@ -10726,8 +10726,8 @@
         </p:blipFill>
         <p:spPr>
           <a:xfrm>
-            <a:off x="457200" y="3749040"/>
-            <a:ext cx="2818638" cy="2651760"/>
+            <a:off x="868680" y="4288536"/>
+            <a:ext cx="2558034" cy="1975104"/>
           </a:xfrm>
           <a:prstGeom prst="rect">
             <a:avLst/>
@@ -10752,8 +10752,8 @@
         </p:blipFill>
         <p:spPr>
           <a:xfrm>
-            <a:off x="3275838" y="3749040"/>
-            <a:ext cx="2818638" cy="2651760"/>
+            <a:off x="3499866" y="4288536"/>
+            <a:ext cx="2558034" cy="1975104"/>
           </a:xfrm>
           <a:prstGeom prst="rect">
             <a:avLst/>
@@ -10778,8 +10778,8 @@
         </p:blipFill>
         <p:spPr>
           <a:xfrm>
-            <a:off x="6094476" y="3749040"/>
-            <a:ext cx="2818638" cy="2651760"/>
+            <a:off x="6131052" y="4288536"/>
+            <a:ext cx="2558034" cy="1975104"/>
           </a:xfrm>
           <a:prstGeom prst="rect">
             <a:avLst/>
@@ -10804,8 +10804,8 @@
         </p:blipFill>
         <p:spPr>
           <a:xfrm>
-            <a:off x="8913114" y="3749040"/>
-            <a:ext cx="2818638" cy="2651760"/>
+            <a:off x="8762238" y="4288536"/>
+            <a:ext cx="2558034" cy="1975104"/>
           </a:xfrm>
           <a:prstGeom prst="rect">
             <a:avLst/>
@@ -10882,8 +10882,8 @@
         </p:blipFill>
         <p:spPr>
           <a:xfrm>
-            <a:off x="457200" y="1097280"/>
-            <a:ext cx="2818638" cy="2651760"/>
+            <a:off x="868680" y="2240280"/>
+            <a:ext cx="2558034" cy="1975104"/>
           </a:xfrm>
           <a:prstGeom prst="rect">
             <a:avLst/>
@@ -10908,8 +10908,8 @@
         </p:blipFill>
         <p:spPr>
           <a:xfrm>
-            <a:off x="3275838" y="1097280"/>
-            <a:ext cx="2818638" cy="2651760"/>
+            <a:off x="3499866" y="2240280"/>
+            <a:ext cx="2558034" cy="1975104"/>
           </a:xfrm>
           <a:prstGeom prst="rect">
             <a:avLst/>
@@ -10934,8 +10934,8 @@
         </p:blipFill>
         <p:spPr>
           <a:xfrm>
-            <a:off x="6094476" y="1097280"/>
-            <a:ext cx="2818638" cy="2651760"/>
+            <a:off x="6131052" y="2240280"/>
+            <a:ext cx="2558034" cy="1975104"/>
           </a:xfrm>
           <a:prstGeom prst="rect">
             <a:avLst/>
@@ -10960,8 +10960,8 @@
         </p:blipFill>
         <p:spPr>
           <a:xfrm>
-            <a:off x="8913114" y="1097280"/>
-            <a:ext cx="2818638" cy="2651760"/>
+            <a:off x="8762238" y="2240280"/>
+            <a:ext cx="2558034" cy="1975104"/>
           </a:xfrm>
           <a:prstGeom prst="rect">
             <a:avLst/>
@@ -10986,8 +10986,8 @@
         </p:blipFill>
         <p:spPr>
           <a:xfrm>
-            <a:off x="457200" y="3749040"/>
-            <a:ext cx="2818638" cy="2651760"/>
+            <a:off x="868680" y="4288536"/>
+            <a:ext cx="2558034" cy="1975104"/>
           </a:xfrm>
           <a:prstGeom prst="rect">
             <a:avLst/>
@@ -11012,8 +11012,8 @@
         </p:blipFill>
         <p:spPr>
           <a:xfrm>
-            <a:off x="3275838" y="3749040"/>
-            <a:ext cx="2818638" cy="2651760"/>
+            <a:off x="3499866" y="4288536"/>
+            <a:ext cx="2558034" cy="1975104"/>
           </a:xfrm>
           <a:prstGeom prst="rect">
             <a:avLst/>
@@ -11038,8 +11038,8 @@
         </p:blipFill>
         <p:spPr>
           <a:xfrm>
-            <a:off x="6094476" y="3749040"/>
-            <a:ext cx="2818638" cy="2651760"/>
+            <a:off x="6131052" y="4288536"/>
+            <a:ext cx="2558034" cy="1975104"/>
           </a:xfrm>
           <a:prstGeom prst="rect">
             <a:avLst/>
@@ -11064,8 +11064,8 @@
         </p:blipFill>
         <p:spPr>
           <a:xfrm>
-            <a:off x="8913114" y="3749040"/>
-            <a:ext cx="2818638" cy="2651760"/>
+            <a:off x="8762238" y="4288536"/>
+            <a:ext cx="2558034" cy="1975104"/>
           </a:xfrm>
           <a:prstGeom prst="rect">
             <a:avLst/>

--- a/output/Sigma_Summary_Latest.pptx
+++ b/output/Sigma_Summary_Latest.pptx
@@ -11,6 +11,7 @@
     <p:sldId id="259" r:id="rId10"/>
     <p:sldId id="260" r:id="rId11"/>
     <p:sldId id="261" r:id="rId12"/>
+    <p:sldId id="262" r:id="rId13"/>
   </p:sldIdLst>
   <p:sldSz cx="12191695" cy="6858000" type="screen4x3"/>
   <p:notesSz cx="6858000" cy="9144000"/>
@@ -3122,38 +3123,5543 @@
           <a:p>
             <a:r>
               <a:rPr/>
-              <a:t>Sigma Score Summary</a:t>
+              <a:t>Flagged Items Summary (1/2)</a:t>
             </a:r>
           </a:p>
         </p:txBody>
       </p:sp>
-      <p:sp>
-        <p:nvSpPr>
+      <p:graphicFrame>
+        <p:nvGraphicFramePr>
           <p:cNvPr id="3" name="Content Placeholder 2"/>
-          <p:cNvSpPr>
-            <a:spLocks noGrp="1"/>
-          </p:cNvSpPr>
-          <p:nvPr>
-            <p:ph idx="1"/>
-          </p:nvPr>
-        </p:nvSpPr>
-        <p:spPr>
-          <a:xfrm>
-            <a:off x="457200" y="1600200"/>
-            <a:ext cx="8229600" cy="4525963"/>
-          </a:xfrm>
-        </p:spPr>
-        <p:txBody>
-          <a:bodyPr/>
-          <a:lstStyle/>
-          <a:p>
-            <a:r>
-              <a:rPr/>
-              <a:t>All perfectly stable. 0 items flagged.</a:t>
-            </a:r>
-          </a:p>
-        </p:txBody>
-      </p:sp>
+          <p:cNvGraphicFramePr>
+            <a:graphicFrameLocks noGrp="true"/>
+          </p:cNvGraphicFramePr>
+          <p:nvPr/>
+        </p:nvGraphicFramePr>
+        <p:xfrm rot="0">
+          <a:off x="457200" y="1600200"/>
+          <a:ext cx="8229600" cy="4525963"/>
+        </p:xfrm>
+        <a:graphic>
+          <a:graphicData uri="http://schemas.openxmlformats.org/drawingml/2006/table">
+            <a:tbl>
+              <a:tblPr/>
+              <a:tblGrid>
+                <a:gridCol w="610228"/>
+                <a:gridCol w="664253"/>
+                <a:gridCol w="819642"/>
+                <a:gridCol w="1293380"/>
+                <a:gridCol w="649041"/>
+                <a:gridCol w="454839"/>
+              </a:tblGrid>
+              <a:tr h="364252">
+                <a:tc>
+                  <a:txBody>
+                    <a:bodyPr/>
+                    <a:lstStyle/>
+                    <a:p>
+                      <a:pPr algn="ctr" marL="63500" marR="63500">
+                        <a:lnSpc>
+                          <a:spcPct val="100000"/>
+                        </a:lnSpc>
+                        <a:spcBef>
+                          <a:spcPts val="500"/>
+                        </a:spcBef>
+                        <a:spcAft>
+                          <a:spcPts val="500"/>
+                        </a:spcAft>
+                        <a:buNone/>
+                      </a:pPr>
+                      <a:r>
+                        <a:rPr cap="none" sz="1100" i="0" b="1" u="none" strike="noStrike">
+                          <a:solidFill>
+                            <a:srgbClr val="000000">
+                              <a:alpha val="100000"/>
+                            </a:srgbClr>
+                          </a:solidFill>
+                          <a:latin typeface="Arial"/>
+                          <a:cs typeface="Arial"/>
+                          <a:ea typeface="Arial"/>
+                          <a:sym typeface="Arial"/>
+                        </a:rPr>
+                        <a:t>Cat1</a:t>
+                      </a:r>
+                    </a:p>
+                  </a:txBody>
+                  <a:tcPr anchor="ctr" marB="63500" marT="63500" marR="0" marL="0">
+                    <a:lnL algn="ctr" cmpd="sng" cap="flat" w="0">
+                      <a:noFill/>
+                      <a:prstDash val="solid"/>
+                    </a:lnL>
+                    <a:lnR algn="ctr" cmpd="sng" cap="flat" w="0">
+                      <a:noFill/>
+                      <a:prstDash val="solid"/>
+                    </a:lnR>
+                    <a:lnT algn="ctr" cmpd="sng" cap="flat" w="0">
+                      <a:noFill/>
+                      <a:prstDash val="solid"/>
+                    </a:lnT>
+                    <a:lnB algn="ctr" cmpd="sng" cap="flat" w="0">
+                      <a:noFill/>
+                      <a:prstDash val="solid"/>
+                    </a:lnB>
+                    <a:solidFill>
+                      <a:srgbClr val="CFCFCF">
+                        <a:alpha val="100000"/>
+                      </a:srgbClr>
+                    </a:solidFill>
+                  </a:tcPr>
+                </a:tc>
+                <a:tc>
+                  <a:txBody>
+                    <a:bodyPr/>
+                    <a:lstStyle/>
+                    <a:p>
+                      <a:pPr algn="ctr" marL="63500" marR="63500">
+                        <a:lnSpc>
+                          <a:spcPct val="100000"/>
+                        </a:lnSpc>
+                        <a:spcBef>
+                          <a:spcPts val="500"/>
+                        </a:spcBef>
+                        <a:spcAft>
+                          <a:spcPts val="500"/>
+                        </a:spcAft>
+                        <a:buNone/>
+                      </a:pPr>
+                      <a:r>
+                        <a:rPr cap="none" sz="1100" i="0" b="1" u="none" strike="noStrike">
+                          <a:solidFill>
+                            <a:srgbClr val="000000">
+                              <a:alpha val="100000"/>
+                            </a:srgbClr>
+                          </a:solidFill>
+                          <a:latin typeface="Arial"/>
+                          <a:cs typeface="Arial"/>
+                          <a:ea typeface="Arial"/>
+                          <a:sym typeface="Arial"/>
+                        </a:rPr>
+                        <a:t>Cat2</a:t>
+                      </a:r>
+                    </a:p>
+                  </a:txBody>
+                  <a:tcPr anchor="ctr" marB="63500" marT="63500" marR="0" marL="0">
+                    <a:lnL algn="ctr" cmpd="sng" cap="flat" w="0">
+                      <a:noFill/>
+                      <a:prstDash val="solid"/>
+                    </a:lnL>
+                    <a:lnR algn="ctr" cmpd="sng" cap="flat" w="0">
+                      <a:noFill/>
+                      <a:prstDash val="solid"/>
+                    </a:lnR>
+                    <a:lnT algn="ctr" cmpd="sng" cap="flat" w="0">
+                      <a:noFill/>
+                      <a:prstDash val="solid"/>
+                    </a:lnT>
+                    <a:lnB algn="ctr" cmpd="sng" cap="flat" w="0">
+                      <a:noFill/>
+                      <a:prstDash val="solid"/>
+                    </a:lnB>
+                    <a:solidFill>
+                      <a:srgbClr val="CFCFCF">
+                        <a:alpha val="100000"/>
+                      </a:srgbClr>
+                    </a:solidFill>
+                  </a:tcPr>
+                </a:tc>
+                <a:tc>
+                  <a:txBody>
+                    <a:bodyPr/>
+                    <a:lstStyle/>
+                    <a:p>
+                      <a:pPr algn="ctr" marL="63500" marR="63500">
+                        <a:lnSpc>
+                          <a:spcPct val="100000"/>
+                        </a:lnSpc>
+                        <a:spcBef>
+                          <a:spcPts val="500"/>
+                        </a:spcBef>
+                        <a:spcAft>
+                          <a:spcPts val="500"/>
+                        </a:spcAft>
+                        <a:buNone/>
+                      </a:pPr>
+                      <a:r>
+                        <a:rPr cap="none" sz="1100" i="0" b="1" u="none" strike="noStrike">
+                          <a:solidFill>
+                            <a:srgbClr val="000000">
+                              <a:alpha val="100000"/>
+                            </a:srgbClr>
+                          </a:solidFill>
+                          <a:latin typeface="Arial"/>
+                          <a:cs typeface="Arial"/>
+                          <a:ea typeface="Arial"/>
+                          <a:sym typeface="Arial"/>
+                        </a:rPr>
+                        <a:t>Cat3</a:t>
+                      </a:r>
+                    </a:p>
+                  </a:txBody>
+                  <a:tcPr anchor="ctr" marB="63500" marT="63500" marR="0" marL="0">
+                    <a:lnL algn="ctr" cmpd="sng" cap="flat" w="0">
+                      <a:noFill/>
+                      <a:prstDash val="solid"/>
+                    </a:lnL>
+                    <a:lnR algn="ctr" cmpd="sng" cap="flat" w="0">
+                      <a:noFill/>
+                      <a:prstDash val="solid"/>
+                    </a:lnR>
+                    <a:lnT algn="ctr" cmpd="sng" cap="flat" w="0">
+                      <a:noFill/>
+                      <a:prstDash val="solid"/>
+                    </a:lnT>
+                    <a:lnB algn="ctr" cmpd="sng" cap="flat" w="0">
+                      <a:noFill/>
+                      <a:prstDash val="solid"/>
+                    </a:lnB>
+                    <a:solidFill>
+                      <a:srgbClr val="CFCFCF">
+                        <a:alpha val="100000"/>
+                      </a:srgbClr>
+                    </a:solidFill>
+                  </a:tcPr>
+                </a:tc>
+                <a:tc>
+                  <a:txBody>
+                    <a:bodyPr/>
+                    <a:lstStyle/>
+                    <a:p>
+                      <a:pPr algn="ctr" marL="63500" marR="63500">
+                        <a:lnSpc>
+                          <a:spcPct val="100000"/>
+                        </a:lnSpc>
+                        <a:spcBef>
+                          <a:spcPts val="500"/>
+                        </a:spcBef>
+                        <a:spcAft>
+                          <a:spcPts val="500"/>
+                        </a:spcAft>
+                        <a:buNone/>
+                      </a:pPr>
+                      <a:r>
+                        <a:rPr cap="none" sz="1100" i="0" b="1" u="none" strike="noStrike">
+                          <a:solidFill>
+                            <a:srgbClr val="000000">
+                              <a:alpha val="100000"/>
+                            </a:srgbClr>
+                          </a:solidFill>
+                          <a:latin typeface="Arial"/>
+                          <a:cs typeface="Arial"/>
+                          <a:ea typeface="Arial"/>
+                          <a:sym typeface="Arial"/>
+                        </a:rPr>
+                        <a:t>MSR</a:t>
+                      </a:r>
+                    </a:p>
+                  </a:txBody>
+                  <a:tcPr anchor="ctr" marB="63500" marT="63500" marR="0" marL="0">
+                    <a:lnL algn="ctr" cmpd="sng" cap="flat" w="0">
+                      <a:noFill/>
+                      <a:prstDash val="solid"/>
+                    </a:lnL>
+                    <a:lnR algn="ctr" cmpd="sng" cap="flat" w="0">
+                      <a:noFill/>
+                      <a:prstDash val="solid"/>
+                    </a:lnR>
+                    <a:lnT algn="ctr" cmpd="sng" cap="flat" w="0">
+                      <a:noFill/>
+                      <a:prstDash val="solid"/>
+                    </a:lnT>
+                    <a:lnB algn="ctr" cmpd="sng" cap="flat" w="0">
+                      <a:noFill/>
+                      <a:prstDash val="solid"/>
+                    </a:lnB>
+                    <a:solidFill>
+                      <a:srgbClr val="CFCFCF">
+                        <a:alpha val="100000"/>
+                      </a:srgbClr>
+                    </a:solidFill>
+                  </a:tcPr>
+                </a:tc>
+                <a:tc>
+                  <a:txBody>
+                    <a:bodyPr/>
+                    <a:lstStyle/>
+                    <a:p>
+                      <a:pPr algn="ctr" marL="63500" marR="63500">
+                        <a:lnSpc>
+                          <a:spcPct val="100000"/>
+                        </a:lnSpc>
+                        <a:spcBef>
+                          <a:spcPts val="500"/>
+                        </a:spcBef>
+                        <a:spcAft>
+                          <a:spcPts val="500"/>
+                        </a:spcAft>
+                        <a:buNone/>
+                      </a:pPr>
+                      <a:r>
+                        <a:rPr cap="none" sz="1100" i="0" b="1" u="none" strike="noStrike">
+                          <a:solidFill>
+                            <a:srgbClr val="000000">
+                              <a:alpha val="100000"/>
+                            </a:srgbClr>
+                          </a:solidFill>
+                          <a:latin typeface="Arial"/>
+                          <a:cs typeface="Arial"/>
+                          <a:ea typeface="Arial"/>
+                          <a:sym typeface="Arial"/>
+                        </a:rPr>
+                        <a:t>Score</a:t>
+                      </a:r>
+                    </a:p>
+                  </a:txBody>
+                  <a:tcPr anchor="ctr" marB="63500" marT="63500" marR="0" marL="0">
+                    <a:lnL algn="ctr" cmpd="sng" cap="flat" w="0">
+                      <a:noFill/>
+                      <a:prstDash val="solid"/>
+                    </a:lnL>
+                    <a:lnR algn="ctr" cmpd="sng" cap="flat" w="0">
+                      <a:noFill/>
+                      <a:prstDash val="solid"/>
+                    </a:lnR>
+                    <a:lnT algn="ctr" cmpd="sng" cap="flat" w="0">
+                      <a:noFill/>
+                      <a:prstDash val="solid"/>
+                    </a:lnT>
+                    <a:lnB algn="ctr" cmpd="sng" cap="flat" w="0">
+                      <a:noFill/>
+                      <a:prstDash val="solid"/>
+                    </a:lnB>
+                    <a:solidFill>
+                      <a:srgbClr val="CFCFCF">
+                        <a:alpha val="100000"/>
+                      </a:srgbClr>
+                    </a:solidFill>
+                  </a:tcPr>
+                </a:tc>
+                <a:tc>
+                  <a:txBody>
+                    <a:bodyPr/>
+                    <a:lstStyle/>
+                    <a:p>
+                      <a:pPr algn="ctr" marL="63500" marR="63500">
+                        <a:lnSpc>
+                          <a:spcPct val="100000"/>
+                        </a:lnSpc>
+                        <a:spcBef>
+                          <a:spcPts val="500"/>
+                        </a:spcBef>
+                        <a:spcAft>
+                          <a:spcPts val="500"/>
+                        </a:spcAft>
+                        <a:buNone/>
+                      </a:pPr>
+                      <a:r>
+                        <a:rPr cap="none" sz="1100" i="0" b="1" u="none" strike="noStrike">
+                          <a:solidFill>
+                            <a:srgbClr val="000000">
+                              <a:alpha val="100000"/>
+                            </a:srgbClr>
+                          </a:solidFill>
+                          <a:latin typeface="Arial"/>
+                          <a:cs typeface="Arial"/>
+                          <a:ea typeface="Arial"/>
+                          <a:sym typeface="Arial"/>
+                        </a:rPr>
+                        <a:t>Dir</a:t>
+                      </a:r>
+                    </a:p>
+                  </a:txBody>
+                  <a:tcPr anchor="ctr" marB="63500" marT="63500" marR="0" marL="0">
+                    <a:lnL algn="ctr" cmpd="sng" cap="flat" w="0">
+                      <a:noFill/>
+                      <a:prstDash val="solid"/>
+                    </a:lnL>
+                    <a:lnR algn="ctr" cmpd="sng" cap="flat" w="0">
+                      <a:noFill/>
+                      <a:prstDash val="solid"/>
+                    </a:lnR>
+                    <a:lnT algn="ctr" cmpd="sng" cap="flat" w="0">
+                      <a:noFill/>
+                      <a:prstDash val="solid"/>
+                    </a:lnT>
+                    <a:lnB algn="ctr" cmpd="sng" cap="flat" w="0">
+                      <a:noFill/>
+                      <a:prstDash val="solid"/>
+                    </a:lnB>
+                    <a:solidFill>
+                      <a:srgbClr val="CFCFCF">
+                        <a:alpha val="100000"/>
+                      </a:srgbClr>
+                    </a:solidFill>
+                  </a:tcPr>
+                </a:tc>
+              </a:tr>
+              <a:tr h="388945">
+                <a:tc>
+                  <a:txBody>
+                    <a:bodyPr/>
+                    <a:lstStyle/>
+                    <a:p>
+                      <a:pPr algn="ctr" marL="63500" marR="63500">
+                        <a:lnSpc>
+                          <a:spcPct val="100000"/>
+                        </a:lnSpc>
+                        <a:spcBef>
+                          <a:spcPts val="500"/>
+                        </a:spcBef>
+                        <a:spcAft>
+                          <a:spcPts val="500"/>
+                        </a:spcAft>
+                        <a:buNone/>
+                      </a:pPr>
+                      <a:r>
+                        <a:rPr cap="none" sz="1100" i="0" b="0" u="none" strike="noStrike">
+                          <a:solidFill>
+                            <a:srgbClr val="000000">
+                              <a:alpha val="100000"/>
+                            </a:srgbClr>
+                          </a:solidFill>
+                          <a:latin typeface="Arial"/>
+                          <a:cs typeface="Arial"/>
+                          <a:ea typeface="Arial"/>
+                          <a:sym typeface="Arial"/>
+                        </a:rPr>
+                        <a:t>PERI</a:t>
+                      </a:r>
+                    </a:p>
+                  </a:txBody>
+                  <a:tcPr anchor="ctr" marB="63500" marT="63500" marR="0" marL="0">
+                    <a:lnL algn="ctr" cmpd="sng" cap="flat" w="0">
+                      <a:noFill/>
+                      <a:prstDash val="solid"/>
+                    </a:lnL>
+                    <a:lnR algn="ctr" cmpd="sng" cap="flat" w="0">
+                      <a:noFill/>
+                      <a:prstDash val="solid"/>
+                    </a:lnR>
+                    <a:lnT algn="ctr" cmpd="sng" cap="flat" w="0">
+                      <a:noFill/>
+                      <a:prstDash val="solid"/>
+                    </a:lnT>
+                    <a:lnB algn="ctr" cmpd="sng" cap="flat" w="0">
+                      <a:noFill/>
+                      <a:prstDash val="solid"/>
+                    </a:lnB>
+                    <a:solidFill>
+                      <a:srgbClr val="EFEFEF">
+                        <a:alpha val="100000"/>
+                      </a:srgbClr>
+                    </a:solidFill>
+                  </a:tcPr>
+                </a:tc>
+                <a:tc>
+                  <a:txBody>
+                    <a:bodyPr/>
+                    <a:lstStyle/>
+                    <a:p>
+                      <a:pPr algn="ctr" marL="63500" marR="63500">
+                        <a:lnSpc>
+                          <a:spcPct val="100000"/>
+                        </a:lnSpc>
+                        <a:spcBef>
+                          <a:spcPts val="500"/>
+                        </a:spcBef>
+                        <a:spcAft>
+                          <a:spcPts val="500"/>
+                        </a:spcAft>
+                        <a:buNone/>
+                      </a:pPr>
+                      <a:r>
+                        <a:rPr cap="none" sz="1100" i="0" b="0" u="none" strike="noStrike">
+                          <a:solidFill>
+                            <a:srgbClr val="000000">
+                              <a:alpha val="100000"/>
+                            </a:srgbClr>
+                          </a:solidFill>
+                          <a:latin typeface="Arial"/>
+                          <a:cs typeface="Arial"/>
+                          <a:ea typeface="Arial"/>
+                          <a:sym typeface="Arial"/>
+                        </a:rPr>
+                        <a:t>BL</a:t>
+                      </a:r>
+                    </a:p>
+                  </a:txBody>
+                  <a:tcPr anchor="ctr" marB="63500" marT="63500" marR="0" marL="0">
+                    <a:lnL algn="ctr" cmpd="sng" cap="flat" w="0">
+                      <a:noFill/>
+                      <a:prstDash val="solid"/>
+                    </a:lnL>
+                    <a:lnR algn="ctr" cmpd="sng" cap="flat" w="0">
+                      <a:noFill/>
+                      <a:prstDash val="solid"/>
+                    </a:lnR>
+                    <a:lnT algn="ctr" cmpd="sng" cap="flat" w="0">
+                      <a:noFill/>
+                      <a:prstDash val="solid"/>
+                    </a:lnT>
+                    <a:lnB algn="ctr" cmpd="sng" cap="flat" w="0">
+                      <a:noFill/>
+                      <a:prstDash val="solid"/>
+                    </a:lnB>
+                    <a:solidFill>
+                      <a:srgbClr val="EFEFEF">
+                        <a:alpha val="100000"/>
+                      </a:srgbClr>
+                    </a:solidFill>
+                  </a:tcPr>
+                </a:tc>
+                <a:tc>
+                  <a:txBody>
+                    <a:bodyPr/>
+                    <a:lstStyle/>
+                    <a:p>
+                      <a:pPr algn="ctr" marL="63500" marR="63500">
+                        <a:lnSpc>
+                          <a:spcPct val="100000"/>
+                        </a:lnSpc>
+                        <a:spcBef>
+                          <a:spcPts val="500"/>
+                        </a:spcBef>
+                        <a:spcAft>
+                          <a:spcPts val="500"/>
+                        </a:spcAft>
+                        <a:buNone/>
+                      </a:pPr>
+                      <a:r>
+                        <a:rPr cap="none" sz="1100" i="0" b="0" u="none" strike="noStrike">
+                          <a:solidFill>
+                            <a:srgbClr val="000000">
+                              <a:alpha val="100000"/>
+                            </a:srgbClr>
+                          </a:solidFill>
+                          <a:latin typeface="Arial"/>
+                          <a:cs typeface="Arial"/>
+                          <a:ea typeface="Arial"/>
+                          <a:sym typeface="Arial"/>
+                        </a:rPr>
+                        <a:t>BL_2</a:t>
+                      </a:r>
+                    </a:p>
+                  </a:txBody>
+                  <a:tcPr anchor="ctr" marB="63500" marT="63500" marR="0" marL="0">
+                    <a:lnL algn="ctr" cmpd="sng" cap="flat" w="0">
+                      <a:noFill/>
+                      <a:prstDash val="solid"/>
+                    </a:lnL>
+                    <a:lnR algn="ctr" cmpd="sng" cap="flat" w="0">
+                      <a:noFill/>
+                      <a:prstDash val="solid"/>
+                    </a:lnR>
+                    <a:lnT algn="ctr" cmpd="sng" cap="flat" w="0">
+                      <a:noFill/>
+                      <a:prstDash val="solid"/>
+                    </a:lnT>
+                    <a:lnB algn="ctr" cmpd="sng" cap="flat" w="0">
+                      <a:noFill/>
+                      <a:prstDash val="solid"/>
+                    </a:lnB>
+                    <a:solidFill>
+                      <a:srgbClr val="EFEFEF">
+                        <a:alpha val="100000"/>
+                      </a:srgbClr>
+                    </a:solidFill>
+                  </a:tcPr>
+                </a:tc>
+                <a:tc>
+                  <a:txBody>
+                    <a:bodyPr/>
+                    <a:lstStyle/>
+                    <a:p>
+                      <a:pPr algn="ctr" marL="63500" marR="63500">
+                        <a:lnSpc>
+                          <a:spcPct val="100000"/>
+                        </a:lnSpc>
+                        <a:spcBef>
+                          <a:spcPts val="500"/>
+                        </a:spcBef>
+                        <a:spcAft>
+                          <a:spcPts val="500"/>
+                        </a:spcAft>
+                        <a:buNone/>
+                      </a:pPr>
+                      <a:r>
+                        <a:rPr cap="none" sz="1100" i="0" b="0" u="none" strike="noStrike">
+                          <a:solidFill>
+                            <a:srgbClr val="000000">
+                              <a:alpha val="100000"/>
+                            </a:srgbClr>
+                          </a:solidFill>
+                          <a:latin typeface="Arial"/>
+                          <a:cs typeface="Arial"/>
+                          <a:ea typeface="Arial"/>
+                          <a:sym typeface="Arial"/>
+                        </a:rPr>
+                        <a:t>Peri_BL_122</a:t>
+                      </a:r>
+                    </a:p>
+                  </a:txBody>
+                  <a:tcPr anchor="ctr" marB="63500" marT="63500" marR="0" marL="0">
+                    <a:lnL algn="ctr" cmpd="sng" cap="flat" w="0">
+                      <a:noFill/>
+                      <a:prstDash val="solid"/>
+                    </a:lnL>
+                    <a:lnR algn="ctr" cmpd="sng" cap="flat" w="0">
+                      <a:noFill/>
+                      <a:prstDash val="solid"/>
+                    </a:lnR>
+                    <a:lnT algn="ctr" cmpd="sng" cap="flat" w="0">
+                      <a:noFill/>
+                      <a:prstDash val="solid"/>
+                    </a:lnT>
+                    <a:lnB algn="ctr" cmpd="sng" cap="flat" w="0">
+                      <a:noFill/>
+                      <a:prstDash val="solid"/>
+                    </a:lnB>
+                    <a:solidFill>
+                      <a:srgbClr val="EFEFEF">
+                        <a:alpha val="100000"/>
+                      </a:srgbClr>
+                    </a:solidFill>
+                  </a:tcPr>
+                </a:tc>
+                <a:tc>
+                  <a:txBody>
+                    <a:bodyPr/>
+                    <a:lstStyle/>
+                    <a:p>
+                      <a:pPr algn="ctr" marL="63500" marR="63500">
+                        <a:lnSpc>
+                          <a:spcPct val="100000"/>
+                        </a:lnSpc>
+                        <a:spcBef>
+                          <a:spcPts val="500"/>
+                        </a:spcBef>
+                        <a:spcAft>
+                          <a:spcPts val="500"/>
+                        </a:spcAft>
+                        <a:buNone/>
+                      </a:pPr>
+                      <a:r>
+                        <a:rPr cap="none" sz="1100" i="0" b="0" u="none" strike="noStrike">
+                          <a:solidFill>
+                            <a:srgbClr val="000000">
+                              <a:alpha val="100000"/>
+                            </a:srgbClr>
+                          </a:solidFill>
+                          <a:latin typeface="Arial"/>
+                          <a:cs typeface="Arial"/>
+                          <a:ea typeface="Arial"/>
+                          <a:sym typeface="Arial"/>
+                        </a:rPr>
+                        <a:t>0.73</a:t>
+                      </a:r>
+                    </a:p>
+                  </a:txBody>
+                  <a:tcPr anchor="ctr" marB="63500" marT="63500" marR="0" marL="0">
+                    <a:lnL algn="ctr" cmpd="sng" cap="flat" w="0">
+                      <a:noFill/>
+                      <a:prstDash val="solid"/>
+                    </a:lnL>
+                    <a:lnR algn="ctr" cmpd="sng" cap="flat" w="0">
+                      <a:noFill/>
+                      <a:prstDash val="solid"/>
+                    </a:lnR>
+                    <a:lnT algn="ctr" cmpd="sng" cap="flat" w="0">
+                      <a:noFill/>
+                      <a:prstDash val="solid"/>
+                    </a:lnT>
+                    <a:lnB algn="ctr" cmpd="sng" cap="flat" w="0">
+                      <a:noFill/>
+                      <a:prstDash val="solid"/>
+                    </a:lnB>
+                    <a:solidFill>
+                      <a:srgbClr val="EFEFEF">
+                        <a:alpha val="100000"/>
+                      </a:srgbClr>
+                    </a:solidFill>
+                  </a:tcPr>
+                </a:tc>
+                <a:tc>
+                  <a:txBody>
+                    <a:bodyPr/>
+                    <a:lstStyle/>
+                    <a:p>
+                      <a:pPr algn="ctr" marL="63500" marR="63500">
+                        <a:lnSpc>
+                          <a:spcPct val="100000"/>
+                        </a:lnSpc>
+                        <a:spcBef>
+                          <a:spcPts val="500"/>
+                        </a:spcBef>
+                        <a:spcAft>
+                          <a:spcPts val="500"/>
+                        </a:spcAft>
+                        <a:buNone/>
+                      </a:pPr>
+                      <a:r>
+                        <a:rPr cap="none" sz="1100" i="0" b="0" u="none" strike="noStrike">
+                          <a:solidFill>
+                            <a:srgbClr val="FF0000">
+                              <a:alpha val="100000"/>
+                            </a:srgbClr>
+                          </a:solidFill>
+                          <a:latin typeface="Arial"/>
+                          <a:cs typeface="Arial"/>
+                          <a:ea typeface="Arial"/>
+                          <a:sym typeface="Arial"/>
+                        </a:rPr>
+                        <a:t>Up</a:t>
+                      </a:r>
+                    </a:p>
+                  </a:txBody>
+                  <a:tcPr anchor="ctr" marB="63500" marT="63500" marR="0" marL="0">
+                    <a:lnL algn="ctr" cmpd="sng" cap="flat" w="0">
+                      <a:noFill/>
+                      <a:prstDash val="solid"/>
+                    </a:lnL>
+                    <a:lnR algn="ctr" cmpd="sng" cap="flat" w="0">
+                      <a:noFill/>
+                      <a:prstDash val="solid"/>
+                    </a:lnR>
+                    <a:lnT algn="ctr" cmpd="sng" cap="flat" w="0">
+                      <a:noFill/>
+                      <a:prstDash val="solid"/>
+                    </a:lnT>
+                    <a:lnB algn="ctr" cmpd="sng" cap="flat" w="0">
+                      <a:noFill/>
+                      <a:prstDash val="solid"/>
+                    </a:lnB>
+                    <a:solidFill>
+                      <a:srgbClr val="EFEFEF">
+                        <a:alpha val="100000"/>
+                      </a:srgbClr>
+                    </a:solidFill>
+                  </a:tcPr>
+                </a:tc>
+              </a:tr>
+              <a:tr h="390241">
+                <a:tc>
+                  <a:txBody>
+                    <a:bodyPr/>
+                    <a:lstStyle/>
+                    <a:p>
+                      <a:pPr algn="ctr" marL="63500" marR="63500">
+                        <a:lnSpc>
+                          <a:spcPct val="100000"/>
+                        </a:lnSpc>
+                        <a:spcBef>
+                          <a:spcPts val="500"/>
+                        </a:spcBef>
+                        <a:spcAft>
+                          <a:spcPts val="500"/>
+                        </a:spcAft>
+                        <a:buNone/>
+                      </a:pPr>
+                      <a:r>
+                        <a:rPr cap="none" sz="1100" i="0" b="0" u="none" strike="noStrike">
+                          <a:solidFill>
+                            <a:srgbClr val="000000">
+                              <a:alpha val="100000"/>
+                            </a:srgbClr>
+                          </a:solidFill>
+                          <a:latin typeface="Arial"/>
+                          <a:cs typeface="Arial"/>
+                          <a:ea typeface="Arial"/>
+                          <a:sym typeface="Arial"/>
+                        </a:rPr>
+                        <a:t>CELL</a:t>
+                      </a:r>
+                    </a:p>
+                  </a:txBody>
+                  <a:tcPr anchor="ctr" marB="63500" marT="63500" marR="0" marL="0">
+                    <a:lnL algn="ctr" cmpd="sng" cap="flat" w="0">
+                      <a:noFill/>
+                      <a:prstDash val="solid"/>
+                    </a:lnL>
+                    <a:lnR algn="ctr" cmpd="sng" cap="flat" w="0">
+                      <a:noFill/>
+                      <a:prstDash val="solid"/>
+                    </a:lnR>
+                    <a:lnT algn="ctr" cmpd="sng" cap="flat" w="0">
+                      <a:noFill/>
+                      <a:prstDash val="solid"/>
+                    </a:lnT>
+                    <a:lnB algn="ctr" cmpd="sng" cap="flat" w="0">
+                      <a:noFill/>
+                      <a:prstDash val="solid"/>
+                    </a:lnB>
+                    <a:solidFill>
+                      <a:srgbClr val="FFFFFF">
+                        <a:alpha val="0"/>
+                      </a:srgbClr>
+                    </a:solidFill>
+                  </a:tcPr>
+                </a:tc>
+                <a:tc>
+                  <a:txBody>
+                    <a:bodyPr/>
+                    <a:lstStyle/>
+                    <a:p>
+                      <a:pPr algn="ctr" marL="63500" marR="63500">
+                        <a:lnSpc>
+                          <a:spcPct val="100000"/>
+                        </a:lnSpc>
+                        <a:spcBef>
+                          <a:spcPts val="500"/>
+                        </a:spcBef>
+                        <a:spcAft>
+                          <a:spcPts val="500"/>
+                        </a:spcAft>
+                        <a:buNone/>
+                      </a:pPr>
+                      <a:r>
+                        <a:rPr cap="none" sz="1100" i="0" b="0" u="none" strike="noStrike">
+                          <a:solidFill>
+                            <a:srgbClr val="000000">
+                              <a:alpha val="100000"/>
+                            </a:srgbClr>
+                          </a:solidFill>
+                          <a:latin typeface="Arial"/>
+                          <a:cs typeface="Arial"/>
+                          <a:ea typeface="Arial"/>
+                          <a:sym typeface="Arial"/>
+                        </a:rPr>
+                        <a:t>TCMC</a:t>
+                      </a:r>
+                    </a:p>
+                  </a:txBody>
+                  <a:tcPr anchor="ctr" marB="63500" marT="63500" marR="0" marL="0">
+                    <a:lnL algn="ctr" cmpd="sng" cap="flat" w="0">
+                      <a:noFill/>
+                      <a:prstDash val="solid"/>
+                    </a:lnL>
+                    <a:lnR algn="ctr" cmpd="sng" cap="flat" w="0">
+                      <a:noFill/>
+                      <a:prstDash val="solid"/>
+                    </a:lnR>
+                    <a:lnT algn="ctr" cmpd="sng" cap="flat" w="0">
+                      <a:noFill/>
+                      <a:prstDash val="solid"/>
+                    </a:lnT>
+                    <a:lnB algn="ctr" cmpd="sng" cap="flat" w="0">
+                      <a:noFill/>
+                      <a:prstDash val="solid"/>
+                    </a:lnB>
+                    <a:solidFill>
+                      <a:srgbClr val="FFFFFF">
+                        <a:alpha val="0"/>
+                      </a:srgbClr>
+                    </a:solidFill>
+                  </a:tcPr>
+                </a:tc>
+                <a:tc>
+                  <a:txBody>
+                    <a:bodyPr/>
+                    <a:lstStyle/>
+                    <a:p>
+                      <a:pPr algn="ctr" marL="63500" marR="63500">
+                        <a:lnSpc>
+                          <a:spcPct val="100000"/>
+                        </a:lnSpc>
+                        <a:spcBef>
+                          <a:spcPts val="500"/>
+                        </a:spcBef>
+                        <a:spcAft>
+                          <a:spcPts val="500"/>
+                        </a:spcAft>
+                        <a:buNone/>
+                      </a:pPr>
+                      <a:r>
+                        <a:rPr cap="none" sz="1100" i="0" b="0" u="none" strike="noStrike">
+                          <a:solidFill>
+                            <a:srgbClr val="000000">
+                              <a:alpha val="100000"/>
+                            </a:srgbClr>
+                          </a:solidFill>
+                          <a:latin typeface="Arial"/>
+                          <a:cs typeface="Arial"/>
+                          <a:ea typeface="Arial"/>
+                          <a:sym typeface="Arial"/>
+                        </a:rPr>
+                        <a:t>TCMC_1</a:t>
+                      </a:r>
+                    </a:p>
+                  </a:txBody>
+                  <a:tcPr anchor="ctr" marB="63500" marT="63500" marR="0" marL="0">
+                    <a:lnL algn="ctr" cmpd="sng" cap="flat" w="0">
+                      <a:noFill/>
+                      <a:prstDash val="solid"/>
+                    </a:lnL>
+                    <a:lnR algn="ctr" cmpd="sng" cap="flat" w="0">
+                      <a:noFill/>
+                      <a:prstDash val="solid"/>
+                    </a:lnR>
+                    <a:lnT algn="ctr" cmpd="sng" cap="flat" w="0">
+                      <a:noFill/>
+                      <a:prstDash val="solid"/>
+                    </a:lnT>
+                    <a:lnB algn="ctr" cmpd="sng" cap="flat" w="0">
+                      <a:noFill/>
+                      <a:prstDash val="solid"/>
+                    </a:lnB>
+                    <a:solidFill>
+                      <a:srgbClr val="FFFFFF">
+                        <a:alpha val="0"/>
+                      </a:srgbClr>
+                    </a:solidFill>
+                  </a:tcPr>
+                </a:tc>
+                <a:tc>
+                  <a:txBody>
+                    <a:bodyPr/>
+                    <a:lstStyle/>
+                    <a:p>
+                      <a:pPr algn="ctr" marL="63500" marR="63500">
+                        <a:lnSpc>
+                          <a:spcPct val="100000"/>
+                        </a:lnSpc>
+                        <a:spcBef>
+                          <a:spcPts val="500"/>
+                        </a:spcBef>
+                        <a:spcAft>
+                          <a:spcPts val="500"/>
+                        </a:spcAft>
+                        <a:buNone/>
+                      </a:pPr>
+                      <a:r>
+                        <a:rPr cap="none" sz="1100" i="0" b="0" u="none" strike="noStrike">
+                          <a:solidFill>
+                            <a:srgbClr val="000000">
+                              <a:alpha val="100000"/>
+                            </a:srgbClr>
+                          </a:solidFill>
+                          <a:latin typeface="Arial"/>
+                          <a:cs typeface="Arial"/>
+                          <a:ea typeface="Arial"/>
+                          <a:sym typeface="Arial"/>
+                        </a:rPr>
+                        <a:t>Cell_TCMC_207</a:t>
+                      </a:r>
+                    </a:p>
+                  </a:txBody>
+                  <a:tcPr anchor="ctr" marB="63500" marT="63500" marR="0" marL="0">
+                    <a:lnL algn="ctr" cmpd="sng" cap="flat" w="0">
+                      <a:noFill/>
+                      <a:prstDash val="solid"/>
+                    </a:lnL>
+                    <a:lnR algn="ctr" cmpd="sng" cap="flat" w="0">
+                      <a:noFill/>
+                      <a:prstDash val="solid"/>
+                    </a:lnR>
+                    <a:lnT algn="ctr" cmpd="sng" cap="flat" w="0">
+                      <a:noFill/>
+                      <a:prstDash val="solid"/>
+                    </a:lnT>
+                    <a:lnB algn="ctr" cmpd="sng" cap="flat" w="0">
+                      <a:noFill/>
+                      <a:prstDash val="solid"/>
+                    </a:lnB>
+                    <a:solidFill>
+                      <a:srgbClr val="FFFFFF">
+                        <a:alpha val="0"/>
+                      </a:srgbClr>
+                    </a:solidFill>
+                  </a:tcPr>
+                </a:tc>
+                <a:tc>
+                  <a:txBody>
+                    <a:bodyPr/>
+                    <a:lstStyle/>
+                    <a:p>
+                      <a:pPr algn="ctr" marL="63500" marR="63500">
+                        <a:lnSpc>
+                          <a:spcPct val="100000"/>
+                        </a:lnSpc>
+                        <a:spcBef>
+                          <a:spcPts val="500"/>
+                        </a:spcBef>
+                        <a:spcAft>
+                          <a:spcPts val="500"/>
+                        </a:spcAft>
+                        <a:buNone/>
+                      </a:pPr>
+                      <a:r>
+                        <a:rPr cap="none" sz="1100" i="0" b="0" u="none" strike="noStrike">
+                          <a:solidFill>
+                            <a:srgbClr val="000000">
+                              <a:alpha val="100000"/>
+                            </a:srgbClr>
+                          </a:solidFill>
+                          <a:latin typeface="Arial"/>
+                          <a:cs typeface="Arial"/>
+                          <a:ea typeface="Arial"/>
+                          <a:sym typeface="Arial"/>
+                        </a:rPr>
+                        <a:t>0.67</a:t>
+                      </a:r>
+                    </a:p>
+                  </a:txBody>
+                  <a:tcPr anchor="ctr" marB="63500" marT="63500" marR="0" marL="0">
+                    <a:lnL algn="ctr" cmpd="sng" cap="flat" w="0">
+                      <a:noFill/>
+                      <a:prstDash val="solid"/>
+                    </a:lnL>
+                    <a:lnR algn="ctr" cmpd="sng" cap="flat" w="0">
+                      <a:noFill/>
+                      <a:prstDash val="solid"/>
+                    </a:lnR>
+                    <a:lnT algn="ctr" cmpd="sng" cap="flat" w="0">
+                      <a:noFill/>
+                      <a:prstDash val="solid"/>
+                    </a:lnT>
+                    <a:lnB algn="ctr" cmpd="sng" cap="flat" w="0">
+                      <a:noFill/>
+                      <a:prstDash val="solid"/>
+                    </a:lnB>
+                    <a:solidFill>
+                      <a:srgbClr val="FFFFFF">
+                        <a:alpha val="0"/>
+                      </a:srgbClr>
+                    </a:solidFill>
+                  </a:tcPr>
+                </a:tc>
+                <a:tc>
+                  <a:txBody>
+                    <a:bodyPr/>
+                    <a:lstStyle/>
+                    <a:p>
+                      <a:pPr algn="ctr" marL="63500" marR="63500">
+                        <a:lnSpc>
+                          <a:spcPct val="100000"/>
+                        </a:lnSpc>
+                        <a:spcBef>
+                          <a:spcPts val="500"/>
+                        </a:spcBef>
+                        <a:spcAft>
+                          <a:spcPts val="500"/>
+                        </a:spcAft>
+                        <a:buNone/>
+                      </a:pPr>
+                      <a:r>
+                        <a:rPr cap="none" sz="1100" i="0" b="0" u="none" strike="noStrike">
+                          <a:solidFill>
+                            <a:srgbClr val="FF0000">
+                              <a:alpha val="100000"/>
+                            </a:srgbClr>
+                          </a:solidFill>
+                          <a:latin typeface="Arial"/>
+                          <a:cs typeface="Arial"/>
+                          <a:ea typeface="Arial"/>
+                          <a:sym typeface="Arial"/>
+                        </a:rPr>
+                        <a:t>Up</a:t>
+                      </a:r>
+                    </a:p>
+                  </a:txBody>
+                  <a:tcPr anchor="ctr" marB="63500" marT="63500" marR="0" marL="0">
+                    <a:lnL algn="ctr" cmpd="sng" cap="flat" w="0">
+                      <a:noFill/>
+                      <a:prstDash val="solid"/>
+                    </a:lnL>
+                    <a:lnR algn="ctr" cmpd="sng" cap="flat" w="0">
+                      <a:noFill/>
+                      <a:prstDash val="solid"/>
+                    </a:lnR>
+                    <a:lnT algn="ctr" cmpd="sng" cap="flat" w="0">
+                      <a:noFill/>
+                      <a:prstDash val="solid"/>
+                    </a:lnT>
+                    <a:lnB algn="ctr" cmpd="sng" cap="flat" w="0">
+                      <a:noFill/>
+                      <a:prstDash val="solid"/>
+                    </a:lnB>
+                    <a:solidFill>
+                      <a:srgbClr val="FFFFFF">
+                        <a:alpha val="0"/>
+                      </a:srgbClr>
+                    </a:solidFill>
+                  </a:tcPr>
+                </a:tc>
+              </a:tr>
+              <a:tr h="390241">
+                <a:tc>
+                  <a:txBody>
+                    <a:bodyPr/>
+                    <a:lstStyle/>
+                    <a:p>
+                      <a:pPr algn="ctr" marL="63500" marR="63500">
+                        <a:lnSpc>
+                          <a:spcPct val="100000"/>
+                        </a:lnSpc>
+                        <a:spcBef>
+                          <a:spcPts val="500"/>
+                        </a:spcBef>
+                        <a:spcAft>
+                          <a:spcPts val="500"/>
+                        </a:spcAft>
+                        <a:buNone/>
+                      </a:pPr>
+                      <a:r>
+                        <a:rPr cap="none" sz="1100" i="0" b="0" u="none" strike="noStrike">
+                          <a:solidFill>
+                            <a:srgbClr val="000000">
+                              <a:alpha val="100000"/>
+                            </a:srgbClr>
+                          </a:solidFill>
+                          <a:latin typeface="Arial"/>
+                          <a:cs typeface="Arial"/>
+                          <a:ea typeface="Arial"/>
+                          <a:sym typeface="Arial"/>
+                        </a:rPr>
+                        <a:t>CELL</a:t>
+                      </a:r>
+                    </a:p>
+                  </a:txBody>
+                  <a:tcPr anchor="ctr" marB="63500" marT="63500" marR="0" marL="0">
+                    <a:lnL algn="ctr" cmpd="sng" cap="flat" w="0">
+                      <a:noFill/>
+                      <a:prstDash val="solid"/>
+                    </a:lnL>
+                    <a:lnR algn="ctr" cmpd="sng" cap="flat" w="0">
+                      <a:noFill/>
+                      <a:prstDash val="solid"/>
+                    </a:lnR>
+                    <a:lnT algn="ctr" cmpd="sng" cap="flat" w="0">
+                      <a:noFill/>
+                      <a:prstDash val="solid"/>
+                    </a:lnT>
+                    <a:lnB algn="ctr" cmpd="sng" cap="flat" w="0">
+                      <a:noFill/>
+                      <a:prstDash val="solid"/>
+                    </a:lnB>
+                    <a:solidFill>
+                      <a:srgbClr val="EFEFEF">
+                        <a:alpha val="100000"/>
+                      </a:srgbClr>
+                    </a:solidFill>
+                  </a:tcPr>
+                </a:tc>
+                <a:tc>
+                  <a:txBody>
+                    <a:bodyPr/>
+                    <a:lstStyle/>
+                    <a:p>
+                      <a:pPr algn="ctr" marL="63500" marR="63500">
+                        <a:lnSpc>
+                          <a:spcPct val="100000"/>
+                        </a:lnSpc>
+                        <a:spcBef>
+                          <a:spcPts val="500"/>
+                        </a:spcBef>
+                        <a:spcAft>
+                          <a:spcPts val="500"/>
+                        </a:spcAft>
+                        <a:buNone/>
+                      </a:pPr>
+                      <a:r>
+                        <a:rPr cap="none" sz="1100" i="0" b="0" u="none" strike="noStrike">
+                          <a:solidFill>
+                            <a:srgbClr val="000000">
+                              <a:alpha val="100000"/>
+                            </a:srgbClr>
+                          </a:solidFill>
+                          <a:latin typeface="Arial"/>
+                          <a:cs typeface="Arial"/>
+                          <a:ea typeface="Arial"/>
+                          <a:sym typeface="Arial"/>
+                        </a:rPr>
+                        <a:t>TCMC</a:t>
+                      </a:r>
+                    </a:p>
+                  </a:txBody>
+                  <a:tcPr anchor="ctr" marB="63500" marT="63500" marR="0" marL="0">
+                    <a:lnL algn="ctr" cmpd="sng" cap="flat" w="0">
+                      <a:noFill/>
+                      <a:prstDash val="solid"/>
+                    </a:lnL>
+                    <a:lnR algn="ctr" cmpd="sng" cap="flat" w="0">
+                      <a:noFill/>
+                      <a:prstDash val="solid"/>
+                    </a:lnR>
+                    <a:lnT algn="ctr" cmpd="sng" cap="flat" w="0">
+                      <a:noFill/>
+                      <a:prstDash val="solid"/>
+                    </a:lnT>
+                    <a:lnB algn="ctr" cmpd="sng" cap="flat" w="0">
+                      <a:noFill/>
+                      <a:prstDash val="solid"/>
+                    </a:lnB>
+                    <a:solidFill>
+                      <a:srgbClr val="EFEFEF">
+                        <a:alpha val="100000"/>
+                      </a:srgbClr>
+                    </a:solidFill>
+                  </a:tcPr>
+                </a:tc>
+                <a:tc>
+                  <a:txBody>
+                    <a:bodyPr/>
+                    <a:lstStyle/>
+                    <a:p>
+                      <a:pPr algn="ctr" marL="63500" marR="63500">
+                        <a:lnSpc>
+                          <a:spcPct val="100000"/>
+                        </a:lnSpc>
+                        <a:spcBef>
+                          <a:spcPts val="500"/>
+                        </a:spcBef>
+                        <a:spcAft>
+                          <a:spcPts val="500"/>
+                        </a:spcAft>
+                        <a:buNone/>
+                      </a:pPr>
+                      <a:r>
+                        <a:rPr cap="none" sz="1100" i="0" b="0" u="none" strike="noStrike">
+                          <a:solidFill>
+                            <a:srgbClr val="000000">
+                              <a:alpha val="100000"/>
+                            </a:srgbClr>
+                          </a:solidFill>
+                          <a:latin typeface="Arial"/>
+                          <a:cs typeface="Arial"/>
+                          <a:ea typeface="Arial"/>
+                          <a:sym typeface="Arial"/>
+                        </a:rPr>
+                        <a:t>TCMC_1</a:t>
+                      </a:r>
+                    </a:p>
+                  </a:txBody>
+                  <a:tcPr anchor="ctr" marB="63500" marT="63500" marR="0" marL="0">
+                    <a:lnL algn="ctr" cmpd="sng" cap="flat" w="0">
+                      <a:noFill/>
+                      <a:prstDash val="solid"/>
+                    </a:lnL>
+                    <a:lnR algn="ctr" cmpd="sng" cap="flat" w="0">
+                      <a:noFill/>
+                      <a:prstDash val="solid"/>
+                    </a:lnR>
+                    <a:lnT algn="ctr" cmpd="sng" cap="flat" w="0">
+                      <a:noFill/>
+                      <a:prstDash val="solid"/>
+                    </a:lnT>
+                    <a:lnB algn="ctr" cmpd="sng" cap="flat" w="0">
+                      <a:noFill/>
+                      <a:prstDash val="solid"/>
+                    </a:lnB>
+                    <a:solidFill>
+                      <a:srgbClr val="EFEFEF">
+                        <a:alpha val="100000"/>
+                      </a:srgbClr>
+                    </a:solidFill>
+                  </a:tcPr>
+                </a:tc>
+                <a:tc>
+                  <a:txBody>
+                    <a:bodyPr/>
+                    <a:lstStyle/>
+                    <a:p>
+                      <a:pPr algn="ctr" marL="63500" marR="63500">
+                        <a:lnSpc>
+                          <a:spcPct val="100000"/>
+                        </a:lnSpc>
+                        <a:spcBef>
+                          <a:spcPts val="500"/>
+                        </a:spcBef>
+                        <a:spcAft>
+                          <a:spcPts val="500"/>
+                        </a:spcAft>
+                        <a:buNone/>
+                      </a:pPr>
+                      <a:r>
+                        <a:rPr cap="none" sz="1100" i="0" b="0" u="none" strike="noStrike">
+                          <a:solidFill>
+                            <a:srgbClr val="000000">
+                              <a:alpha val="100000"/>
+                            </a:srgbClr>
+                          </a:solidFill>
+                          <a:latin typeface="Arial"/>
+                          <a:cs typeface="Arial"/>
+                          <a:ea typeface="Arial"/>
+                          <a:sym typeface="Arial"/>
+                        </a:rPr>
+                        <a:t>Cell_TCMC_212</a:t>
+                      </a:r>
+                    </a:p>
+                  </a:txBody>
+                  <a:tcPr anchor="ctr" marB="63500" marT="63500" marR="0" marL="0">
+                    <a:lnL algn="ctr" cmpd="sng" cap="flat" w="0">
+                      <a:noFill/>
+                      <a:prstDash val="solid"/>
+                    </a:lnL>
+                    <a:lnR algn="ctr" cmpd="sng" cap="flat" w="0">
+                      <a:noFill/>
+                      <a:prstDash val="solid"/>
+                    </a:lnR>
+                    <a:lnT algn="ctr" cmpd="sng" cap="flat" w="0">
+                      <a:noFill/>
+                      <a:prstDash val="solid"/>
+                    </a:lnT>
+                    <a:lnB algn="ctr" cmpd="sng" cap="flat" w="0">
+                      <a:noFill/>
+                      <a:prstDash val="solid"/>
+                    </a:lnB>
+                    <a:solidFill>
+                      <a:srgbClr val="EFEFEF">
+                        <a:alpha val="100000"/>
+                      </a:srgbClr>
+                    </a:solidFill>
+                  </a:tcPr>
+                </a:tc>
+                <a:tc>
+                  <a:txBody>
+                    <a:bodyPr/>
+                    <a:lstStyle/>
+                    <a:p>
+                      <a:pPr algn="ctr" marL="63500" marR="63500">
+                        <a:lnSpc>
+                          <a:spcPct val="100000"/>
+                        </a:lnSpc>
+                        <a:spcBef>
+                          <a:spcPts val="500"/>
+                        </a:spcBef>
+                        <a:spcAft>
+                          <a:spcPts val="500"/>
+                        </a:spcAft>
+                        <a:buNone/>
+                      </a:pPr>
+                      <a:r>
+                        <a:rPr cap="none" sz="1100" i="0" b="0" u="none" strike="noStrike">
+                          <a:solidFill>
+                            <a:srgbClr val="000000">
+                              <a:alpha val="100000"/>
+                            </a:srgbClr>
+                          </a:solidFill>
+                          <a:latin typeface="Arial"/>
+                          <a:cs typeface="Arial"/>
+                          <a:ea typeface="Arial"/>
+                          <a:sym typeface="Arial"/>
+                        </a:rPr>
+                        <a:t>0.67</a:t>
+                      </a:r>
+                    </a:p>
+                  </a:txBody>
+                  <a:tcPr anchor="ctr" marB="63500" marT="63500" marR="0" marL="0">
+                    <a:lnL algn="ctr" cmpd="sng" cap="flat" w="0">
+                      <a:noFill/>
+                      <a:prstDash val="solid"/>
+                    </a:lnL>
+                    <a:lnR algn="ctr" cmpd="sng" cap="flat" w="0">
+                      <a:noFill/>
+                      <a:prstDash val="solid"/>
+                    </a:lnR>
+                    <a:lnT algn="ctr" cmpd="sng" cap="flat" w="0">
+                      <a:noFill/>
+                      <a:prstDash val="solid"/>
+                    </a:lnT>
+                    <a:lnB algn="ctr" cmpd="sng" cap="flat" w="0">
+                      <a:noFill/>
+                      <a:prstDash val="solid"/>
+                    </a:lnB>
+                    <a:solidFill>
+                      <a:srgbClr val="EFEFEF">
+                        <a:alpha val="100000"/>
+                      </a:srgbClr>
+                    </a:solidFill>
+                  </a:tcPr>
+                </a:tc>
+                <a:tc>
+                  <a:txBody>
+                    <a:bodyPr/>
+                    <a:lstStyle/>
+                    <a:p>
+                      <a:pPr algn="ctr" marL="63500" marR="63500">
+                        <a:lnSpc>
+                          <a:spcPct val="100000"/>
+                        </a:lnSpc>
+                        <a:spcBef>
+                          <a:spcPts val="500"/>
+                        </a:spcBef>
+                        <a:spcAft>
+                          <a:spcPts val="500"/>
+                        </a:spcAft>
+                        <a:buNone/>
+                      </a:pPr>
+                      <a:r>
+                        <a:rPr cap="none" sz="1100" i="0" b="0" u="none" strike="noStrike">
+                          <a:solidFill>
+                            <a:srgbClr val="FF0000">
+                              <a:alpha val="100000"/>
+                            </a:srgbClr>
+                          </a:solidFill>
+                          <a:latin typeface="Arial"/>
+                          <a:cs typeface="Arial"/>
+                          <a:ea typeface="Arial"/>
+                          <a:sym typeface="Arial"/>
+                        </a:rPr>
+                        <a:t>Up</a:t>
+                      </a:r>
+                    </a:p>
+                  </a:txBody>
+                  <a:tcPr anchor="ctr" marB="63500" marT="63500" marR="0" marL="0">
+                    <a:lnL algn="ctr" cmpd="sng" cap="flat" w="0">
+                      <a:noFill/>
+                      <a:prstDash val="solid"/>
+                    </a:lnL>
+                    <a:lnR algn="ctr" cmpd="sng" cap="flat" w="0">
+                      <a:noFill/>
+                      <a:prstDash val="solid"/>
+                    </a:lnR>
+                    <a:lnT algn="ctr" cmpd="sng" cap="flat" w="0">
+                      <a:noFill/>
+                      <a:prstDash val="solid"/>
+                    </a:lnT>
+                    <a:lnB algn="ctr" cmpd="sng" cap="flat" w="0">
+                      <a:noFill/>
+                      <a:prstDash val="solid"/>
+                    </a:lnB>
+                    <a:solidFill>
+                      <a:srgbClr val="EFEFEF">
+                        <a:alpha val="100000"/>
+                      </a:srgbClr>
+                    </a:solidFill>
+                  </a:tcPr>
+                </a:tc>
+              </a:tr>
+              <a:tr h="390241">
+                <a:tc>
+                  <a:txBody>
+                    <a:bodyPr/>
+                    <a:lstStyle/>
+                    <a:p>
+                      <a:pPr algn="ctr" marL="63500" marR="63500">
+                        <a:lnSpc>
+                          <a:spcPct val="100000"/>
+                        </a:lnSpc>
+                        <a:spcBef>
+                          <a:spcPts val="500"/>
+                        </a:spcBef>
+                        <a:spcAft>
+                          <a:spcPts val="500"/>
+                        </a:spcAft>
+                        <a:buNone/>
+                      </a:pPr>
+                      <a:r>
+                        <a:rPr cap="none" sz="1100" i="0" b="0" u="none" strike="noStrike">
+                          <a:solidFill>
+                            <a:srgbClr val="000000">
+                              <a:alpha val="100000"/>
+                            </a:srgbClr>
+                          </a:solidFill>
+                          <a:latin typeface="Arial"/>
+                          <a:cs typeface="Arial"/>
+                          <a:ea typeface="Arial"/>
+                          <a:sym typeface="Arial"/>
+                        </a:rPr>
+                        <a:t>CELL</a:t>
+                      </a:r>
+                    </a:p>
+                  </a:txBody>
+                  <a:tcPr anchor="ctr" marB="63500" marT="63500" marR="0" marL="0">
+                    <a:lnL algn="ctr" cmpd="sng" cap="flat" w="0">
+                      <a:noFill/>
+                      <a:prstDash val="solid"/>
+                    </a:lnL>
+                    <a:lnR algn="ctr" cmpd="sng" cap="flat" w="0">
+                      <a:noFill/>
+                      <a:prstDash val="solid"/>
+                    </a:lnR>
+                    <a:lnT algn="ctr" cmpd="sng" cap="flat" w="0">
+                      <a:noFill/>
+                      <a:prstDash val="solid"/>
+                    </a:lnT>
+                    <a:lnB algn="ctr" cmpd="sng" cap="flat" w="0">
+                      <a:noFill/>
+                      <a:prstDash val="solid"/>
+                    </a:lnB>
+                    <a:solidFill>
+                      <a:srgbClr val="FFFFFF">
+                        <a:alpha val="0"/>
+                      </a:srgbClr>
+                    </a:solidFill>
+                  </a:tcPr>
+                </a:tc>
+                <a:tc>
+                  <a:txBody>
+                    <a:bodyPr/>
+                    <a:lstStyle/>
+                    <a:p>
+                      <a:pPr algn="ctr" marL="63500" marR="63500">
+                        <a:lnSpc>
+                          <a:spcPct val="100000"/>
+                        </a:lnSpc>
+                        <a:spcBef>
+                          <a:spcPts val="500"/>
+                        </a:spcBef>
+                        <a:spcAft>
+                          <a:spcPts val="500"/>
+                        </a:spcAft>
+                        <a:buNone/>
+                      </a:pPr>
+                      <a:r>
+                        <a:rPr cap="none" sz="1100" i="0" b="0" u="none" strike="noStrike">
+                          <a:solidFill>
+                            <a:srgbClr val="000000">
+                              <a:alpha val="100000"/>
+                            </a:srgbClr>
+                          </a:solidFill>
+                          <a:latin typeface="Arial"/>
+                          <a:cs typeface="Arial"/>
+                          <a:ea typeface="Arial"/>
+                          <a:sym typeface="Arial"/>
+                        </a:rPr>
+                        <a:t>TCMC</a:t>
+                      </a:r>
+                    </a:p>
+                  </a:txBody>
+                  <a:tcPr anchor="ctr" marB="63500" marT="63500" marR="0" marL="0">
+                    <a:lnL algn="ctr" cmpd="sng" cap="flat" w="0">
+                      <a:noFill/>
+                      <a:prstDash val="solid"/>
+                    </a:lnL>
+                    <a:lnR algn="ctr" cmpd="sng" cap="flat" w="0">
+                      <a:noFill/>
+                      <a:prstDash val="solid"/>
+                    </a:lnR>
+                    <a:lnT algn="ctr" cmpd="sng" cap="flat" w="0">
+                      <a:noFill/>
+                      <a:prstDash val="solid"/>
+                    </a:lnT>
+                    <a:lnB algn="ctr" cmpd="sng" cap="flat" w="0">
+                      <a:noFill/>
+                      <a:prstDash val="solid"/>
+                    </a:lnB>
+                    <a:solidFill>
+                      <a:srgbClr val="FFFFFF">
+                        <a:alpha val="0"/>
+                      </a:srgbClr>
+                    </a:solidFill>
+                  </a:tcPr>
+                </a:tc>
+                <a:tc>
+                  <a:txBody>
+                    <a:bodyPr/>
+                    <a:lstStyle/>
+                    <a:p>
+                      <a:pPr algn="ctr" marL="63500" marR="63500">
+                        <a:lnSpc>
+                          <a:spcPct val="100000"/>
+                        </a:lnSpc>
+                        <a:spcBef>
+                          <a:spcPts val="500"/>
+                        </a:spcBef>
+                        <a:spcAft>
+                          <a:spcPts val="500"/>
+                        </a:spcAft>
+                        <a:buNone/>
+                      </a:pPr>
+                      <a:r>
+                        <a:rPr cap="none" sz="1100" i="0" b="0" u="none" strike="noStrike">
+                          <a:solidFill>
+                            <a:srgbClr val="000000">
+                              <a:alpha val="100000"/>
+                            </a:srgbClr>
+                          </a:solidFill>
+                          <a:latin typeface="Arial"/>
+                          <a:cs typeface="Arial"/>
+                          <a:ea typeface="Arial"/>
+                          <a:sym typeface="Arial"/>
+                        </a:rPr>
+                        <a:t>TCMC_2</a:t>
+                      </a:r>
+                    </a:p>
+                  </a:txBody>
+                  <a:tcPr anchor="ctr" marB="63500" marT="63500" marR="0" marL="0">
+                    <a:lnL algn="ctr" cmpd="sng" cap="flat" w="0">
+                      <a:noFill/>
+                      <a:prstDash val="solid"/>
+                    </a:lnL>
+                    <a:lnR algn="ctr" cmpd="sng" cap="flat" w="0">
+                      <a:noFill/>
+                      <a:prstDash val="solid"/>
+                    </a:lnR>
+                    <a:lnT algn="ctr" cmpd="sng" cap="flat" w="0">
+                      <a:noFill/>
+                      <a:prstDash val="solid"/>
+                    </a:lnT>
+                    <a:lnB algn="ctr" cmpd="sng" cap="flat" w="0">
+                      <a:noFill/>
+                      <a:prstDash val="solid"/>
+                    </a:lnB>
+                    <a:solidFill>
+                      <a:srgbClr val="FFFFFF">
+                        <a:alpha val="0"/>
+                      </a:srgbClr>
+                    </a:solidFill>
+                  </a:tcPr>
+                </a:tc>
+                <a:tc>
+                  <a:txBody>
+                    <a:bodyPr/>
+                    <a:lstStyle/>
+                    <a:p>
+                      <a:pPr algn="ctr" marL="63500" marR="63500">
+                        <a:lnSpc>
+                          <a:spcPct val="100000"/>
+                        </a:lnSpc>
+                        <a:spcBef>
+                          <a:spcPts val="500"/>
+                        </a:spcBef>
+                        <a:spcAft>
+                          <a:spcPts val="500"/>
+                        </a:spcAft>
+                        <a:buNone/>
+                      </a:pPr>
+                      <a:r>
+                        <a:rPr cap="none" sz="1100" i="0" b="0" u="none" strike="noStrike">
+                          <a:solidFill>
+                            <a:srgbClr val="000000">
+                              <a:alpha val="100000"/>
+                            </a:srgbClr>
+                          </a:solidFill>
+                          <a:latin typeface="Arial"/>
+                          <a:cs typeface="Arial"/>
+                          <a:ea typeface="Arial"/>
+                          <a:sym typeface="Arial"/>
+                        </a:rPr>
+                        <a:t>Cell_TCMC_234</a:t>
+                      </a:r>
+                    </a:p>
+                  </a:txBody>
+                  <a:tcPr anchor="ctr" marB="63500" marT="63500" marR="0" marL="0">
+                    <a:lnL algn="ctr" cmpd="sng" cap="flat" w="0">
+                      <a:noFill/>
+                      <a:prstDash val="solid"/>
+                    </a:lnL>
+                    <a:lnR algn="ctr" cmpd="sng" cap="flat" w="0">
+                      <a:noFill/>
+                      <a:prstDash val="solid"/>
+                    </a:lnR>
+                    <a:lnT algn="ctr" cmpd="sng" cap="flat" w="0">
+                      <a:noFill/>
+                      <a:prstDash val="solid"/>
+                    </a:lnT>
+                    <a:lnB algn="ctr" cmpd="sng" cap="flat" w="0">
+                      <a:noFill/>
+                      <a:prstDash val="solid"/>
+                    </a:lnB>
+                    <a:solidFill>
+                      <a:srgbClr val="FFFFFF">
+                        <a:alpha val="0"/>
+                      </a:srgbClr>
+                    </a:solidFill>
+                  </a:tcPr>
+                </a:tc>
+                <a:tc>
+                  <a:txBody>
+                    <a:bodyPr/>
+                    <a:lstStyle/>
+                    <a:p>
+                      <a:pPr algn="ctr" marL="63500" marR="63500">
+                        <a:lnSpc>
+                          <a:spcPct val="100000"/>
+                        </a:lnSpc>
+                        <a:spcBef>
+                          <a:spcPts val="500"/>
+                        </a:spcBef>
+                        <a:spcAft>
+                          <a:spcPts val="500"/>
+                        </a:spcAft>
+                        <a:buNone/>
+                      </a:pPr>
+                      <a:r>
+                        <a:rPr cap="none" sz="1100" i="0" b="0" u="none" strike="noStrike">
+                          <a:solidFill>
+                            <a:srgbClr val="000000">
+                              <a:alpha val="100000"/>
+                            </a:srgbClr>
+                          </a:solidFill>
+                          <a:latin typeface="Arial"/>
+                          <a:cs typeface="Arial"/>
+                          <a:ea typeface="Arial"/>
+                          <a:sym typeface="Arial"/>
+                        </a:rPr>
+                        <a:t>0.67</a:t>
+                      </a:r>
+                    </a:p>
+                  </a:txBody>
+                  <a:tcPr anchor="ctr" marB="63500" marT="63500" marR="0" marL="0">
+                    <a:lnL algn="ctr" cmpd="sng" cap="flat" w="0">
+                      <a:noFill/>
+                      <a:prstDash val="solid"/>
+                    </a:lnL>
+                    <a:lnR algn="ctr" cmpd="sng" cap="flat" w="0">
+                      <a:noFill/>
+                      <a:prstDash val="solid"/>
+                    </a:lnR>
+                    <a:lnT algn="ctr" cmpd="sng" cap="flat" w="0">
+                      <a:noFill/>
+                      <a:prstDash val="solid"/>
+                    </a:lnT>
+                    <a:lnB algn="ctr" cmpd="sng" cap="flat" w="0">
+                      <a:noFill/>
+                      <a:prstDash val="solid"/>
+                    </a:lnB>
+                    <a:solidFill>
+                      <a:srgbClr val="FFFFFF">
+                        <a:alpha val="0"/>
+                      </a:srgbClr>
+                    </a:solidFill>
+                  </a:tcPr>
+                </a:tc>
+                <a:tc>
+                  <a:txBody>
+                    <a:bodyPr/>
+                    <a:lstStyle/>
+                    <a:p>
+                      <a:pPr algn="ctr" marL="63500" marR="63500">
+                        <a:lnSpc>
+                          <a:spcPct val="100000"/>
+                        </a:lnSpc>
+                        <a:spcBef>
+                          <a:spcPts val="500"/>
+                        </a:spcBef>
+                        <a:spcAft>
+                          <a:spcPts val="500"/>
+                        </a:spcAft>
+                        <a:buNone/>
+                      </a:pPr>
+                      <a:r>
+                        <a:rPr cap="none" sz="1100" i="0" b="0" u="none" strike="noStrike">
+                          <a:solidFill>
+                            <a:srgbClr val="FF0000">
+                              <a:alpha val="100000"/>
+                            </a:srgbClr>
+                          </a:solidFill>
+                          <a:latin typeface="Arial"/>
+                          <a:cs typeface="Arial"/>
+                          <a:ea typeface="Arial"/>
+                          <a:sym typeface="Arial"/>
+                        </a:rPr>
+                        <a:t>Up</a:t>
+                      </a:r>
+                    </a:p>
+                  </a:txBody>
+                  <a:tcPr anchor="ctr" marB="63500" marT="63500" marR="0" marL="0">
+                    <a:lnL algn="ctr" cmpd="sng" cap="flat" w="0">
+                      <a:noFill/>
+                      <a:prstDash val="solid"/>
+                    </a:lnL>
+                    <a:lnR algn="ctr" cmpd="sng" cap="flat" w="0">
+                      <a:noFill/>
+                      <a:prstDash val="solid"/>
+                    </a:lnR>
+                    <a:lnT algn="ctr" cmpd="sng" cap="flat" w="0">
+                      <a:noFill/>
+                      <a:prstDash val="solid"/>
+                    </a:lnT>
+                    <a:lnB algn="ctr" cmpd="sng" cap="flat" w="0">
+                      <a:noFill/>
+                      <a:prstDash val="solid"/>
+                    </a:lnB>
+                    <a:solidFill>
+                      <a:srgbClr val="FFFFFF">
+                        <a:alpha val="0"/>
+                      </a:srgbClr>
+                    </a:solidFill>
+                  </a:tcPr>
+                </a:tc>
+              </a:tr>
+              <a:tr h="390241">
+                <a:tc>
+                  <a:txBody>
+                    <a:bodyPr/>
+                    <a:lstStyle/>
+                    <a:p>
+                      <a:pPr algn="ctr" marL="63500" marR="63500">
+                        <a:lnSpc>
+                          <a:spcPct val="100000"/>
+                        </a:lnSpc>
+                        <a:spcBef>
+                          <a:spcPts val="500"/>
+                        </a:spcBef>
+                        <a:spcAft>
+                          <a:spcPts val="500"/>
+                        </a:spcAft>
+                        <a:buNone/>
+                      </a:pPr>
+                      <a:r>
+                        <a:rPr cap="none" sz="1100" i="0" b="0" u="none" strike="noStrike">
+                          <a:solidFill>
+                            <a:srgbClr val="000000">
+                              <a:alpha val="100000"/>
+                            </a:srgbClr>
+                          </a:solidFill>
+                          <a:latin typeface="Arial"/>
+                          <a:cs typeface="Arial"/>
+                          <a:ea typeface="Arial"/>
+                          <a:sym typeface="Arial"/>
+                        </a:rPr>
+                        <a:t>CELL</a:t>
+                      </a:r>
+                    </a:p>
+                  </a:txBody>
+                  <a:tcPr anchor="ctr" marB="63500" marT="63500" marR="0" marL="0">
+                    <a:lnL algn="ctr" cmpd="sng" cap="flat" w="0">
+                      <a:noFill/>
+                      <a:prstDash val="solid"/>
+                    </a:lnL>
+                    <a:lnR algn="ctr" cmpd="sng" cap="flat" w="0">
+                      <a:noFill/>
+                      <a:prstDash val="solid"/>
+                    </a:lnR>
+                    <a:lnT algn="ctr" cmpd="sng" cap="flat" w="0">
+                      <a:noFill/>
+                      <a:prstDash val="solid"/>
+                    </a:lnT>
+                    <a:lnB algn="ctr" cmpd="sng" cap="flat" w="0">
+                      <a:noFill/>
+                      <a:prstDash val="solid"/>
+                    </a:lnB>
+                    <a:solidFill>
+                      <a:srgbClr val="EFEFEF">
+                        <a:alpha val="100000"/>
+                      </a:srgbClr>
+                    </a:solidFill>
+                  </a:tcPr>
+                </a:tc>
+                <a:tc>
+                  <a:txBody>
+                    <a:bodyPr/>
+                    <a:lstStyle/>
+                    <a:p>
+                      <a:pPr algn="ctr" marL="63500" marR="63500">
+                        <a:lnSpc>
+                          <a:spcPct val="100000"/>
+                        </a:lnSpc>
+                        <a:spcBef>
+                          <a:spcPts val="500"/>
+                        </a:spcBef>
+                        <a:spcAft>
+                          <a:spcPts val="500"/>
+                        </a:spcAft>
+                        <a:buNone/>
+                      </a:pPr>
+                      <a:r>
+                        <a:rPr cap="none" sz="1100" i="0" b="0" u="none" strike="noStrike">
+                          <a:solidFill>
+                            <a:srgbClr val="000000">
+                              <a:alpha val="100000"/>
+                            </a:srgbClr>
+                          </a:solidFill>
+                          <a:latin typeface="Arial"/>
+                          <a:cs typeface="Arial"/>
+                          <a:ea typeface="Arial"/>
+                          <a:sym typeface="Arial"/>
+                        </a:rPr>
+                        <a:t>TCMC</a:t>
+                      </a:r>
+                    </a:p>
+                  </a:txBody>
+                  <a:tcPr anchor="ctr" marB="63500" marT="63500" marR="0" marL="0">
+                    <a:lnL algn="ctr" cmpd="sng" cap="flat" w="0">
+                      <a:noFill/>
+                      <a:prstDash val="solid"/>
+                    </a:lnL>
+                    <a:lnR algn="ctr" cmpd="sng" cap="flat" w="0">
+                      <a:noFill/>
+                      <a:prstDash val="solid"/>
+                    </a:lnR>
+                    <a:lnT algn="ctr" cmpd="sng" cap="flat" w="0">
+                      <a:noFill/>
+                      <a:prstDash val="solid"/>
+                    </a:lnT>
+                    <a:lnB algn="ctr" cmpd="sng" cap="flat" w="0">
+                      <a:noFill/>
+                      <a:prstDash val="solid"/>
+                    </a:lnB>
+                    <a:solidFill>
+                      <a:srgbClr val="EFEFEF">
+                        <a:alpha val="100000"/>
+                      </a:srgbClr>
+                    </a:solidFill>
+                  </a:tcPr>
+                </a:tc>
+                <a:tc>
+                  <a:txBody>
+                    <a:bodyPr/>
+                    <a:lstStyle/>
+                    <a:p>
+                      <a:pPr algn="ctr" marL="63500" marR="63500">
+                        <a:lnSpc>
+                          <a:spcPct val="100000"/>
+                        </a:lnSpc>
+                        <a:spcBef>
+                          <a:spcPts val="500"/>
+                        </a:spcBef>
+                        <a:spcAft>
+                          <a:spcPts val="500"/>
+                        </a:spcAft>
+                        <a:buNone/>
+                      </a:pPr>
+                      <a:r>
+                        <a:rPr cap="none" sz="1100" i="0" b="0" u="none" strike="noStrike">
+                          <a:solidFill>
+                            <a:srgbClr val="000000">
+                              <a:alpha val="100000"/>
+                            </a:srgbClr>
+                          </a:solidFill>
+                          <a:latin typeface="Arial"/>
+                          <a:cs typeface="Arial"/>
+                          <a:ea typeface="Arial"/>
+                          <a:sym typeface="Arial"/>
+                        </a:rPr>
+                        <a:t>TCMC_2</a:t>
+                      </a:r>
+                    </a:p>
+                  </a:txBody>
+                  <a:tcPr anchor="ctr" marB="63500" marT="63500" marR="0" marL="0">
+                    <a:lnL algn="ctr" cmpd="sng" cap="flat" w="0">
+                      <a:noFill/>
+                      <a:prstDash val="solid"/>
+                    </a:lnL>
+                    <a:lnR algn="ctr" cmpd="sng" cap="flat" w="0">
+                      <a:noFill/>
+                      <a:prstDash val="solid"/>
+                    </a:lnR>
+                    <a:lnT algn="ctr" cmpd="sng" cap="flat" w="0">
+                      <a:noFill/>
+                      <a:prstDash val="solid"/>
+                    </a:lnT>
+                    <a:lnB algn="ctr" cmpd="sng" cap="flat" w="0">
+                      <a:noFill/>
+                      <a:prstDash val="solid"/>
+                    </a:lnB>
+                    <a:solidFill>
+                      <a:srgbClr val="EFEFEF">
+                        <a:alpha val="100000"/>
+                      </a:srgbClr>
+                    </a:solidFill>
+                  </a:tcPr>
+                </a:tc>
+                <a:tc>
+                  <a:txBody>
+                    <a:bodyPr/>
+                    <a:lstStyle/>
+                    <a:p>
+                      <a:pPr algn="ctr" marL="63500" marR="63500">
+                        <a:lnSpc>
+                          <a:spcPct val="100000"/>
+                        </a:lnSpc>
+                        <a:spcBef>
+                          <a:spcPts val="500"/>
+                        </a:spcBef>
+                        <a:spcAft>
+                          <a:spcPts val="500"/>
+                        </a:spcAft>
+                        <a:buNone/>
+                      </a:pPr>
+                      <a:r>
+                        <a:rPr cap="none" sz="1100" i="0" b="0" u="none" strike="noStrike">
+                          <a:solidFill>
+                            <a:srgbClr val="000000">
+                              <a:alpha val="100000"/>
+                            </a:srgbClr>
+                          </a:solidFill>
+                          <a:latin typeface="Arial"/>
+                          <a:cs typeface="Arial"/>
+                          <a:ea typeface="Arial"/>
+                          <a:sym typeface="Arial"/>
+                        </a:rPr>
+                        <a:t>Cell_TCMC_235</a:t>
+                      </a:r>
+                    </a:p>
+                  </a:txBody>
+                  <a:tcPr anchor="ctr" marB="63500" marT="63500" marR="0" marL="0">
+                    <a:lnL algn="ctr" cmpd="sng" cap="flat" w="0">
+                      <a:noFill/>
+                      <a:prstDash val="solid"/>
+                    </a:lnL>
+                    <a:lnR algn="ctr" cmpd="sng" cap="flat" w="0">
+                      <a:noFill/>
+                      <a:prstDash val="solid"/>
+                    </a:lnR>
+                    <a:lnT algn="ctr" cmpd="sng" cap="flat" w="0">
+                      <a:noFill/>
+                      <a:prstDash val="solid"/>
+                    </a:lnT>
+                    <a:lnB algn="ctr" cmpd="sng" cap="flat" w="0">
+                      <a:noFill/>
+                      <a:prstDash val="solid"/>
+                    </a:lnB>
+                    <a:solidFill>
+                      <a:srgbClr val="EFEFEF">
+                        <a:alpha val="100000"/>
+                      </a:srgbClr>
+                    </a:solidFill>
+                  </a:tcPr>
+                </a:tc>
+                <a:tc>
+                  <a:txBody>
+                    <a:bodyPr/>
+                    <a:lstStyle/>
+                    <a:p>
+                      <a:pPr algn="ctr" marL="63500" marR="63500">
+                        <a:lnSpc>
+                          <a:spcPct val="100000"/>
+                        </a:lnSpc>
+                        <a:spcBef>
+                          <a:spcPts val="500"/>
+                        </a:spcBef>
+                        <a:spcAft>
+                          <a:spcPts val="500"/>
+                        </a:spcAft>
+                        <a:buNone/>
+                      </a:pPr>
+                      <a:r>
+                        <a:rPr cap="none" sz="1100" i="0" b="0" u="none" strike="noStrike">
+                          <a:solidFill>
+                            <a:srgbClr val="000000">
+                              <a:alpha val="100000"/>
+                            </a:srgbClr>
+                          </a:solidFill>
+                          <a:latin typeface="Arial"/>
+                          <a:cs typeface="Arial"/>
+                          <a:ea typeface="Arial"/>
+                          <a:sym typeface="Arial"/>
+                        </a:rPr>
+                        <a:t>0.67</a:t>
+                      </a:r>
+                    </a:p>
+                  </a:txBody>
+                  <a:tcPr anchor="ctr" marB="63500" marT="63500" marR="0" marL="0">
+                    <a:lnL algn="ctr" cmpd="sng" cap="flat" w="0">
+                      <a:noFill/>
+                      <a:prstDash val="solid"/>
+                    </a:lnL>
+                    <a:lnR algn="ctr" cmpd="sng" cap="flat" w="0">
+                      <a:noFill/>
+                      <a:prstDash val="solid"/>
+                    </a:lnR>
+                    <a:lnT algn="ctr" cmpd="sng" cap="flat" w="0">
+                      <a:noFill/>
+                      <a:prstDash val="solid"/>
+                    </a:lnT>
+                    <a:lnB algn="ctr" cmpd="sng" cap="flat" w="0">
+                      <a:noFill/>
+                      <a:prstDash val="solid"/>
+                    </a:lnB>
+                    <a:solidFill>
+                      <a:srgbClr val="EFEFEF">
+                        <a:alpha val="100000"/>
+                      </a:srgbClr>
+                    </a:solidFill>
+                  </a:tcPr>
+                </a:tc>
+                <a:tc>
+                  <a:txBody>
+                    <a:bodyPr/>
+                    <a:lstStyle/>
+                    <a:p>
+                      <a:pPr algn="ctr" marL="63500" marR="63500">
+                        <a:lnSpc>
+                          <a:spcPct val="100000"/>
+                        </a:lnSpc>
+                        <a:spcBef>
+                          <a:spcPts val="500"/>
+                        </a:spcBef>
+                        <a:spcAft>
+                          <a:spcPts val="500"/>
+                        </a:spcAft>
+                        <a:buNone/>
+                      </a:pPr>
+                      <a:r>
+                        <a:rPr cap="none" sz="1100" i="0" b="0" u="none" strike="noStrike">
+                          <a:solidFill>
+                            <a:srgbClr val="FF0000">
+                              <a:alpha val="100000"/>
+                            </a:srgbClr>
+                          </a:solidFill>
+                          <a:latin typeface="Arial"/>
+                          <a:cs typeface="Arial"/>
+                          <a:ea typeface="Arial"/>
+                          <a:sym typeface="Arial"/>
+                        </a:rPr>
+                        <a:t>Up</a:t>
+                      </a:r>
+                    </a:p>
+                  </a:txBody>
+                  <a:tcPr anchor="ctr" marB="63500" marT="63500" marR="0" marL="0">
+                    <a:lnL algn="ctr" cmpd="sng" cap="flat" w="0">
+                      <a:noFill/>
+                      <a:prstDash val="solid"/>
+                    </a:lnL>
+                    <a:lnR algn="ctr" cmpd="sng" cap="flat" w="0">
+                      <a:noFill/>
+                      <a:prstDash val="solid"/>
+                    </a:lnR>
+                    <a:lnT algn="ctr" cmpd="sng" cap="flat" w="0">
+                      <a:noFill/>
+                      <a:prstDash val="solid"/>
+                    </a:lnT>
+                    <a:lnB algn="ctr" cmpd="sng" cap="flat" w="0">
+                      <a:noFill/>
+                      <a:prstDash val="solid"/>
+                    </a:lnB>
+                    <a:solidFill>
+                      <a:srgbClr val="EFEFEF">
+                        <a:alpha val="100000"/>
+                      </a:srgbClr>
+                    </a:solidFill>
+                  </a:tcPr>
+                </a:tc>
+              </a:tr>
+              <a:tr h="388945">
+                <a:tc>
+                  <a:txBody>
+                    <a:bodyPr/>
+                    <a:lstStyle/>
+                    <a:p>
+                      <a:pPr algn="ctr" marL="63500" marR="63500">
+                        <a:lnSpc>
+                          <a:spcPct val="100000"/>
+                        </a:lnSpc>
+                        <a:spcBef>
+                          <a:spcPts val="500"/>
+                        </a:spcBef>
+                        <a:spcAft>
+                          <a:spcPts val="500"/>
+                        </a:spcAft>
+                        <a:buNone/>
+                      </a:pPr>
+                      <a:r>
+                        <a:rPr cap="none" sz="1100" i="0" b="0" u="none" strike="noStrike">
+                          <a:solidFill>
+                            <a:srgbClr val="000000">
+                              <a:alpha val="100000"/>
+                            </a:srgbClr>
+                          </a:solidFill>
+                          <a:latin typeface="Arial"/>
+                          <a:cs typeface="Arial"/>
+                          <a:ea typeface="Arial"/>
+                          <a:sym typeface="Arial"/>
+                        </a:rPr>
+                        <a:t>PERI</a:t>
+                      </a:r>
+                    </a:p>
+                  </a:txBody>
+                  <a:tcPr anchor="ctr" marB="63500" marT="63500" marR="0" marL="0">
+                    <a:lnL algn="ctr" cmpd="sng" cap="flat" w="0">
+                      <a:noFill/>
+                      <a:prstDash val="solid"/>
+                    </a:lnL>
+                    <a:lnR algn="ctr" cmpd="sng" cap="flat" w="0">
+                      <a:noFill/>
+                      <a:prstDash val="solid"/>
+                    </a:lnR>
+                    <a:lnT algn="ctr" cmpd="sng" cap="flat" w="0">
+                      <a:noFill/>
+                      <a:prstDash val="solid"/>
+                    </a:lnT>
+                    <a:lnB algn="ctr" cmpd="sng" cap="flat" w="0">
+                      <a:noFill/>
+                      <a:prstDash val="solid"/>
+                    </a:lnB>
+                    <a:solidFill>
+                      <a:srgbClr val="FFFFFF">
+                        <a:alpha val="0"/>
+                      </a:srgbClr>
+                    </a:solidFill>
+                  </a:tcPr>
+                </a:tc>
+                <a:tc>
+                  <a:txBody>
+                    <a:bodyPr/>
+                    <a:lstStyle/>
+                    <a:p>
+                      <a:pPr algn="ctr" marL="63500" marR="63500">
+                        <a:lnSpc>
+                          <a:spcPct val="100000"/>
+                        </a:lnSpc>
+                        <a:spcBef>
+                          <a:spcPts val="500"/>
+                        </a:spcBef>
+                        <a:spcAft>
+                          <a:spcPts val="500"/>
+                        </a:spcAft>
+                        <a:buNone/>
+                      </a:pPr>
+                      <a:r>
+                        <a:rPr cap="none" sz="1100" i="0" b="0" u="none" strike="noStrike">
+                          <a:solidFill>
+                            <a:srgbClr val="000000">
+                              <a:alpha val="100000"/>
+                            </a:srgbClr>
+                          </a:solidFill>
+                          <a:latin typeface="Arial"/>
+                          <a:cs typeface="Arial"/>
+                          <a:ea typeface="Arial"/>
+                          <a:sym typeface="Arial"/>
+                        </a:rPr>
+                        <a:t>PB</a:t>
+                      </a:r>
+                    </a:p>
+                  </a:txBody>
+                  <a:tcPr anchor="ctr" marB="63500" marT="63500" marR="0" marL="0">
+                    <a:lnL algn="ctr" cmpd="sng" cap="flat" w="0">
+                      <a:noFill/>
+                      <a:prstDash val="solid"/>
+                    </a:lnL>
+                    <a:lnR algn="ctr" cmpd="sng" cap="flat" w="0">
+                      <a:noFill/>
+                      <a:prstDash val="solid"/>
+                    </a:lnR>
+                    <a:lnT algn="ctr" cmpd="sng" cap="flat" w="0">
+                      <a:noFill/>
+                      <a:prstDash val="solid"/>
+                    </a:lnT>
+                    <a:lnB algn="ctr" cmpd="sng" cap="flat" w="0">
+                      <a:noFill/>
+                      <a:prstDash val="solid"/>
+                    </a:lnB>
+                    <a:solidFill>
+                      <a:srgbClr val="FFFFFF">
+                        <a:alpha val="0"/>
+                      </a:srgbClr>
+                    </a:solidFill>
+                  </a:tcPr>
+                </a:tc>
+                <a:tc>
+                  <a:txBody>
+                    <a:bodyPr/>
+                    <a:lstStyle/>
+                    <a:p>
+                      <a:pPr algn="ctr" marL="63500" marR="63500">
+                        <a:lnSpc>
+                          <a:spcPct val="100000"/>
+                        </a:lnSpc>
+                        <a:spcBef>
+                          <a:spcPts val="500"/>
+                        </a:spcBef>
+                        <a:spcAft>
+                          <a:spcPts val="500"/>
+                        </a:spcAft>
+                        <a:buNone/>
+                      </a:pPr>
+                      <a:r>
+                        <a:rPr cap="none" sz="1100" i="0" b="0" u="none" strike="noStrike">
+                          <a:solidFill>
+                            <a:srgbClr val="000000">
+                              <a:alpha val="100000"/>
+                            </a:srgbClr>
+                          </a:solidFill>
+                          <a:latin typeface="Arial"/>
+                          <a:cs typeface="Arial"/>
+                          <a:ea typeface="Arial"/>
+                          <a:sym typeface="Arial"/>
+                        </a:rPr>
+                        <a:t>PB_1</a:t>
+                      </a:r>
+                    </a:p>
+                  </a:txBody>
+                  <a:tcPr anchor="ctr" marB="63500" marT="63500" marR="0" marL="0">
+                    <a:lnL algn="ctr" cmpd="sng" cap="flat" w="0">
+                      <a:noFill/>
+                      <a:prstDash val="solid"/>
+                    </a:lnL>
+                    <a:lnR algn="ctr" cmpd="sng" cap="flat" w="0">
+                      <a:noFill/>
+                      <a:prstDash val="solid"/>
+                    </a:lnR>
+                    <a:lnT algn="ctr" cmpd="sng" cap="flat" w="0">
+                      <a:noFill/>
+                      <a:prstDash val="solid"/>
+                    </a:lnT>
+                    <a:lnB algn="ctr" cmpd="sng" cap="flat" w="0">
+                      <a:noFill/>
+                      <a:prstDash val="solid"/>
+                    </a:lnB>
+                    <a:solidFill>
+                      <a:srgbClr val="FFFFFF">
+                        <a:alpha val="0"/>
+                      </a:srgbClr>
+                    </a:solidFill>
+                  </a:tcPr>
+                </a:tc>
+                <a:tc>
+                  <a:txBody>
+                    <a:bodyPr/>
+                    <a:lstStyle/>
+                    <a:p>
+                      <a:pPr algn="ctr" marL="63500" marR="63500">
+                        <a:lnSpc>
+                          <a:spcPct val="100000"/>
+                        </a:lnSpc>
+                        <a:spcBef>
+                          <a:spcPts val="500"/>
+                        </a:spcBef>
+                        <a:spcAft>
+                          <a:spcPts val="500"/>
+                        </a:spcAft>
+                        <a:buNone/>
+                      </a:pPr>
+                      <a:r>
+                        <a:rPr cap="none" sz="1100" i="0" b="0" u="none" strike="noStrike">
+                          <a:solidFill>
+                            <a:srgbClr val="000000">
+                              <a:alpha val="100000"/>
+                            </a:srgbClr>
+                          </a:solidFill>
+                          <a:latin typeface="Arial"/>
+                          <a:cs typeface="Arial"/>
+                          <a:ea typeface="Arial"/>
+                          <a:sym typeface="Arial"/>
+                        </a:rPr>
+                        <a:t>Peri_PB_004</a:t>
+                      </a:r>
+                    </a:p>
+                  </a:txBody>
+                  <a:tcPr anchor="ctr" marB="63500" marT="63500" marR="0" marL="0">
+                    <a:lnL algn="ctr" cmpd="sng" cap="flat" w="0">
+                      <a:noFill/>
+                      <a:prstDash val="solid"/>
+                    </a:lnL>
+                    <a:lnR algn="ctr" cmpd="sng" cap="flat" w="0">
+                      <a:noFill/>
+                      <a:prstDash val="solid"/>
+                    </a:lnR>
+                    <a:lnT algn="ctr" cmpd="sng" cap="flat" w="0">
+                      <a:noFill/>
+                      <a:prstDash val="solid"/>
+                    </a:lnT>
+                    <a:lnB algn="ctr" cmpd="sng" cap="flat" w="0">
+                      <a:noFill/>
+                      <a:prstDash val="solid"/>
+                    </a:lnB>
+                    <a:solidFill>
+                      <a:srgbClr val="FFFFFF">
+                        <a:alpha val="0"/>
+                      </a:srgbClr>
+                    </a:solidFill>
+                  </a:tcPr>
+                </a:tc>
+                <a:tc>
+                  <a:txBody>
+                    <a:bodyPr/>
+                    <a:lstStyle/>
+                    <a:p>
+                      <a:pPr algn="ctr" marL="63500" marR="63500">
+                        <a:lnSpc>
+                          <a:spcPct val="100000"/>
+                        </a:lnSpc>
+                        <a:spcBef>
+                          <a:spcPts val="500"/>
+                        </a:spcBef>
+                        <a:spcAft>
+                          <a:spcPts val="500"/>
+                        </a:spcAft>
+                        <a:buNone/>
+                      </a:pPr>
+                      <a:r>
+                        <a:rPr cap="none" sz="1100" i="0" b="0" u="none" strike="noStrike">
+                          <a:solidFill>
+                            <a:srgbClr val="000000">
+                              <a:alpha val="100000"/>
+                            </a:srgbClr>
+                          </a:solidFill>
+                          <a:latin typeface="Arial"/>
+                          <a:cs typeface="Arial"/>
+                          <a:ea typeface="Arial"/>
+                          <a:sym typeface="Arial"/>
+                        </a:rPr>
+                        <a:t>0.63</a:t>
+                      </a:r>
+                    </a:p>
+                  </a:txBody>
+                  <a:tcPr anchor="ctr" marB="63500" marT="63500" marR="0" marL="0">
+                    <a:lnL algn="ctr" cmpd="sng" cap="flat" w="0">
+                      <a:noFill/>
+                      <a:prstDash val="solid"/>
+                    </a:lnL>
+                    <a:lnR algn="ctr" cmpd="sng" cap="flat" w="0">
+                      <a:noFill/>
+                      <a:prstDash val="solid"/>
+                    </a:lnR>
+                    <a:lnT algn="ctr" cmpd="sng" cap="flat" w="0">
+                      <a:noFill/>
+                      <a:prstDash val="solid"/>
+                    </a:lnT>
+                    <a:lnB algn="ctr" cmpd="sng" cap="flat" w="0">
+                      <a:noFill/>
+                      <a:prstDash val="solid"/>
+                    </a:lnB>
+                    <a:solidFill>
+                      <a:srgbClr val="FFFFFF">
+                        <a:alpha val="0"/>
+                      </a:srgbClr>
+                    </a:solidFill>
+                  </a:tcPr>
+                </a:tc>
+                <a:tc>
+                  <a:txBody>
+                    <a:bodyPr/>
+                    <a:lstStyle/>
+                    <a:p>
+                      <a:pPr algn="ctr" marL="63500" marR="63500">
+                        <a:lnSpc>
+                          <a:spcPct val="100000"/>
+                        </a:lnSpc>
+                        <a:spcBef>
+                          <a:spcPts val="500"/>
+                        </a:spcBef>
+                        <a:spcAft>
+                          <a:spcPts val="500"/>
+                        </a:spcAft>
+                        <a:buNone/>
+                      </a:pPr>
+                      <a:r>
+                        <a:rPr cap="none" sz="1100" i="0" b="0" u="none" strike="noStrike">
+                          <a:solidFill>
+                            <a:srgbClr val="FF0000">
+                              <a:alpha val="100000"/>
+                            </a:srgbClr>
+                          </a:solidFill>
+                          <a:latin typeface="Arial"/>
+                          <a:cs typeface="Arial"/>
+                          <a:ea typeface="Arial"/>
+                          <a:sym typeface="Arial"/>
+                        </a:rPr>
+                        <a:t>Up</a:t>
+                      </a:r>
+                    </a:p>
+                  </a:txBody>
+                  <a:tcPr anchor="ctr" marB="63500" marT="63500" marR="0" marL="0">
+                    <a:lnL algn="ctr" cmpd="sng" cap="flat" w="0">
+                      <a:noFill/>
+                      <a:prstDash val="solid"/>
+                    </a:lnL>
+                    <a:lnR algn="ctr" cmpd="sng" cap="flat" w="0">
+                      <a:noFill/>
+                      <a:prstDash val="solid"/>
+                    </a:lnR>
+                    <a:lnT algn="ctr" cmpd="sng" cap="flat" w="0">
+                      <a:noFill/>
+                      <a:prstDash val="solid"/>
+                    </a:lnT>
+                    <a:lnB algn="ctr" cmpd="sng" cap="flat" w="0">
+                      <a:noFill/>
+                      <a:prstDash val="solid"/>
+                    </a:lnB>
+                    <a:solidFill>
+                      <a:srgbClr val="FFFFFF">
+                        <a:alpha val="0"/>
+                      </a:srgbClr>
+                    </a:solidFill>
+                  </a:tcPr>
+                </a:tc>
+              </a:tr>
+              <a:tr h="390241">
+                <a:tc>
+                  <a:txBody>
+                    <a:bodyPr/>
+                    <a:lstStyle/>
+                    <a:p>
+                      <a:pPr algn="ctr" marL="63500" marR="63500">
+                        <a:lnSpc>
+                          <a:spcPct val="100000"/>
+                        </a:lnSpc>
+                        <a:spcBef>
+                          <a:spcPts val="500"/>
+                        </a:spcBef>
+                        <a:spcAft>
+                          <a:spcPts val="500"/>
+                        </a:spcAft>
+                        <a:buNone/>
+                      </a:pPr>
+                      <a:r>
+                        <a:rPr cap="none" sz="1100" i="0" b="0" u="none" strike="noStrike">
+                          <a:solidFill>
+                            <a:srgbClr val="000000">
+                              <a:alpha val="100000"/>
+                            </a:srgbClr>
+                          </a:solidFill>
+                          <a:latin typeface="Arial"/>
+                          <a:cs typeface="Arial"/>
+                          <a:ea typeface="Arial"/>
+                          <a:sym typeface="Arial"/>
+                        </a:rPr>
+                        <a:t>CELL</a:t>
+                      </a:r>
+                    </a:p>
+                  </a:txBody>
+                  <a:tcPr anchor="ctr" marB="63500" marT="63500" marR="0" marL="0">
+                    <a:lnL algn="ctr" cmpd="sng" cap="flat" w="0">
+                      <a:noFill/>
+                      <a:prstDash val="solid"/>
+                    </a:lnL>
+                    <a:lnR algn="ctr" cmpd="sng" cap="flat" w="0">
+                      <a:noFill/>
+                      <a:prstDash val="solid"/>
+                    </a:lnR>
+                    <a:lnT algn="ctr" cmpd="sng" cap="flat" w="0">
+                      <a:noFill/>
+                      <a:prstDash val="solid"/>
+                    </a:lnT>
+                    <a:lnB algn="ctr" cmpd="sng" cap="flat" w="0">
+                      <a:noFill/>
+                      <a:prstDash val="solid"/>
+                    </a:lnB>
+                    <a:solidFill>
+                      <a:srgbClr val="EFEFEF">
+                        <a:alpha val="100000"/>
+                      </a:srgbClr>
+                    </a:solidFill>
+                  </a:tcPr>
+                </a:tc>
+                <a:tc>
+                  <a:txBody>
+                    <a:bodyPr/>
+                    <a:lstStyle/>
+                    <a:p>
+                      <a:pPr algn="ctr" marL="63500" marR="63500">
+                        <a:lnSpc>
+                          <a:spcPct val="100000"/>
+                        </a:lnSpc>
+                        <a:spcBef>
+                          <a:spcPts val="500"/>
+                        </a:spcBef>
+                        <a:spcAft>
+                          <a:spcPts val="500"/>
+                        </a:spcAft>
+                        <a:buNone/>
+                      </a:pPr>
+                      <a:r>
+                        <a:rPr cap="none" sz="1100" i="0" b="0" u="none" strike="noStrike">
+                          <a:solidFill>
+                            <a:srgbClr val="000000">
+                              <a:alpha val="100000"/>
+                            </a:srgbClr>
+                          </a:solidFill>
+                          <a:latin typeface="Arial"/>
+                          <a:cs typeface="Arial"/>
+                          <a:ea typeface="Arial"/>
+                          <a:sym typeface="Arial"/>
+                        </a:rPr>
+                        <a:t>TCMC</a:t>
+                      </a:r>
+                    </a:p>
+                  </a:txBody>
+                  <a:tcPr anchor="ctr" marB="63500" marT="63500" marR="0" marL="0">
+                    <a:lnL algn="ctr" cmpd="sng" cap="flat" w="0">
+                      <a:noFill/>
+                      <a:prstDash val="solid"/>
+                    </a:lnL>
+                    <a:lnR algn="ctr" cmpd="sng" cap="flat" w="0">
+                      <a:noFill/>
+                      <a:prstDash val="solid"/>
+                    </a:lnR>
+                    <a:lnT algn="ctr" cmpd="sng" cap="flat" w="0">
+                      <a:noFill/>
+                      <a:prstDash val="solid"/>
+                    </a:lnT>
+                    <a:lnB algn="ctr" cmpd="sng" cap="flat" w="0">
+                      <a:noFill/>
+                      <a:prstDash val="solid"/>
+                    </a:lnB>
+                    <a:solidFill>
+                      <a:srgbClr val="EFEFEF">
+                        <a:alpha val="100000"/>
+                      </a:srgbClr>
+                    </a:solidFill>
+                  </a:tcPr>
+                </a:tc>
+                <a:tc>
+                  <a:txBody>
+                    <a:bodyPr/>
+                    <a:lstStyle/>
+                    <a:p>
+                      <a:pPr algn="ctr" marL="63500" marR="63500">
+                        <a:lnSpc>
+                          <a:spcPct val="100000"/>
+                        </a:lnSpc>
+                        <a:spcBef>
+                          <a:spcPts val="500"/>
+                        </a:spcBef>
+                        <a:spcAft>
+                          <a:spcPts val="500"/>
+                        </a:spcAft>
+                        <a:buNone/>
+                      </a:pPr>
+                      <a:r>
+                        <a:rPr cap="none" sz="1100" i="0" b="0" u="none" strike="noStrike">
+                          <a:solidFill>
+                            <a:srgbClr val="000000">
+                              <a:alpha val="100000"/>
+                            </a:srgbClr>
+                          </a:solidFill>
+                          <a:latin typeface="Arial"/>
+                          <a:cs typeface="Arial"/>
+                          <a:ea typeface="Arial"/>
+                          <a:sym typeface="Arial"/>
+                        </a:rPr>
+                        <a:t>TCMC_1</a:t>
+                      </a:r>
+                    </a:p>
+                  </a:txBody>
+                  <a:tcPr anchor="ctr" marB="63500" marT="63500" marR="0" marL="0">
+                    <a:lnL algn="ctr" cmpd="sng" cap="flat" w="0">
+                      <a:noFill/>
+                      <a:prstDash val="solid"/>
+                    </a:lnL>
+                    <a:lnR algn="ctr" cmpd="sng" cap="flat" w="0">
+                      <a:noFill/>
+                      <a:prstDash val="solid"/>
+                    </a:lnR>
+                    <a:lnT algn="ctr" cmpd="sng" cap="flat" w="0">
+                      <a:noFill/>
+                      <a:prstDash val="solid"/>
+                    </a:lnT>
+                    <a:lnB algn="ctr" cmpd="sng" cap="flat" w="0">
+                      <a:noFill/>
+                      <a:prstDash val="solid"/>
+                    </a:lnB>
+                    <a:solidFill>
+                      <a:srgbClr val="EFEFEF">
+                        <a:alpha val="100000"/>
+                      </a:srgbClr>
+                    </a:solidFill>
+                  </a:tcPr>
+                </a:tc>
+                <a:tc>
+                  <a:txBody>
+                    <a:bodyPr/>
+                    <a:lstStyle/>
+                    <a:p>
+                      <a:pPr algn="ctr" marL="63500" marR="63500">
+                        <a:lnSpc>
+                          <a:spcPct val="100000"/>
+                        </a:lnSpc>
+                        <a:spcBef>
+                          <a:spcPts val="500"/>
+                        </a:spcBef>
+                        <a:spcAft>
+                          <a:spcPts val="500"/>
+                        </a:spcAft>
+                        <a:buNone/>
+                      </a:pPr>
+                      <a:r>
+                        <a:rPr cap="none" sz="1100" i="0" b="0" u="none" strike="noStrike">
+                          <a:solidFill>
+                            <a:srgbClr val="000000">
+                              <a:alpha val="100000"/>
+                            </a:srgbClr>
+                          </a:solidFill>
+                          <a:latin typeface="Arial"/>
+                          <a:cs typeface="Arial"/>
+                          <a:ea typeface="Arial"/>
+                          <a:sym typeface="Arial"/>
+                        </a:rPr>
+                        <a:t>Cell_TCMC_203</a:t>
+                      </a:r>
+                    </a:p>
+                  </a:txBody>
+                  <a:tcPr anchor="ctr" marB="63500" marT="63500" marR="0" marL="0">
+                    <a:lnL algn="ctr" cmpd="sng" cap="flat" w="0">
+                      <a:noFill/>
+                      <a:prstDash val="solid"/>
+                    </a:lnL>
+                    <a:lnR algn="ctr" cmpd="sng" cap="flat" w="0">
+                      <a:noFill/>
+                      <a:prstDash val="solid"/>
+                    </a:lnR>
+                    <a:lnT algn="ctr" cmpd="sng" cap="flat" w="0">
+                      <a:noFill/>
+                      <a:prstDash val="solid"/>
+                    </a:lnT>
+                    <a:lnB algn="ctr" cmpd="sng" cap="flat" w="0">
+                      <a:noFill/>
+                      <a:prstDash val="solid"/>
+                    </a:lnB>
+                    <a:solidFill>
+                      <a:srgbClr val="EFEFEF">
+                        <a:alpha val="100000"/>
+                      </a:srgbClr>
+                    </a:solidFill>
+                  </a:tcPr>
+                </a:tc>
+                <a:tc>
+                  <a:txBody>
+                    <a:bodyPr/>
+                    <a:lstStyle/>
+                    <a:p>
+                      <a:pPr algn="ctr" marL="63500" marR="63500">
+                        <a:lnSpc>
+                          <a:spcPct val="100000"/>
+                        </a:lnSpc>
+                        <a:spcBef>
+                          <a:spcPts val="500"/>
+                        </a:spcBef>
+                        <a:spcAft>
+                          <a:spcPts val="500"/>
+                        </a:spcAft>
+                        <a:buNone/>
+                      </a:pPr>
+                      <a:r>
+                        <a:rPr cap="none" sz="1100" i="0" b="0" u="none" strike="noStrike">
+                          <a:solidFill>
+                            <a:srgbClr val="000000">
+                              <a:alpha val="100000"/>
+                            </a:srgbClr>
+                          </a:solidFill>
+                          <a:latin typeface="Arial"/>
+                          <a:cs typeface="Arial"/>
+                          <a:ea typeface="Arial"/>
+                          <a:sym typeface="Arial"/>
+                        </a:rPr>
+                        <a:t>0.59</a:t>
+                      </a:r>
+                    </a:p>
+                  </a:txBody>
+                  <a:tcPr anchor="ctr" marB="63500" marT="63500" marR="0" marL="0">
+                    <a:lnL algn="ctr" cmpd="sng" cap="flat" w="0">
+                      <a:noFill/>
+                      <a:prstDash val="solid"/>
+                    </a:lnL>
+                    <a:lnR algn="ctr" cmpd="sng" cap="flat" w="0">
+                      <a:noFill/>
+                      <a:prstDash val="solid"/>
+                    </a:lnR>
+                    <a:lnT algn="ctr" cmpd="sng" cap="flat" w="0">
+                      <a:noFill/>
+                      <a:prstDash val="solid"/>
+                    </a:lnT>
+                    <a:lnB algn="ctr" cmpd="sng" cap="flat" w="0">
+                      <a:noFill/>
+                      <a:prstDash val="solid"/>
+                    </a:lnB>
+                    <a:solidFill>
+                      <a:srgbClr val="EFEFEF">
+                        <a:alpha val="100000"/>
+                      </a:srgbClr>
+                    </a:solidFill>
+                  </a:tcPr>
+                </a:tc>
+                <a:tc>
+                  <a:txBody>
+                    <a:bodyPr/>
+                    <a:lstStyle/>
+                    <a:p>
+                      <a:pPr algn="ctr" marL="63500" marR="63500">
+                        <a:lnSpc>
+                          <a:spcPct val="100000"/>
+                        </a:lnSpc>
+                        <a:spcBef>
+                          <a:spcPts val="500"/>
+                        </a:spcBef>
+                        <a:spcAft>
+                          <a:spcPts val="500"/>
+                        </a:spcAft>
+                        <a:buNone/>
+                      </a:pPr>
+                      <a:r>
+                        <a:rPr cap="none" sz="1100" i="0" b="0" u="none" strike="noStrike">
+                          <a:solidFill>
+                            <a:srgbClr val="FF0000">
+                              <a:alpha val="100000"/>
+                            </a:srgbClr>
+                          </a:solidFill>
+                          <a:latin typeface="Arial"/>
+                          <a:cs typeface="Arial"/>
+                          <a:ea typeface="Arial"/>
+                          <a:sym typeface="Arial"/>
+                        </a:rPr>
+                        <a:t>Up</a:t>
+                      </a:r>
+                    </a:p>
+                  </a:txBody>
+                  <a:tcPr anchor="ctr" marB="63500" marT="63500" marR="0" marL="0">
+                    <a:lnL algn="ctr" cmpd="sng" cap="flat" w="0">
+                      <a:noFill/>
+                      <a:prstDash val="solid"/>
+                    </a:lnL>
+                    <a:lnR algn="ctr" cmpd="sng" cap="flat" w="0">
+                      <a:noFill/>
+                      <a:prstDash val="solid"/>
+                    </a:lnR>
+                    <a:lnT algn="ctr" cmpd="sng" cap="flat" w="0">
+                      <a:noFill/>
+                      <a:prstDash val="solid"/>
+                    </a:lnT>
+                    <a:lnB algn="ctr" cmpd="sng" cap="flat" w="0">
+                      <a:noFill/>
+                      <a:prstDash val="solid"/>
+                    </a:lnB>
+                    <a:solidFill>
+                      <a:srgbClr val="EFEFEF">
+                        <a:alpha val="100000"/>
+                      </a:srgbClr>
+                    </a:solidFill>
+                  </a:tcPr>
+                </a:tc>
+              </a:tr>
+              <a:tr h="390241">
+                <a:tc>
+                  <a:txBody>
+                    <a:bodyPr/>
+                    <a:lstStyle/>
+                    <a:p>
+                      <a:pPr algn="ctr" marL="63500" marR="63500">
+                        <a:lnSpc>
+                          <a:spcPct val="100000"/>
+                        </a:lnSpc>
+                        <a:spcBef>
+                          <a:spcPts val="500"/>
+                        </a:spcBef>
+                        <a:spcAft>
+                          <a:spcPts val="500"/>
+                        </a:spcAft>
+                        <a:buNone/>
+                      </a:pPr>
+                      <a:r>
+                        <a:rPr cap="none" sz="1100" i="0" b="0" u="none" strike="noStrike">
+                          <a:solidFill>
+                            <a:srgbClr val="000000">
+                              <a:alpha val="100000"/>
+                            </a:srgbClr>
+                          </a:solidFill>
+                          <a:latin typeface="Arial"/>
+                          <a:cs typeface="Arial"/>
+                          <a:ea typeface="Arial"/>
+                          <a:sym typeface="Arial"/>
+                        </a:rPr>
+                        <a:t>CELL</a:t>
+                      </a:r>
+                    </a:p>
+                  </a:txBody>
+                  <a:tcPr anchor="ctr" marB="63500" marT="63500" marR="0" marL="0">
+                    <a:lnL algn="ctr" cmpd="sng" cap="flat" w="0">
+                      <a:noFill/>
+                      <a:prstDash val="solid"/>
+                    </a:lnL>
+                    <a:lnR algn="ctr" cmpd="sng" cap="flat" w="0">
+                      <a:noFill/>
+                      <a:prstDash val="solid"/>
+                    </a:lnR>
+                    <a:lnT algn="ctr" cmpd="sng" cap="flat" w="0">
+                      <a:noFill/>
+                      <a:prstDash val="solid"/>
+                    </a:lnT>
+                    <a:lnB algn="ctr" cmpd="sng" cap="flat" w="0">
+                      <a:noFill/>
+                      <a:prstDash val="solid"/>
+                    </a:lnB>
+                    <a:solidFill>
+                      <a:srgbClr val="FFFFFF">
+                        <a:alpha val="0"/>
+                      </a:srgbClr>
+                    </a:solidFill>
+                  </a:tcPr>
+                </a:tc>
+                <a:tc>
+                  <a:txBody>
+                    <a:bodyPr/>
+                    <a:lstStyle/>
+                    <a:p>
+                      <a:pPr algn="ctr" marL="63500" marR="63500">
+                        <a:lnSpc>
+                          <a:spcPct val="100000"/>
+                        </a:lnSpc>
+                        <a:spcBef>
+                          <a:spcPts val="500"/>
+                        </a:spcBef>
+                        <a:spcAft>
+                          <a:spcPts val="500"/>
+                        </a:spcAft>
+                        <a:buNone/>
+                      </a:pPr>
+                      <a:r>
+                        <a:rPr cap="none" sz="1100" i="0" b="0" u="none" strike="noStrike">
+                          <a:solidFill>
+                            <a:srgbClr val="000000">
+                              <a:alpha val="100000"/>
+                            </a:srgbClr>
+                          </a:solidFill>
+                          <a:latin typeface="Arial"/>
+                          <a:cs typeface="Arial"/>
+                          <a:ea typeface="Arial"/>
+                          <a:sym typeface="Arial"/>
+                        </a:rPr>
+                        <a:t>WLS</a:t>
+                      </a:r>
+                    </a:p>
+                  </a:txBody>
+                  <a:tcPr anchor="ctr" marB="63500" marT="63500" marR="0" marL="0">
+                    <a:lnL algn="ctr" cmpd="sng" cap="flat" w="0">
+                      <a:noFill/>
+                      <a:prstDash val="solid"/>
+                    </a:lnL>
+                    <a:lnR algn="ctr" cmpd="sng" cap="flat" w="0">
+                      <a:noFill/>
+                      <a:prstDash val="solid"/>
+                    </a:lnR>
+                    <a:lnT algn="ctr" cmpd="sng" cap="flat" w="0">
+                      <a:noFill/>
+                      <a:prstDash val="solid"/>
+                    </a:lnT>
+                    <a:lnB algn="ctr" cmpd="sng" cap="flat" w="0">
+                      <a:noFill/>
+                      <a:prstDash val="solid"/>
+                    </a:lnB>
+                    <a:solidFill>
+                      <a:srgbClr val="FFFFFF">
+                        <a:alpha val="0"/>
+                      </a:srgbClr>
+                    </a:solidFill>
+                  </a:tcPr>
+                </a:tc>
+                <a:tc>
+                  <a:txBody>
+                    <a:bodyPr/>
+                    <a:lstStyle/>
+                    <a:p>
+                      <a:pPr algn="ctr" marL="63500" marR="63500">
+                        <a:lnSpc>
+                          <a:spcPct val="100000"/>
+                        </a:lnSpc>
+                        <a:spcBef>
+                          <a:spcPts val="500"/>
+                        </a:spcBef>
+                        <a:spcAft>
+                          <a:spcPts val="500"/>
+                        </a:spcAft>
+                        <a:buNone/>
+                      </a:pPr>
+                      <a:r>
+                        <a:rPr cap="none" sz="1100" i="0" b="0" u="none" strike="noStrike">
+                          <a:solidFill>
+                            <a:srgbClr val="000000">
+                              <a:alpha val="100000"/>
+                            </a:srgbClr>
+                          </a:solidFill>
+                          <a:latin typeface="Arial"/>
+                          <a:cs typeface="Arial"/>
+                          <a:ea typeface="Arial"/>
+                          <a:sym typeface="Arial"/>
+                        </a:rPr>
+                        <a:t>WLS_2</a:t>
+                      </a:r>
+                    </a:p>
+                  </a:txBody>
+                  <a:tcPr anchor="ctr" marB="63500" marT="63500" marR="0" marL="0">
+                    <a:lnL algn="ctr" cmpd="sng" cap="flat" w="0">
+                      <a:noFill/>
+                      <a:prstDash val="solid"/>
+                    </a:lnL>
+                    <a:lnR algn="ctr" cmpd="sng" cap="flat" w="0">
+                      <a:noFill/>
+                      <a:prstDash val="solid"/>
+                    </a:lnR>
+                    <a:lnT algn="ctr" cmpd="sng" cap="flat" w="0">
+                      <a:noFill/>
+                      <a:prstDash val="solid"/>
+                    </a:lnT>
+                    <a:lnB algn="ctr" cmpd="sng" cap="flat" w="0">
+                      <a:noFill/>
+                      <a:prstDash val="solid"/>
+                    </a:lnB>
+                    <a:solidFill>
+                      <a:srgbClr val="FFFFFF">
+                        <a:alpha val="0"/>
+                      </a:srgbClr>
+                    </a:solidFill>
+                  </a:tcPr>
+                </a:tc>
+                <a:tc>
+                  <a:txBody>
+                    <a:bodyPr/>
+                    <a:lstStyle/>
+                    <a:p>
+                      <a:pPr algn="ctr" marL="63500" marR="63500">
+                        <a:lnSpc>
+                          <a:spcPct val="100000"/>
+                        </a:lnSpc>
+                        <a:spcBef>
+                          <a:spcPts val="500"/>
+                        </a:spcBef>
+                        <a:spcAft>
+                          <a:spcPts val="500"/>
+                        </a:spcAft>
+                        <a:buNone/>
+                      </a:pPr>
+                      <a:r>
+                        <a:rPr cap="none" sz="1100" i="0" b="0" u="none" strike="noStrike">
+                          <a:solidFill>
+                            <a:srgbClr val="000000">
+                              <a:alpha val="100000"/>
+                            </a:srgbClr>
+                          </a:solidFill>
+                          <a:latin typeface="Arial"/>
+                          <a:cs typeface="Arial"/>
+                          <a:ea typeface="Arial"/>
+                          <a:sym typeface="Arial"/>
+                        </a:rPr>
+                        <a:t>Cell_WLS_196</a:t>
+                      </a:r>
+                    </a:p>
+                  </a:txBody>
+                  <a:tcPr anchor="ctr" marB="63500" marT="63500" marR="0" marL="0">
+                    <a:lnL algn="ctr" cmpd="sng" cap="flat" w="0">
+                      <a:noFill/>
+                      <a:prstDash val="solid"/>
+                    </a:lnL>
+                    <a:lnR algn="ctr" cmpd="sng" cap="flat" w="0">
+                      <a:noFill/>
+                      <a:prstDash val="solid"/>
+                    </a:lnR>
+                    <a:lnT algn="ctr" cmpd="sng" cap="flat" w="0">
+                      <a:noFill/>
+                      <a:prstDash val="solid"/>
+                    </a:lnT>
+                    <a:lnB algn="ctr" cmpd="sng" cap="flat" w="0">
+                      <a:noFill/>
+                      <a:prstDash val="solid"/>
+                    </a:lnB>
+                    <a:solidFill>
+                      <a:srgbClr val="FFFFFF">
+                        <a:alpha val="0"/>
+                      </a:srgbClr>
+                    </a:solidFill>
+                  </a:tcPr>
+                </a:tc>
+                <a:tc>
+                  <a:txBody>
+                    <a:bodyPr/>
+                    <a:lstStyle/>
+                    <a:p>
+                      <a:pPr algn="ctr" marL="63500" marR="63500">
+                        <a:lnSpc>
+                          <a:spcPct val="100000"/>
+                        </a:lnSpc>
+                        <a:spcBef>
+                          <a:spcPts val="500"/>
+                        </a:spcBef>
+                        <a:spcAft>
+                          <a:spcPts val="500"/>
+                        </a:spcAft>
+                        <a:buNone/>
+                      </a:pPr>
+                      <a:r>
+                        <a:rPr cap="none" sz="1100" i="0" b="0" u="none" strike="noStrike">
+                          <a:solidFill>
+                            <a:srgbClr val="000000">
+                              <a:alpha val="100000"/>
+                            </a:srgbClr>
+                          </a:solidFill>
+                          <a:latin typeface="Arial"/>
+                          <a:cs typeface="Arial"/>
+                          <a:ea typeface="Arial"/>
+                          <a:sym typeface="Arial"/>
+                        </a:rPr>
+                        <a:t>0.55</a:t>
+                      </a:r>
+                    </a:p>
+                  </a:txBody>
+                  <a:tcPr anchor="ctr" marB="63500" marT="63500" marR="0" marL="0">
+                    <a:lnL algn="ctr" cmpd="sng" cap="flat" w="0">
+                      <a:noFill/>
+                      <a:prstDash val="solid"/>
+                    </a:lnL>
+                    <a:lnR algn="ctr" cmpd="sng" cap="flat" w="0">
+                      <a:noFill/>
+                      <a:prstDash val="solid"/>
+                    </a:lnR>
+                    <a:lnT algn="ctr" cmpd="sng" cap="flat" w="0">
+                      <a:noFill/>
+                      <a:prstDash val="solid"/>
+                    </a:lnT>
+                    <a:lnB algn="ctr" cmpd="sng" cap="flat" w="0">
+                      <a:noFill/>
+                      <a:prstDash val="solid"/>
+                    </a:lnB>
+                    <a:solidFill>
+                      <a:srgbClr val="FFFFFF">
+                        <a:alpha val="0"/>
+                      </a:srgbClr>
+                    </a:solidFill>
+                  </a:tcPr>
+                </a:tc>
+                <a:tc>
+                  <a:txBody>
+                    <a:bodyPr/>
+                    <a:lstStyle/>
+                    <a:p>
+                      <a:pPr algn="ctr" marL="63500" marR="63500">
+                        <a:lnSpc>
+                          <a:spcPct val="100000"/>
+                        </a:lnSpc>
+                        <a:spcBef>
+                          <a:spcPts val="500"/>
+                        </a:spcBef>
+                        <a:spcAft>
+                          <a:spcPts val="500"/>
+                        </a:spcAft>
+                        <a:buNone/>
+                      </a:pPr>
+                      <a:r>
+                        <a:rPr cap="none" sz="1100" i="0" b="0" u="none" strike="noStrike">
+                          <a:solidFill>
+                            <a:srgbClr val="FF0000">
+                              <a:alpha val="100000"/>
+                            </a:srgbClr>
+                          </a:solidFill>
+                          <a:latin typeface="Arial"/>
+                          <a:cs typeface="Arial"/>
+                          <a:ea typeface="Arial"/>
+                          <a:sym typeface="Arial"/>
+                        </a:rPr>
+                        <a:t>Up</a:t>
+                      </a:r>
+                    </a:p>
+                  </a:txBody>
+                  <a:tcPr anchor="ctr" marB="63500" marT="63500" marR="0" marL="0">
+                    <a:lnL algn="ctr" cmpd="sng" cap="flat" w="0">
+                      <a:noFill/>
+                      <a:prstDash val="solid"/>
+                    </a:lnL>
+                    <a:lnR algn="ctr" cmpd="sng" cap="flat" w="0">
+                      <a:noFill/>
+                      <a:prstDash val="solid"/>
+                    </a:lnR>
+                    <a:lnT algn="ctr" cmpd="sng" cap="flat" w="0">
+                      <a:noFill/>
+                      <a:prstDash val="solid"/>
+                    </a:lnT>
+                    <a:lnB algn="ctr" cmpd="sng" cap="flat" w="0">
+                      <a:noFill/>
+                      <a:prstDash val="solid"/>
+                    </a:lnB>
+                    <a:solidFill>
+                      <a:srgbClr val="FFFFFF">
+                        <a:alpha val="0"/>
+                      </a:srgbClr>
+                    </a:solidFill>
+                  </a:tcPr>
+                </a:tc>
+              </a:tr>
+              <a:tr h="388945">
+                <a:tc>
+                  <a:txBody>
+                    <a:bodyPr/>
+                    <a:lstStyle/>
+                    <a:p>
+                      <a:pPr algn="ctr" marL="63500" marR="63500">
+                        <a:lnSpc>
+                          <a:spcPct val="100000"/>
+                        </a:lnSpc>
+                        <a:spcBef>
+                          <a:spcPts val="500"/>
+                        </a:spcBef>
+                        <a:spcAft>
+                          <a:spcPts val="500"/>
+                        </a:spcAft>
+                        <a:buNone/>
+                      </a:pPr>
+                      <a:r>
+                        <a:rPr cap="none" sz="1100" i="0" b="0" u="none" strike="noStrike">
+                          <a:solidFill>
+                            <a:srgbClr val="000000">
+                              <a:alpha val="100000"/>
+                            </a:srgbClr>
+                          </a:solidFill>
+                          <a:latin typeface="Arial"/>
+                          <a:cs typeface="Arial"/>
+                          <a:ea typeface="Arial"/>
+                          <a:sym typeface="Arial"/>
+                        </a:rPr>
+                        <a:t>PERI</a:t>
+                      </a:r>
+                    </a:p>
+                  </a:txBody>
+                  <a:tcPr anchor="ctr" marB="63500" marT="63500" marR="0" marL="0">
+                    <a:lnL algn="ctr" cmpd="sng" cap="flat" w="0">
+                      <a:noFill/>
+                      <a:prstDash val="solid"/>
+                    </a:lnL>
+                    <a:lnR algn="ctr" cmpd="sng" cap="flat" w="0">
+                      <a:noFill/>
+                      <a:prstDash val="solid"/>
+                    </a:lnR>
+                    <a:lnT algn="ctr" cmpd="sng" cap="flat" w="0">
+                      <a:noFill/>
+                      <a:prstDash val="solid"/>
+                    </a:lnT>
+                    <a:lnB algn="ctr" cmpd="sng" cap="flat" w="0">
+                      <a:noFill/>
+                      <a:prstDash val="solid"/>
+                    </a:lnB>
+                    <a:solidFill>
+                      <a:srgbClr val="EFEFEF">
+                        <a:alpha val="100000"/>
+                      </a:srgbClr>
+                    </a:solidFill>
+                  </a:tcPr>
+                </a:tc>
+                <a:tc>
+                  <a:txBody>
+                    <a:bodyPr/>
+                    <a:lstStyle/>
+                    <a:p>
+                      <a:pPr algn="ctr" marL="63500" marR="63500">
+                        <a:lnSpc>
+                          <a:spcPct val="100000"/>
+                        </a:lnSpc>
+                        <a:spcBef>
+                          <a:spcPts val="500"/>
+                        </a:spcBef>
+                        <a:spcAft>
+                          <a:spcPts val="500"/>
+                        </a:spcAft>
+                        <a:buNone/>
+                      </a:pPr>
+                      <a:r>
+                        <a:rPr cap="none" sz="1100" i="0" b="0" u="none" strike="noStrike">
+                          <a:solidFill>
+                            <a:srgbClr val="000000">
+                              <a:alpha val="100000"/>
+                            </a:srgbClr>
+                          </a:solidFill>
+                          <a:latin typeface="Arial"/>
+                          <a:cs typeface="Arial"/>
+                          <a:ea typeface="Arial"/>
+                          <a:sym typeface="Arial"/>
+                        </a:rPr>
+                        <a:t>BL</a:t>
+                      </a:r>
+                    </a:p>
+                  </a:txBody>
+                  <a:tcPr anchor="ctr" marB="63500" marT="63500" marR="0" marL="0">
+                    <a:lnL algn="ctr" cmpd="sng" cap="flat" w="0">
+                      <a:noFill/>
+                      <a:prstDash val="solid"/>
+                    </a:lnL>
+                    <a:lnR algn="ctr" cmpd="sng" cap="flat" w="0">
+                      <a:noFill/>
+                      <a:prstDash val="solid"/>
+                    </a:lnR>
+                    <a:lnT algn="ctr" cmpd="sng" cap="flat" w="0">
+                      <a:noFill/>
+                      <a:prstDash val="solid"/>
+                    </a:lnT>
+                    <a:lnB algn="ctr" cmpd="sng" cap="flat" w="0">
+                      <a:noFill/>
+                      <a:prstDash val="solid"/>
+                    </a:lnB>
+                    <a:solidFill>
+                      <a:srgbClr val="EFEFEF">
+                        <a:alpha val="100000"/>
+                      </a:srgbClr>
+                    </a:solidFill>
+                  </a:tcPr>
+                </a:tc>
+                <a:tc>
+                  <a:txBody>
+                    <a:bodyPr/>
+                    <a:lstStyle/>
+                    <a:p>
+                      <a:pPr algn="ctr" marL="63500" marR="63500">
+                        <a:lnSpc>
+                          <a:spcPct val="100000"/>
+                        </a:lnSpc>
+                        <a:spcBef>
+                          <a:spcPts val="500"/>
+                        </a:spcBef>
+                        <a:spcAft>
+                          <a:spcPts val="500"/>
+                        </a:spcAft>
+                        <a:buNone/>
+                      </a:pPr>
+                      <a:r>
+                        <a:rPr cap="none" sz="1100" i="0" b="0" u="none" strike="noStrike">
+                          <a:solidFill>
+                            <a:srgbClr val="000000">
+                              <a:alpha val="100000"/>
+                            </a:srgbClr>
+                          </a:solidFill>
+                          <a:latin typeface="Arial"/>
+                          <a:cs typeface="Arial"/>
+                          <a:ea typeface="Arial"/>
+                          <a:sym typeface="Arial"/>
+                        </a:rPr>
+                        <a:t>BL_3</a:t>
+                      </a:r>
+                    </a:p>
+                  </a:txBody>
+                  <a:tcPr anchor="ctr" marB="63500" marT="63500" marR="0" marL="0">
+                    <a:lnL algn="ctr" cmpd="sng" cap="flat" w="0">
+                      <a:noFill/>
+                      <a:prstDash val="solid"/>
+                    </a:lnL>
+                    <a:lnR algn="ctr" cmpd="sng" cap="flat" w="0">
+                      <a:noFill/>
+                      <a:prstDash val="solid"/>
+                    </a:lnR>
+                    <a:lnT algn="ctr" cmpd="sng" cap="flat" w="0">
+                      <a:noFill/>
+                      <a:prstDash val="solid"/>
+                    </a:lnT>
+                    <a:lnB algn="ctr" cmpd="sng" cap="flat" w="0">
+                      <a:noFill/>
+                      <a:prstDash val="solid"/>
+                    </a:lnB>
+                    <a:solidFill>
+                      <a:srgbClr val="EFEFEF">
+                        <a:alpha val="100000"/>
+                      </a:srgbClr>
+                    </a:solidFill>
+                  </a:tcPr>
+                </a:tc>
+                <a:tc>
+                  <a:txBody>
+                    <a:bodyPr/>
+                    <a:lstStyle/>
+                    <a:p>
+                      <a:pPr algn="ctr" marL="63500" marR="63500">
+                        <a:lnSpc>
+                          <a:spcPct val="100000"/>
+                        </a:lnSpc>
+                        <a:spcBef>
+                          <a:spcPts val="500"/>
+                        </a:spcBef>
+                        <a:spcAft>
+                          <a:spcPts val="500"/>
+                        </a:spcAft>
+                        <a:buNone/>
+                      </a:pPr>
+                      <a:r>
+                        <a:rPr cap="none" sz="1100" i="0" b="0" u="none" strike="noStrike">
+                          <a:solidFill>
+                            <a:srgbClr val="000000">
+                              <a:alpha val="100000"/>
+                            </a:srgbClr>
+                          </a:solidFill>
+                          <a:latin typeface="Arial"/>
+                          <a:cs typeface="Arial"/>
+                          <a:ea typeface="Arial"/>
+                          <a:sym typeface="Arial"/>
+                        </a:rPr>
+                        <a:t>Peri_BL_139</a:t>
+                      </a:r>
+                    </a:p>
+                  </a:txBody>
+                  <a:tcPr anchor="ctr" marB="63500" marT="63500" marR="0" marL="0">
+                    <a:lnL algn="ctr" cmpd="sng" cap="flat" w="0">
+                      <a:noFill/>
+                      <a:prstDash val="solid"/>
+                    </a:lnL>
+                    <a:lnR algn="ctr" cmpd="sng" cap="flat" w="0">
+                      <a:noFill/>
+                      <a:prstDash val="solid"/>
+                    </a:lnR>
+                    <a:lnT algn="ctr" cmpd="sng" cap="flat" w="0">
+                      <a:noFill/>
+                      <a:prstDash val="solid"/>
+                    </a:lnT>
+                    <a:lnB algn="ctr" cmpd="sng" cap="flat" w="0">
+                      <a:noFill/>
+                      <a:prstDash val="solid"/>
+                    </a:lnB>
+                    <a:solidFill>
+                      <a:srgbClr val="EFEFEF">
+                        <a:alpha val="100000"/>
+                      </a:srgbClr>
+                    </a:solidFill>
+                  </a:tcPr>
+                </a:tc>
+                <a:tc>
+                  <a:txBody>
+                    <a:bodyPr/>
+                    <a:lstStyle/>
+                    <a:p>
+                      <a:pPr algn="ctr" marL="63500" marR="63500">
+                        <a:lnSpc>
+                          <a:spcPct val="100000"/>
+                        </a:lnSpc>
+                        <a:spcBef>
+                          <a:spcPts val="500"/>
+                        </a:spcBef>
+                        <a:spcAft>
+                          <a:spcPts val="500"/>
+                        </a:spcAft>
+                        <a:buNone/>
+                      </a:pPr>
+                      <a:r>
+                        <a:rPr cap="none" sz="1100" i="0" b="0" u="none" strike="noStrike">
+                          <a:solidFill>
+                            <a:srgbClr val="000000">
+                              <a:alpha val="100000"/>
+                            </a:srgbClr>
+                          </a:solidFill>
+                          <a:latin typeface="Arial"/>
+                          <a:cs typeface="Arial"/>
+                          <a:ea typeface="Arial"/>
+                          <a:sym typeface="Arial"/>
+                        </a:rPr>
+                        <a:t>0.55</a:t>
+                      </a:r>
+                    </a:p>
+                  </a:txBody>
+                  <a:tcPr anchor="ctr" marB="63500" marT="63500" marR="0" marL="0">
+                    <a:lnL algn="ctr" cmpd="sng" cap="flat" w="0">
+                      <a:noFill/>
+                      <a:prstDash val="solid"/>
+                    </a:lnL>
+                    <a:lnR algn="ctr" cmpd="sng" cap="flat" w="0">
+                      <a:noFill/>
+                      <a:prstDash val="solid"/>
+                    </a:lnR>
+                    <a:lnT algn="ctr" cmpd="sng" cap="flat" w="0">
+                      <a:noFill/>
+                      <a:prstDash val="solid"/>
+                    </a:lnT>
+                    <a:lnB algn="ctr" cmpd="sng" cap="flat" w="0">
+                      <a:noFill/>
+                      <a:prstDash val="solid"/>
+                    </a:lnB>
+                    <a:solidFill>
+                      <a:srgbClr val="EFEFEF">
+                        <a:alpha val="100000"/>
+                      </a:srgbClr>
+                    </a:solidFill>
+                  </a:tcPr>
+                </a:tc>
+                <a:tc>
+                  <a:txBody>
+                    <a:bodyPr/>
+                    <a:lstStyle/>
+                    <a:p>
+                      <a:pPr algn="ctr" marL="63500" marR="63500">
+                        <a:lnSpc>
+                          <a:spcPct val="100000"/>
+                        </a:lnSpc>
+                        <a:spcBef>
+                          <a:spcPts val="500"/>
+                        </a:spcBef>
+                        <a:spcAft>
+                          <a:spcPts val="500"/>
+                        </a:spcAft>
+                        <a:buNone/>
+                      </a:pPr>
+                      <a:r>
+                        <a:rPr cap="none" sz="1100" i="0" b="0" u="none" strike="noStrike">
+                          <a:solidFill>
+                            <a:srgbClr val="FF0000">
+                              <a:alpha val="100000"/>
+                            </a:srgbClr>
+                          </a:solidFill>
+                          <a:latin typeface="Arial"/>
+                          <a:cs typeface="Arial"/>
+                          <a:ea typeface="Arial"/>
+                          <a:sym typeface="Arial"/>
+                        </a:rPr>
+                        <a:t>Up</a:t>
+                      </a:r>
+                    </a:p>
+                  </a:txBody>
+                  <a:tcPr anchor="ctr" marB="63500" marT="63500" marR="0" marL="0">
+                    <a:lnL algn="ctr" cmpd="sng" cap="flat" w="0">
+                      <a:noFill/>
+                      <a:prstDash val="solid"/>
+                    </a:lnL>
+                    <a:lnR algn="ctr" cmpd="sng" cap="flat" w="0">
+                      <a:noFill/>
+                      <a:prstDash val="solid"/>
+                    </a:lnR>
+                    <a:lnT algn="ctr" cmpd="sng" cap="flat" w="0">
+                      <a:noFill/>
+                      <a:prstDash val="solid"/>
+                    </a:lnT>
+                    <a:lnB algn="ctr" cmpd="sng" cap="flat" w="0">
+                      <a:noFill/>
+                      <a:prstDash val="solid"/>
+                    </a:lnB>
+                    <a:solidFill>
+                      <a:srgbClr val="EFEFEF">
+                        <a:alpha val="100000"/>
+                      </a:srgbClr>
+                    </a:solidFill>
+                  </a:tcPr>
+                </a:tc>
+              </a:tr>
+              <a:tr h="388945">
+                <a:tc>
+                  <a:txBody>
+                    <a:bodyPr/>
+                    <a:lstStyle/>
+                    <a:p>
+                      <a:pPr algn="ctr" marL="63500" marR="63500">
+                        <a:lnSpc>
+                          <a:spcPct val="100000"/>
+                        </a:lnSpc>
+                        <a:spcBef>
+                          <a:spcPts val="500"/>
+                        </a:spcBef>
+                        <a:spcAft>
+                          <a:spcPts val="500"/>
+                        </a:spcAft>
+                        <a:buNone/>
+                      </a:pPr>
+                      <a:r>
+                        <a:rPr cap="none" sz="1100" i="0" b="0" u="none" strike="noStrike">
+                          <a:solidFill>
+                            <a:srgbClr val="000000">
+                              <a:alpha val="100000"/>
+                            </a:srgbClr>
+                          </a:solidFill>
+                          <a:latin typeface="Arial"/>
+                          <a:cs typeface="Arial"/>
+                          <a:ea typeface="Arial"/>
+                          <a:sym typeface="Arial"/>
+                        </a:rPr>
+                        <a:t>PERI</a:t>
+                      </a:r>
+                    </a:p>
+                  </a:txBody>
+                  <a:tcPr anchor="ctr" marB="63500" marT="63500" marR="0" marL="0">
+                    <a:lnL algn="ctr" cmpd="sng" cap="flat" w="0">
+                      <a:noFill/>
+                      <a:prstDash val="solid"/>
+                    </a:lnL>
+                    <a:lnR algn="ctr" cmpd="sng" cap="flat" w="0">
+                      <a:noFill/>
+                      <a:prstDash val="solid"/>
+                    </a:lnR>
+                    <a:lnT algn="ctr" cmpd="sng" cap="flat" w="0">
+                      <a:noFill/>
+                      <a:prstDash val="solid"/>
+                    </a:lnT>
+                    <a:lnB algn="ctr" cmpd="sng" cap="flat" w="0">
+                      <a:noFill/>
+                      <a:prstDash val="solid"/>
+                    </a:lnB>
+                    <a:solidFill>
+                      <a:srgbClr val="FFFFFF">
+                        <a:alpha val="0"/>
+                      </a:srgbClr>
+                    </a:solidFill>
+                  </a:tcPr>
+                </a:tc>
+                <a:tc>
+                  <a:txBody>
+                    <a:bodyPr/>
+                    <a:lstStyle/>
+                    <a:p>
+                      <a:pPr algn="ctr" marL="63500" marR="63500">
+                        <a:lnSpc>
+                          <a:spcPct val="100000"/>
+                        </a:lnSpc>
+                        <a:spcBef>
+                          <a:spcPts val="500"/>
+                        </a:spcBef>
+                        <a:spcAft>
+                          <a:spcPts val="500"/>
+                        </a:spcAft>
+                        <a:buNone/>
+                      </a:pPr>
+                      <a:r>
+                        <a:rPr cap="none" sz="1100" i="0" b="0" u="none" strike="noStrike">
+                          <a:solidFill>
+                            <a:srgbClr val="000000">
+                              <a:alpha val="100000"/>
+                            </a:srgbClr>
+                          </a:solidFill>
+                          <a:latin typeface="Arial"/>
+                          <a:cs typeface="Arial"/>
+                          <a:ea typeface="Arial"/>
+                          <a:sym typeface="Arial"/>
+                        </a:rPr>
+                        <a:t>BL</a:t>
+                      </a:r>
+                    </a:p>
+                  </a:txBody>
+                  <a:tcPr anchor="ctr" marB="63500" marT="63500" marR="0" marL="0">
+                    <a:lnL algn="ctr" cmpd="sng" cap="flat" w="0">
+                      <a:noFill/>
+                      <a:prstDash val="solid"/>
+                    </a:lnL>
+                    <a:lnR algn="ctr" cmpd="sng" cap="flat" w="0">
+                      <a:noFill/>
+                      <a:prstDash val="solid"/>
+                    </a:lnR>
+                    <a:lnT algn="ctr" cmpd="sng" cap="flat" w="0">
+                      <a:noFill/>
+                      <a:prstDash val="solid"/>
+                    </a:lnT>
+                    <a:lnB algn="ctr" cmpd="sng" cap="flat" w="0">
+                      <a:noFill/>
+                      <a:prstDash val="solid"/>
+                    </a:lnB>
+                    <a:solidFill>
+                      <a:srgbClr val="FFFFFF">
+                        <a:alpha val="0"/>
+                      </a:srgbClr>
+                    </a:solidFill>
+                  </a:tcPr>
+                </a:tc>
+                <a:tc>
+                  <a:txBody>
+                    <a:bodyPr/>
+                    <a:lstStyle/>
+                    <a:p>
+                      <a:pPr algn="ctr" marL="63500" marR="63500">
+                        <a:lnSpc>
+                          <a:spcPct val="100000"/>
+                        </a:lnSpc>
+                        <a:spcBef>
+                          <a:spcPts val="500"/>
+                        </a:spcBef>
+                        <a:spcAft>
+                          <a:spcPts val="500"/>
+                        </a:spcAft>
+                        <a:buNone/>
+                      </a:pPr>
+                      <a:r>
+                        <a:rPr cap="none" sz="1100" i="0" b="0" u="none" strike="noStrike">
+                          <a:solidFill>
+                            <a:srgbClr val="000000">
+                              <a:alpha val="100000"/>
+                            </a:srgbClr>
+                          </a:solidFill>
+                          <a:latin typeface="Arial"/>
+                          <a:cs typeface="Arial"/>
+                          <a:ea typeface="Arial"/>
+                          <a:sym typeface="Arial"/>
+                        </a:rPr>
+                        <a:t>BL_3</a:t>
+                      </a:r>
+                    </a:p>
+                  </a:txBody>
+                  <a:tcPr anchor="ctr" marB="63500" marT="63500" marR="0" marL="0">
+                    <a:lnL algn="ctr" cmpd="sng" cap="flat" w="0">
+                      <a:noFill/>
+                      <a:prstDash val="solid"/>
+                    </a:lnL>
+                    <a:lnR algn="ctr" cmpd="sng" cap="flat" w="0">
+                      <a:noFill/>
+                      <a:prstDash val="solid"/>
+                    </a:lnR>
+                    <a:lnT algn="ctr" cmpd="sng" cap="flat" w="0">
+                      <a:noFill/>
+                      <a:prstDash val="solid"/>
+                    </a:lnT>
+                    <a:lnB algn="ctr" cmpd="sng" cap="flat" w="0">
+                      <a:noFill/>
+                      <a:prstDash val="solid"/>
+                    </a:lnB>
+                    <a:solidFill>
+                      <a:srgbClr val="FFFFFF">
+                        <a:alpha val="0"/>
+                      </a:srgbClr>
+                    </a:solidFill>
+                  </a:tcPr>
+                </a:tc>
+                <a:tc>
+                  <a:txBody>
+                    <a:bodyPr/>
+                    <a:lstStyle/>
+                    <a:p>
+                      <a:pPr algn="ctr" marL="63500" marR="63500">
+                        <a:lnSpc>
+                          <a:spcPct val="100000"/>
+                        </a:lnSpc>
+                        <a:spcBef>
+                          <a:spcPts val="500"/>
+                        </a:spcBef>
+                        <a:spcAft>
+                          <a:spcPts val="500"/>
+                        </a:spcAft>
+                        <a:buNone/>
+                      </a:pPr>
+                      <a:r>
+                        <a:rPr cap="none" sz="1100" i="0" b="0" u="none" strike="noStrike">
+                          <a:solidFill>
+                            <a:srgbClr val="000000">
+                              <a:alpha val="100000"/>
+                            </a:srgbClr>
+                          </a:solidFill>
+                          <a:latin typeface="Arial"/>
+                          <a:cs typeface="Arial"/>
+                          <a:ea typeface="Arial"/>
+                          <a:sym typeface="Arial"/>
+                        </a:rPr>
+                        <a:t>Peri_BL_141</a:t>
+                      </a:r>
+                    </a:p>
+                  </a:txBody>
+                  <a:tcPr anchor="ctr" marB="63500" marT="63500" marR="0" marL="0">
+                    <a:lnL algn="ctr" cmpd="sng" cap="flat" w="0">
+                      <a:noFill/>
+                      <a:prstDash val="solid"/>
+                    </a:lnL>
+                    <a:lnR algn="ctr" cmpd="sng" cap="flat" w="0">
+                      <a:noFill/>
+                      <a:prstDash val="solid"/>
+                    </a:lnR>
+                    <a:lnT algn="ctr" cmpd="sng" cap="flat" w="0">
+                      <a:noFill/>
+                      <a:prstDash val="solid"/>
+                    </a:lnT>
+                    <a:lnB algn="ctr" cmpd="sng" cap="flat" w="0">
+                      <a:noFill/>
+                      <a:prstDash val="solid"/>
+                    </a:lnB>
+                    <a:solidFill>
+                      <a:srgbClr val="FFFFFF">
+                        <a:alpha val="0"/>
+                      </a:srgbClr>
+                    </a:solidFill>
+                  </a:tcPr>
+                </a:tc>
+                <a:tc>
+                  <a:txBody>
+                    <a:bodyPr/>
+                    <a:lstStyle/>
+                    <a:p>
+                      <a:pPr algn="ctr" marL="63500" marR="63500">
+                        <a:lnSpc>
+                          <a:spcPct val="100000"/>
+                        </a:lnSpc>
+                        <a:spcBef>
+                          <a:spcPts val="500"/>
+                        </a:spcBef>
+                        <a:spcAft>
+                          <a:spcPts val="500"/>
+                        </a:spcAft>
+                        <a:buNone/>
+                      </a:pPr>
+                      <a:r>
+                        <a:rPr cap="none" sz="1100" i="0" b="0" u="none" strike="noStrike">
+                          <a:solidFill>
+                            <a:srgbClr val="000000">
+                              <a:alpha val="100000"/>
+                            </a:srgbClr>
+                          </a:solidFill>
+                          <a:latin typeface="Arial"/>
+                          <a:cs typeface="Arial"/>
+                          <a:ea typeface="Arial"/>
+                          <a:sym typeface="Arial"/>
+                        </a:rPr>
+                        <a:t>0.54</a:t>
+                      </a:r>
+                    </a:p>
+                  </a:txBody>
+                  <a:tcPr anchor="ctr" marB="63500" marT="63500" marR="0" marL="0">
+                    <a:lnL algn="ctr" cmpd="sng" cap="flat" w="0">
+                      <a:noFill/>
+                      <a:prstDash val="solid"/>
+                    </a:lnL>
+                    <a:lnR algn="ctr" cmpd="sng" cap="flat" w="0">
+                      <a:noFill/>
+                      <a:prstDash val="solid"/>
+                    </a:lnR>
+                    <a:lnT algn="ctr" cmpd="sng" cap="flat" w="0">
+                      <a:noFill/>
+                      <a:prstDash val="solid"/>
+                    </a:lnT>
+                    <a:lnB algn="ctr" cmpd="sng" cap="flat" w="0">
+                      <a:noFill/>
+                      <a:prstDash val="solid"/>
+                    </a:lnB>
+                    <a:solidFill>
+                      <a:srgbClr val="FFFFFF">
+                        <a:alpha val="0"/>
+                      </a:srgbClr>
+                    </a:solidFill>
+                  </a:tcPr>
+                </a:tc>
+                <a:tc>
+                  <a:txBody>
+                    <a:bodyPr/>
+                    <a:lstStyle/>
+                    <a:p>
+                      <a:pPr algn="ctr" marL="63500" marR="63500">
+                        <a:lnSpc>
+                          <a:spcPct val="100000"/>
+                        </a:lnSpc>
+                        <a:spcBef>
+                          <a:spcPts val="500"/>
+                        </a:spcBef>
+                        <a:spcAft>
+                          <a:spcPts val="500"/>
+                        </a:spcAft>
+                        <a:buNone/>
+                      </a:pPr>
+                      <a:r>
+                        <a:rPr cap="none" sz="1100" i="0" b="0" u="none" strike="noStrike">
+                          <a:solidFill>
+                            <a:srgbClr val="FF0000">
+                              <a:alpha val="100000"/>
+                            </a:srgbClr>
+                          </a:solidFill>
+                          <a:latin typeface="Arial"/>
+                          <a:cs typeface="Arial"/>
+                          <a:ea typeface="Arial"/>
+                          <a:sym typeface="Arial"/>
+                        </a:rPr>
+                        <a:t>Up</a:t>
+                      </a:r>
+                    </a:p>
+                  </a:txBody>
+                  <a:tcPr anchor="ctr" marB="63500" marT="63500" marR="0" marL="0">
+                    <a:lnL algn="ctr" cmpd="sng" cap="flat" w="0">
+                      <a:noFill/>
+                      <a:prstDash val="solid"/>
+                    </a:lnL>
+                    <a:lnR algn="ctr" cmpd="sng" cap="flat" w="0">
+                      <a:noFill/>
+                      <a:prstDash val="solid"/>
+                    </a:lnR>
+                    <a:lnT algn="ctr" cmpd="sng" cap="flat" w="0">
+                      <a:noFill/>
+                      <a:prstDash val="solid"/>
+                    </a:lnT>
+                    <a:lnB algn="ctr" cmpd="sng" cap="flat" w="0">
+                      <a:noFill/>
+                      <a:prstDash val="solid"/>
+                    </a:lnB>
+                    <a:solidFill>
+                      <a:srgbClr val="FFFFFF">
+                        <a:alpha val="0"/>
+                      </a:srgbClr>
+                    </a:solidFill>
+                  </a:tcPr>
+                </a:tc>
+              </a:tr>
+              <a:tr h="388945">
+                <a:tc>
+                  <a:txBody>
+                    <a:bodyPr/>
+                    <a:lstStyle/>
+                    <a:p>
+                      <a:pPr algn="ctr" marL="63500" marR="63500">
+                        <a:lnSpc>
+                          <a:spcPct val="100000"/>
+                        </a:lnSpc>
+                        <a:spcBef>
+                          <a:spcPts val="500"/>
+                        </a:spcBef>
+                        <a:spcAft>
+                          <a:spcPts val="500"/>
+                        </a:spcAft>
+                        <a:buNone/>
+                      </a:pPr>
+                      <a:r>
+                        <a:rPr cap="none" sz="1100" i="0" b="0" u="none" strike="noStrike">
+                          <a:solidFill>
+                            <a:srgbClr val="000000">
+                              <a:alpha val="100000"/>
+                            </a:srgbClr>
+                          </a:solidFill>
+                          <a:latin typeface="Arial"/>
+                          <a:cs typeface="Arial"/>
+                          <a:ea typeface="Arial"/>
+                          <a:sym typeface="Arial"/>
+                        </a:rPr>
+                        <a:t>PERI</a:t>
+                      </a:r>
+                    </a:p>
+                  </a:txBody>
+                  <a:tcPr anchor="ctr" marB="63500" marT="63500" marR="0" marL="0">
+                    <a:lnL algn="ctr" cmpd="sng" cap="flat" w="0">
+                      <a:noFill/>
+                      <a:prstDash val="solid"/>
+                    </a:lnL>
+                    <a:lnR algn="ctr" cmpd="sng" cap="flat" w="0">
+                      <a:noFill/>
+                      <a:prstDash val="solid"/>
+                    </a:lnR>
+                    <a:lnT algn="ctr" cmpd="sng" cap="flat" w="0">
+                      <a:noFill/>
+                      <a:prstDash val="solid"/>
+                    </a:lnT>
+                    <a:lnB algn="ctr" cmpd="sng" cap="flat" w="0">
+                      <a:noFill/>
+                      <a:prstDash val="solid"/>
+                    </a:lnB>
+                    <a:solidFill>
+                      <a:srgbClr val="EFEFEF">
+                        <a:alpha val="100000"/>
+                      </a:srgbClr>
+                    </a:solidFill>
+                  </a:tcPr>
+                </a:tc>
+                <a:tc>
+                  <a:txBody>
+                    <a:bodyPr/>
+                    <a:lstStyle/>
+                    <a:p>
+                      <a:pPr algn="ctr" marL="63500" marR="63500">
+                        <a:lnSpc>
+                          <a:spcPct val="100000"/>
+                        </a:lnSpc>
+                        <a:spcBef>
+                          <a:spcPts val="500"/>
+                        </a:spcBef>
+                        <a:spcAft>
+                          <a:spcPts val="500"/>
+                        </a:spcAft>
+                        <a:buNone/>
+                      </a:pPr>
+                      <a:r>
+                        <a:rPr cap="none" sz="1100" i="0" b="0" u="none" strike="noStrike">
+                          <a:solidFill>
+                            <a:srgbClr val="000000">
+                              <a:alpha val="100000"/>
+                            </a:srgbClr>
+                          </a:solidFill>
+                          <a:latin typeface="Arial"/>
+                          <a:cs typeface="Arial"/>
+                          <a:ea typeface="Arial"/>
+                          <a:sym typeface="Arial"/>
+                        </a:rPr>
+                        <a:t>PB</a:t>
+                      </a:r>
+                    </a:p>
+                  </a:txBody>
+                  <a:tcPr anchor="ctr" marB="63500" marT="63500" marR="0" marL="0">
+                    <a:lnL algn="ctr" cmpd="sng" cap="flat" w="0">
+                      <a:noFill/>
+                      <a:prstDash val="solid"/>
+                    </a:lnL>
+                    <a:lnR algn="ctr" cmpd="sng" cap="flat" w="0">
+                      <a:noFill/>
+                      <a:prstDash val="solid"/>
+                    </a:lnR>
+                    <a:lnT algn="ctr" cmpd="sng" cap="flat" w="0">
+                      <a:noFill/>
+                      <a:prstDash val="solid"/>
+                    </a:lnT>
+                    <a:lnB algn="ctr" cmpd="sng" cap="flat" w="0">
+                      <a:noFill/>
+                      <a:prstDash val="solid"/>
+                    </a:lnB>
+                    <a:solidFill>
+                      <a:srgbClr val="EFEFEF">
+                        <a:alpha val="100000"/>
+                      </a:srgbClr>
+                    </a:solidFill>
+                  </a:tcPr>
+                </a:tc>
+                <a:tc>
+                  <a:txBody>
+                    <a:bodyPr/>
+                    <a:lstStyle/>
+                    <a:p>
+                      <a:pPr algn="ctr" marL="63500" marR="63500">
+                        <a:lnSpc>
+                          <a:spcPct val="100000"/>
+                        </a:lnSpc>
+                        <a:spcBef>
+                          <a:spcPts val="500"/>
+                        </a:spcBef>
+                        <a:spcAft>
+                          <a:spcPts val="500"/>
+                        </a:spcAft>
+                        <a:buNone/>
+                      </a:pPr>
+                      <a:r>
+                        <a:rPr cap="none" sz="1100" i="0" b="0" u="none" strike="noStrike">
+                          <a:solidFill>
+                            <a:srgbClr val="000000">
+                              <a:alpha val="100000"/>
+                            </a:srgbClr>
+                          </a:solidFill>
+                          <a:latin typeface="Arial"/>
+                          <a:cs typeface="Arial"/>
+                          <a:ea typeface="Arial"/>
+                          <a:sym typeface="Arial"/>
+                        </a:rPr>
+                        <a:t>PB_2</a:t>
+                      </a:r>
+                    </a:p>
+                  </a:txBody>
+                  <a:tcPr anchor="ctr" marB="63500" marT="63500" marR="0" marL="0">
+                    <a:lnL algn="ctr" cmpd="sng" cap="flat" w="0">
+                      <a:noFill/>
+                      <a:prstDash val="solid"/>
+                    </a:lnL>
+                    <a:lnR algn="ctr" cmpd="sng" cap="flat" w="0">
+                      <a:noFill/>
+                      <a:prstDash val="solid"/>
+                    </a:lnR>
+                    <a:lnT algn="ctr" cmpd="sng" cap="flat" w="0">
+                      <a:noFill/>
+                      <a:prstDash val="solid"/>
+                    </a:lnT>
+                    <a:lnB algn="ctr" cmpd="sng" cap="flat" w="0">
+                      <a:noFill/>
+                      <a:prstDash val="solid"/>
+                    </a:lnB>
+                    <a:solidFill>
+                      <a:srgbClr val="EFEFEF">
+                        <a:alpha val="100000"/>
+                      </a:srgbClr>
+                    </a:solidFill>
+                  </a:tcPr>
+                </a:tc>
+                <a:tc>
+                  <a:txBody>
+                    <a:bodyPr/>
+                    <a:lstStyle/>
+                    <a:p>
+                      <a:pPr algn="ctr" marL="63500" marR="63500">
+                        <a:lnSpc>
+                          <a:spcPct val="100000"/>
+                        </a:lnSpc>
+                        <a:spcBef>
+                          <a:spcPts val="500"/>
+                        </a:spcBef>
+                        <a:spcAft>
+                          <a:spcPts val="500"/>
+                        </a:spcAft>
+                        <a:buNone/>
+                      </a:pPr>
+                      <a:r>
+                        <a:rPr cap="none" sz="1100" i="0" b="0" u="none" strike="noStrike">
+                          <a:solidFill>
+                            <a:srgbClr val="000000">
+                              <a:alpha val="100000"/>
+                            </a:srgbClr>
+                          </a:solidFill>
+                          <a:latin typeface="Arial"/>
+                          <a:cs typeface="Arial"/>
+                          <a:ea typeface="Arial"/>
+                          <a:sym typeface="Arial"/>
+                        </a:rPr>
+                        <a:t>Peri_PB_034</a:t>
+                      </a:r>
+                    </a:p>
+                  </a:txBody>
+                  <a:tcPr anchor="ctr" marB="63500" marT="63500" marR="0" marL="0">
+                    <a:lnL algn="ctr" cmpd="sng" cap="flat" w="0">
+                      <a:noFill/>
+                      <a:prstDash val="solid"/>
+                    </a:lnL>
+                    <a:lnR algn="ctr" cmpd="sng" cap="flat" w="0">
+                      <a:noFill/>
+                      <a:prstDash val="solid"/>
+                    </a:lnR>
+                    <a:lnT algn="ctr" cmpd="sng" cap="flat" w="0">
+                      <a:noFill/>
+                      <a:prstDash val="solid"/>
+                    </a:lnT>
+                    <a:lnB algn="ctr" cmpd="sng" cap="flat" w="0">
+                      <a:noFill/>
+                      <a:prstDash val="solid"/>
+                    </a:lnB>
+                    <a:solidFill>
+                      <a:srgbClr val="EFEFEF">
+                        <a:alpha val="100000"/>
+                      </a:srgbClr>
+                    </a:solidFill>
+                  </a:tcPr>
+                </a:tc>
+                <a:tc>
+                  <a:txBody>
+                    <a:bodyPr/>
+                    <a:lstStyle/>
+                    <a:p>
+                      <a:pPr algn="ctr" marL="63500" marR="63500">
+                        <a:lnSpc>
+                          <a:spcPct val="100000"/>
+                        </a:lnSpc>
+                        <a:spcBef>
+                          <a:spcPts val="500"/>
+                        </a:spcBef>
+                        <a:spcAft>
+                          <a:spcPts val="500"/>
+                        </a:spcAft>
+                        <a:buNone/>
+                      </a:pPr>
+                      <a:r>
+                        <a:rPr cap="none" sz="1100" i="0" b="0" u="none" strike="noStrike">
+                          <a:solidFill>
+                            <a:srgbClr val="000000">
+                              <a:alpha val="100000"/>
+                            </a:srgbClr>
+                          </a:solidFill>
+                          <a:latin typeface="Arial"/>
+                          <a:cs typeface="Arial"/>
+                          <a:ea typeface="Arial"/>
+                          <a:sym typeface="Arial"/>
+                        </a:rPr>
+                        <a:t>0.54</a:t>
+                      </a:r>
+                    </a:p>
+                  </a:txBody>
+                  <a:tcPr anchor="ctr" marB="63500" marT="63500" marR="0" marL="0">
+                    <a:lnL algn="ctr" cmpd="sng" cap="flat" w="0">
+                      <a:noFill/>
+                      <a:prstDash val="solid"/>
+                    </a:lnL>
+                    <a:lnR algn="ctr" cmpd="sng" cap="flat" w="0">
+                      <a:noFill/>
+                      <a:prstDash val="solid"/>
+                    </a:lnR>
+                    <a:lnT algn="ctr" cmpd="sng" cap="flat" w="0">
+                      <a:noFill/>
+                      <a:prstDash val="solid"/>
+                    </a:lnT>
+                    <a:lnB algn="ctr" cmpd="sng" cap="flat" w="0">
+                      <a:noFill/>
+                      <a:prstDash val="solid"/>
+                    </a:lnB>
+                    <a:solidFill>
+                      <a:srgbClr val="EFEFEF">
+                        <a:alpha val="100000"/>
+                      </a:srgbClr>
+                    </a:solidFill>
+                  </a:tcPr>
+                </a:tc>
+                <a:tc>
+                  <a:txBody>
+                    <a:bodyPr/>
+                    <a:lstStyle/>
+                    <a:p>
+                      <a:pPr algn="ctr" marL="63500" marR="63500">
+                        <a:lnSpc>
+                          <a:spcPct val="100000"/>
+                        </a:lnSpc>
+                        <a:spcBef>
+                          <a:spcPts val="500"/>
+                        </a:spcBef>
+                        <a:spcAft>
+                          <a:spcPts val="500"/>
+                        </a:spcAft>
+                        <a:buNone/>
+                      </a:pPr>
+                      <a:r>
+                        <a:rPr cap="none" sz="1100" i="0" b="0" u="none" strike="noStrike">
+                          <a:solidFill>
+                            <a:srgbClr val="FF0000">
+                              <a:alpha val="100000"/>
+                            </a:srgbClr>
+                          </a:solidFill>
+                          <a:latin typeface="Arial"/>
+                          <a:cs typeface="Arial"/>
+                          <a:ea typeface="Arial"/>
+                          <a:sym typeface="Arial"/>
+                        </a:rPr>
+                        <a:t>Up</a:t>
+                      </a:r>
+                    </a:p>
+                  </a:txBody>
+                  <a:tcPr anchor="ctr" marB="63500" marT="63500" marR="0" marL="0">
+                    <a:lnL algn="ctr" cmpd="sng" cap="flat" w="0">
+                      <a:noFill/>
+                      <a:prstDash val="solid"/>
+                    </a:lnL>
+                    <a:lnR algn="ctr" cmpd="sng" cap="flat" w="0">
+                      <a:noFill/>
+                      <a:prstDash val="solid"/>
+                    </a:lnR>
+                    <a:lnT algn="ctr" cmpd="sng" cap="flat" w="0">
+                      <a:noFill/>
+                      <a:prstDash val="solid"/>
+                    </a:lnT>
+                    <a:lnB algn="ctr" cmpd="sng" cap="flat" w="0">
+                      <a:noFill/>
+                      <a:prstDash val="solid"/>
+                    </a:lnB>
+                    <a:solidFill>
+                      <a:srgbClr val="EFEFEF">
+                        <a:alpha val="100000"/>
+                      </a:srgbClr>
+                    </a:solidFill>
+                  </a:tcPr>
+                </a:tc>
+              </a:tr>
+              <a:tr h="388945">
+                <a:tc>
+                  <a:txBody>
+                    <a:bodyPr/>
+                    <a:lstStyle/>
+                    <a:p>
+                      <a:pPr algn="ctr" marL="63500" marR="63500">
+                        <a:lnSpc>
+                          <a:spcPct val="100000"/>
+                        </a:lnSpc>
+                        <a:spcBef>
+                          <a:spcPts val="500"/>
+                        </a:spcBef>
+                        <a:spcAft>
+                          <a:spcPts val="500"/>
+                        </a:spcAft>
+                        <a:buNone/>
+                      </a:pPr>
+                      <a:r>
+                        <a:rPr cap="none" sz="1100" i="0" b="0" u="none" strike="noStrike">
+                          <a:solidFill>
+                            <a:srgbClr val="000000">
+                              <a:alpha val="100000"/>
+                            </a:srgbClr>
+                          </a:solidFill>
+                          <a:latin typeface="Arial"/>
+                          <a:cs typeface="Arial"/>
+                          <a:ea typeface="Arial"/>
+                          <a:sym typeface="Arial"/>
+                        </a:rPr>
+                        <a:t>PERI</a:t>
+                      </a:r>
+                    </a:p>
+                  </a:txBody>
+                  <a:tcPr anchor="ctr" marB="63500" marT="63500" marR="0" marL="0">
+                    <a:lnL algn="ctr" cmpd="sng" cap="flat" w="0">
+                      <a:noFill/>
+                      <a:prstDash val="solid"/>
+                    </a:lnL>
+                    <a:lnR algn="ctr" cmpd="sng" cap="flat" w="0">
+                      <a:noFill/>
+                      <a:prstDash val="solid"/>
+                    </a:lnR>
+                    <a:lnT algn="ctr" cmpd="sng" cap="flat" w="0">
+                      <a:noFill/>
+                      <a:prstDash val="solid"/>
+                    </a:lnT>
+                    <a:lnB algn="ctr" cmpd="sng" cap="flat" w="0">
+                      <a:noFill/>
+                      <a:prstDash val="solid"/>
+                    </a:lnB>
+                    <a:solidFill>
+                      <a:srgbClr val="FFFFFF">
+                        <a:alpha val="0"/>
+                      </a:srgbClr>
+                    </a:solidFill>
+                  </a:tcPr>
+                </a:tc>
+                <a:tc>
+                  <a:txBody>
+                    <a:bodyPr/>
+                    <a:lstStyle/>
+                    <a:p>
+                      <a:pPr algn="ctr" marL="63500" marR="63500">
+                        <a:lnSpc>
+                          <a:spcPct val="100000"/>
+                        </a:lnSpc>
+                        <a:spcBef>
+                          <a:spcPts val="500"/>
+                        </a:spcBef>
+                        <a:spcAft>
+                          <a:spcPts val="500"/>
+                        </a:spcAft>
+                        <a:buNone/>
+                      </a:pPr>
+                      <a:r>
+                        <a:rPr cap="none" sz="1100" i="0" b="0" u="none" strike="noStrike">
+                          <a:solidFill>
+                            <a:srgbClr val="000000">
+                              <a:alpha val="100000"/>
+                            </a:srgbClr>
+                          </a:solidFill>
+                          <a:latin typeface="Arial"/>
+                          <a:cs typeface="Arial"/>
+                          <a:ea typeface="Arial"/>
+                          <a:sym typeface="Arial"/>
+                        </a:rPr>
+                        <a:t>BL</a:t>
+                      </a:r>
+                    </a:p>
+                  </a:txBody>
+                  <a:tcPr anchor="ctr" marB="63500" marT="63500" marR="0" marL="0">
+                    <a:lnL algn="ctr" cmpd="sng" cap="flat" w="0">
+                      <a:noFill/>
+                      <a:prstDash val="solid"/>
+                    </a:lnL>
+                    <a:lnR algn="ctr" cmpd="sng" cap="flat" w="0">
+                      <a:noFill/>
+                      <a:prstDash val="solid"/>
+                    </a:lnR>
+                    <a:lnT algn="ctr" cmpd="sng" cap="flat" w="0">
+                      <a:noFill/>
+                      <a:prstDash val="solid"/>
+                    </a:lnT>
+                    <a:lnB algn="ctr" cmpd="sng" cap="flat" w="0">
+                      <a:noFill/>
+                      <a:prstDash val="solid"/>
+                    </a:lnB>
+                    <a:solidFill>
+                      <a:srgbClr val="FFFFFF">
+                        <a:alpha val="0"/>
+                      </a:srgbClr>
+                    </a:solidFill>
+                  </a:tcPr>
+                </a:tc>
+                <a:tc>
+                  <a:txBody>
+                    <a:bodyPr/>
+                    <a:lstStyle/>
+                    <a:p>
+                      <a:pPr algn="ctr" marL="63500" marR="63500">
+                        <a:lnSpc>
+                          <a:spcPct val="100000"/>
+                        </a:lnSpc>
+                        <a:spcBef>
+                          <a:spcPts val="500"/>
+                        </a:spcBef>
+                        <a:spcAft>
+                          <a:spcPts val="500"/>
+                        </a:spcAft>
+                        <a:buNone/>
+                      </a:pPr>
+                      <a:r>
+                        <a:rPr cap="none" sz="1100" i="0" b="0" u="none" strike="noStrike">
+                          <a:solidFill>
+                            <a:srgbClr val="000000">
+                              <a:alpha val="100000"/>
+                            </a:srgbClr>
+                          </a:solidFill>
+                          <a:latin typeface="Arial"/>
+                          <a:cs typeface="Arial"/>
+                          <a:ea typeface="Arial"/>
+                          <a:sym typeface="Arial"/>
+                        </a:rPr>
+                        <a:t>BL_2</a:t>
+                      </a:r>
+                    </a:p>
+                  </a:txBody>
+                  <a:tcPr anchor="ctr" marB="63500" marT="63500" marR="0" marL="0">
+                    <a:lnL algn="ctr" cmpd="sng" cap="flat" w="0">
+                      <a:noFill/>
+                      <a:prstDash val="solid"/>
+                    </a:lnL>
+                    <a:lnR algn="ctr" cmpd="sng" cap="flat" w="0">
+                      <a:noFill/>
+                      <a:prstDash val="solid"/>
+                    </a:lnR>
+                    <a:lnT algn="ctr" cmpd="sng" cap="flat" w="0">
+                      <a:noFill/>
+                      <a:prstDash val="solid"/>
+                    </a:lnT>
+                    <a:lnB algn="ctr" cmpd="sng" cap="flat" w="0">
+                      <a:noFill/>
+                      <a:prstDash val="solid"/>
+                    </a:lnB>
+                    <a:solidFill>
+                      <a:srgbClr val="FFFFFF">
+                        <a:alpha val="0"/>
+                      </a:srgbClr>
+                    </a:solidFill>
+                  </a:tcPr>
+                </a:tc>
+                <a:tc>
+                  <a:txBody>
+                    <a:bodyPr/>
+                    <a:lstStyle/>
+                    <a:p>
+                      <a:pPr algn="ctr" marL="63500" marR="63500">
+                        <a:lnSpc>
+                          <a:spcPct val="100000"/>
+                        </a:lnSpc>
+                        <a:spcBef>
+                          <a:spcPts val="500"/>
+                        </a:spcBef>
+                        <a:spcAft>
+                          <a:spcPts val="500"/>
+                        </a:spcAft>
+                        <a:buNone/>
+                      </a:pPr>
+                      <a:r>
+                        <a:rPr cap="none" sz="1100" i="0" b="0" u="none" strike="noStrike">
+                          <a:solidFill>
+                            <a:srgbClr val="000000">
+                              <a:alpha val="100000"/>
+                            </a:srgbClr>
+                          </a:solidFill>
+                          <a:latin typeface="Arial"/>
+                          <a:cs typeface="Arial"/>
+                          <a:ea typeface="Arial"/>
+                          <a:sym typeface="Arial"/>
+                        </a:rPr>
+                        <a:t>Peri_BL_121</a:t>
+                      </a:r>
+                    </a:p>
+                  </a:txBody>
+                  <a:tcPr anchor="ctr" marB="63500" marT="63500" marR="0" marL="0">
+                    <a:lnL algn="ctr" cmpd="sng" cap="flat" w="0">
+                      <a:noFill/>
+                      <a:prstDash val="solid"/>
+                    </a:lnL>
+                    <a:lnR algn="ctr" cmpd="sng" cap="flat" w="0">
+                      <a:noFill/>
+                      <a:prstDash val="solid"/>
+                    </a:lnR>
+                    <a:lnT algn="ctr" cmpd="sng" cap="flat" w="0">
+                      <a:noFill/>
+                      <a:prstDash val="solid"/>
+                    </a:lnT>
+                    <a:lnB algn="ctr" cmpd="sng" cap="flat" w="0">
+                      <a:noFill/>
+                      <a:prstDash val="solid"/>
+                    </a:lnB>
+                    <a:solidFill>
+                      <a:srgbClr val="FFFFFF">
+                        <a:alpha val="0"/>
+                      </a:srgbClr>
+                    </a:solidFill>
+                  </a:tcPr>
+                </a:tc>
+                <a:tc>
+                  <a:txBody>
+                    <a:bodyPr/>
+                    <a:lstStyle/>
+                    <a:p>
+                      <a:pPr algn="ctr" marL="63500" marR="63500">
+                        <a:lnSpc>
+                          <a:spcPct val="100000"/>
+                        </a:lnSpc>
+                        <a:spcBef>
+                          <a:spcPts val="500"/>
+                        </a:spcBef>
+                        <a:spcAft>
+                          <a:spcPts val="500"/>
+                        </a:spcAft>
+                        <a:buNone/>
+                      </a:pPr>
+                      <a:r>
+                        <a:rPr cap="none" sz="1100" i="0" b="0" u="none" strike="noStrike">
+                          <a:solidFill>
+                            <a:srgbClr val="000000">
+                              <a:alpha val="100000"/>
+                            </a:srgbClr>
+                          </a:solidFill>
+                          <a:latin typeface="Arial"/>
+                          <a:cs typeface="Arial"/>
+                          <a:ea typeface="Arial"/>
+                          <a:sym typeface="Arial"/>
+                        </a:rPr>
+                        <a:t>0.54</a:t>
+                      </a:r>
+                    </a:p>
+                  </a:txBody>
+                  <a:tcPr anchor="ctr" marB="63500" marT="63500" marR="0" marL="0">
+                    <a:lnL algn="ctr" cmpd="sng" cap="flat" w="0">
+                      <a:noFill/>
+                      <a:prstDash val="solid"/>
+                    </a:lnL>
+                    <a:lnR algn="ctr" cmpd="sng" cap="flat" w="0">
+                      <a:noFill/>
+                      <a:prstDash val="solid"/>
+                    </a:lnR>
+                    <a:lnT algn="ctr" cmpd="sng" cap="flat" w="0">
+                      <a:noFill/>
+                      <a:prstDash val="solid"/>
+                    </a:lnT>
+                    <a:lnB algn="ctr" cmpd="sng" cap="flat" w="0">
+                      <a:noFill/>
+                      <a:prstDash val="solid"/>
+                    </a:lnB>
+                    <a:solidFill>
+                      <a:srgbClr val="FFFFFF">
+                        <a:alpha val="0"/>
+                      </a:srgbClr>
+                    </a:solidFill>
+                  </a:tcPr>
+                </a:tc>
+                <a:tc>
+                  <a:txBody>
+                    <a:bodyPr/>
+                    <a:lstStyle/>
+                    <a:p>
+                      <a:pPr algn="ctr" marL="63500" marR="63500">
+                        <a:lnSpc>
+                          <a:spcPct val="100000"/>
+                        </a:lnSpc>
+                        <a:spcBef>
+                          <a:spcPts val="500"/>
+                        </a:spcBef>
+                        <a:spcAft>
+                          <a:spcPts val="500"/>
+                        </a:spcAft>
+                        <a:buNone/>
+                      </a:pPr>
+                      <a:r>
+                        <a:rPr cap="none" sz="1100" i="0" b="0" u="none" strike="noStrike">
+                          <a:solidFill>
+                            <a:srgbClr val="FF0000">
+                              <a:alpha val="100000"/>
+                            </a:srgbClr>
+                          </a:solidFill>
+                          <a:latin typeface="Arial"/>
+                          <a:cs typeface="Arial"/>
+                          <a:ea typeface="Arial"/>
+                          <a:sym typeface="Arial"/>
+                        </a:rPr>
+                        <a:t>Up</a:t>
+                      </a:r>
+                    </a:p>
+                  </a:txBody>
+                  <a:tcPr anchor="ctr" marB="63500" marT="63500" marR="0" marL="0">
+                    <a:lnL algn="ctr" cmpd="sng" cap="flat" w="0">
+                      <a:noFill/>
+                      <a:prstDash val="solid"/>
+                    </a:lnL>
+                    <a:lnR algn="ctr" cmpd="sng" cap="flat" w="0">
+                      <a:noFill/>
+                      <a:prstDash val="solid"/>
+                    </a:lnR>
+                    <a:lnT algn="ctr" cmpd="sng" cap="flat" w="0">
+                      <a:noFill/>
+                      <a:prstDash val="solid"/>
+                    </a:lnT>
+                    <a:lnB algn="ctr" cmpd="sng" cap="flat" w="0">
+                      <a:noFill/>
+                      <a:prstDash val="solid"/>
+                    </a:lnB>
+                    <a:solidFill>
+                      <a:srgbClr val="FFFFFF">
+                        <a:alpha val="0"/>
+                      </a:srgbClr>
+                    </a:solidFill>
+                  </a:tcPr>
+                </a:tc>
+              </a:tr>
+              <a:tr h="390241">
+                <a:tc>
+                  <a:txBody>
+                    <a:bodyPr/>
+                    <a:lstStyle/>
+                    <a:p>
+                      <a:pPr algn="ctr" marL="63500" marR="63500">
+                        <a:lnSpc>
+                          <a:spcPct val="100000"/>
+                        </a:lnSpc>
+                        <a:spcBef>
+                          <a:spcPts val="500"/>
+                        </a:spcBef>
+                        <a:spcAft>
+                          <a:spcPts val="500"/>
+                        </a:spcAft>
+                        <a:buNone/>
+                      </a:pPr>
+                      <a:r>
+                        <a:rPr cap="none" sz="1100" i="0" b="0" u="none" strike="noStrike">
+                          <a:solidFill>
+                            <a:srgbClr val="000000">
+                              <a:alpha val="100000"/>
+                            </a:srgbClr>
+                          </a:solidFill>
+                          <a:latin typeface="Arial"/>
+                          <a:cs typeface="Arial"/>
+                          <a:ea typeface="Arial"/>
+                          <a:sym typeface="Arial"/>
+                        </a:rPr>
+                        <a:t>CELL</a:t>
+                      </a:r>
+                    </a:p>
+                  </a:txBody>
+                  <a:tcPr anchor="ctr" marB="63500" marT="63500" marR="0" marL="0">
+                    <a:lnL algn="ctr" cmpd="sng" cap="flat" w="0">
+                      <a:noFill/>
+                      <a:prstDash val="solid"/>
+                    </a:lnL>
+                    <a:lnR algn="ctr" cmpd="sng" cap="flat" w="0">
+                      <a:noFill/>
+                      <a:prstDash val="solid"/>
+                    </a:lnR>
+                    <a:lnT algn="ctr" cmpd="sng" cap="flat" w="0">
+                      <a:noFill/>
+                      <a:prstDash val="solid"/>
+                    </a:lnT>
+                    <a:lnB algn="ctr" cmpd="sng" cap="flat" w="0">
+                      <a:noFill/>
+                      <a:prstDash val="solid"/>
+                    </a:lnB>
+                    <a:solidFill>
+                      <a:srgbClr val="EFEFEF">
+                        <a:alpha val="100000"/>
+                      </a:srgbClr>
+                    </a:solidFill>
+                  </a:tcPr>
+                </a:tc>
+                <a:tc>
+                  <a:txBody>
+                    <a:bodyPr/>
+                    <a:lstStyle/>
+                    <a:p>
+                      <a:pPr algn="ctr" marL="63500" marR="63500">
+                        <a:lnSpc>
+                          <a:spcPct val="100000"/>
+                        </a:lnSpc>
+                        <a:spcBef>
+                          <a:spcPts val="500"/>
+                        </a:spcBef>
+                        <a:spcAft>
+                          <a:spcPts val="500"/>
+                        </a:spcAft>
+                        <a:buNone/>
+                      </a:pPr>
+                      <a:r>
+                        <a:rPr cap="none" sz="1100" i="0" b="0" u="none" strike="noStrike">
+                          <a:solidFill>
+                            <a:srgbClr val="000000">
+                              <a:alpha val="100000"/>
+                            </a:srgbClr>
+                          </a:solidFill>
+                          <a:latin typeface="Arial"/>
+                          <a:cs typeface="Arial"/>
+                          <a:ea typeface="Arial"/>
+                          <a:sym typeface="Arial"/>
+                        </a:rPr>
+                        <a:t>TCMC</a:t>
+                      </a:r>
+                    </a:p>
+                  </a:txBody>
+                  <a:tcPr anchor="ctr" marB="63500" marT="63500" marR="0" marL="0">
+                    <a:lnL algn="ctr" cmpd="sng" cap="flat" w="0">
+                      <a:noFill/>
+                      <a:prstDash val="solid"/>
+                    </a:lnL>
+                    <a:lnR algn="ctr" cmpd="sng" cap="flat" w="0">
+                      <a:noFill/>
+                      <a:prstDash val="solid"/>
+                    </a:lnR>
+                    <a:lnT algn="ctr" cmpd="sng" cap="flat" w="0">
+                      <a:noFill/>
+                      <a:prstDash val="solid"/>
+                    </a:lnT>
+                    <a:lnB algn="ctr" cmpd="sng" cap="flat" w="0">
+                      <a:noFill/>
+                      <a:prstDash val="solid"/>
+                    </a:lnB>
+                    <a:solidFill>
+                      <a:srgbClr val="EFEFEF">
+                        <a:alpha val="100000"/>
+                      </a:srgbClr>
+                    </a:solidFill>
+                  </a:tcPr>
+                </a:tc>
+                <a:tc>
+                  <a:txBody>
+                    <a:bodyPr/>
+                    <a:lstStyle/>
+                    <a:p>
+                      <a:pPr algn="ctr" marL="63500" marR="63500">
+                        <a:lnSpc>
+                          <a:spcPct val="100000"/>
+                        </a:lnSpc>
+                        <a:spcBef>
+                          <a:spcPts val="500"/>
+                        </a:spcBef>
+                        <a:spcAft>
+                          <a:spcPts val="500"/>
+                        </a:spcAft>
+                        <a:buNone/>
+                      </a:pPr>
+                      <a:r>
+                        <a:rPr cap="none" sz="1100" i="0" b="0" u="none" strike="noStrike">
+                          <a:solidFill>
+                            <a:srgbClr val="000000">
+                              <a:alpha val="100000"/>
+                            </a:srgbClr>
+                          </a:solidFill>
+                          <a:latin typeface="Arial"/>
+                          <a:cs typeface="Arial"/>
+                          <a:ea typeface="Arial"/>
+                          <a:sym typeface="Arial"/>
+                        </a:rPr>
+                        <a:t>TCMC_1</a:t>
+                      </a:r>
+                    </a:p>
+                  </a:txBody>
+                  <a:tcPr anchor="ctr" marB="63500" marT="63500" marR="0" marL="0">
+                    <a:lnL algn="ctr" cmpd="sng" cap="flat" w="0">
+                      <a:noFill/>
+                      <a:prstDash val="solid"/>
+                    </a:lnL>
+                    <a:lnR algn="ctr" cmpd="sng" cap="flat" w="0">
+                      <a:noFill/>
+                      <a:prstDash val="solid"/>
+                    </a:lnR>
+                    <a:lnT algn="ctr" cmpd="sng" cap="flat" w="0">
+                      <a:noFill/>
+                      <a:prstDash val="solid"/>
+                    </a:lnT>
+                    <a:lnB algn="ctr" cmpd="sng" cap="flat" w="0">
+                      <a:noFill/>
+                      <a:prstDash val="solid"/>
+                    </a:lnB>
+                    <a:solidFill>
+                      <a:srgbClr val="EFEFEF">
+                        <a:alpha val="100000"/>
+                      </a:srgbClr>
+                    </a:solidFill>
+                  </a:tcPr>
+                </a:tc>
+                <a:tc>
+                  <a:txBody>
+                    <a:bodyPr/>
+                    <a:lstStyle/>
+                    <a:p>
+                      <a:pPr algn="ctr" marL="63500" marR="63500">
+                        <a:lnSpc>
+                          <a:spcPct val="100000"/>
+                        </a:lnSpc>
+                        <a:spcBef>
+                          <a:spcPts val="500"/>
+                        </a:spcBef>
+                        <a:spcAft>
+                          <a:spcPts val="500"/>
+                        </a:spcAft>
+                        <a:buNone/>
+                      </a:pPr>
+                      <a:r>
+                        <a:rPr cap="none" sz="1100" i="0" b="0" u="none" strike="noStrike">
+                          <a:solidFill>
+                            <a:srgbClr val="000000">
+                              <a:alpha val="100000"/>
+                            </a:srgbClr>
+                          </a:solidFill>
+                          <a:latin typeface="Arial"/>
+                          <a:cs typeface="Arial"/>
+                          <a:ea typeface="Arial"/>
+                          <a:sym typeface="Arial"/>
+                        </a:rPr>
+                        <a:t>Cell_TCMC_219</a:t>
+                      </a:r>
+                    </a:p>
+                  </a:txBody>
+                  <a:tcPr anchor="ctr" marB="63500" marT="63500" marR="0" marL="0">
+                    <a:lnL algn="ctr" cmpd="sng" cap="flat" w="0">
+                      <a:noFill/>
+                      <a:prstDash val="solid"/>
+                    </a:lnL>
+                    <a:lnR algn="ctr" cmpd="sng" cap="flat" w="0">
+                      <a:noFill/>
+                      <a:prstDash val="solid"/>
+                    </a:lnR>
+                    <a:lnT algn="ctr" cmpd="sng" cap="flat" w="0">
+                      <a:noFill/>
+                      <a:prstDash val="solid"/>
+                    </a:lnT>
+                    <a:lnB algn="ctr" cmpd="sng" cap="flat" w="0">
+                      <a:noFill/>
+                      <a:prstDash val="solid"/>
+                    </a:lnB>
+                    <a:solidFill>
+                      <a:srgbClr val="EFEFEF">
+                        <a:alpha val="100000"/>
+                      </a:srgbClr>
+                    </a:solidFill>
+                  </a:tcPr>
+                </a:tc>
+                <a:tc>
+                  <a:txBody>
+                    <a:bodyPr/>
+                    <a:lstStyle/>
+                    <a:p>
+                      <a:pPr algn="ctr" marL="63500" marR="63500">
+                        <a:lnSpc>
+                          <a:spcPct val="100000"/>
+                        </a:lnSpc>
+                        <a:spcBef>
+                          <a:spcPts val="500"/>
+                        </a:spcBef>
+                        <a:spcAft>
+                          <a:spcPts val="500"/>
+                        </a:spcAft>
+                        <a:buNone/>
+                      </a:pPr>
+                      <a:r>
+                        <a:rPr cap="none" sz="1100" i="0" b="0" u="none" strike="noStrike">
+                          <a:solidFill>
+                            <a:srgbClr val="000000">
+                              <a:alpha val="100000"/>
+                            </a:srgbClr>
+                          </a:solidFill>
+                          <a:latin typeface="Arial"/>
+                          <a:cs typeface="Arial"/>
+                          <a:ea typeface="Arial"/>
+                          <a:sym typeface="Arial"/>
+                        </a:rPr>
+                        <a:t>0.53</a:t>
+                      </a:r>
+                    </a:p>
+                  </a:txBody>
+                  <a:tcPr anchor="ctr" marB="63500" marT="63500" marR="0" marL="0">
+                    <a:lnL algn="ctr" cmpd="sng" cap="flat" w="0">
+                      <a:noFill/>
+                      <a:prstDash val="solid"/>
+                    </a:lnL>
+                    <a:lnR algn="ctr" cmpd="sng" cap="flat" w="0">
+                      <a:noFill/>
+                      <a:prstDash val="solid"/>
+                    </a:lnR>
+                    <a:lnT algn="ctr" cmpd="sng" cap="flat" w="0">
+                      <a:noFill/>
+                      <a:prstDash val="solid"/>
+                    </a:lnT>
+                    <a:lnB algn="ctr" cmpd="sng" cap="flat" w="0">
+                      <a:noFill/>
+                      <a:prstDash val="solid"/>
+                    </a:lnB>
+                    <a:solidFill>
+                      <a:srgbClr val="EFEFEF">
+                        <a:alpha val="100000"/>
+                      </a:srgbClr>
+                    </a:solidFill>
+                  </a:tcPr>
+                </a:tc>
+                <a:tc>
+                  <a:txBody>
+                    <a:bodyPr/>
+                    <a:lstStyle/>
+                    <a:p>
+                      <a:pPr algn="ctr" marL="63500" marR="63500">
+                        <a:lnSpc>
+                          <a:spcPct val="100000"/>
+                        </a:lnSpc>
+                        <a:spcBef>
+                          <a:spcPts val="500"/>
+                        </a:spcBef>
+                        <a:spcAft>
+                          <a:spcPts val="500"/>
+                        </a:spcAft>
+                        <a:buNone/>
+                      </a:pPr>
+                      <a:r>
+                        <a:rPr cap="none" sz="1100" i="0" b="0" u="none" strike="noStrike">
+                          <a:solidFill>
+                            <a:srgbClr val="FF0000">
+                              <a:alpha val="100000"/>
+                            </a:srgbClr>
+                          </a:solidFill>
+                          <a:latin typeface="Arial"/>
+                          <a:cs typeface="Arial"/>
+                          <a:ea typeface="Arial"/>
+                          <a:sym typeface="Arial"/>
+                        </a:rPr>
+                        <a:t>Up</a:t>
+                      </a:r>
+                    </a:p>
+                  </a:txBody>
+                  <a:tcPr anchor="ctr" marB="63500" marT="63500" marR="0" marL="0">
+                    <a:lnL algn="ctr" cmpd="sng" cap="flat" w="0">
+                      <a:noFill/>
+                      <a:prstDash val="solid"/>
+                    </a:lnL>
+                    <a:lnR algn="ctr" cmpd="sng" cap="flat" w="0">
+                      <a:noFill/>
+                      <a:prstDash val="solid"/>
+                    </a:lnR>
+                    <a:lnT algn="ctr" cmpd="sng" cap="flat" w="0">
+                      <a:noFill/>
+                      <a:prstDash val="solid"/>
+                    </a:lnT>
+                    <a:lnB algn="ctr" cmpd="sng" cap="flat" w="0">
+                      <a:noFill/>
+                      <a:prstDash val="solid"/>
+                    </a:lnB>
+                    <a:solidFill>
+                      <a:srgbClr val="EFEFEF">
+                        <a:alpha val="100000"/>
+                      </a:srgbClr>
+                    </a:solidFill>
+                  </a:tcPr>
+                </a:tc>
+              </a:tr>
+              <a:tr h="390241">
+                <a:tc>
+                  <a:txBody>
+                    <a:bodyPr/>
+                    <a:lstStyle/>
+                    <a:p>
+                      <a:pPr algn="ctr" marL="63500" marR="63500">
+                        <a:lnSpc>
+                          <a:spcPct val="100000"/>
+                        </a:lnSpc>
+                        <a:spcBef>
+                          <a:spcPts val="500"/>
+                        </a:spcBef>
+                        <a:spcAft>
+                          <a:spcPts val="500"/>
+                        </a:spcAft>
+                        <a:buNone/>
+                      </a:pPr>
+                      <a:r>
+                        <a:rPr cap="none" sz="1100" i="0" b="0" u="none" strike="noStrike">
+                          <a:solidFill>
+                            <a:srgbClr val="000000">
+                              <a:alpha val="100000"/>
+                            </a:srgbClr>
+                          </a:solidFill>
+                          <a:latin typeface="Arial"/>
+                          <a:cs typeface="Arial"/>
+                          <a:ea typeface="Arial"/>
+                          <a:sym typeface="Arial"/>
+                        </a:rPr>
+                        <a:t>CELL</a:t>
+                      </a:r>
+                    </a:p>
+                  </a:txBody>
+                  <a:tcPr anchor="ctr" marB="63500" marT="63500" marR="0" marL="0">
+                    <a:lnL algn="ctr" cmpd="sng" cap="flat" w="0">
+                      <a:noFill/>
+                      <a:prstDash val="solid"/>
+                    </a:lnL>
+                    <a:lnR algn="ctr" cmpd="sng" cap="flat" w="0">
+                      <a:noFill/>
+                      <a:prstDash val="solid"/>
+                    </a:lnR>
+                    <a:lnT algn="ctr" cmpd="sng" cap="flat" w="0">
+                      <a:noFill/>
+                      <a:prstDash val="solid"/>
+                    </a:lnT>
+                    <a:lnB algn="ctr" cmpd="sng" cap="flat" w="0">
+                      <a:noFill/>
+                      <a:prstDash val="solid"/>
+                    </a:lnB>
+                    <a:solidFill>
+                      <a:srgbClr val="FFFFFF">
+                        <a:alpha val="0"/>
+                      </a:srgbClr>
+                    </a:solidFill>
+                  </a:tcPr>
+                </a:tc>
+                <a:tc>
+                  <a:txBody>
+                    <a:bodyPr/>
+                    <a:lstStyle/>
+                    <a:p>
+                      <a:pPr algn="ctr" marL="63500" marR="63500">
+                        <a:lnSpc>
+                          <a:spcPct val="100000"/>
+                        </a:lnSpc>
+                        <a:spcBef>
+                          <a:spcPts val="500"/>
+                        </a:spcBef>
+                        <a:spcAft>
+                          <a:spcPts val="500"/>
+                        </a:spcAft>
+                        <a:buNone/>
+                      </a:pPr>
+                      <a:r>
+                        <a:rPr cap="none" sz="1100" i="0" b="0" u="none" strike="noStrike">
+                          <a:solidFill>
+                            <a:srgbClr val="000000">
+                              <a:alpha val="100000"/>
+                            </a:srgbClr>
+                          </a:solidFill>
+                          <a:latin typeface="Arial"/>
+                          <a:cs typeface="Arial"/>
+                          <a:ea typeface="Arial"/>
+                          <a:sym typeface="Arial"/>
+                        </a:rPr>
+                        <a:t>WTC</a:t>
+                      </a:r>
+                    </a:p>
+                  </a:txBody>
+                  <a:tcPr anchor="ctr" marB="63500" marT="63500" marR="0" marL="0">
+                    <a:lnL algn="ctr" cmpd="sng" cap="flat" w="0">
+                      <a:noFill/>
+                      <a:prstDash val="solid"/>
+                    </a:lnL>
+                    <a:lnR algn="ctr" cmpd="sng" cap="flat" w="0">
+                      <a:noFill/>
+                      <a:prstDash val="solid"/>
+                    </a:lnR>
+                    <a:lnT algn="ctr" cmpd="sng" cap="flat" w="0">
+                      <a:noFill/>
+                      <a:prstDash val="solid"/>
+                    </a:lnT>
+                    <a:lnB algn="ctr" cmpd="sng" cap="flat" w="0">
+                      <a:noFill/>
+                      <a:prstDash val="solid"/>
+                    </a:lnB>
+                    <a:solidFill>
+                      <a:srgbClr val="FFFFFF">
+                        <a:alpha val="0"/>
+                      </a:srgbClr>
+                    </a:solidFill>
+                  </a:tcPr>
+                </a:tc>
+                <a:tc>
+                  <a:txBody>
+                    <a:bodyPr/>
+                    <a:lstStyle/>
+                    <a:p>
+                      <a:pPr algn="ctr" marL="63500" marR="63500">
+                        <a:lnSpc>
+                          <a:spcPct val="100000"/>
+                        </a:lnSpc>
+                        <a:spcBef>
+                          <a:spcPts val="500"/>
+                        </a:spcBef>
+                        <a:spcAft>
+                          <a:spcPts val="500"/>
+                        </a:spcAft>
+                        <a:buNone/>
+                      </a:pPr>
+                      <a:r>
+                        <a:rPr cap="none" sz="1100" i="0" b="0" u="none" strike="noStrike">
+                          <a:solidFill>
+                            <a:srgbClr val="000000">
+                              <a:alpha val="100000"/>
+                            </a:srgbClr>
+                          </a:solidFill>
+                          <a:latin typeface="Arial"/>
+                          <a:cs typeface="Arial"/>
+                          <a:ea typeface="Arial"/>
+                          <a:sym typeface="Arial"/>
+                        </a:rPr>
+                        <a:t>WTC_2</a:t>
+                      </a:r>
+                    </a:p>
+                  </a:txBody>
+                  <a:tcPr anchor="ctr" marB="63500" marT="63500" marR="0" marL="0">
+                    <a:lnL algn="ctr" cmpd="sng" cap="flat" w="0">
+                      <a:noFill/>
+                      <a:prstDash val="solid"/>
+                    </a:lnL>
+                    <a:lnR algn="ctr" cmpd="sng" cap="flat" w="0">
+                      <a:noFill/>
+                      <a:prstDash val="solid"/>
+                    </a:lnR>
+                    <a:lnT algn="ctr" cmpd="sng" cap="flat" w="0">
+                      <a:noFill/>
+                      <a:prstDash val="solid"/>
+                    </a:lnT>
+                    <a:lnB algn="ctr" cmpd="sng" cap="flat" w="0">
+                      <a:noFill/>
+                      <a:prstDash val="solid"/>
+                    </a:lnB>
+                    <a:solidFill>
+                      <a:srgbClr val="FFFFFF">
+                        <a:alpha val="0"/>
+                      </a:srgbClr>
+                    </a:solidFill>
+                  </a:tcPr>
+                </a:tc>
+                <a:tc>
+                  <a:txBody>
+                    <a:bodyPr/>
+                    <a:lstStyle/>
+                    <a:p>
+                      <a:pPr algn="ctr" marL="63500" marR="63500">
+                        <a:lnSpc>
+                          <a:spcPct val="100000"/>
+                        </a:lnSpc>
+                        <a:spcBef>
+                          <a:spcPts val="500"/>
+                        </a:spcBef>
+                        <a:spcAft>
+                          <a:spcPts val="500"/>
+                        </a:spcAft>
+                        <a:buNone/>
+                      </a:pPr>
+                      <a:r>
+                        <a:rPr cap="none" sz="1100" i="0" b="0" u="none" strike="noStrike">
+                          <a:solidFill>
+                            <a:srgbClr val="000000">
+                              <a:alpha val="100000"/>
+                            </a:srgbClr>
+                          </a:solidFill>
+                          <a:latin typeface="Arial"/>
+                          <a:cs typeface="Arial"/>
+                          <a:ea typeface="Arial"/>
+                          <a:sym typeface="Arial"/>
+                        </a:rPr>
+                        <a:t>Cell_WTC_290</a:t>
+                      </a:r>
+                    </a:p>
+                  </a:txBody>
+                  <a:tcPr anchor="ctr" marB="63500" marT="63500" marR="0" marL="0">
+                    <a:lnL algn="ctr" cmpd="sng" cap="flat" w="0">
+                      <a:noFill/>
+                      <a:prstDash val="solid"/>
+                    </a:lnL>
+                    <a:lnR algn="ctr" cmpd="sng" cap="flat" w="0">
+                      <a:noFill/>
+                      <a:prstDash val="solid"/>
+                    </a:lnR>
+                    <a:lnT algn="ctr" cmpd="sng" cap="flat" w="0">
+                      <a:noFill/>
+                      <a:prstDash val="solid"/>
+                    </a:lnT>
+                    <a:lnB algn="ctr" cmpd="sng" cap="flat" w="0">
+                      <a:noFill/>
+                      <a:prstDash val="solid"/>
+                    </a:lnB>
+                    <a:solidFill>
+                      <a:srgbClr val="FFFFFF">
+                        <a:alpha val="0"/>
+                      </a:srgbClr>
+                    </a:solidFill>
+                  </a:tcPr>
+                </a:tc>
+                <a:tc>
+                  <a:txBody>
+                    <a:bodyPr/>
+                    <a:lstStyle/>
+                    <a:p>
+                      <a:pPr algn="ctr" marL="63500" marR="63500">
+                        <a:lnSpc>
+                          <a:spcPct val="100000"/>
+                        </a:lnSpc>
+                        <a:spcBef>
+                          <a:spcPts val="500"/>
+                        </a:spcBef>
+                        <a:spcAft>
+                          <a:spcPts val="500"/>
+                        </a:spcAft>
+                        <a:buNone/>
+                      </a:pPr>
+                      <a:r>
+                        <a:rPr cap="none" sz="1100" i="0" b="0" u="none" strike="noStrike">
+                          <a:solidFill>
+                            <a:srgbClr val="000000">
+                              <a:alpha val="100000"/>
+                            </a:srgbClr>
+                          </a:solidFill>
+                          <a:latin typeface="Arial"/>
+                          <a:cs typeface="Arial"/>
+                          <a:ea typeface="Arial"/>
+                          <a:sym typeface="Arial"/>
+                        </a:rPr>
+                        <a:t>0.53</a:t>
+                      </a:r>
+                    </a:p>
+                  </a:txBody>
+                  <a:tcPr anchor="ctr" marB="63500" marT="63500" marR="0" marL="0">
+                    <a:lnL algn="ctr" cmpd="sng" cap="flat" w="0">
+                      <a:noFill/>
+                      <a:prstDash val="solid"/>
+                    </a:lnL>
+                    <a:lnR algn="ctr" cmpd="sng" cap="flat" w="0">
+                      <a:noFill/>
+                      <a:prstDash val="solid"/>
+                    </a:lnR>
+                    <a:lnT algn="ctr" cmpd="sng" cap="flat" w="0">
+                      <a:noFill/>
+                      <a:prstDash val="solid"/>
+                    </a:lnT>
+                    <a:lnB algn="ctr" cmpd="sng" cap="flat" w="0">
+                      <a:noFill/>
+                      <a:prstDash val="solid"/>
+                    </a:lnB>
+                    <a:solidFill>
+                      <a:srgbClr val="FFFFFF">
+                        <a:alpha val="0"/>
+                      </a:srgbClr>
+                    </a:solidFill>
+                  </a:tcPr>
+                </a:tc>
+                <a:tc>
+                  <a:txBody>
+                    <a:bodyPr/>
+                    <a:lstStyle/>
+                    <a:p>
+                      <a:pPr algn="ctr" marL="63500" marR="63500">
+                        <a:lnSpc>
+                          <a:spcPct val="100000"/>
+                        </a:lnSpc>
+                        <a:spcBef>
+                          <a:spcPts val="500"/>
+                        </a:spcBef>
+                        <a:spcAft>
+                          <a:spcPts val="500"/>
+                        </a:spcAft>
+                        <a:buNone/>
+                      </a:pPr>
+                      <a:r>
+                        <a:rPr cap="none" sz="1100" i="0" b="0" u="none" strike="noStrike">
+                          <a:solidFill>
+                            <a:srgbClr val="FF0000">
+                              <a:alpha val="100000"/>
+                            </a:srgbClr>
+                          </a:solidFill>
+                          <a:latin typeface="Arial"/>
+                          <a:cs typeface="Arial"/>
+                          <a:ea typeface="Arial"/>
+                          <a:sym typeface="Arial"/>
+                        </a:rPr>
+                        <a:t>Up</a:t>
+                      </a:r>
+                    </a:p>
+                  </a:txBody>
+                  <a:tcPr anchor="ctr" marB="63500" marT="63500" marR="0" marL="0">
+                    <a:lnL algn="ctr" cmpd="sng" cap="flat" w="0">
+                      <a:noFill/>
+                      <a:prstDash val="solid"/>
+                    </a:lnL>
+                    <a:lnR algn="ctr" cmpd="sng" cap="flat" w="0">
+                      <a:noFill/>
+                      <a:prstDash val="solid"/>
+                    </a:lnR>
+                    <a:lnT algn="ctr" cmpd="sng" cap="flat" w="0">
+                      <a:noFill/>
+                      <a:prstDash val="solid"/>
+                    </a:lnT>
+                    <a:lnB algn="ctr" cmpd="sng" cap="flat" w="0">
+                      <a:noFill/>
+                      <a:prstDash val="solid"/>
+                    </a:lnB>
+                    <a:solidFill>
+                      <a:srgbClr val="FFFFFF">
+                        <a:alpha val="0"/>
+                      </a:srgbClr>
+                    </a:solidFill>
+                  </a:tcPr>
+                </a:tc>
+              </a:tr>
+              <a:tr h="390241">
+                <a:tc>
+                  <a:txBody>
+                    <a:bodyPr/>
+                    <a:lstStyle/>
+                    <a:p>
+                      <a:pPr algn="ctr" marL="63500" marR="63500">
+                        <a:lnSpc>
+                          <a:spcPct val="100000"/>
+                        </a:lnSpc>
+                        <a:spcBef>
+                          <a:spcPts val="500"/>
+                        </a:spcBef>
+                        <a:spcAft>
+                          <a:spcPts val="500"/>
+                        </a:spcAft>
+                        <a:buNone/>
+                      </a:pPr>
+                      <a:r>
+                        <a:rPr cap="none" sz="1100" i="0" b="0" u="none" strike="noStrike">
+                          <a:solidFill>
+                            <a:srgbClr val="000000">
+                              <a:alpha val="100000"/>
+                            </a:srgbClr>
+                          </a:solidFill>
+                          <a:latin typeface="Arial"/>
+                          <a:cs typeface="Arial"/>
+                          <a:ea typeface="Arial"/>
+                          <a:sym typeface="Arial"/>
+                        </a:rPr>
+                        <a:t>CELL</a:t>
+                      </a:r>
+                    </a:p>
+                  </a:txBody>
+                  <a:tcPr anchor="ctr" marB="63500" marT="63500" marR="0" marL="0">
+                    <a:lnL algn="ctr" cmpd="sng" cap="flat" w="0">
+                      <a:noFill/>
+                      <a:prstDash val="solid"/>
+                    </a:lnL>
+                    <a:lnR algn="ctr" cmpd="sng" cap="flat" w="0">
+                      <a:noFill/>
+                      <a:prstDash val="solid"/>
+                    </a:lnR>
+                    <a:lnT algn="ctr" cmpd="sng" cap="flat" w="0">
+                      <a:noFill/>
+                      <a:prstDash val="solid"/>
+                    </a:lnT>
+                    <a:lnB algn="ctr" cmpd="sng" cap="flat" w="0">
+                      <a:noFill/>
+                      <a:prstDash val="solid"/>
+                    </a:lnB>
+                    <a:solidFill>
+                      <a:srgbClr val="EFEFEF">
+                        <a:alpha val="100000"/>
+                      </a:srgbClr>
+                    </a:solidFill>
+                  </a:tcPr>
+                </a:tc>
+                <a:tc>
+                  <a:txBody>
+                    <a:bodyPr/>
+                    <a:lstStyle/>
+                    <a:p>
+                      <a:pPr algn="ctr" marL="63500" marR="63500">
+                        <a:lnSpc>
+                          <a:spcPct val="100000"/>
+                        </a:lnSpc>
+                        <a:spcBef>
+                          <a:spcPts val="500"/>
+                        </a:spcBef>
+                        <a:spcAft>
+                          <a:spcPts val="500"/>
+                        </a:spcAft>
+                        <a:buNone/>
+                      </a:pPr>
+                      <a:r>
+                        <a:rPr cap="none" sz="1100" i="0" b="0" u="none" strike="noStrike">
+                          <a:solidFill>
+                            <a:srgbClr val="000000">
+                              <a:alpha val="100000"/>
+                            </a:srgbClr>
+                          </a:solidFill>
+                          <a:latin typeface="Arial"/>
+                          <a:cs typeface="Arial"/>
+                          <a:ea typeface="Arial"/>
+                          <a:sym typeface="Arial"/>
+                        </a:rPr>
+                        <a:t>WTC</a:t>
+                      </a:r>
+                    </a:p>
+                  </a:txBody>
+                  <a:tcPr anchor="ctr" marB="63500" marT="63500" marR="0" marL="0">
+                    <a:lnL algn="ctr" cmpd="sng" cap="flat" w="0">
+                      <a:noFill/>
+                      <a:prstDash val="solid"/>
+                    </a:lnL>
+                    <a:lnR algn="ctr" cmpd="sng" cap="flat" w="0">
+                      <a:noFill/>
+                      <a:prstDash val="solid"/>
+                    </a:lnR>
+                    <a:lnT algn="ctr" cmpd="sng" cap="flat" w="0">
+                      <a:noFill/>
+                      <a:prstDash val="solid"/>
+                    </a:lnT>
+                    <a:lnB algn="ctr" cmpd="sng" cap="flat" w="0">
+                      <a:noFill/>
+                      <a:prstDash val="solid"/>
+                    </a:lnB>
+                    <a:solidFill>
+                      <a:srgbClr val="EFEFEF">
+                        <a:alpha val="100000"/>
+                      </a:srgbClr>
+                    </a:solidFill>
+                  </a:tcPr>
+                </a:tc>
+                <a:tc>
+                  <a:txBody>
+                    <a:bodyPr/>
+                    <a:lstStyle/>
+                    <a:p>
+                      <a:pPr algn="ctr" marL="63500" marR="63500">
+                        <a:lnSpc>
+                          <a:spcPct val="100000"/>
+                        </a:lnSpc>
+                        <a:spcBef>
+                          <a:spcPts val="500"/>
+                        </a:spcBef>
+                        <a:spcAft>
+                          <a:spcPts val="500"/>
+                        </a:spcAft>
+                        <a:buNone/>
+                      </a:pPr>
+                      <a:r>
+                        <a:rPr cap="none" sz="1100" i="0" b="0" u="none" strike="noStrike">
+                          <a:solidFill>
+                            <a:srgbClr val="000000">
+                              <a:alpha val="100000"/>
+                            </a:srgbClr>
+                          </a:solidFill>
+                          <a:latin typeface="Arial"/>
+                          <a:cs typeface="Arial"/>
+                          <a:ea typeface="Arial"/>
+                          <a:sym typeface="Arial"/>
+                        </a:rPr>
+                        <a:t>WTC_1</a:t>
+                      </a:r>
+                    </a:p>
+                  </a:txBody>
+                  <a:tcPr anchor="ctr" marB="63500" marT="63500" marR="0" marL="0">
+                    <a:lnL algn="ctr" cmpd="sng" cap="flat" w="0">
+                      <a:noFill/>
+                      <a:prstDash val="solid"/>
+                    </a:lnL>
+                    <a:lnR algn="ctr" cmpd="sng" cap="flat" w="0">
+                      <a:noFill/>
+                      <a:prstDash val="solid"/>
+                    </a:lnR>
+                    <a:lnT algn="ctr" cmpd="sng" cap="flat" w="0">
+                      <a:noFill/>
+                      <a:prstDash val="solid"/>
+                    </a:lnT>
+                    <a:lnB algn="ctr" cmpd="sng" cap="flat" w="0">
+                      <a:noFill/>
+                      <a:prstDash val="solid"/>
+                    </a:lnB>
+                    <a:solidFill>
+                      <a:srgbClr val="EFEFEF">
+                        <a:alpha val="100000"/>
+                      </a:srgbClr>
+                    </a:solidFill>
+                  </a:tcPr>
+                </a:tc>
+                <a:tc>
+                  <a:txBody>
+                    <a:bodyPr/>
+                    <a:lstStyle/>
+                    <a:p>
+                      <a:pPr algn="ctr" marL="63500" marR="63500">
+                        <a:lnSpc>
+                          <a:spcPct val="100000"/>
+                        </a:lnSpc>
+                        <a:spcBef>
+                          <a:spcPts val="500"/>
+                        </a:spcBef>
+                        <a:spcAft>
+                          <a:spcPts val="500"/>
+                        </a:spcAft>
+                        <a:buNone/>
+                      </a:pPr>
+                      <a:r>
+                        <a:rPr cap="none" sz="1100" i="0" b="0" u="none" strike="noStrike">
+                          <a:solidFill>
+                            <a:srgbClr val="000000">
+                              <a:alpha val="100000"/>
+                            </a:srgbClr>
+                          </a:solidFill>
+                          <a:latin typeface="Arial"/>
+                          <a:cs typeface="Arial"/>
+                          <a:ea typeface="Arial"/>
+                          <a:sym typeface="Arial"/>
+                        </a:rPr>
+                        <a:t>Cell_WTC_271</a:t>
+                      </a:r>
+                    </a:p>
+                  </a:txBody>
+                  <a:tcPr anchor="ctr" marB="63500" marT="63500" marR="0" marL="0">
+                    <a:lnL algn="ctr" cmpd="sng" cap="flat" w="0">
+                      <a:noFill/>
+                      <a:prstDash val="solid"/>
+                    </a:lnL>
+                    <a:lnR algn="ctr" cmpd="sng" cap="flat" w="0">
+                      <a:noFill/>
+                      <a:prstDash val="solid"/>
+                    </a:lnR>
+                    <a:lnT algn="ctr" cmpd="sng" cap="flat" w="0">
+                      <a:noFill/>
+                      <a:prstDash val="solid"/>
+                    </a:lnT>
+                    <a:lnB algn="ctr" cmpd="sng" cap="flat" w="0">
+                      <a:noFill/>
+                      <a:prstDash val="solid"/>
+                    </a:lnB>
+                    <a:solidFill>
+                      <a:srgbClr val="EFEFEF">
+                        <a:alpha val="100000"/>
+                      </a:srgbClr>
+                    </a:solidFill>
+                  </a:tcPr>
+                </a:tc>
+                <a:tc>
+                  <a:txBody>
+                    <a:bodyPr/>
+                    <a:lstStyle/>
+                    <a:p>
+                      <a:pPr algn="ctr" marL="63500" marR="63500">
+                        <a:lnSpc>
+                          <a:spcPct val="100000"/>
+                        </a:lnSpc>
+                        <a:spcBef>
+                          <a:spcPts val="500"/>
+                        </a:spcBef>
+                        <a:spcAft>
+                          <a:spcPts val="500"/>
+                        </a:spcAft>
+                        <a:buNone/>
+                      </a:pPr>
+                      <a:r>
+                        <a:rPr cap="none" sz="1100" i="0" b="0" u="none" strike="noStrike">
+                          <a:solidFill>
+                            <a:srgbClr val="000000">
+                              <a:alpha val="100000"/>
+                            </a:srgbClr>
+                          </a:solidFill>
+                          <a:latin typeface="Arial"/>
+                          <a:cs typeface="Arial"/>
+                          <a:ea typeface="Arial"/>
+                          <a:sym typeface="Arial"/>
+                        </a:rPr>
+                        <a:t>0.52</a:t>
+                      </a:r>
+                    </a:p>
+                  </a:txBody>
+                  <a:tcPr anchor="ctr" marB="63500" marT="63500" marR="0" marL="0">
+                    <a:lnL algn="ctr" cmpd="sng" cap="flat" w="0">
+                      <a:noFill/>
+                      <a:prstDash val="solid"/>
+                    </a:lnL>
+                    <a:lnR algn="ctr" cmpd="sng" cap="flat" w="0">
+                      <a:noFill/>
+                      <a:prstDash val="solid"/>
+                    </a:lnR>
+                    <a:lnT algn="ctr" cmpd="sng" cap="flat" w="0">
+                      <a:noFill/>
+                      <a:prstDash val="solid"/>
+                    </a:lnT>
+                    <a:lnB algn="ctr" cmpd="sng" cap="flat" w="0">
+                      <a:noFill/>
+                      <a:prstDash val="solid"/>
+                    </a:lnB>
+                    <a:solidFill>
+                      <a:srgbClr val="EFEFEF">
+                        <a:alpha val="100000"/>
+                      </a:srgbClr>
+                    </a:solidFill>
+                  </a:tcPr>
+                </a:tc>
+                <a:tc>
+                  <a:txBody>
+                    <a:bodyPr/>
+                    <a:lstStyle/>
+                    <a:p>
+                      <a:pPr algn="ctr" marL="63500" marR="63500">
+                        <a:lnSpc>
+                          <a:spcPct val="100000"/>
+                        </a:lnSpc>
+                        <a:spcBef>
+                          <a:spcPts val="500"/>
+                        </a:spcBef>
+                        <a:spcAft>
+                          <a:spcPts val="500"/>
+                        </a:spcAft>
+                        <a:buNone/>
+                      </a:pPr>
+                      <a:r>
+                        <a:rPr cap="none" sz="1100" i="0" b="0" u="none" strike="noStrike">
+                          <a:solidFill>
+                            <a:srgbClr val="FF0000">
+                              <a:alpha val="100000"/>
+                            </a:srgbClr>
+                          </a:solidFill>
+                          <a:latin typeface="Arial"/>
+                          <a:cs typeface="Arial"/>
+                          <a:ea typeface="Arial"/>
+                          <a:sym typeface="Arial"/>
+                        </a:rPr>
+                        <a:t>Up</a:t>
+                      </a:r>
+                    </a:p>
+                  </a:txBody>
+                  <a:tcPr anchor="ctr" marB="63500" marT="63500" marR="0" marL="0">
+                    <a:lnL algn="ctr" cmpd="sng" cap="flat" w="0">
+                      <a:noFill/>
+                      <a:prstDash val="solid"/>
+                    </a:lnL>
+                    <a:lnR algn="ctr" cmpd="sng" cap="flat" w="0">
+                      <a:noFill/>
+                      <a:prstDash val="solid"/>
+                    </a:lnR>
+                    <a:lnT algn="ctr" cmpd="sng" cap="flat" w="0">
+                      <a:noFill/>
+                      <a:prstDash val="solid"/>
+                    </a:lnT>
+                    <a:lnB algn="ctr" cmpd="sng" cap="flat" w="0">
+                      <a:noFill/>
+                      <a:prstDash val="solid"/>
+                    </a:lnB>
+                    <a:solidFill>
+                      <a:srgbClr val="EFEFEF">
+                        <a:alpha val="100000"/>
+                      </a:srgbClr>
+                    </a:solidFill>
+                  </a:tcPr>
+                </a:tc>
+              </a:tr>
+            </a:tbl>
+          </a:graphicData>
+        </a:graphic>
+      </p:graphicFrame>
     </p:spTree>
   </p:cSld>
   <p:clrMapOvr>
@@ -3163,6 +8669,1118 @@
 </file>
 
 <file path=ppt/slides/slide2.xml><?xml version="1.0" encoding="utf-8"?>
+<p:sld xmlns:a="http://schemas.openxmlformats.org/drawingml/2006/main" xmlns:r="http://schemas.openxmlformats.org/officeDocument/2006/relationships" xmlns:p="http://schemas.openxmlformats.org/presentationml/2006/main">
+  <p:cSld>
+    <p:spTree>
+      <p:nvGrpSpPr>
+        <p:cNvPr id="1" name=""/>
+        <p:cNvGrpSpPr/>
+        <p:nvPr/>
+      </p:nvGrpSpPr>
+      <p:grpSpPr>
+        <a:xfrm>
+          <a:off x="0" y="0"/>
+          <a:ext cx="0" cy="0"/>
+          <a:chOff x="0" y="0"/>
+          <a:chExt cx="0" cy="0"/>
+        </a:xfrm>
+      </p:grpSpPr>
+      <p:sp>
+        <p:nvSpPr>
+          <p:cNvPr id="2" name="Title 1"/>
+          <p:cNvSpPr>
+            <a:spLocks noGrp="1"/>
+          </p:cNvSpPr>
+          <p:nvPr>
+            <p:ph type="title"/>
+          </p:nvPr>
+        </p:nvSpPr>
+        <p:spPr>
+          <a:xfrm>
+            <a:off x="457200" y="274638"/>
+            <a:ext cx="8229600" cy="1143000"/>
+          </a:xfrm>
+        </p:spPr>
+        <p:txBody>
+          <a:bodyPr/>
+          <a:lstStyle/>
+          <a:p>
+            <a:r>
+              <a:rPr/>
+              <a:t>Flagged Items Summary (2/2)</a:t>
+            </a:r>
+          </a:p>
+        </p:txBody>
+      </p:sp>
+      <p:graphicFrame>
+        <p:nvGraphicFramePr>
+          <p:cNvPr id="3" name="Content Placeholder 2"/>
+          <p:cNvGraphicFramePr>
+            <a:graphicFrameLocks noGrp="true"/>
+          </p:cNvGraphicFramePr>
+          <p:nvPr/>
+        </p:nvGraphicFramePr>
+        <p:xfrm rot="0">
+          <a:off x="457200" y="1600200"/>
+          <a:ext cx="8229600" cy="4525963"/>
+        </p:xfrm>
+        <a:graphic>
+          <a:graphicData uri="http://schemas.openxmlformats.org/drawingml/2006/table">
+            <a:tbl>
+              <a:tblPr/>
+              <a:tblGrid>
+                <a:gridCol w="610228"/>
+                <a:gridCol w="563570"/>
+                <a:gridCol w="718891"/>
+                <a:gridCol w="1192630"/>
+                <a:gridCol w="649041"/>
+                <a:gridCol w="454839"/>
+              </a:tblGrid>
+              <a:tr h="364252">
+                <a:tc>
+                  <a:txBody>
+                    <a:bodyPr/>
+                    <a:lstStyle/>
+                    <a:p>
+                      <a:pPr algn="ctr" marL="63500" marR="63500">
+                        <a:lnSpc>
+                          <a:spcPct val="100000"/>
+                        </a:lnSpc>
+                        <a:spcBef>
+                          <a:spcPts val="500"/>
+                        </a:spcBef>
+                        <a:spcAft>
+                          <a:spcPts val="500"/>
+                        </a:spcAft>
+                        <a:buNone/>
+                      </a:pPr>
+                      <a:r>
+                        <a:rPr cap="none" sz="1100" i="0" b="1" u="none" strike="noStrike">
+                          <a:solidFill>
+                            <a:srgbClr val="000000">
+                              <a:alpha val="100000"/>
+                            </a:srgbClr>
+                          </a:solidFill>
+                          <a:latin typeface="Arial"/>
+                          <a:cs typeface="Arial"/>
+                          <a:ea typeface="Arial"/>
+                          <a:sym typeface="Arial"/>
+                        </a:rPr>
+                        <a:t>Cat1</a:t>
+                      </a:r>
+                    </a:p>
+                  </a:txBody>
+                  <a:tcPr anchor="ctr" marB="63500" marT="63500" marR="0" marL="0">
+                    <a:lnL algn="ctr" cmpd="sng" cap="flat" w="0">
+                      <a:noFill/>
+                      <a:prstDash val="solid"/>
+                    </a:lnL>
+                    <a:lnR algn="ctr" cmpd="sng" cap="flat" w="0">
+                      <a:noFill/>
+                      <a:prstDash val="solid"/>
+                    </a:lnR>
+                    <a:lnT algn="ctr" cmpd="sng" cap="flat" w="0">
+                      <a:noFill/>
+                      <a:prstDash val="solid"/>
+                    </a:lnT>
+                    <a:lnB algn="ctr" cmpd="sng" cap="flat" w="0">
+                      <a:noFill/>
+                      <a:prstDash val="solid"/>
+                    </a:lnB>
+                    <a:solidFill>
+                      <a:srgbClr val="CFCFCF">
+                        <a:alpha val="100000"/>
+                      </a:srgbClr>
+                    </a:solidFill>
+                  </a:tcPr>
+                </a:tc>
+                <a:tc>
+                  <a:txBody>
+                    <a:bodyPr/>
+                    <a:lstStyle/>
+                    <a:p>
+                      <a:pPr algn="ctr" marL="63500" marR="63500">
+                        <a:lnSpc>
+                          <a:spcPct val="100000"/>
+                        </a:lnSpc>
+                        <a:spcBef>
+                          <a:spcPts val="500"/>
+                        </a:spcBef>
+                        <a:spcAft>
+                          <a:spcPts val="500"/>
+                        </a:spcAft>
+                        <a:buNone/>
+                      </a:pPr>
+                      <a:r>
+                        <a:rPr cap="none" sz="1100" i="0" b="1" u="none" strike="noStrike">
+                          <a:solidFill>
+                            <a:srgbClr val="000000">
+                              <a:alpha val="100000"/>
+                            </a:srgbClr>
+                          </a:solidFill>
+                          <a:latin typeface="Arial"/>
+                          <a:cs typeface="Arial"/>
+                          <a:ea typeface="Arial"/>
+                          <a:sym typeface="Arial"/>
+                        </a:rPr>
+                        <a:t>Cat2</a:t>
+                      </a:r>
+                    </a:p>
+                  </a:txBody>
+                  <a:tcPr anchor="ctr" marB="63500" marT="63500" marR="0" marL="0">
+                    <a:lnL algn="ctr" cmpd="sng" cap="flat" w="0">
+                      <a:noFill/>
+                      <a:prstDash val="solid"/>
+                    </a:lnL>
+                    <a:lnR algn="ctr" cmpd="sng" cap="flat" w="0">
+                      <a:noFill/>
+                      <a:prstDash val="solid"/>
+                    </a:lnR>
+                    <a:lnT algn="ctr" cmpd="sng" cap="flat" w="0">
+                      <a:noFill/>
+                      <a:prstDash val="solid"/>
+                    </a:lnT>
+                    <a:lnB algn="ctr" cmpd="sng" cap="flat" w="0">
+                      <a:noFill/>
+                      <a:prstDash val="solid"/>
+                    </a:lnB>
+                    <a:solidFill>
+                      <a:srgbClr val="CFCFCF">
+                        <a:alpha val="100000"/>
+                      </a:srgbClr>
+                    </a:solidFill>
+                  </a:tcPr>
+                </a:tc>
+                <a:tc>
+                  <a:txBody>
+                    <a:bodyPr/>
+                    <a:lstStyle/>
+                    <a:p>
+                      <a:pPr algn="ctr" marL="63500" marR="63500">
+                        <a:lnSpc>
+                          <a:spcPct val="100000"/>
+                        </a:lnSpc>
+                        <a:spcBef>
+                          <a:spcPts val="500"/>
+                        </a:spcBef>
+                        <a:spcAft>
+                          <a:spcPts val="500"/>
+                        </a:spcAft>
+                        <a:buNone/>
+                      </a:pPr>
+                      <a:r>
+                        <a:rPr cap="none" sz="1100" i="0" b="1" u="none" strike="noStrike">
+                          <a:solidFill>
+                            <a:srgbClr val="000000">
+                              <a:alpha val="100000"/>
+                            </a:srgbClr>
+                          </a:solidFill>
+                          <a:latin typeface="Arial"/>
+                          <a:cs typeface="Arial"/>
+                          <a:ea typeface="Arial"/>
+                          <a:sym typeface="Arial"/>
+                        </a:rPr>
+                        <a:t>Cat3</a:t>
+                      </a:r>
+                    </a:p>
+                  </a:txBody>
+                  <a:tcPr anchor="ctr" marB="63500" marT="63500" marR="0" marL="0">
+                    <a:lnL algn="ctr" cmpd="sng" cap="flat" w="0">
+                      <a:noFill/>
+                      <a:prstDash val="solid"/>
+                    </a:lnL>
+                    <a:lnR algn="ctr" cmpd="sng" cap="flat" w="0">
+                      <a:noFill/>
+                      <a:prstDash val="solid"/>
+                    </a:lnR>
+                    <a:lnT algn="ctr" cmpd="sng" cap="flat" w="0">
+                      <a:noFill/>
+                      <a:prstDash val="solid"/>
+                    </a:lnT>
+                    <a:lnB algn="ctr" cmpd="sng" cap="flat" w="0">
+                      <a:noFill/>
+                      <a:prstDash val="solid"/>
+                    </a:lnB>
+                    <a:solidFill>
+                      <a:srgbClr val="CFCFCF">
+                        <a:alpha val="100000"/>
+                      </a:srgbClr>
+                    </a:solidFill>
+                  </a:tcPr>
+                </a:tc>
+                <a:tc>
+                  <a:txBody>
+                    <a:bodyPr/>
+                    <a:lstStyle/>
+                    <a:p>
+                      <a:pPr algn="ctr" marL="63500" marR="63500">
+                        <a:lnSpc>
+                          <a:spcPct val="100000"/>
+                        </a:lnSpc>
+                        <a:spcBef>
+                          <a:spcPts val="500"/>
+                        </a:spcBef>
+                        <a:spcAft>
+                          <a:spcPts val="500"/>
+                        </a:spcAft>
+                        <a:buNone/>
+                      </a:pPr>
+                      <a:r>
+                        <a:rPr cap="none" sz="1100" i="0" b="1" u="none" strike="noStrike">
+                          <a:solidFill>
+                            <a:srgbClr val="000000">
+                              <a:alpha val="100000"/>
+                            </a:srgbClr>
+                          </a:solidFill>
+                          <a:latin typeface="Arial"/>
+                          <a:cs typeface="Arial"/>
+                          <a:ea typeface="Arial"/>
+                          <a:sym typeface="Arial"/>
+                        </a:rPr>
+                        <a:t>MSR</a:t>
+                      </a:r>
+                    </a:p>
+                  </a:txBody>
+                  <a:tcPr anchor="ctr" marB="63500" marT="63500" marR="0" marL="0">
+                    <a:lnL algn="ctr" cmpd="sng" cap="flat" w="0">
+                      <a:noFill/>
+                      <a:prstDash val="solid"/>
+                    </a:lnL>
+                    <a:lnR algn="ctr" cmpd="sng" cap="flat" w="0">
+                      <a:noFill/>
+                      <a:prstDash val="solid"/>
+                    </a:lnR>
+                    <a:lnT algn="ctr" cmpd="sng" cap="flat" w="0">
+                      <a:noFill/>
+                      <a:prstDash val="solid"/>
+                    </a:lnT>
+                    <a:lnB algn="ctr" cmpd="sng" cap="flat" w="0">
+                      <a:noFill/>
+                      <a:prstDash val="solid"/>
+                    </a:lnB>
+                    <a:solidFill>
+                      <a:srgbClr val="CFCFCF">
+                        <a:alpha val="100000"/>
+                      </a:srgbClr>
+                    </a:solidFill>
+                  </a:tcPr>
+                </a:tc>
+                <a:tc>
+                  <a:txBody>
+                    <a:bodyPr/>
+                    <a:lstStyle/>
+                    <a:p>
+                      <a:pPr algn="ctr" marL="63500" marR="63500">
+                        <a:lnSpc>
+                          <a:spcPct val="100000"/>
+                        </a:lnSpc>
+                        <a:spcBef>
+                          <a:spcPts val="500"/>
+                        </a:spcBef>
+                        <a:spcAft>
+                          <a:spcPts val="500"/>
+                        </a:spcAft>
+                        <a:buNone/>
+                      </a:pPr>
+                      <a:r>
+                        <a:rPr cap="none" sz="1100" i="0" b="1" u="none" strike="noStrike">
+                          <a:solidFill>
+                            <a:srgbClr val="000000">
+                              <a:alpha val="100000"/>
+                            </a:srgbClr>
+                          </a:solidFill>
+                          <a:latin typeface="Arial"/>
+                          <a:cs typeface="Arial"/>
+                          <a:ea typeface="Arial"/>
+                          <a:sym typeface="Arial"/>
+                        </a:rPr>
+                        <a:t>Score</a:t>
+                      </a:r>
+                    </a:p>
+                  </a:txBody>
+                  <a:tcPr anchor="ctr" marB="63500" marT="63500" marR="0" marL="0">
+                    <a:lnL algn="ctr" cmpd="sng" cap="flat" w="0">
+                      <a:noFill/>
+                      <a:prstDash val="solid"/>
+                    </a:lnL>
+                    <a:lnR algn="ctr" cmpd="sng" cap="flat" w="0">
+                      <a:noFill/>
+                      <a:prstDash val="solid"/>
+                    </a:lnR>
+                    <a:lnT algn="ctr" cmpd="sng" cap="flat" w="0">
+                      <a:noFill/>
+                      <a:prstDash val="solid"/>
+                    </a:lnT>
+                    <a:lnB algn="ctr" cmpd="sng" cap="flat" w="0">
+                      <a:noFill/>
+                      <a:prstDash val="solid"/>
+                    </a:lnB>
+                    <a:solidFill>
+                      <a:srgbClr val="CFCFCF">
+                        <a:alpha val="100000"/>
+                      </a:srgbClr>
+                    </a:solidFill>
+                  </a:tcPr>
+                </a:tc>
+                <a:tc>
+                  <a:txBody>
+                    <a:bodyPr/>
+                    <a:lstStyle/>
+                    <a:p>
+                      <a:pPr algn="ctr" marL="63500" marR="63500">
+                        <a:lnSpc>
+                          <a:spcPct val="100000"/>
+                        </a:lnSpc>
+                        <a:spcBef>
+                          <a:spcPts val="500"/>
+                        </a:spcBef>
+                        <a:spcAft>
+                          <a:spcPts val="500"/>
+                        </a:spcAft>
+                        <a:buNone/>
+                      </a:pPr>
+                      <a:r>
+                        <a:rPr cap="none" sz="1100" i="0" b="1" u="none" strike="noStrike">
+                          <a:solidFill>
+                            <a:srgbClr val="000000">
+                              <a:alpha val="100000"/>
+                            </a:srgbClr>
+                          </a:solidFill>
+                          <a:latin typeface="Arial"/>
+                          <a:cs typeface="Arial"/>
+                          <a:ea typeface="Arial"/>
+                          <a:sym typeface="Arial"/>
+                        </a:rPr>
+                        <a:t>Dir</a:t>
+                      </a:r>
+                    </a:p>
+                  </a:txBody>
+                  <a:tcPr anchor="ctr" marB="63500" marT="63500" marR="0" marL="0">
+                    <a:lnL algn="ctr" cmpd="sng" cap="flat" w="0">
+                      <a:noFill/>
+                      <a:prstDash val="solid"/>
+                    </a:lnL>
+                    <a:lnR algn="ctr" cmpd="sng" cap="flat" w="0">
+                      <a:noFill/>
+                      <a:prstDash val="solid"/>
+                    </a:lnR>
+                    <a:lnT algn="ctr" cmpd="sng" cap="flat" w="0">
+                      <a:noFill/>
+                      <a:prstDash val="solid"/>
+                    </a:lnT>
+                    <a:lnB algn="ctr" cmpd="sng" cap="flat" w="0">
+                      <a:noFill/>
+                      <a:prstDash val="solid"/>
+                    </a:lnB>
+                    <a:solidFill>
+                      <a:srgbClr val="CFCFCF">
+                        <a:alpha val="100000"/>
+                      </a:srgbClr>
+                    </a:solidFill>
+                  </a:tcPr>
+                </a:tc>
+              </a:tr>
+              <a:tr h="390241">
+                <a:tc>
+                  <a:txBody>
+                    <a:bodyPr/>
+                    <a:lstStyle/>
+                    <a:p>
+                      <a:pPr algn="ctr" marL="63500" marR="63500">
+                        <a:lnSpc>
+                          <a:spcPct val="100000"/>
+                        </a:lnSpc>
+                        <a:spcBef>
+                          <a:spcPts val="500"/>
+                        </a:spcBef>
+                        <a:spcAft>
+                          <a:spcPts val="500"/>
+                        </a:spcAft>
+                        <a:buNone/>
+                      </a:pPr>
+                      <a:r>
+                        <a:rPr cap="none" sz="1100" i="0" b="0" u="none" strike="noStrike">
+                          <a:solidFill>
+                            <a:srgbClr val="000000">
+                              <a:alpha val="100000"/>
+                            </a:srgbClr>
+                          </a:solidFill>
+                          <a:latin typeface="Arial"/>
+                          <a:cs typeface="Arial"/>
+                          <a:ea typeface="Arial"/>
+                          <a:sym typeface="Arial"/>
+                        </a:rPr>
+                        <a:t>CELL</a:t>
+                      </a:r>
+                    </a:p>
+                  </a:txBody>
+                  <a:tcPr anchor="ctr" marB="63500" marT="63500" marR="0" marL="0">
+                    <a:lnL algn="ctr" cmpd="sng" cap="flat" w="0">
+                      <a:noFill/>
+                      <a:prstDash val="solid"/>
+                    </a:lnL>
+                    <a:lnR algn="ctr" cmpd="sng" cap="flat" w="0">
+                      <a:noFill/>
+                      <a:prstDash val="solid"/>
+                    </a:lnR>
+                    <a:lnT algn="ctr" cmpd="sng" cap="flat" w="0">
+                      <a:noFill/>
+                      <a:prstDash val="solid"/>
+                    </a:lnT>
+                    <a:lnB algn="ctr" cmpd="sng" cap="flat" w="0">
+                      <a:noFill/>
+                      <a:prstDash val="solid"/>
+                    </a:lnB>
+                    <a:solidFill>
+                      <a:srgbClr val="EFEFEF">
+                        <a:alpha val="100000"/>
+                      </a:srgbClr>
+                    </a:solidFill>
+                  </a:tcPr>
+                </a:tc>
+                <a:tc>
+                  <a:txBody>
+                    <a:bodyPr/>
+                    <a:lstStyle/>
+                    <a:p>
+                      <a:pPr algn="ctr" marL="63500" marR="63500">
+                        <a:lnSpc>
+                          <a:spcPct val="100000"/>
+                        </a:lnSpc>
+                        <a:spcBef>
+                          <a:spcPts val="500"/>
+                        </a:spcBef>
+                        <a:spcAft>
+                          <a:spcPts val="500"/>
+                        </a:spcAft>
+                        <a:buNone/>
+                      </a:pPr>
+                      <a:r>
+                        <a:rPr cap="none" sz="1100" i="0" b="0" u="none" strike="noStrike">
+                          <a:solidFill>
+                            <a:srgbClr val="000000">
+                              <a:alpha val="100000"/>
+                            </a:srgbClr>
+                          </a:solidFill>
+                          <a:latin typeface="Arial"/>
+                          <a:cs typeface="Arial"/>
+                          <a:ea typeface="Arial"/>
+                          <a:sym typeface="Arial"/>
+                        </a:rPr>
+                        <a:t>WLS</a:t>
+                      </a:r>
+                    </a:p>
+                  </a:txBody>
+                  <a:tcPr anchor="ctr" marB="63500" marT="63500" marR="0" marL="0">
+                    <a:lnL algn="ctr" cmpd="sng" cap="flat" w="0">
+                      <a:noFill/>
+                      <a:prstDash val="solid"/>
+                    </a:lnL>
+                    <a:lnR algn="ctr" cmpd="sng" cap="flat" w="0">
+                      <a:noFill/>
+                      <a:prstDash val="solid"/>
+                    </a:lnR>
+                    <a:lnT algn="ctr" cmpd="sng" cap="flat" w="0">
+                      <a:noFill/>
+                      <a:prstDash val="solid"/>
+                    </a:lnT>
+                    <a:lnB algn="ctr" cmpd="sng" cap="flat" w="0">
+                      <a:noFill/>
+                      <a:prstDash val="solid"/>
+                    </a:lnB>
+                    <a:solidFill>
+                      <a:srgbClr val="EFEFEF">
+                        <a:alpha val="100000"/>
+                      </a:srgbClr>
+                    </a:solidFill>
+                  </a:tcPr>
+                </a:tc>
+                <a:tc>
+                  <a:txBody>
+                    <a:bodyPr/>
+                    <a:lstStyle/>
+                    <a:p>
+                      <a:pPr algn="ctr" marL="63500" marR="63500">
+                        <a:lnSpc>
+                          <a:spcPct val="100000"/>
+                        </a:lnSpc>
+                        <a:spcBef>
+                          <a:spcPts val="500"/>
+                        </a:spcBef>
+                        <a:spcAft>
+                          <a:spcPts val="500"/>
+                        </a:spcAft>
+                        <a:buNone/>
+                      </a:pPr>
+                      <a:r>
+                        <a:rPr cap="none" sz="1100" i="0" b="0" u="none" strike="noStrike">
+                          <a:solidFill>
+                            <a:srgbClr val="000000">
+                              <a:alpha val="100000"/>
+                            </a:srgbClr>
+                          </a:solidFill>
+                          <a:latin typeface="Arial"/>
+                          <a:cs typeface="Arial"/>
+                          <a:ea typeface="Arial"/>
+                          <a:sym typeface="Arial"/>
+                        </a:rPr>
+                        <a:t>WLS_2</a:t>
+                      </a:r>
+                    </a:p>
+                  </a:txBody>
+                  <a:tcPr anchor="ctr" marB="63500" marT="63500" marR="0" marL="0">
+                    <a:lnL algn="ctr" cmpd="sng" cap="flat" w="0">
+                      <a:noFill/>
+                      <a:prstDash val="solid"/>
+                    </a:lnL>
+                    <a:lnR algn="ctr" cmpd="sng" cap="flat" w="0">
+                      <a:noFill/>
+                      <a:prstDash val="solid"/>
+                    </a:lnR>
+                    <a:lnT algn="ctr" cmpd="sng" cap="flat" w="0">
+                      <a:noFill/>
+                      <a:prstDash val="solid"/>
+                    </a:lnT>
+                    <a:lnB algn="ctr" cmpd="sng" cap="flat" w="0">
+                      <a:noFill/>
+                      <a:prstDash val="solid"/>
+                    </a:lnB>
+                    <a:solidFill>
+                      <a:srgbClr val="EFEFEF">
+                        <a:alpha val="100000"/>
+                      </a:srgbClr>
+                    </a:solidFill>
+                  </a:tcPr>
+                </a:tc>
+                <a:tc>
+                  <a:txBody>
+                    <a:bodyPr/>
+                    <a:lstStyle/>
+                    <a:p>
+                      <a:pPr algn="ctr" marL="63500" marR="63500">
+                        <a:lnSpc>
+                          <a:spcPct val="100000"/>
+                        </a:lnSpc>
+                        <a:spcBef>
+                          <a:spcPts val="500"/>
+                        </a:spcBef>
+                        <a:spcAft>
+                          <a:spcPts val="500"/>
+                        </a:spcAft>
+                        <a:buNone/>
+                      </a:pPr>
+                      <a:r>
+                        <a:rPr cap="none" sz="1100" i="0" b="0" u="none" strike="noStrike">
+                          <a:solidFill>
+                            <a:srgbClr val="000000">
+                              <a:alpha val="100000"/>
+                            </a:srgbClr>
+                          </a:solidFill>
+                          <a:latin typeface="Arial"/>
+                          <a:cs typeface="Arial"/>
+                          <a:ea typeface="Arial"/>
+                          <a:sym typeface="Arial"/>
+                        </a:rPr>
+                        <a:t>Cell_WLS_193</a:t>
+                      </a:r>
+                    </a:p>
+                  </a:txBody>
+                  <a:tcPr anchor="ctr" marB="63500" marT="63500" marR="0" marL="0">
+                    <a:lnL algn="ctr" cmpd="sng" cap="flat" w="0">
+                      <a:noFill/>
+                      <a:prstDash val="solid"/>
+                    </a:lnL>
+                    <a:lnR algn="ctr" cmpd="sng" cap="flat" w="0">
+                      <a:noFill/>
+                      <a:prstDash val="solid"/>
+                    </a:lnR>
+                    <a:lnT algn="ctr" cmpd="sng" cap="flat" w="0">
+                      <a:noFill/>
+                      <a:prstDash val="solid"/>
+                    </a:lnT>
+                    <a:lnB algn="ctr" cmpd="sng" cap="flat" w="0">
+                      <a:noFill/>
+                      <a:prstDash val="solid"/>
+                    </a:lnB>
+                    <a:solidFill>
+                      <a:srgbClr val="EFEFEF">
+                        <a:alpha val="100000"/>
+                      </a:srgbClr>
+                    </a:solidFill>
+                  </a:tcPr>
+                </a:tc>
+                <a:tc>
+                  <a:txBody>
+                    <a:bodyPr/>
+                    <a:lstStyle/>
+                    <a:p>
+                      <a:pPr algn="ctr" marL="63500" marR="63500">
+                        <a:lnSpc>
+                          <a:spcPct val="100000"/>
+                        </a:lnSpc>
+                        <a:spcBef>
+                          <a:spcPts val="500"/>
+                        </a:spcBef>
+                        <a:spcAft>
+                          <a:spcPts val="500"/>
+                        </a:spcAft>
+                        <a:buNone/>
+                      </a:pPr>
+                      <a:r>
+                        <a:rPr cap="none" sz="1100" i="0" b="0" u="none" strike="noStrike">
+                          <a:solidFill>
+                            <a:srgbClr val="000000">
+                              <a:alpha val="100000"/>
+                            </a:srgbClr>
+                          </a:solidFill>
+                          <a:latin typeface="Arial"/>
+                          <a:cs typeface="Arial"/>
+                          <a:ea typeface="Arial"/>
+                          <a:sym typeface="Arial"/>
+                        </a:rPr>
+                        <a:t>0.52</a:t>
+                      </a:r>
+                    </a:p>
+                  </a:txBody>
+                  <a:tcPr anchor="ctr" marB="63500" marT="63500" marR="0" marL="0">
+                    <a:lnL algn="ctr" cmpd="sng" cap="flat" w="0">
+                      <a:noFill/>
+                      <a:prstDash val="solid"/>
+                    </a:lnL>
+                    <a:lnR algn="ctr" cmpd="sng" cap="flat" w="0">
+                      <a:noFill/>
+                      <a:prstDash val="solid"/>
+                    </a:lnR>
+                    <a:lnT algn="ctr" cmpd="sng" cap="flat" w="0">
+                      <a:noFill/>
+                      <a:prstDash val="solid"/>
+                    </a:lnT>
+                    <a:lnB algn="ctr" cmpd="sng" cap="flat" w="0">
+                      <a:noFill/>
+                      <a:prstDash val="solid"/>
+                    </a:lnB>
+                    <a:solidFill>
+                      <a:srgbClr val="EFEFEF">
+                        <a:alpha val="100000"/>
+                      </a:srgbClr>
+                    </a:solidFill>
+                  </a:tcPr>
+                </a:tc>
+                <a:tc>
+                  <a:txBody>
+                    <a:bodyPr/>
+                    <a:lstStyle/>
+                    <a:p>
+                      <a:pPr algn="ctr" marL="63500" marR="63500">
+                        <a:lnSpc>
+                          <a:spcPct val="100000"/>
+                        </a:lnSpc>
+                        <a:spcBef>
+                          <a:spcPts val="500"/>
+                        </a:spcBef>
+                        <a:spcAft>
+                          <a:spcPts val="500"/>
+                        </a:spcAft>
+                        <a:buNone/>
+                      </a:pPr>
+                      <a:r>
+                        <a:rPr cap="none" sz="1100" i="0" b="0" u="none" strike="noStrike">
+                          <a:solidFill>
+                            <a:srgbClr val="FF0000">
+                              <a:alpha val="100000"/>
+                            </a:srgbClr>
+                          </a:solidFill>
+                          <a:latin typeface="Arial"/>
+                          <a:cs typeface="Arial"/>
+                          <a:ea typeface="Arial"/>
+                          <a:sym typeface="Arial"/>
+                        </a:rPr>
+                        <a:t>Up</a:t>
+                      </a:r>
+                    </a:p>
+                  </a:txBody>
+                  <a:tcPr anchor="ctr" marB="63500" marT="63500" marR="0" marL="0">
+                    <a:lnL algn="ctr" cmpd="sng" cap="flat" w="0">
+                      <a:noFill/>
+                      <a:prstDash val="solid"/>
+                    </a:lnL>
+                    <a:lnR algn="ctr" cmpd="sng" cap="flat" w="0">
+                      <a:noFill/>
+                      <a:prstDash val="solid"/>
+                    </a:lnR>
+                    <a:lnT algn="ctr" cmpd="sng" cap="flat" w="0">
+                      <a:noFill/>
+                      <a:prstDash val="solid"/>
+                    </a:lnT>
+                    <a:lnB algn="ctr" cmpd="sng" cap="flat" w="0">
+                      <a:noFill/>
+                      <a:prstDash val="solid"/>
+                    </a:lnB>
+                    <a:solidFill>
+                      <a:srgbClr val="EFEFEF">
+                        <a:alpha val="100000"/>
+                      </a:srgbClr>
+                    </a:solidFill>
+                  </a:tcPr>
+                </a:tc>
+              </a:tr>
+              <a:tr h="388945">
+                <a:tc>
+                  <a:txBody>
+                    <a:bodyPr/>
+                    <a:lstStyle/>
+                    <a:p>
+                      <a:pPr algn="ctr" marL="63500" marR="63500">
+                        <a:lnSpc>
+                          <a:spcPct val="100000"/>
+                        </a:lnSpc>
+                        <a:spcBef>
+                          <a:spcPts val="500"/>
+                        </a:spcBef>
+                        <a:spcAft>
+                          <a:spcPts val="500"/>
+                        </a:spcAft>
+                        <a:buNone/>
+                      </a:pPr>
+                      <a:r>
+                        <a:rPr cap="none" sz="1100" i="0" b="0" u="none" strike="noStrike">
+                          <a:solidFill>
+                            <a:srgbClr val="000000">
+                              <a:alpha val="100000"/>
+                            </a:srgbClr>
+                          </a:solidFill>
+                          <a:latin typeface="Arial"/>
+                          <a:cs typeface="Arial"/>
+                          <a:ea typeface="Arial"/>
+                          <a:sym typeface="Arial"/>
+                        </a:rPr>
+                        <a:t>PERI</a:t>
+                      </a:r>
+                    </a:p>
+                  </a:txBody>
+                  <a:tcPr anchor="ctr" marB="63500" marT="63500" marR="0" marL="0">
+                    <a:lnL algn="ctr" cmpd="sng" cap="flat" w="0">
+                      <a:noFill/>
+                      <a:prstDash val="solid"/>
+                    </a:lnL>
+                    <a:lnR algn="ctr" cmpd="sng" cap="flat" w="0">
+                      <a:noFill/>
+                      <a:prstDash val="solid"/>
+                    </a:lnR>
+                    <a:lnT algn="ctr" cmpd="sng" cap="flat" w="0">
+                      <a:noFill/>
+                      <a:prstDash val="solid"/>
+                    </a:lnT>
+                    <a:lnB algn="ctr" cmpd="sng" cap="flat" w="0">
+                      <a:noFill/>
+                      <a:prstDash val="solid"/>
+                    </a:lnB>
+                    <a:solidFill>
+                      <a:srgbClr val="FFFFFF">
+                        <a:alpha val="0"/>
+                      </a:srgbClr>
+                    </a:solidFill>
+                  </a:tcPr>
+                </a:tc>
+                <a:tc>
+                  <a:txBody>
+                    <a:bodyPr/>
+                    <a:lstStyle/>
+                    <a:p>
+                      <a:pPr algn="ctr" marL="63500" marR="63500">
+                        <a:lnSpc>
+                          <a:spcPct val="100000"/>
+                        </a:lnSpc>
+                        <a:spcBef>
+                          <a:spcPts val="500"/>
+                        </a:spcBef>
+                        <a:spcAft>
+                          <a:spcPts val="500"/>
+                        </a:spcAft>
+                        <a:buNone/>
+                      </a:pPr>
+                      <a:r>
+                        <a:rPr cap="none" sz="1100" i="0" b="0" u="none" strike="noStrike">
+                          <a:solidFill>
+                            <a:srgbClr val="000000">
+                              <a:alpha val="100000"/>
+                            </a:srgbClr>
+                          </a:solidFill>
+                          <a:latin typeface="Arial"/>
+                          <a:cs typeface="Arial"/>
+                          <a:ea typeface="Arial"/>
+                          <a:sym typeface="Arial"/>
+                        </a:rPr>
+                        <a:t>BL</a:t>
+                      </a:r>
+                    </a:p>
+                  </a:txBody>
+                  <a:tcPr anchor="ctr" marB="63500" marT="63500" marR="0" marL="0">
+                    <a:lnL algn="ctr" cmpd="sng" cap="flat" w="0">
+                      <a:noFill/>
+                      <a:prstDash val="solid"/>
+                    </a:lnL>
+                    <a:lnR algn="ctr" cmpd="sng" cap="flat" w="0">
+                      <a:noFill/>
+                      <a:prstDash val="solid"/>
+                    </a:lnR>
+                    <a:lnT algn="ctr" cmpd="sng" cap="flat" w="0">
+                      <a:noFill/>
+                      <a:prstDash val="solid"/>
+                    </a:lnT>
+                    <a:lnB algn="ctr" cmpd="sng" cap="flat" w="0">
+                      <a:noFill/>
+                      <a:prstDash val="solid"/>
+                    </a:lnB>
+                    <a:solidFill>
+                      <a:srgbClr val="FFFFFF">
+                        <a:alpha val="0"/>
+                      </a:srgbClr>
+                    </a:solidFill>
+                  </a:tcPr>
+                </a:tc>
+                <a:tc>
+                  <a:txBody>
+                    <a:bodyPr/>
+                    <a:lstStyle/>
+                    <a:p>
+                      <a:pPr algn="ctr" marL="63500" marR="63500">
+                        <a:lnSpc>
+                          <a:spcPct val="100000"/>
+                        </a:lnSpc>
+                        <a:spcBef>
+                          <a:spcPts val="500"/>
+                        </a:spcBef>
+                        <a:spcAft>
+                          <a:spcPts val="500"/>
+                        </a:spcAft>
+                        <a:buNone/>
+                      </a:pPr>
+                      <a:r>
+                        <a:rPr cap="none" sz="1100" i="0" b="0" u="none" strike="noStrike">
+                          <a:solidFill>
+                            <a:srgbClr val="000000">
+                              <a:alpha val="100000"/>
+                            </a:srgbClr>
+                          </a:solidFill>
+                          <a:latin typeface="Arial"/>
+                          <a:cs typeface="Arial"/>
+                          <a:ea typeface="Arial"/>
+                          <a:sym typeface="Arial"/>
+                        </a:rPr>
+                        <a:t>BL_2</a:t>
+                      </a:r>
+                    </a:p>
+                  </a:txBody>
+                  <a:tcPr anchor="ctr" marB="63500" marT="63500" marR="0" marL="0">
+                    <a:lnL algn="ctr" cmpd="sng" cap="flat" w="0">
+                      <a:noFill/>
+                      <a:prstDash val="solid"/>
+                    </a:lnL>
+                    <a:lnR algn="ctr" cmpd="sng" cap="flat" w="0">
+                      <a:noFill/>
+                      <a:prstDash val="solid"/>
+                    </a:lnR>
+                    <a:lnT algn="ctr" cmpd="sng" cap="flat" w="0">
+                      <a:noFill/>
+                      <a:prstDash val="solid"/>
+                    </a:lnT>
+                    <a:lnB algn="ctr" cmpd="sng" cap="flat" w="0">
+                      <a:noFill/>
+                      <a:prstDash val="solid"/>
+                    </a:lnB>
+                    <a:solidFill>
+                      <a:srgbClr val="FFFFFF">
+                        <a:alpha val="0"/>
+                      </a:srgbClr>
+                    </a:solidFill>
+                  </a:tcPr>
+                </a:tc>
+                <a:tc>
+                  <a:txBody>
+                    <a:bodyPr/>
+                    <a:lstStyle/>
+                    <a:p>
+                      <a:pPr algn="ctr" marL="63500" marR="63500">
+                        <a:lnSpc>
+                          <a:spcPct val="100000"/>
+                        </a:lnSpc>
+                        <a:spcBef>
+                          <a:spcPts val="500"/>
+                        </a:spcBef>
+                        <a:spcAft>
+                          <a:spcPts val="500"/>
+                        </a:spcAft>
+                        <a:buNone/>
+                      </a:pPr>
+                      <a:r>
+                        <a:rPr cap="none" sz="1100" i="0" b="0" u="none" strike="noStrike">
+                          <a:solidFill>
+                            <a:srgbClr val="000000">
+                              <a:alpha val="100000"/>
+                            </a:srgbClr>
+                          </a:solidFill>
+                          <a:latin typeface="Arial"/>
+                          <a:cs typeface="Arial"/>
+                          <a:ea typeface="Arial"/>
+                          <a:sym typeface="Arial"/>
+                        </a:rPr>
+                        <a:t>Peri_BL_101</a:t>
+                      </a:r>
+                    </a:p>
+                  </a:txBody>
+                  <a:tcPr anchor="ctr" marB="63500" marT="63500" marR="0" marL="0">
+                    <a:lnL algn="ctr" cmpd="sng" cap="flat" w="0">
+                      <a:noFill/>
+                      <a:prstDash val="solid"/>
+                    </a:lnL>
+                    <a:lnR algn="ctr" cmpd="sng" cap="flat" w="0">
+                      <a:noFill/>
+                      <a:prstDash val="solid"/>
+                    </a:lnR>
+                    <a:lnT algn="ctr" cmpd="sng" cap="flat" w="0">
+                      <a:noFill/>
+                      <a:prstDash val="solid"/>
+                    </a:lnT>
+                    <a:lnB algn="ctr" cmpd="sng" cap="flat" w="0">
+                      <a:noFill/>
+                      <a:prstDash val="solid"/>
+                    </a:lnB>
+                    <a:solidFill>
+                      <a:srgbClr val="FFFFFF">
+                        <a:alpha val="0"/>
+                      </a:srgbClr>
+                    </a:solidFill>
+                  </a:tcPr>
+                </a:tc>
+                <a:tc>
+                  <a:txBody>
+                    <a:bodyPr/>
+                    <a:lstStyle/>
+                    <a:p>
+                      <a:pPr algn="ctr" marL="63500" marR="63500">
+                        <a:lnSpc>
+                          <a:spcPct val="100000"/>
+                        </a:lnSpc>
+                        <a:spcBef>
+                          <a:spcPts val="500"/>
+                        </a:spcBef>
+                        <a:spcAft>
+                          <a:spcPts val="500"/>
+                        </a:spcAft>
+                        <a:buNone/>
+                      </a:pPr>
+                      <a:r>
+                        <a:rPr cap="none" sz="1100" i="0" b="0" u="none" strike="noStrike">
+                          <a:solidFill>
+                            <a:srgbClr val="000000">
+                              <a:alpha val="100000"/>
+                            </a:srgbClr>
+                          </a:solidFill>
+                          <a:latin typeface="Arial"/>
+                          <a:cs typeface="Arial"/>
+                          <a:ea typeface="Arial"/>
+                          <a:sym typeface="Arial"/>
+                        </a:rPr>
+                        <a:t>0.50</a:t>
+                      </a:r>
+                    </a:p>
+                  </a:txBody>
+                  <a:tcPr anchor="ctr" marB="63500" marT="63500" marR="0" marL="0">
+                    <a:lnL algn="ctr" cmpd="sng" cap="flat" w="0">
+                      <a:noFill/>
+                      <a:prstDash val="solid"/>
+                    </a:lnL>
+                    <a:lnR algn="ctr" cmpd="sng" cap="flat" w="0">
+                      <a:noFill/>
+                      <a:prstDash val="solid"/>
+                    </a:lnR>
+                    <a:lnT algn="ctr" cmpd="sng" cap="flat" w="0">
+                      <a:noFill/>
+                      <a:prstDash val="solid"/>
+                    </a:lnT>
+                    <a:lnB algn="ctr" cmpd="sng" cap="flat" w="0">
+                      <a:noFill/>
+                      <a:prstDash val="solid"/>
+                    </a:lnB>
+                    <a:solidFill>
+                      <a:srgbClr val="FFFFFF">
+                        <a:alpha val="0"/>
+                      </a:srgbClr>
+                    </a:solidFill>
+                  </a:tcPr>
+                </a:tc>
+                <a:tc>
+                  <a:txBody>
+                    <a:bodyPr/>
+                    <a:lstStyle/>
+                    <a:p>
+                      <a:pPr algn="ctr" marL="63500" marR="63500">
+                        <a:lnSpc>
+                          <a:spcPct val="100000"/>
+                        </a:lnSpc>
+                        <a:spcBef>
+                          <a:spcPts val="500"/>
+                        </a:spcBef>
+                        <a:spcAft>
+                          <a:spcPts val="500"/>
+                        </a:spcAft>
+                        <a:buNone/>
+                      </a:pPr>
+                      <a:r>
+                        <a:rPr cap="none" sz="1100" i="0" b="0" u="none" strike="noStrike">
+                          <a:solidFill>
+                            <a:srgbClr val="FF0000">
+                              <a:alpha val="100000"/>
+                            </a:srgbClr>
+                          </a:solidFill>
+                          <a:latin typeface="Arial"/>
+                          <a:cs typeface="Arial"/>
+                          <a:ea typeface="Arial"/>
+                          <a:sym typeface="Arial"/>
+                        </a:rPr>
+                        <a:t>Up</a:t>
+                      </a:r>
+                    </a:p>
+                  </a:txBody>
+                  <a:tcPr anchor="ctr" marB="63500" marT="63500" marR="0" marL="0">
+                    <a:lnL algn="ctr" cmpd="sng" cap="flat" w="0">
+                      <a:noFill/>
+                      <a:prstDash val="solid"/>
+                    </a:lnL>
+                    <a:lnR algn="ctr" cmpd="sng" cap="flat" w="0">
+                      <a:noFill/>
+                      <a:prstDash val="solid"/>
+                    </a:lnR>
+                    <a:lnT algn="ctr" cmpd="sng" cap="flat" w="0">
+                      <a:noFill/>
+                      <a:prstDash val="solid"/>
+                    </a:lnT>
+                    <a:lnB algn="ctr" cmpd="sng" cap="flat" w="0">
+                      <a:noFill/>
+                      <a:prstDash val="solid"/>
+                    </a:lnB>
+                    <a:solidFill>
+                      <a:srgbClr val="FFFFFF">
+                        <a:alpha val="0"/>
+                      </a:srgbClr>
+                    </a:solidFill>
+                  </a:tcPr>
+                </a:tc>
+              </a:tr>
+            </a:tbl>
+          </a:graphicData>
+        </a:graphic>
+      </p:graphicFrame>
+    </p:spTree>
+  </p:cSld>
+  <p:clrMapOvr>
+    <a:masterClrMapping/>
+  </p:clrMapOvr>
+</p:sld>
+</file>
+
+<file path=ppt/slides/slide3.xml><?xml version="1.0" encoding="utf-8"?>
 <p:sld xmlns:a="http://schemas.openxmlformats.org/drawingml/2006/main" xmlns:r="http://schemas.openxmlformats.org/officeDocument/2006/relationships" xmlns:p="http://schemas.openxmlformats.org/presentationml/2006/main">
   <p:cSld>
     <p:spTree>
@@ -3247,7 +9865,7 @@
                         <a:buNone/>
                       </a:pPr>
                       <a:r>
-                        <a:rPr cap="none" sz="900" i="0" b="1" u="none" strike="noStrike">
+                        <a:rPr cap="none" sz="1000" i="0" b="1" u="none" strike="noStrike">
                           <a:solidFill>
                             <a:srgbClr val="333333">
                               <a:alpha val="100000"/>
@@ -3319,7 +9937,7 @@
                         </a:spcAft>
                         <a:buNone/>
                       </a:pPr>
-                      <a:endParaRPr cap="none" sz="900" i="0" b="1" u="none" strike="noStrike">
+                      <a:endParaRPr cap="none" sz="1000" i="0" b="1" u="none" strike="noStrike">
                         <a:solidFill>
                           <a:srgbClr val="333333">
                             <a:alpha val="100000"/>
@@ -3331,7 +9949,7 @@
                         <a:sym typeface="Arial"/>
                       </a:endParaRPr>
                       <a:r>
-                        <a:rPr cap="none" sz="900" i="0" b="1" u="none" strike="noStrike">
+                        <a:rPr cap="none" sz="1000" i="0" b="1" u="none" strike="noStrike">
                           <a:solidFill>
                             <a:srgbClr val="333333">
                               <a:alpha val="100000"/>
@@ -3403,7 +10021,7 @@
                         </a:spcAft>
                         <a:buNone/>
                       </a:pPr>
-                      <a:endParaRPr cap="none" sz="900" i="0" b="1" u="none" strike="noStrike">
+                      <a:endParaRPr cap="none" sz="1000" i="0" b="1" u="none" strike="noStrike">
                         <a:solidFill>
                           <a:srgbClr val="333333">
                             <a:alpha val="100000"/>
@@ -3415,7 +10033,7 @@
                         <a:sym typeface="Arial"/>
                       </a:endParaRPr>
                       <a:r>
-                        <a:rPr cap="none" sz="900" i="0" b="1" u="none" strike="noStrike">
+                        <a:rPr cap="none" sz="1000" i="0" b="1" u="none" strike="noStrike">
                           <a:solidFill>
                             <a:srgbClr val="333333">
                               <a:alpha val="100000"/>
@@ -3487,7 +10105,7 @@
                         </a:spcAft>
                         <a:buNone/>
                       </a:pPr>
-                      <a:endParaRPr cap="none" sz="900" i="0" b="1" u="none" strike="noStrike">
+                      <a:endParaRPr cap="none" sz="1000" i="0" b="1" u="none" strike="noStrike">
                         <a:solidFill>
                           <a:srgbClr val="333333">
                             <a:alpha val="100000"/>
@@ -3499,7 +10117,7 @@
                         <a:sym typeface="Arial"/>
                       </a:endParaRPr>
                       <a:r>
-                        <a:rPr cap="none" sz="900" i="0" b="1" u="none" strike="noStrike">
+                        <a:rPr cap="none" sz="1000" i="0" b="1" u="none" strike="noStrike">
                           <a:solidFill>
                             <a:srgbClr val="333333">
                               <a:alpha val="100000"/>
@@ -3555,7 +10173,7 @@
                   </a:tcPr>
                 </a:tc>
               </a:tr>
-              <a:tr h="292608">
+              <a:tr h="256032">
                 <a:tc>
                   <a:txBody>
                     <a:bodyPr/>
@@ -3893,7 +10511,7 @@
                   </a:tcPr>
                 </a:tc>
               </a:tr>
-              <a:tr h="1993392">
+              <a:tr h="2029968">
                 <a:tc>
                   <a:txBody>
                     <a:bodyPr/>
@@ -4231,7 +10849,7 @@
                   </a:tcPr>
                 </a:tc>
               </a:tr>
-              <a:tr h="292608">
+              <a:tr h="256032">
                 <a:tc>
                   <a:txBody>
                     <a:bodyPr/>
@@ -4569,7 +11187,7 @@
                   </a:tcPr>
                 </a:tc>
               </a:tr>
-              <a:tr h="1993392">
+              <a:tr h="2029968">
                 <a:tc>
                   <a:txBody>
                     <a:bodyPr/>
@@ -4923,7 +11541,7 @@
         </p:nvSpPr>
         <p:spPr>
           <a:xfrm>
-            <a:off x="329184" y="1860804"/>
+            <a:off x="329184" y="1842516"/>
             <a:ext cx="2827782" cy="228600"/>
           </a:xfrm>
           <a:solidFill>
@@ -4951,7 +11569,7 @@
             <a:r>
               <a:rPr cap="none" sz="900" i="0" b="1" u="none" strike="noStrike">
                 <a:solidFill>
-                  <a:srgbClr val="8C8C8C">
+                  <a:srgbClr val="D62728">
                     <a:alpha val="100000"/>
                   </a:srgbClr>
                 </a:solidFill>
@@ -4997,8 +11615,8 @@
         </p:blipFill>
         <p:spPr>
           <a:xfrm>
-            <a:off x="329184" y="2121408"/>
-            <a:ext cx="2827782" cy="1956816"/>
+            <a:off x="329184" y="2084832"/>
+            <a:ext cx="2827782" cy="1993392"/>
           </a:xfrm>
           <a:prstGeom prst="rect">
             <a:avLst/>
@@ -5017,7 +11635,7 @@
         </p:nvSpPr>
         <p:spPr>
           <a:xfrm>
-            <a:off x="3230118" y="1860804"/>
+            <a:off x="3230118" y="1842516"/>
             <a:ext cx="2827782" cy="228600"/>
           </a:xfrm>
           <a:solidFill>
@@ -5045,7 +11663,7 @@
             <a:r>
               <a:rPr cap="none" sz="900" i="0" b="1" u="none" strike="noStrike">
                 <a:solidFill>
-                  <a:srgbClr val="8C8C8C">
+                  <a:srgbClr val="D62728">
                     <a:alpha val="100000"/>
                   </a:srgbClr>
                 </a:solidFill>
@@ -5091,8 +11709,8 @@
         </p:blipFill>
         <p:spPr>
           <a:xfrm>
-            <a:off x="3230118" y="2121408"/>
-            <a:ext cx="2827782" cy="1956816"/>
+            <a:off x="3230118" y="2084832"/>
+            <a:ext cx="2827782" cy="1993392"/>
           </a:xfrm>
           <a:prstGeom prst="rect">
             <a:avLst/>
@@ -5111,7 +11729,7 @@
         </p:nvSpPr>
         <p:spPr>
           <a:xfrm>
-            <a:off x="6131052" y="1860804"/>
+            <a:off x="6131052" y="1842516"/>
             <a:ext cx="2827782" cy="228600"/>
           </a:xfrm>
           <a:solidFill>
@@ -5185,8 +11803,8 @@
         </p:blipFill>
         <p:spPr>
           <a:xfrm>
-            <a:off x="6131052" y="2121408"/>
-            <a:ext cx="2827782" cy="1956816"/>
+            <a:off x="6131052" y="2084832"/>
+            <a:ext cx="2827782" cy="1993392"/>
           </a:xfrm>
           <a:prstGeom prst="rect">
             <a:avLst/>
@@ -5205,7 +11823,7 @@
         </p:nvSpPr>
         <p:spPr>
           <a:xfrm>
-            <a:off x="9031986" y="1860804"/>
+            <a:off x="9031986" y="1842516"/>
             <a:ext cx="2827782" cy="228600"/>
           </a:xfrm>
           <a:solidFill>
@@ -5279,8 +11897,8 @@
         </p:blipFill>
         <p:spPr>
           <a:xfrm>
-            <a:off x="9031986" y="2121408"/>
-            <a:ext cx="2827782" cy="1956816"/>
+            <a:off x="9031986" y="2084832"/>
+            <a:ext cx="2827782" cy="1993392"/>
           </a:xfrm>
           <a:prstGeom prst="rect">
             <a:avLst/>
@@ -5299,7 +11917,7 @@
         </p:nvSpPr>
         <p:spPr>
           <a:xfrm>
-            <a:off x="329184" y="4146804"/>
+            <a:off x="329184" y="4128516"/>
             <a:ext cx="2827782" cy="228600"/>
           </a:xfrm>
           <a:solidFill>
@@ -5373,8 +11991,8 @@
         </p:blipFill>
         <p:spPr>
           <a:xfrm>
-            <a:off x="329184" y="4407408"/>
-            <a:ext cx="2827782" cy="1956816"/>
+            <a:off x="329184" y="4370832"/>
+            <a:ext cx="2827782" cy="1993392"/>
           </a:xfrm>
           <a:prstGeom prst="rect">
             <a:avLst/>
@@ -5393,7 +12011,7 @@
         </p:nvSpPr>
         <p:spPr>
           <a:xfrm>
-            <a:off x="3230118" y="4146804"/>
+            <a:off x="3230118" y="4128516"/>
             <a:ext cx="2827782" cy="228600"/>
           </a:xfrm>
           <a:solidFill>
@@ -5467,8 +12085,8 @@
         </p:blipFill>
         <p:spPr>
           <a:xfrm>
-            <a:off x="3230118" y="4407408"/>
-            <a:ext cx="2827782" cy="1956816"/>
+            <a:off x="3230118" y="4370832"/>
+            <a:ext cx="2827782" cy="1993392"/>
           </a:xfrm>
           <a:prstGeom prst="rect">
             <a:avLst/>
@@ -5487,7 +12105,7 @@
         </p:nvSpPr>
         <p:spPr>
           <a:xfrm>
-            <a:off x="6131052" y="4146804"/>
+            <a:off x="6131052" y="4128516"/>
             <a:ext cx="2827782" cy="228600"/>
           </a:xfrm>
           <a:solidFill>
@@ -5561,8 +12179,8 @@
         </p:blipFill>
         <p:spPr>
           <a:xfrm>
-            <a:off x="6131052" y="4407408"/>
-            <a:ext cx="2827782" cy="1956816"/>
+            <a:off x="6131052" y="4370832"/>
+            <a:ext cx="2827782" cy="1993392"/>
           </a:xfrm>
           <a:prstGeom prst="rect">
             <a:avLst/>
@@ -5581,7 +12199,7 @@
         </p:nvSpPr>
         <p:spPr>
           <a:xfrm>
-            <a:off x="9031986" y="4146804"/>
+            <a:off x="9031986" y="4128516"/>
             <a:ext cx="2827782" cy="228600"/>
           </a:xfrm>
           <a:solidFill>
@@ -5655,8 +12273,8 @@
         </p:blipFill>
         <p:spPr>
           <a:xfrm>
-            <a:off x="9031986" y="4407408"/>
-            <a:ext cx="2827782" cy="1956816"/>
+            <a:off x="9031986" y="4370832"/>
+            <a:ext cx="2827782" cy="1993392"/>
           </a:xfrm>
           <a:prstGeom prst="rect">
             <a:avLst/>
@@ -5671,7 +12289,7 @@
 </p:sld>
 </file>
 
-<file path=ppt/slides/slide3.xml><?xml version="1.0" encoding="utf-8"?>
+<file path=ppt/slides/slide4.xml><?xml version="1.0" encoding="utf-8"?>
 <p:sld xmlns:a="http://schemas.openxmlformats.org/drawingml/2006/main" xmlns:r="http://schemas.openxmlformats.org/officeDocument/2006/relationships" xmlns:p="http://schemas.openxmlformats.org/presentationml/2006/main">
   <p:cSld>
     <p:spTree>
@@ -5756,7 +12374,7 @@
                         <a:buNone/>
                       </a:pPr>
                       <a:r>
-                        <a:rPr cap="none" sz="900" i="0" b="1" u="none" strike="noStrike">
+                        <a:rPr cap="none" sz="1000" i="0" b="1" u="none" strike="noStrike">
                           <a:solidFill>
                             <a:srgbClr val="333333">
                               <a:alpha val="100000"/>
@@ -5828,7 +12446,7 @@
                         </a:spcAft>
                         <a:buNone/>
                       </a:pPr>
-                      <a:endParaRPr cap="none" sz="900" i="0" b="1" u="none" strike="noStrike">
+                      <a:endParaRPr cap="none" sz="1000" i="0" b="1" u="none" strike="noStrike">
                         <a:solidFill>
                           <a:srgbClr val="333333">
                             <a:alpha val="100000"/>
@@ -5840,7 +12458,7 @@
                         <a:sym typeface="Arial"/>
                       </a:endParaRPr>
                       <a:r>
-                        <a:rPr cap="none" sz="900" i="0" b="1" u="none" strike="noStrike">
+                        <a:rPr cap="none" sz="1000" i="0" b="1" u="none" strike="noStrike">
                           <a:solidFill>
                             <a:srgbClr val="333333">
                               <a:alpha val="100000"/>
@@ -5912,7 +12530,7 @@
                         </a:spcAft>
                         <a:buNone/>
                       </a:pPr>
-                      <a:endParaRPr cap="none" sz="900" i="0" b="1" u="none" strike="noStrike">
+                      <a:endParaRPr cap="none" sz="1000" i="0" b="1" u="none" strike="noStrike">
                         <a:solidFill>
                           <a:srgbClr val="333333">
                             <a:alpha val="100000"/>
@@ -5924,7 +12542,7 @@
                         <a:sym typeface="Arial"/>
                       </a:endParaRPr>
                       <a:r>
-                        <a:rPr cap="none" sz="900" i="0" b="1" u="none" strike="noStrike">
+                        <a:rPr cap="none" sz="1000" i="0" b="1" u="none" strike="noStrike">
                           <a:solidFill>
                             <a:srgbClr val="333333">
                               <a:alpha val="100000"/>
@@ -5996,7 +12614,7 @@
                         </a:spcAft>
                         <a:buNone/>
                       </a:pPr>
-                      <a:endParaRPr cap="none" sz="900" i="0" b="1" u="none" strike="noStrike">
+                      <a:endParaRPr cap="none" sz="1000" i="0" b="1" u="none" strike="noStrike">
                         <a:solidFill>
                           <a:srgbClr val="333333">
                             <a:alpha val="100000"/>
@@ -6008,7 +12626,7 @@
                         <a:sym typeface="Arial"/>
                       </a:endParaRPr>
                       <a:r>
-                        <a:rPr cap="none" sz="900" i="0" b="1" u="none" strike="noStrike">
+                        <a:rPr cap="none" sz="1000" i="0" b="1" u="none" strike="noStrike">
                           <a:solidFill>
                             <a:srgbClr val="333333">
                               <a:alpha val="100000"/>
@@ -6064,7 +12682,7 @@
                   </a:tcPr>
                 </a:tc>
               </a:tr>
-              <a:tr h="292608">
+              <a:tr h="256032">
                 <a:tc>
                   <a:txBody>
                     <a:bodyPr/>
@@ -6402,7 +13020,7 @@
                   </a:tcPr>
                 </a:tc>
               </a:tr>
-              <a:tr h="1993392">
+              <a:tr h="2029968">
                 <a:tc>
                   <a:txBody>
                     <a:bodyPr/>
@@ -6740,7 +13358,7 @@
                   </a:tcPr>
                 </a:tc>
               </a:tr>
-              <a:tr h="292608">
+              <a:tr h="256032">
                 <a:tc>
                   <a:txBody>
                     <a:bodyPr/>
@@ -7078,7 +13696,7 @@
                   </a:tcPr>
                 </a:tc>
               </a:tr>
-              <a:tr h="1993392">
+              <a:tr h="2029968">
                 <a:tc>
                   <a:txBody>
                     <a:bodyPr/>
@@ -7432,7 +14050,7 @@
         </p:nvSpPr>
         <p:spPr>
           <a:xfrm>
-            <a:off x="329184" y="1860804"/>
+            <a:off x="329184" y="1842516"/>
             <a:ext cx="2827782" cy="228600"/>
           </a:xfrm>
           <a:solidFill>
@@ -7460,7 +14078,7 @@
             <a:r>
               <a:rPr cap="none" sz="900" i="0" b="1" u="none" strike="noStrike">
                 <a:solidFill>
-                  <a:srgbClr val="8C8C8C">
+                  <a:srgbClr val="D62728">
                     <a:alpha val="100000"/>
                   </a:srgbClr>
                 </a:solidFill>
@@ -7506,8 +14124,8 @@
         </p:blipFill>
         <p:spPr>
           <a:xfrm>
-            <a:off x="329184" y="2121408"/>
-            <a:ext cx="2827782" cy="1956816"/>
+            <a:off x="329184" y="2084832"/>
+            <a:ext cx="2827782" cy="1993392"/>
           </a:xfrm>
           <a:prstGeom prst="rect">
             <a:avLst/>
@@ -7526,7 +14144,7 @@
         </p:nvSpPr>
         <p:spPr>
           <a:xfrm>
-            <a:off x="3230118" y="1860804"/>
+            <a:off x="3230118" y="1842516"/>
             <a:ext cx="2827782" cy="228600"/>
           </a:xfrm>
           <a:solidFill>
@@ -7554,7 +14172,7 @@
             <a:r>
               <a:rPr cap="none" sz="900" i="0" b="1" u="none" strike="noStrike">
                 <a:solidFill>
-                  <a:srgbClr val="8C8C8C">
+                  <a:srgbClr val="D62728">
                     <a:alpha val="100000"/>
                   </a:srgbClr>
                 </a:solidFill>
@@ -7600,8 +14218,8 @@
         </p:blipFill>
         <p:spPr>
           <a:xfrm>
-            <a:off x="3230118" y="2121408"/>
-            <a:ext cx="2827782" cy="1956816"/>
+            <a:off x="3230118" y="2084832"/>
+            <a:ext cx="2827782" cy="1993392"/>
           </a:xfrm>
           <a:prstGeom prst="rect">
             <a:avLst/>
@@ -7620,7 +14238,7 @@
         </p:nvSpPr>
         <p:spPr>
           <a:xfrm>
-            <a:off x="6131052" y="1860804"/>
+            <a:off x="6131052" y="1842516"/>
             <a:ext cx="2827782" cy="228600"/>
           </a:xfrm>
           <a:solidFill>
@@ -7648,7 +14266,7 @@
             <a:r>
               <a:rPr cap="none" sz="900" i="0" b="1" u="none" strike="noStrike">
                 <a:solidFill>
-                  <a:srgbClr val="8C8C8C">
+                  <a:srgbClr val="D62728">
                     <a:alpha val="100000"/>
                   </a:srgbClr>
                 </a:solidFill>
@@ -7694,8 +14312,8 @@
         </p:blipFill>
         <p:spPr>
           <a:xfrm>
-            <a:off x="6131052" y="2121408"/>
-            <a:ext cx="2827782" cy="1956816"/>
+            <a:off x="6131052" y="2084832"/>
+            <a:ext cx="2827782" cy="1993392"/>
           </a:xfrm>
           <a:prstGeom prst="rect">
             <a:avLst/>
@@ -7714,7 +14332,7 @@
         </p:nvSpPr>
         <p:spPr>
           <a:xfrm>
-            <a:off x="9031986" y="1860804"/>
+            <a:off x="9031986" y="1842516"/>
             <a:ext cx="2827782" cy="228600"/>
           </a:xfrm>
           <a:solidFill>
@@ -7742,7 +14360,7 @@
             <a:r>
               <a:rPr cap="none" sz="900" i="0" b="1" u="none" strike="noStrike">
                 <a:solidFill>
-                  <a:srgbClr val="8C8C8C">
+                  <a:srgbClr val="D62728">
                     <a:alpha val="100000"/>
                   </a:srgbClr>
                 </a:solidFill>
@@ -7788,8 +14406,8 @@
         </p:blipFill>
         <p:spPr>
           <a:xfrm>
-            <a:off x="9031986" y="2121408"/>
-            <a:ext cx="2827782" cy="1956816"/>
+            <a:off x="9031986" y="2084832"/>
+            <a:ext cx="2827782" cy="1993392"/>
           </a:xfrm>
           <a:prstGeom prst="rect">
             <a:avLst/>
@@ -7808,7 +14426,7 @@
         </p:nvSpPr>
         <p:spPr>
           <a:xfrm>
-            <a:off x="329184" y="4146804"/>
+            <a:off x="329184" y="4128516"/>
             <a:ext cx="2827782" cy="228600"/>
           </a:xfrm>
           <a:solidFill>
@@ -7836,7 +14454,7 @@
             <a:r>
               <a:rPr cap="none" sz="900" i="0" b="1" u="none" strike="noStrike">
                 <a:solidFill>
-                  <a:srgbClr val="8C8C8C">
+                  <a:srgbClr val="D62728">
                     <a:alpha val="100000"/>
                   </a:srgbClr>
                 </a:solidFill>
@@ -7882,8 +14500,8 @@
         </p:blipFill>
         <p:spPr>
           <a:xfrm>
-            <a:off x="329184" y="4407408"/>
-            <a:ext cx="2827782" cy="1956816"/>
+            <a:off x="329184" y="4370832"/>
+            <a:ext cx="2827782" cy="1993392"/>
           </a:xfrm>
           <a:prstGeom prst="rect">
             <a:avLst/>
@@ -7902,7 +14520,7 @@
         </p:nvSpPr>
         <p:spPr>
           <a:xfrm>
-            <a:off x="3230118" y="4146804"/>
+            <a:off x="3230118" y="4128516"/>
             <a:ext cx="2827782" cy="228600"/>
           </a:xfrm>
           <a:solidFill>
@@ -7976,8 +14594,8 @@
         </p:blipFill>
         <p:spPr>
           <a:xfrm>
-            <a:off x="3230118" y="4407408"/>
-            <a:ext cx="2827782" cy="1956816"/>
+            <a:off x="3230118" y="4370832"/>
+            <a:ext cx="2827782" cy="1993392"/>
           </a:xfrm>
           <a:prstGeom prst="rect">
             <a:avLst/>
@@ -7996,7 +14614,7 @@
         </p:nvSpPr>
         <p:spPr>
           <a:xfrm>
-            <a:off x="6131052" y="4146804"/>
+            <a:off x="6131052" y="4128516"/>
             <a:ext cx="2827782" cy="228600"/>
           </a:xfrm>
           <a:solidFill>
@@ -8070,8 +14688,8 @@
         </p:blipFill>
         <p:spPr>
           <a:xfrm>
-            <a:off x="6131052" y="4407408"/>
-            <a:ext cx="2827782" cy="1956816"/>
+            <a:off x="6131052" y="4370832"/>
+            <a:ext cx="2827782" cy="1993392"/>
           </a:xfrm>
           <a:prstGeom prst="rect">
             <a:avLst/>
@@ -8090,7 +14708,7 @@
         </p:nvSpPr>
         <p:spPr>
           <a:xfrm>
-            <a:off x="9031986" y="4146804"/>
+            <a:off x="9031986" y="4128516"/>
             <a:ext cx="2827782" cy="228600"/>
           </a:xfrm>
           <a:solidFill>
@@ -8164,8 +14782,8 @@
         </p:blipFill>
         <p:spPr>
           <a:xfrm>
-            <a:off x="9031986" y="4407408"/>
-            <a:ext cx="2827782" cy="1956816"/>
+            <a:off x="9031986" y="4370832"/>
+            <a:ext cx="2827782" cy="1993392"/>
           </a:xfrm>
           <a:prstGeom prst="rect">
             <a:avLst/>
@@ -8180,7 +14798,7 @@
 </p:sld>
 </file>
 
-<file path=ppt/slides/slide4.xml><?xml version="1.0" encoding="utf-8"?>
+<file path=ppt/slides/slide5.xml><?xml version="1.0" encoding="utf-8"?>
 <p:sld xmlns:a="http://schemas.openxmlformats.org/drawingml/2006/main" xmlns:r="http://schemas.openxmlformats.org/officeDocument/2006/relationships" xmlns:p="http://schemas.openxmlformats.org/presentationml/2006/main">
   <p:cSld>
     <p:spTree>
@@ -8265,7 +14883,7 @@
                         <a:buNone/>
                       </a:pPr>
                       <a:r>
-                        <a:rPr cap="none" sz="900" i="0" b="1" u="none" strike="noStrike">
+                        <a:rPr cap="none" sz="1000" i="0" b="1" u="none" strike="noStrike">
                           <a:solidFill>
                             <a:srgbClr val="333333">
                               <a:alpha val="100000"/>
@@ -8337,7 +14955,7 @@
                         </a:spcAft>
                         <a:buNone/>
                       </a:pPr>
-                      <a:endParaRPr cap="none" sz="900" i="0" b="1" u="none" strike="noStrike">
+                      <a:endParaRPr cap="none" sz="1000" i="0" b="1" u="none" strike="noStrike">
                         <a:solidFill>
                           <a:srgbClr val="333333">
                             <a:alpha val="100000"/>
@@ -8349,7 +14967,7 @@
                         <a:sym typeface="Arial"/>
                       </a:endParaRPr>
                       <a:r>
-                        <a:rPr cap="none" sz="900" i="0" b="1" u="none" strike="noStrike">
+                        <a:rPr cap="none" sz="1000" i="0" b="1" u="none" strike="noStrike">
                           <a:solidFill>
                             <a:srgbClr val="333333">
                               <a:alpha val="100000"/>
@@ -8421,7 +15039,7 @@
                         </a:spcAft>
                         <a:buNone/>
                       </a:pPr>
-                      <a:endParaRPr cap="none" sz="900" i="0" b="1" u="none" strike="noStrike">
+                      <a:endParaRPr cap="none" sz="1000" i="0" b="1" u="none" strike="noStrike">
                         <a:solidFill>
                           <a:srgbClr val="333333">
                             <a:alpha val="100000"/>
@@ -8433,7 +15051,7 @@
                         <a:sym typeface="Arial"/>
                       </a:endParaRPr>
                       <a:r>
-                        <a:rPr cap="none" sz="900" i="0" b="1" u="none" strike="noStrike">
+                        <a:rPr cap="none" sz="1000" i="0" b="1" u="none" strike="noStrike">
                           <a:solidFill>
                             <a:srgbClr val="333333">
                               <a:alpha val="100000"/>
@@ -8505,7 +15123,7 @@
                         </a:spcAft>
                         <a:buNone/>
                       </a:pPr>
-                      <a:endParaRPr cap="none" sz="900" i="0" b="1" u="none" strike="noStrike">
+                      <a:endParaRPr cap="none" sz="1000" i="0" b="1" u="none" strike="noStrike">
                         <a:solidFill>
                           <a:srgbClr val="333333">
                             <a:alpha val="100000"/>
@@ -8517,7 +15135,7 @@
                         <a:sym typeface="Arial"/>
                       </a:endParaRPr>
                       <a:r>
-                        <a:rPr cap="none" sz="900" i="0" b="1" u="none" strike="noStrike">
+                        <a:rPr cap="none" sz="1000" i="0" b="1" u="none" strike="noStrike">
                           <a:solidFill>
                             <a:srgbClr val="333333">
                               <a:alpha val="100000"/>
@@ -8573,7 +15191,7 @@
                   </a:tcPr>
                 </a:tc>
               </a:tr>
-              <a:tr h="292608">
+              <a:tr h="256032">
                 <a:tc>
                   <a:txBody>
                     <a:bodyPr/>
@@ -8911,7 +15529,7 @@
                   </a:tcPr>
                 </a:tc>
               </a:tr>
-              <a:tr h="1993392">
+              <a:tr h="2029968">
                 <a:tc>
                   <a:txBody>
                     <a:bodyPr/>
@@ -9249,7 +15867,7 @@
                   </a:tcPr>
                 </a:tc>
               </a:tr>
-              <a:tr h="292608">
+              <a:tr h="256032">
                 <a:tc>
                   <a:txBody>
                     <a:bodyPr/>
@@ -9587,7 +16205,7 @@
                   </a:tcPr>
                 </a:tc>
               </a:tr>
-              <a:tr h="1993392">
+              <a:tr h="2029968">
                 <a:tc>
                   <a:txBody>
                     <a:bodyPr/>
@@ -9941,7 +16559,7 @@
         </p:nvSpPr>
         <p:spPr>
           <a:xfrm>
-            <a:off x="329184" y="1860804"/>
+            <a:off x="329184" y="1842516"/>
             <a:ext cx="2827782" cy="228600"/>
           </a:xfrm>
           <a:solidFill>
@@ -9969,7 +16587,7 @@
             <a:r>
               <a:rPr cap="none" sz="900" i="0" b="1" u="none" strike="noStrike">
                 <a:solidFill>
-                  <a:srgbClr val="8C8C8C">
+                  <a:srgbClr val="D62728">
                     <a:alpha val="100000"/>
                   </a:srgbClr>
                 </a:solidFill>
@@ -10015,8 +16633,8 @@
         </p:blipFill>
         <p:spPr>
           <a:xfrm>
-            <a:off x="329184" y="2121408"/>
-            <a:ext cx="2827782" cy="1956816"/>
+            <a:off x="329184" y="2084832"/>
+            <a:ext cx="2827782" cy="1993392"/>
           </a:xfrm>
           <a:prstGeom prst="rect">
             <a:avLst/>
@@ -10035,7 +16653,7 @@
         </p:nvSpPr>
         <p:spPr>
           <a:xfrm>
-            <a:off x="3230118" y="1860804"/>
+            <a:off x="3230118" y="1842516"/>
             <a:ext cx="2827782" cy="228600"/>
           </a:xfrm>
           <a:solidFill>
@@ -10063,7 +16681,7 @@
             <a:r>
               <a:rPr cap="none" sz="900" i="0" b="1" u="none" strike="noStrike">
                 <a:solidFill>
-                  <a:srgbClr val="8C8C8C">
+                  <a:srgbClr val="D62728">
                     <a:alpha val="100000"/>
                   </a:srgbClr>
                 </a:solidFill>
@@ -10109,8 +16727,8 @@
         </p:blipFill>
         <p:spPr>
           <a:xfrm>
-            <a:off x="3230118" y="2121408"/>
-            <a:ext cx="2827782" cy="1956816"/>
+            <a:off x="3230118" y="2084832"/>
+            <a:ext cx="2827782" cy="1993392"/>
           </a:xfrm>
           <a:prstGeom prst="rect">
             <a:avLst/>
@@ -10129,7 +16747,7 @@
         </p:nvSpPr>
         <p:spPr>
           <a:xfrm>
-            <a:off x="6131052" y="1860804"/>
+            <a:off x="6131052" y="1842516"/>
             <a:ext cx="2827782" cy="228600"/>
           </a:xfrm>
           <a:solidFill>
@@ -10203,8 +16821,8 @@
         </p:blipFill>
         <p:spPr>
           <a:xfrm>
-            <a:off x="6131052" y="2121408"/>
-            <a:ext cx="2827782" cy="1956816"/>
+            <a:off x="6131052" y="2084832"/>
+            <a:ext cx="2827782" cy="1993392"/>
           </a:xfrm>
           <a:prstGeom prst="rect">
             <a:avLst/>
@@ -10223,7 +16841,7 @@
         </p:nvSpPr>
         <p:spPr>
           <a:xfrm>
-            <a:off x="9031986" y="1860804"/>
+            <a:off x="9031986" y="1842516"/>
             <a:ext cx="2827782" cy="228600"/>
           </a:xfrm>
           <a:solidFill>
@@ -10297,8 +16915,8 @@
         </p:blipFill>
         <p:spPr>
           <a:xfrm>
-            <a:off x="9031986" y="2121408"/>
-            <a:ext cx="2827782" cy="1956816"/>
+            <a:off x="9031986" y="2084832"/>
+            <a:ext cx="2827782" cy="1993392"/>
           </a:xfrm>
           <a:prstGeom prst="rect">
             <a:avLst/>
@@ -10317,7 +16935,7 @@
         </p:nvSpPr>
         <p:spPr>
           <a:xfrm>
-            <a:off x="329184" y="4146804"/>
+            <a:off x="329184" y="4128516"/>
             <a:ext cx="2827782" cy="228600"/>
           </a:xfrm>
           <a:solidFill>
@@ -10391,8 +17009,8 @@
         </p:blipFill>
         <p:spPr>
           <a:xfrm>
-            <a:off x="329184" y="4407408"/>
-            <a:ext cx="2827782" cy="1956816"/>
+            <a:off x="329184" y="4370832"/>
+            <a:ext cx="2827782" cy="1993392"/>
           </a:xfrm>
           <a:prstGeom prst="rect">
             <a:avLst/>
@@ -10411,7 +17029,7 @@
         </p:nvSpPr>
         <p:spPr>
           <a:xfrm>
-            <a:off x="3230118" y="4146804"/>
+            <a:off x="3230118" y="4128516"/>
             <a:ext cx="2827782" cy="228600"/>
           </a:xfrm>
           <a:solidFill>
@@ -10485,8 +17103,8 @@
         </p:blipFill>
         <p:spPr>
           <a:xfrm>
-            <a:off x="3230118" y="4407408"/>
-            <a:ext cx="2827782" cy="1956816"/>
+            <a:off x="3230118" y="4370832"/>
+            <a:ext cx="2827782" cy="1993392"/>
           </a:xfrm>
           <a:prstGeom prst="rect">
             <a:avLst/>
@@ -10505,7 +17123,7 @@
         </p:nvSpPr>
         <p:spPr>
           <a:xfrm>
-            <a:off x="6131052" y="4146804"/>
+            <a:off x="6131052" y="4128516"/>
             <a:ext cx="2827782" cy="228600"/>
           </a:xfrm>
           <a:solidFill>
@@ -10579,8 +17197,8 @@
         </p:blipFill>
         <p:spPr>
           <a:xfrm>
-            <a:off x="6131052" y="4407408"/>
-            <a:ext cx="2827782" cy="1956816"/>
+            <a:off x="6131052" y="4370832"/>
+            <a:ext cx="2827782" cy="1993392"/>
           </a:xfrm>
           <a:prstGeom prst="rect">
             <a:avLst/>
@@ -10599,7 +17217,7 @@
         </p:nvSpPr>
         <p:spPr>
           <a:xfrm>
-            <a:off x="9031986" y="4146804"/>
+            <a:off x="9031986" y="4128516"/>
             <a:ext cx="2827782" cy="228600"/>
           </a:xfrm>
           <a:solidFill>
@@ -10673,8 +17291,8 @@
         </p:blipFill>
         <p:spPr>
           <a:xfrm>
-            <a:off x="9031986" y="4407408"/>
-            <a:ext cx="2827782" cy="1956816"/>
+            <a:off x="9031986" y="4370832"/>
+            <a:ext cx="2827782" cy="1993392"/>
           </a:xfrm>
           <a:prstGeom prst="rect">
             <a:avLst/>
@@ -10689,7 +17307,7 @@
 </p:sld>
 </file>
 
-<file path=ppt/slides/slide5.xml><?xml version="1.0" encoding="utf-8"?>
+<file path=ppt/slides/slide6.xml><?xml version="1.0" encoding="utf-8"?>
 <p:sld xmlns:a="http://schemas.openxmlformats.org/drawingml/2006/main" xmlns:r="http://schemas.openxmlformats.org/officeDocument/2006/relationships" xmlns:p="http://schemas.openxmlformats.org/presentationml/2006/main">
   <p:cSld>
     <p:spTree>
@@ -10774,7 +17392,7 @@
                         <a:buNone/>
                       </a:pPr>
                       <a:r>
-                        <a:rPr cap="none" sz="900" i="0" b="1" u="none" strike="noStrike">
+                        <a:rPr cap="none" sz="1000" i="0" b="1" u="none" strike="noStrike">
                           <a:solidFill>
                             <a:srgbClr val="333333">
                               <a:alpha val="100000"/>
@@ -10846,7 +17464,7 @@
                         </a:spcAft>
                         <a:buNone/>
                       </a:pPr>
-                      <a:endParaRPr cap="none" sz="900" i="0" b="1" u="none" strike="noStrike">
+                      <a:endParaRPr cap="none" sz="1000" i="0" b="1" u="none" strike="noStrike">
                         <a:solidFill>
                           <a:srgbClr val="333333">
                             <a:alpha val="100000"/>
@@ -10858,7 +17476,7 @@
                         <a:sym typeface="Arial"/>
                       </a:endParaRPr>
                       <a:r>
-                        <a:rPr cap="none" sz="900" i="0" b="1" u="none" strike="noStrike">
+                        <a:rPr cap="none" sz="1000" i="0" b="1" u="none" strike="noStrike">
                           <a:solidFill>
                             <a:srgbClr val="333333">
                               <a:alpha val="100000"/>
@@ -10930,7 +17548,7 @@
                         </a:spcAft>
                         <a:buNone/>
                       </a:pPr>
-                      <a:endParaRPr cap="none" sz="900" i="0" b="1" u="none" strike="noStrike">
+                      <a:endParaRPr cap="none" sz="1000" i="0" b="1" u="none" strike="noStrike">
                         <a:solidFill>
                           <a:srgbClr val="333333">
                             <a:alpha val="100000"/>
@@ -10942,7 +17560,7 @@
                         <a:sym typeface="Arial"/>
                       </a:endParaRPr>
                       <a:r>
-                        <a:rPr cap="none" sz="900" i="0" b="1" u="none" strike="noStrike">
+                        <a:rPr cap="none" sz="1000" i="0" b="1" u="none" strike="noStrike">
                           <a:solidFill>
                             <a:srgbClr val="333333">
                               <a:alpha val="100000"/>
@@ -11014,7 +17632,7 @@
                         </a:spcAft>
                         <a:buNone/>
                       </a:pPr>
-                      <a:endParaRPr cap="none" sz="900" i="0" b="1" u="none" strike="noStrike">
+                      <a:endParaRPr cap="none" sz="1000" i="0" b="1" u="none" strike="noStrike">
                         <a:solidFill>
                           <a:srgbClr val="333333">
                             <a:alpha val="100000"/>
@@ -11026,7 +17644,7 @@
                         <a:sym typeface="Arial"/>
                       </a:endParaRPr>
                       <a:r>
-                        <a:rPr cap="none" sz="900" i="0" b="1" u="none" strike="noStrike">
+                        <a:rPr cap="none" sz="1000" i="0" b="1" u="none" strike="noStrike">
                           <a:solidFill>
                             <a:srgbClr val="333333">
                               <a:alpha val="100000"/>
@@ -11082,7 +17700,7 @@
                   </a:tcPr>
                 </a:tc>
               </a:tr>
-              <a:tr h="292608">
+              <a:tr h="256032">
                 <a:tc>
                   <a:txBody>
                     <a:bodyPr/>
@@ -11420,7 +18038,7 @@
                   </a:tcPr>
                 </a:tc>
               </a:tr>
-              <a:tr h="1993392">
+              <a:tr h="2029968">
                 <a:tc>
                   <a:txBody>
                     <a:bodyPr/>
@@ -11758,7 +18376,7 @@
                   </a:tcPr>
                 </a:tc>
               </a:tr>
-              <a:tr h="292608">
+              <a:tr h="256032">
                 <a:tc>
                   <a:txBody>
                     <a:bodyPr/>
@@ -12096,7 +18714,7 @@
                   </a:tcPr>
                 </a:tc>
               </a:tr>
-              <a:tr h="1993392">
+              <a:tr h="2029968">
                 <a:tc>
                   <a:txBody>
                     <a:bodyPr/>
@@ -12450,7 +19068,7 @@
         </p:nvSpPr>
         <p:spPr>
           <a:xfrm>
-            <a:off x="329184" y="1860804"/>
+            <a:off x="329184" y="1842516"/>
             <a:ext cx="2827782" cy="228600"/>
           </a:xfrm>
           <a:solidFill>
@@ -12478,7 +19096,7 @@
             <a:r>
               <a:rPr cap="none" sz="900" i="0" b="1" u="none" strike="noStrike">
                 <a:solidFill>
-                  <a:srgbClr val="8C8C8C">
+                  <a:srgbClr val="D62728">
                     <a:alpha val="100000"/>
                   </a:srgbClr>
                 </a:solidFill>
@@ -12524,8 +19142,8 @@
         </p:blipFill>
         <p:spPr>
           <a:xfrm>
-            <a:off x="329184" y="2121408"/>
-            <a:ext cx="2827782" cy="1956816"/>
+            <a:off x="329184" y="2084832"/>
+            <a:ext cx="2827782" cy="1993392"/>
           </a:xfrm>
           <a:prstGeom prst="rect">
             <a:avLst/>
@@ -12544,7 +19162,7 @@
         </p:nvSpPr>
         <p:spPr>
           <a:xfrm>
-            <a:off x="3230118" y="1860804"/>
+            <a:off x="3230118" y="1842516"/>
             <a:ext cx="2827782" cy="228600"/>
           </a:xfrm>
           <a:solidFill>
@@ -12572,7 +19190,7 @@
             <a:r>
               <a:rPr cap="none" sz="900" i="0" b="1" u="none" strike="noStrike">
                 <a:solidFill>
-                  <a:srgbClr val="8C8C8C">
+                  <a:srgbClr val="D62728">
                     <a:alpha val="100000"/>
                   </a:srgbClr>
                 </a:solidFill>
@@ -12618,8 +19236,8 @@
         </p:blipFill>
         <p:spPr>
           <a:xfrm>
-            <a:off x="3230118" y="2121408"/>
-            <a:ext cx="2827782" cy="1956816"/>
+            <a:off x="3230118" y="2084832"/>
+            <a:ext cx="2827782" cy="1993392"/>
           </a:xfrm>
           <a:prstGeom prst="rect">
             <a:avLst/>
@@ -12638,7 +19256,7 @@
         </p:nvSpPr>
         <p:spPr>
           <a:xfrm>
-            <a:off x="6131052" y="1860804"/>
+            <a:off x="6131052" y="1842516"/>
             <a:ext cx="2827782" cy="228600"/>
           </a:xfrm>
           <a:solidFill>
@@ -12666,7 +19284,7 @@
             <a:r>
               <a:rPr cap="none" sz="900" i="0" b="1" u="none" strike="noStrike">
                 <a:solidFill>
-                  <a:srgbClr val="8C8C8C">
+                  <a:srgbClr val="D62728">
                     <a:alpha val="100000"/>
                   </a:srgbClr>
                 </a:solidFill>
@@ -12712,8 +19330,8 @@
         </p:blipFill>
         <p:spPr>
           <a:xfrm>
-            <a:off x="6131052" y="2121408"/>
-            <a:ext cx="2827782" cy="1956816"/>
+            <a:off x="6131052" y="2084832"/>
+            <a:ext cx="2827782" cy="1993392"/>
           </a:xfrm>
           <a:prstGeom prst="rect">
             <a:avLst/>
@@ -12732,7 +19350,7 @@
         </p:nvSpPr>
         <p:spPr>
           <a:xfrm>
-            <a:off x="9031986" y="1860804"/>
+            <a:off x="9031986" y="1842516"/>
             <a:ext cx="2827782" cy="228600"/>
           </a:xfrm>
           <a:solidFill>
@@ -12760,7 +19378,7 @@
             <a:r>
               <a:rPr cap="none" sz="900" i="0" b="1" u="none" strike="noStrike">
                 <a:solidFill>
-                  <a:srgbClr val="8C8C8C">
+                  <a:srgbClr val="D62728">
                     <a:alpha val="100000"/>
                   </a:srgbClr>
                 </a:solidFill>
@@ -12806,8 +19424,8 @@
         </p:blipFill>
         <p:spPr>
           <a:xfrm>
-            <a:off x="9031986" y="2121408"/>
-            <a:ext cx="2827782" cy="1956816"/>
+            <a:off x="9031986" y="2084832"/>
+            <a:ext cx="2827782" cy="1993392"/>
           </a:xfrm>
           <a:prstGeom prst="rect">
             <a:avLst/>
@@ -12826,7 +19444,7 @@
         </p:nvSpPr>
         <p:spPr>
           <a:xfrm>
-            <a:off x="329184" y="4146804"/>
+            <a:off x="329184" y="4128516"/>
             <a:ext cx="2827782" cy="228600"/>
           </a:xfrm>
           <a:solidFill>
@@ -12854,7 +19472,7 @@
             <a:r>
               <a:rPr cap="none" sz="900" i="0" b="1" u="none" strike="noStrike">
                 <a:solidFill>
-                  <a:srgbClr val="8C8C8C">
+                  <a:srgbClr val="D62728">
                     <a:alpha val="100000"/>
                   </a:srgbClr>
                 </a:solidFill>
@@ -12900,8 +19518,8 @@
         </p:blipFill>
         <p:spPr>
           <a:xfrm>
-            <a:off x="329184" y="4407408"/>
-            <a:ext cx="2827782" cy="1956816"/>
+            <a:off x="329184" y="4370832"/>
+            <a:ext cx="2827782" cy="1993392"/>
           </a:xfrm>
           <a:prstGeom prst="rect">
             <a:avLst/>
@@ -12920,7 +19538,7 @@
         </p:nvSpPr>
         <p:spPr>
           <a:xfrm>
-            <a:off x="3230118" y="4146804"/>
+            <a:off x="3230118" y="4128516"/>
             <a:ext cx="2827782" cy="228600"/>
           </a:xfrm>
           <a:solidFill>
@@ -12948,7 +19566,7 @@
             <a:r>
               <a:rPr cap="none" sz="900" i="0" b="1" u="none" strike="noStrike">
                 <a:solidFill>
-                  <a:srgbClr val="8C8C8C">
+                  <a:srgbClr val="D62728">
                     <a:alpha val="100000"/>
                   </a:srgbClr>
                 </a:solidFill>
@@ -12994,8 +19612,8 @@
         </p:blipFill>
         <p:spPr>
           <a:xfrm>
-            <a:off x="3230118" y="4407408"/>
-            <a:ext cx="2827782" cy="1956816"/>
+            <a:off x="3230118" y="4370832"/>
+            <a:ext cx="2827782" cy="1993392"/>
           </a:xfrm>
           <a:prstGeom prst="rect">
             <a:avLst/>
@@ -13014,7 +19632,7 @@
         </p:nvSpPr>
         <p:spPr>
           <a:xfrm>
-            <a:off x="6131052" y="4146804"/>
+            <a:off x="6131052" y="4128516"/>
             <a:ext cx="2827782" cy="228600"/>
           </a:xfrm>
           <a:solidFill>
@@ -13088,8 +19706,8 @@
         </p:blipFill>
         <p:spPr>
           <a:xfrm>
-            <a:off x="6131052" y="4407408"/>
-            <a:ext cx="2827782" cy="1956816"/>
+            <a:off x="6131052" y="4370832"/>
+            <a:ext cx="2827782" cy="1993392"/>
           </a:xfrm>
           <a:prstGeom prst="rect">
             <a:avLst/>
@@ -13108,7 +19726,7 @@
         </p:nvSpPr>
         <p:spPr>
           <a:xfrm>
-            <a:off x="9031986" y="4146804"/>
+            <a:off x="9031986" y="4128516"/>
             <a:ext cx="2827782" cy="228600"/>
           </a:xfrm>
           <a:solidFill>
@@ -13182,8 +19800,8 @@
         </p:blipFill>
         <p:spPr>
           <a:xfrm>
-            <a:off x="9031986" y="4407408"/>
-            <a:ext cx="2827782" cy="1956816"/>
+            <a:off x="9031986" y="4370832"/>
+            <a:ext cx="2827782" cy="1993392"/>
           </a:xfrm>
           <a:prstGeom prst="rect">
             <a:avLst/>
@@ -13198,7 +19816,7 @@
 </p:sld>
 </file>
 
-<file path=ppt/slides/slide6.xml><?xml version="1.0" encoding="utf-8"?>
+<file path=ppt/slides/slide7.xml><?xml version="1.0" encoding="utf-8"?>
 <p:sld xmlns:a="http://schemas.openxmlformats.org/drawingml/2006/main" xmlns:r="http://schemas.openxmlformats.org/officeDocument/2006/relationships" xmlns:p="http://schemas.openxmlformats.org/presentationml/2006/main">
   <p:cSld>
     <p:spTree>
@@ -13283,7 +19901,7 @@
                         <a:buNone/>
                       </a:pPr>
                       <a:r>
-                        <a:rPr cap="none" sz="900" i="0" b="1" u="none" strike="noStrike">
+                        <a:rPr cap="none" sz="1000" i="0" b="1" u="none" strike="noStrike">
                           <a:solidFill>
                             <a:srgbClr val="333333">
                               <a:alpha val="100000"/>
@@ -13355,7 +19973,7 @@
                         </a:spcAft>
                         <a:buNone/>
                       </a:pPr>
-                      <a:endParaRPr cap="none" sz="900" i="0" b="1" u="none" strike="noStrike">
+                      <a:endParaRPr cap="none" sz="1000" i="0" b="1" u="none" strike="noStrike">
                         <a:solidFill>
                           <a:srgbClr val="333333">
                             <a:alpha val="100000"/>
@@ -13367,7 +19985,7 @@
                         <a:sym typeface="Arial"/>
                       </a:endParaRPr>
                       <a:r>
-                        <a:rPr cap="none" sz="900" i="0" b="1" u="none" strike="noStrike">
+                        <a:rPr cap="none" sz="1000" i="0" b="1" u="none" strike="noStrike">
                           <a:solidFill>
                             <a:srgbClr val="333333">
                               <a:alpha val="100000"/>
@@ -13439,7 +20057,7 @@
                         </a:spcAft>
                         <a:buNone/>
                       </a:pPr>
-                      <a:endParaRPr cap="none" sz="900" i="0" b="1" u="none" strike="noStrike">
+                      <a:endParaRPr cap="none" sz="1000" i="0" b="1" u="none" strike="noStrike">
                         <a:solidFill>
                           <a:srgbClr val="333333">
                             <a:alpha val="100000"/>
@@ -13451,7 +20069,7 @@
                         <a:sym typeface="Arial"/>
                       </a:endParaRPr>
                       <a:r>
-                        <a:rPr cap="none" sz="900" i="0" b="1" u="none" strike="noStrike">
+                        <a:rPr cap="none" sz="1000" i="0" b="1" u="none" strike="noStrike">
                           <a:solidFill>
                             <a:srgbClr val="333333">
                               <a:alpha val="100000"/>
@@ -13523,7 +20141,7 @@
                         </a:spcAft>
                         <a:buNone/>
                       </a:pPr>
-                      <a:endParaRPr cap="none" sz="900" i="0" b="1" u="none" strike="noStrike">
+                      <a:endParaRPr cap="none" sz="1000" i="0" b="1" u="none" strike="noStrike">
                         <a:solidFill>
                           <a:srgbClr val="333333">
                             <a:alpha val="100000"/>
@@ -13535,7 +20153,7 @@
                         <a:sym typeface="Arial"/>
                       </a:endParaRPr>
                       <a:r>
-                        <a:rPr cap="none" sz="900" i="0" b="1" u="none" strike="noStrike">
+                        <a:rPr cap="none" sz="1000" i="0" b="1" u="none" strike="noStrike">
                           <a:solidFill>
                             <a:srgbClr val="333333">
                               <a:alpha val="100000"/>
@@ -13591,7 +20209,7 @@
                   </a:tcPr>
                 </a:tc>
               </a:tr>
-              <a:tr h="292608">
+              <a:tr h="256032">
                 <a:tc>
                   <a:txBody>
                     <a:bodyPr/>
@@ -13929,7 +20547,7 @@
                   </a:tcPr>
                 </a:tc>
               </a:tr>
-              <a:tr h="1993392">
+              <a:tr h="2029968">
                 <a:tc>
                   <a:txBody>
                     <a:bodyPr/>
@@ -14267,7 +20885,7 @@
                   </a:tcPr>
                 </a:tc>
               </a:tr>
-              <a:tr h="292608">
+              <a:tr h="256032">
                 <a:tc>
                   <a:txBody>
                     <a:bodyPr/>
@@ -14605,7 +21223,7 @@
                   </a:tcPr>
                 </a:tc>
               </a:tr>
-              <a:tr h="1993392">
+              <a:tr h="2029968">
                 <a:tc>
                   <a:txBody>
                     <a:bodyPr/>
@@ -14959,7 +21577,7 @@
         </p:nvSpPr>
         <p:spPr>
           <a:xfrm>
-            <a:off x="329184" y="1860804"/>
+            <a:off x="329184" y="1842516"/>
             <a:ext cx="2827782" cy="228600"/>
           </a:xfrm>
           <a:solidFill>
@@ -14987,7 +21605,7 @@
             <a:r>
               <a:rPr cap="none" sz="900" i="0" b="1" u="none" strike="noStrike">
                 <a:solidFill>
-                  <a:srgbClr val="8C8C8C">
+                  <a:srgbClr val="D62728">
                     <a:alpha val="100000"/>
                   </a:srgbClr>
                 </a:solidFill>
@@ -15033,8 +21651,8 @@
         </p:blipFill>
         <p:spPr>
           <a:xfrm>
-            <a:off x="329184" y="2121408"/>
-            <a:ext cx="2827782" cy="1956816"/>
+            <a:off x="329184" y="2084832"/>
+            <a:ext cx="2827782" cy="1993392"/>
           </a:xfrm>
           <a:prstGeom prst="rect">
             <a:avLst/>
@@ -15053,7 +21671,7 @@
         </p:nvSpPr>
         <p:spPr>
           <a:xfrm>
-            <a:off x="3230118" y="1860804"/>
+            <a:off x="3230118" y="1842516"/>
             <a:ext cx="2827782" cy="228600"/>
           </a:xfrm>
           <a:solidFill>
@@ -15081,7 +21699,7 @@
             <a:r>
               <a:rPr cap="none" sz="900" i="0" b="1" u="none" strike="noStrike">
                 <a:solidFill>
-                  <a:srgbClr val="8C8C8C">
+                  <a:srgbClr val="D62728">
                     <a:alpha val="100000"/>
                   </a:srgbClr>
                 </a:solidFill>
@@ -15127,8 +21745,8 @@
         </p:blipFill>
         <p:spPr>
           <a:xfrm>
-            <a:off x="3230118" y="2121408"/>
-            <a:ext cx="2827782" cy="1956816"/>
+            <a:off x="3230118" y="2084832"/>
+            <a:ext cx="2827782" cy="1993392"/>
           </a:xfrm>
           <a:prstGeom prst="rect">
             <a:avLst/>
@@ -15147,7 +21765,7 @@
         </p:nvSpPr>
         <p:spPr>
           <a:xfrm>
-            <a:off x="6131052" y="1860804"/>
+            <a:off x="6131052" y="1842516"/>
             <a:ext cx="2827782" cy="228600"/>
           </a:xfrm>
           <a:solidFill>
@@ -15221,8 +21839,8 @@
         </p:blipFill>
         <p:spPr>
           <a:xfrm>
-            <a:off x="6131052" y="2121408"/>
-            <a:ext cx="2827782" cy="1956816"/>
+            <a:off x="6131052" y="2084832"/>
+            <a:ext cx="2827782" cy="1993392"/>
           </a:xfrm>
           <a:prstGeom prst="rect">
             <a:avLst/>
@@ -15241,7 +21859,7 @@
         </p:nvSpPr>
         <p:spPr>
           <a:xfrm>
-            <a:off x="9031986" y="1860804"/>
+            <a:off x="9031986" y="1842516"/>
             <a:ext cx="2827782" cy="228600"/>
           </a:xfrm>
           <a:solidFill>
@@ -15315,8 +21933,8 @@
         </p:blipFill>
         <p:spPr>
           <a:xfrm>
-            <a:off x="9031986" y="2121408"/>
-            <a:ext cx="2827782" cy="1956816"/>
+            <a:off x="9031986" y="2084832"/>
+            <a:ext cx="2827782" cy="1993392"/>
           </a:xfrm>
           <a:prstGeom prst="rect">
             <a:avLst/>
@@ -15335,7 +21953,7 @@
         </p:nvSpPr>
         <p:spPr>
           <a:xfrm>
-            <a:off x="329184" y="4146804"/>
+            <a:off x="329184" y="4128516"/>
             <a:ext cx="2827782" cy="228600"/>
           </a:xfrm>
           <a:solidFill>
@@ -15409,8 +22027,8 @@
         </p:blipFill>
         <p:spPr>
           <a:xfrm>
-            <a:off x="329184" y="4407408"/>
-            <a:ext cx="2827782" cy="1956816"/>
+            <a:off x="329184" y="4370832"/>
+            <a:ext cx="2827782" cy="1993392"/>
           </a:xfrm>
           <a:prstGeom prst="rect">
             <a:avLst/>
@@ -15429,7 +22047,7 @@
         </p:nvSpPr>
         <p:spPr>
           <a:xfrm>
-            <a:off x="3230118" y="4146804"/>
+            <a:off x="3230118" y="4128516"/>
             <a:ext cx="2827782" cy="228600"/>
           </a:xfrm>
           <a:solidFill>
@@ -15503,8 +22121,8 @@
         </p:blipFill>
         <p:spPr>
           <a:xfrm>
-            <a:off x="3230118" y="4407408"/>
-            <a:ext cx="2827782" cy="1956816"/>
+            <a:off x="3230118" y="4370832"/>
+            <a:ext cx="2827782" cy="1993392"/>
           </a:xfrm>
           <a:prstGeom prst="rect">
             <a:avLst/>
@@ -15523,7 +22141,7 @@
         </p:nvSpPr>
         <p:spPr>
           <a:xfrm>
-            <a:off x="6131052" y="4146804"/>
+            <a:off x="6131052" y="4128516"/>
             <a:ext cx="2827782" cy="228600"/>
           </a:xfrm>
           <a:solidFill>
@@ -15597,8 +22215,8 @@
         </p:blipFill>
         <p:spPr>
           <a:xfrm>
-            <a:off x="6131052" y="4407408"/>
-            <a:ext cx="2827782" cy="1956816"/>
+            <a:off x="6131052" y="4370832"/>
+            <a:ext cx="2827782" cy="1993392"/>
           </a:xfrm>
           <a:prstGeom prst="rect">
             <a:avLst/>
@@ -15617,7 +22235,7 @@
         </p:nvSpPr>
         <p:spPr>
           <a:xfrm>
-            <a:off x="9031986" y="4146804"/>
+            <a:off x="9031986" y="4128516"/>
             <a:ext cx="2827782" cy="228600"/>
           </a:xfrm>
           <a:solidFill>
@@ -15691,8 +22309,8 @@
         </p:blipFill>
         <p:spPr>
           <a:xfrm>
-            <a:off x="9031986" y="4407408"/>
-            <a:ext cx="2827782" cy="1956816"/>
+            <a:off x="9031986" y="4370832"/>
+            <a:ext cx="2827782" cy="1993392"/>
           </a:xfrm>
           <a:prstGeom prst="rect">
             <a:avLst/>

--- a/output/Sigma_Summary_Latest.pptx
+++ b/output/Sigma_Summary_Latest.pptx
@@ -3123,7 +3123,7 @@
           <a:p>
             <a:r>
               <a:rPr/>
-              <a:t>Flagged Items Summary (1/2)</a:t>
+              <a:t>[DM] DRB Statistical Auto Report</a:t>
             </a:r>
           </a:p>
         </p:txBody>
@@ -8707,7 +8707,7 @@
           <a:p>
             <a:r>
               <a:rPr/>
-              <a:t>Flagged Items Summary (2/2)</a:t>
+              <a:t>[DM] DRB Statistical Auto Report</a:t>
             </a:r>
           </a:p>
         </p:txBody>
@@ -9819,7 +9819,7 @@
           <a:p>
             <a:r>
               <a:rPr/>
-              <a:t>Category: PB - Top 8 Sigma Delta</a:t>
+              <a:t>[DM] DRB Statistical Auto Report</a:t>
             </a:r>
           </a:p>
         </p:txBody>
@@ -12328,7 +12328,7 @@
           <a:p>
             <a:r>
               <a:rPr/>
-              <a:t>Category: BL - Top 8 Sigma Delta</a:t>
+              <a:t>[DM] DRB Statistical Auto Report</a:t>
             </a:r>
           </a:p>
         </p:txBody>
@@ -14837,7 +14837,7 @@
           <a:p>
             <a:r>
               <a:rPr/>
-              <a:t>Category: WLS - Top 8 Sigma Delta</a:t>
+              <a:t>[DM] DRB Statistical Auto Report</a:t>
             </a:r>
           </a:p>
         </p:txBody>
@@ -17346,7 +17346,7 @@
           <a:p>
             <a:r>
               <a:rPr/>
-              <a:t>Category: TCMC - Top 8 Sigma Delta</a:t>
+              <a:t>[DM] DRB Statistical Auto Report</a:t>
             </a:r>
           </a:p>
         </p:txBody>
@@ -19855,7 +19855,7 @@
           <a:p>
             <a:r>
               <a:rPr/>
-              <a:t>Category: WTC - Top 8 Sigma Delta</a:t>
+              <a:t>[DM] DRB Statistical Auto Report</a:t>
             </a:r>
           </a:p>
         </p:txBody>

--- a/output/Sigma_Summary_Latest.pptx
+++ b/output/Sigma_Summary_Latest.pptx
@@ -3103,34 +3103,213 @@
       </p:grpSpPr>
       <p:sp>
         <p:nvSpPr>
-          <p:cNvPr id="2" name="Title 1"/>
+          <p:cNvPr id="2" name=""/>
           <p:cNvSpPr>
             <a:spLocks noGrp="1"/>
           </p:cNvSpPr>
           <p:nvPr>
-            <p:ph type="title"/>
+            <p:ph/>
           </p:nvPr>
         </p:nvSpPr>
         <p:spPr>
           <a:xfrm>
-            <a:off x="457200" y="274638"/>
-            <a:ext cx="8229600" cy="1143000"/>
+            <a:off x="457200" y="237744"/>
+            <a:ext cx="11155680" cy="310896"/>
           </a:xfrm>
+          <a:solidFill>
+            <a:srgbClr val="FFFFFF">
+              <a:alpha val="0"/>
+            </a:srgbClr>
+          </a:solidFill>
         </p:spPr>
         <p:txBody>
           <a:bodyPr/>
           <a:lstStyle/>
           <a:p>
+            <a:pPr algn="l" marL="0" marR="0">
+              <a:lnSpc>
+                <a:spcPct val="100000"/>
+              </a:lnSpc>
+              <a:spcBef>
+                <a:spcPts val="0"/>
+              </a:spcBef>
+              <a:spcAft>
+                <a:spcPts val="0"/>
+              </a:spcAft>
+              <a:buNone/>
+            </a:pPr>
             <a:r>
-              <a:rPr/>
-              <a:t>[DM] DRB Statistical Auto Report</a:t>
+              <a:rPr cap="none" sz="2000" i="0" b="1" u="none" strike="noStrike">
+                <a:solidFill>
+                  <a:srgbClr val="111111">
+                    <a:alpha val="100000"/>
+                  </a:srgbClr>
+                </a:solidFill>
+                <a:latin typeface="Arial"/>
+                <a:cs typeface="Arial"/>
+                <a:ea typeface="Arial"/>
+                <a:sym typeface="Arial"/>
+              </a:rPr>
+              <a:t>[DM] Data Review Board Auto Report</a:t>
+            </a:r>
+          </a:p>
+        </p:txBody>
+      </p:sp>
+      <p:sp>
+        <p:nvSpPr>
+          <p:cNvPr id="3" name=""/>
+          <p:cNvSpPr>
+            <a:spLocks noGrp="1"/>
+          </p:cNvSpPr>
+          <p:nvPr>
+            <p:ph/>
+          </p:nvPr>
+        </p:nvSpPr>
+        <p:spPr>
+          <a:xfrm>
+            <a:off x="457200" y="676656"/>
+            <a:ext cx="11155680" cy="640080"/>
+          </a:xfrm>
+          <a:solidFill>
+            <a:srgbClr val="FFFFFF">
+              <a:alpha val="0"/>
+            </a:srgbClr>
+          </a:solidFill>
+        </p:spPr>
+        <p:txBody>
+          <a:bodyPr/>
+          <a:lstStyle/>
+          <a:p>
+            <a:pPr algn="l" marL="0" marR="0">
+              <a:lnSpc>
+                <a:spcPct val="100000"/>
+              </a:lnSpc>
+              <a:spcBef>
+                <a:spcPts val="0"/>
+              </a:spcBef>
+              <a:spcAft>
+                <a:spcPts val="0"/>
+              </a:spcAft>
+              <a:buNone/>
+            </a:pPr>
+            <a:r>
+              <a:rPr cap="none" sz="1100" i="0" b="1" u="none" strike="noStrike">
+                <a:solidFill>
+                  <a:srgbClr val="333333">
+                    <a:alpha val="100000"/>
+                  </a:srgbClr>
+                </a:solidFill>
+                <a:latin typeface="Arial"/>
+                <a:cs typeface="Arial"/>
+                <a:ea typeface="Arial"/>
+                <a:sym typeface="Arial"/>
+              </a:rPr>
+              <a:t>■</a:t>
+            </a:r>
+            <a:r>
+              <a:rPr cap="none" sz="1100" i="0" b="0" u="none" strike="noStrike">
+                <a:solidFill>
+                  <a:srgbClr val="333333">
+                    <a:alpha val="100000"/>
+                  </a:srgbClr>
+                </a:solidFill>
+                <a:latin typeface="Arial"/>
+                <a:cs typeface="Arial"/>
+                <a:ea typeface="Arial"/>
+                <a:sym typeface="Arial"/>
+              </a:rPr>
+              <a:t> comment</a:t>
+            </a:r>
+          </a:p>
+          <a:p>
+            <a:pPr algn="l" marL="0" marR="0">
+              <a:lnSpc>
+                <a:spcPct val="100000"/>
+              </a:lnSpc>
+              <a:spcBef>
+                <a:spcPts val="0"/>
+              </a:spcBef>
+              <a:spcAft>
+                <a:spcPts val="0"/>
+              </a:spcAft>
+              <a:buNone/>
+            </a:pPr>
+            <a:r>
+              <a:rPr cap="none" sz="1100" i="0" b="1" u="none" strike="noStrike">
+                <a:solidFill>
+                  <a:srgbClr val="333333">
+                    <a:alpha val="100000"/>
+                  </a:srgbClr>
+                </a:solidFill>
+                <a:latin typeface="Arial"/>
+                <a:cs typeface="Arial"/>
+                <a:ea typeface="Arial"/>
+                <a:sym typeface="Arial"/>
+              </a:rPr>
+              <a:t>■</a:t>
+            </a:r>
+            <a:r>
+              <a:rPr cap="none" sz="1100" i="0" b="0" u="none" strike="noStrike">
+                <a:solidFill>
+                  <a:srgbClr val="333333">
+                    <a:alpha val="100000"/>
+                  </a:srgbClr>
+                </a:solidFill>
+                <a:latin typeface="Arial"/>
+                <a:cs typeface="Arial"/>
+                <a:ea typeface="Arial"/>
+                <a:sym typeface="Arial"/>
+              </a:rPr>
+              <a:t> comment</a:t>
+            </a:r>
+          </a:p>
+          <a:p>
+            <a:pPr algn="l" marL="0" marR="0">
+              <a:lnSpc>
+                <a:spcPct val="100000"/>
+              </a:lnSpc>
+              <a:spcBef>
+                <a:spcPts val="0"/>
+              </a:spcBef>
+              <a:spcAft>
+                <a:spcPts val="0"/>
+              </a:spcAft>
+              <a:buNone/>
+            </a:pPr>
+            <a:r>
+              <a:rPr cap="none" sz="1100" i="0" b="1" u="none" strike="noStrike">
+                <a:solidFill>
+                  <a:srgbClr val="333333">
+                    <a:alpha val="100000"/>
+                  </a:srgbClr>
+                </a:solidFill>
+                <a:latin typeface="Arial"/>
+                <a:cs typeface="Arial"/>
+                <a:ea typeface="Arial"/>
+                <a:sym typeface="Arial"/>
+              </a:rPr>
+              <a:t>■</a:t>
+            </a:r>
+            <a:r>
+              <a:rPr cap="none" sz="1100" i="0" b="0" u="none" strike="noStrike">
+                <a:solidFill>
+                  <a:srgbClr val="333333">
+                    <a:alpha val="100000"/>
+                  </a:srgbClr>
+                </a:solidFill>
+                <a:latin typeface="Arial"/>
+                <a:cs typeface="Arial"/>
+                <a:ea typeface="Arial"/>
+                <a:sym typeface="Arial"/>
+              </a:rPr>
+              <a:t> comment</a:t>
             </a:r>
           </a:p>
         </p:txBody>
       </p:sp>
       <p:graphicFrame>
         <p:nvGraphicFramePr>
-          <p:cNvPr id="3" name="Content Placeholder 2"/>
+          <p:cNvPr id="4" name="Content Placeholder 2"/>
           <p:cNvGraphicFramePr>
             <a:graphicFrameLocks noGrp="true"/>
           </p:cNvGraphicFramePr>
@@ -8687,34 +8866,213 @@
       </p:grpSpPr>
       <p:sp>
         <p:nvSpPr>
-          <p:cNvPr id="2" name="Title 1"/>
+          <p:cNvPr id="2" name=""/>
           <p:cNvSpPr>
             <a:spLocks noGrp="1"/>
           </p:cNvSpPr>
           <p:nvPr>
-            <p:ph type="title"/>
+            <p:ph/>
           </p:nvPr>
         </p:nvSpPr>
         <p:spPr>
           <a:xfrm>
-            <a:off x="457200" y="274638"/>
-            <a:ext cx="8229600" cy="1143000"/>
+            <a:off x="457200" y="237744"/>
+            <a:ext cx="11155680" cy="310896"/>
           </a:xfrm>
+          <a:solidFill>
+            <a:srgbClr val="FFFFFF">
+              <a:alpha val="0"/>
+            </a:srgbClr>
+          </a:solidFill>
         </p:spPr>
         <p:txBody>
           <a:bodyPr/>
           <a:lstStyle/>
           <a:p>
+            <a:pPr algn="l" marL="0" marR="0">
+              <a:lnSpc>
+                <a:spcPct val="100000"/>
+              </a:lnSpc>
+              <a:spcBef>
+                <a:spcPts val="0"/>
+              </a:spcBef>
+              <a:spcAft>
+                <a:spcPts val="0"/>
+              </a:spcAft>
+              <a:buNone/>
+            </a:pPr>
             <a:r>
-              <a:rPr/>
-              <a:t>[DM] DRB Statistical Auto Report</a:t>
+              <a:rPr cap="none" sz="2000" i="0" b="1" u="none" strike="noStrike">
+                <a:solidFill>
+                  <a:srgbClr val="111111">
+                    <a:alpha val="100000"/>
+                  </a:srgbClr>
+                </a:solidFill>
+                <a:latin typeface="Arial"/>
+                <a:cs typeface="Arial"/>
+                <a:ea typeface="Arial"/>
+                <a:sym typeface="Arial"/>
+              </a:rPr>
+              <a:t>[DM] Data Review Board Auto Report</a:t>
+            </a:r>
+          </a:p>
+        </p:txBody>
+      </p:sp>
+      <p:sp>
+        <p:nvSpPr>
+          <p:cNvPr id="3" name=""/>
+          <p:cNvSpPr>
+            <a:spLocks noGrp="1"/>
+          </p:cNvSpPr>
+          <p:nvPr>
+            <p:ph/>
+          </p:nvPr>
+        </p:nvSpPr>
+        <p:spPr>
+          <a:xfrm>
+            <a:off x="457200" y="676656"/>
+            <a:ext cx="11155680" cy="640080"/>
+          </a:xfrm>
+          <a:solidFill>
+            <a:srgbClr val="FFFFFF">
+              <a:alpha val="0"/>
+            </a:srgbClr>
+          </a:solidFill>
+        </p:spPr>
+        <p:txBody>
+          <a:bodyPr/>
+          <a:lstStyle/>
+          <a:p>
+            <a:pPr algn="l" marL="0" marR="0">
+              <a:lnSpc>
+                <a:spcPct val="100000"/>
+              </a:lnSpc>
+              <a:spcBef>
+                <a:spcPts val="0"/>
+              </a:spcBef>
+              <a:spcAft>
+                <a:spcPts val="0"/>
+              </a:spcAft>
+              <a:buNone/>
+            </a:pPr>
+            <a:r>
+              <a:rPr cap="none" sz="1100" i="0" b="1" u="none" strike="noStrike">
+                <a:solidFill>
+                  <a:srgbClr val="333333">
+                    <a:alpha val="100000"/>
+                  </a:srgbClr>
+                </a:solidFill>
+                <a:latin typeface="Arial"/>
+                <a:cs typeface="Arial"/>
+                <a:ea typeface="Arial"/>
+                <a:sym typeface="Arial"/>
+              </a:rPr>
+              <a:t>■</a:t>
+            </a:r>
+            <a:r>
+              <a:rPr cap="none" sz="1100" i="0" b="0" u="none" strike="noStrike">
+                <a:solidFill>
+                  <a:srgbClr val="333333">
+                    <a:alpha val="100000"/>
+                  </a:srgbClr>
+                </a:solidFill>
+                <a:latin typeface="Arial"/>
+                <a:cs typeface="Arial"/>
+                <a:ea typeface="Arial"/>
+                <a:sym typeface="Arial"/>
+              </a:rPr>
+              <a:t> comment</a:t>
+            </a:r>
+          </a:p>
+          <a:p>
+            <a:pPr algn="l" marL="0" marR="0">
+              <a:lnSpc>
+                <a:spcPct val="100000"/>
+              </a:lnSpc>
+              <a:spcBef>
+                <a:spcPts val="0"/>
+              </a:spcBef>
+              <a:spcAft>
+                <a:spcPts val="0"/>
+              </a:spcAft>
+              <a:buNone/>
+            </a:pPr>
+            <a:r>
+              <a:rPr cap="none" sz="1100" i="0" b="1" u="none" strike="noStrike">
+                <a:solidFill>
+                  <a:srgbClr val="333333">
+                    <a:alpha val="100000"/>
+                  </a:srgbClr>
+                </a:solidFill>
+                <a:latin typeface="Arial"/>
+                <a:cs typeface="Arial"/>
+                <a:ea typeface="Arial"/>
+                <a:sym typeface="Arial"/>
+              </a:rPr>
+              <a:t>■</a:t>
+            </a:r>
+            <a:r>
+              <a:rPr cap="none" sz="1100" i="0" b="0" u="none" strike="noStrike">
+                <a:solidFill>
+                  <a:srgbClr val="333333">
+                    <a:alpha val="100000"/>
+                  </a:srgbClr>
+                </a:solidFill>
+                <a:latin typeface="Arial"/>
+                <a:cs typeface="Arial"/>
+                <a:ea typeface="Arial"/>
+                <a:sym typeface="Arial"/>
+              </a:rPr>
+              <a:t> comment</a:t>
+            </a:r>
+          </a:p>
+          <a:p>
+            <a:pPr algn="l" marL="0" marR="0">
+              <a:lnSpc>
+                <a:spcPct val="100000"/>
+              </a:lnSpc>
+              <a:spcBef>
+                <a:spcPts val="0"/>
+              </a:spcBef>
+              <a:spcAft>
+                <a:spcPts val="0"/>
+              </a:spcAft>
+              <a:buNone/>
+            </a:pPr>
+            <a:r>
+              <a:rPr cap="none" sz="1100" i="0" b="1" u="none" strike="noStrike">
+                <a:solidFill>
+                  <a:srgbClr val="333333">
+                    <a:alpha val="100000"/>
+                  </a:srgbClr>
+                </a:solidFill>
+                <a:latin typeface="Arial"/>
+                <a:cs typeface="Arial"/>
+                <a:ea typeface="Arial"/>
+                <a:sym typeface="Arial"/>
+              </a:rPr>
+              <a:t>■</a:t>
+            </a:r>
+            <a:r>
+              <a:rPr cap="none" sz="1100" i="0" b="0" u="none" strike="noStrike">
+                <a:solidFill>
+                  <a:srgbClr val="333333">
+                    <a:alpha val="100000"/>
+                  </a:srgbClr>
+                </a:solidFill>
+                <a:latin typeface="Arial"/>
+                <a:cs typeface="Arial"/>
+                <a:ea typeface="Arial"/>
+                <a:sym typeface="Arial"/>
+              </a:rPr>
+              <a:t> comment</a:t>
             </a:r>
           </a:p>
         </p:txBody>
       </p:sp>
       <p:graphicFrame>
         <p:nvGraphicFramePr>
-          <p:cNvPr id="3" name="Content Placeholder 2"/>
+          <p:cNvPr id="4" name="Content Placeholder 2"/>
           <p:cNvGraphicFramePr>
             <a:graphicFrameLocks noGrp="true"/>
           </p:cNvGraphicFramePr>
@@ -9799,34 +10157,213 @@
       </p:grpSpPr>
       <p:sp>
         <p:nvSpPr>
-          <p:cNvPr id="2" name="Title 1"/>
+          <p:cNvPr id="2" name=""/>
           <p:cNvSpPr>
             <a:spLocks noGrp="1"/>
           </p:cNvSpPr>
           <p:nvPr>
-            <p:ph type="title"/>
+            <p:ph/>
           </p:nvPr>
         </p:nvSpPr>
         <p:spPr>
           <a:xfrm>
-            <a:off x="457200" y="274638"/>
-            <a:ext cx="8229600" cy="1143000"/>
+            <a:off x="457200" y="237744"/>
+            <a:ext cx="11155680" cy="310896"/>
           </a:xfrm>
+          <a:solidFill>
+            <a:srgbClr val="FFFFFF">
+              <a:alpha val="0"/>
+            </a:srgbClr>
+          </a:solidFill>
         </p:spPr>
         <p:txBody>
           <a:bodyPr/>
           <a:lstStyle/>
           <a:p>
+            <a:pPr algn="l" marL="0" marR="0">
+              <a:lnSpc>
+                <a:spcPct val="100000"/>
+              </a:lnSpc>
+              <a:spcBef>
+                <a:spcPts val="0"/>
+              </a:spcBef>
+              <a:spcAft>
+                <a:spcPts val="0"/>
+              </a:spcAft>
+              <a:buNone/>
+            </a:pPr>
             <a:r>
-              <a:rPr/>
-              <a:t>[DM] DRB Statistical Auto Report</a:t>
+              <a:rPr cap="none" sz="2000" i="0" b="1" u="none" strike="noStrike">
+                <a:solidFill>
+                  <a:srgbClr val="111111">
+                    <a:alpha val="100000"/>
+                  </a:srgbClr>
+                </a:solidFill>
+                <a:latin typeface="Arial"/>
+                <a:cs typeface="Arial"/>
+                <a:ea typeface="Arial"/>
+                <a:sym typeface="Arial"/>
+              </a:rPr>
+              <a:t>[DM] Data Review Board Auto Report</a:t>
+            </a:r>
+          </a:p>
+        </p:txBody>
+      </p:sp>
+      <p:sp>
+        <p:nvSpPr>
+          <p:cNvPr id="3" name=""/>
+          <p:cNvSpPr>
+            <a:spLocks noGrp="1"/>
+          </p:cNvSpPr>
+          <p:nvPr>
+            <p:ph/>
+          </p:nvPr>
+        </p:nvSpPr>
+        <p:spPr>
+          <a:xfrm>
+            <a:off x="457200" y="676656"/>
+            <a:ext cx="11155680" cy="640080"/>
+          </a:xfrm>
+          <a:solidFill>
+            <a:srgbClr val="FFFFFF">
+              <a:alpha val="0"/>
+            </a:srgbClr>
+          </a:solidFill>
+        </p:spPr>
+        <p:txBody>
+          <a:bodyPr/>
+          <a:lstStyle/>
+          <a:p>
+            <a:pPr algn="l" marL="0" marR="0">
+              <a:lnSpc>
+                <a:spcPct val="100000"/>
+              </a:lnSpc>
+              <a:spcBef>
+                <a:spcPts val="0"/>
+              </a:spcBef>
+              <a:spcAft>
+                <a:spcPts val="0"/>
+              </a:spcAft>
+              <a:buNone/>
+            </a:pPr>
+            <a:r>
+              <a:rPr cap="none" sz="1100" i="0" b="1" u="none" strike="noStrike">
+                <a:solidFill>
+                  <a:srgbClr val="333333">
+                    <a:alpha val="100000"/>
+                  </a:srgbClr>
+                </a:solidFill>
+                <a:latin typeface="Arial"/>
+                <a:cs typeface="Arial"/>
+                <a:ea typeface="Arial"/>
+                <a:sym typeface="Arial"/>
+              </a:rPr>
+              <a:t>■</a:t>
+            </a:r>
+            <a:r>
+              <a:rPr cap="none" sz="1100" i="0" b="0" u="none" strike="noStrike">
+                <a:solidFill>
+                  <a:srgbClr val="333333">
+                    <a:alpha val="100000"/>
+                  </a:srgbClr>
+                </a:solidFill>
+                <a:latin typeface="Arial"/>
+                <a:cs typeface="Arial"/>
+                <a:ea typeface="Arial"/>
+                <a:sym typeface="Arial"/>
+              </a:rPr>
+              <a:t> comment</a:t>
+            </a:r>
+          </a:p>
+          <a:p>
+            <a:pPr algn="l" marL="0" marR="0">
+              <a:lnSpc>
+                <a:spcPct val="100000"/>
+              </a:lnSpc>
+              <a:spcBef>
+                <a:spcPts val="0"/>
+              </a:spcBef>
+              <a:spcAft>
+                <a:spcPts val="0"/>
+              </a:spcAft>
+              <a:buNone/>
+            </a:pPr>
+            <a:r>
+              <a:rPr cap="none" sz="1100" i="0" b="1" u="none" strike="noStrike">
+                <a:solidFill>
+                  <a:srgbClr val="333333">
+                    <a:alpha val="100000"/>
+                  </a:srgbClr>
+                </a:solidFill>
+                <a:latin typeface="Arial"/>
+                <a:cs typeface="Arial"/>
+                <a:ea typeface="Arial"/>
+                <a:sym typeface="Arial"/>
+              </a:rPr>
+              <a:t>■</a:t>
+            </a:r>
+            <a:r>
+              <a:rPr cap="none" sz="1100" i="0" b="0" u="none" strike="noStrike">
+                <a:solidFill>
+                  <a:srgbClr val="333333">
+                    <a:alpha val="100000"/>
+                  </a:srgbClr>
+                </a:solidFill>
+                <a:latin typeface="Arial"/>
+                <a:cs typeface="Arial"/>
+                <a:ea typeface="Arial"/>
+                <a:sym typeface="Arial"/>
+              </a:rPr>
+              <a:t> comment</a:t>
+            </a:r>
+          </a:p>
+          <a:p>
+            <a:pPr algn="l" marL="0" marR="0">
+              <a:lnSpc>
+                <a:spcPct val="100000"/>
+              </a:lnSpc>
+              <a:spcBef>
+                <a:spcPts val="0"/>
+              </a:spcBef>
+              <a:spcAft>
+                <a:spcPts val="0"/>
+              </a:spcAft>
+              <a:buNone/>
+            </a:pPr>
+            <a:r>
+              <a:rPr cap="none" sz="1100" i="0" b="1" u="none" strike="noStrike">
+                <a:solidFill>
+                  <a:srgbClr val="333333">
+                    <a:alpha val="100000"/>
+                  </a:srgbClr>
+                </a:solidFill>
+                <a:latin typeface="Arial"/>
+                <a:cs typeface="Arial"/>
+                <a:ea typeface="Arial"/>
+                <a:sym typeface="Arial"/>
+              </a:rPr>
+              <a:t>■</a:t>
+            </a:r>
+            <a:r>
+              <a:rPr cap="none" sz="1100" i="0" b="0" u="none" strike="noStrike">
+                <a:solidFill>
+                  <a:srgbClr val="333333">
+                    <a:alpha val="100000"/>
+                  </a:srgbClr>
+                </a:solidFill>
+                <a:latin typeface="Arial"/>
+                <a:cs typeface="Arial"/>
+                <a:ea typeface="Arial"/>
+                <a:sym typeface="Arial"/>
+              </a:rPr>
+              <a:t> comment</a:t>
             </a:r>
           </a:p>
         </p:txBody>
       </p:sp>
       <p:graphicFrame>
         <p:nvGraphicFramePr>
-          <p:cNvPr id="3" name=""/>
+          <p:cNvPr id="4" name=""/>
           <p:cNvGraphicFramePr>
             <a:graphicFrameLocks noGrp="true"/>
           </p:cNvGraphicFramePr>
@@ -11531,7 +12068,7 @@
       </p:graphicFrame>
       <p:sp>
         <p:nvSpPr>
-          <p:cNvPr id="4" name=""/>
+          <p:cNvPr id="5" name=""/>
           <p:cNvSpPr>
             <a:spLocks noGrp="1"/>
           </p:cNvSpPr>
@@ -11599,7 +12136,7 @@
       </p:sp>
       <p:pic>
         <p:nvPicPr>
-          <p:cNvPr id="5" name="" descr=""/>
+          <p:cNvPr id="6" name="" descr=""/>
           <p:cNvPicPr>
             <a:picLocks noGrp="1"/>
           </p:cNvPicPr>
@@ -11625,7 +12162,7 @@
       </p:pic>
       <p:sp>
         <p:nvSpPr>
-          <p:cNvPr id="6" name=""/>
+          <p:cNvPr id="7" name=""/>
           <p:cNvSpPr>
             <a:spLocks noGrp="1"/>
           </p:cNvSpPr>
@@ -11693,7 +12230,7 @@
       </p:sp>
       <p:pic>
         <p:nvPicPr>
-          <p:cNvPr id="7" name="" descr=""/>
+          <p:cNvPr id="8" name="" descr=""/>
           <p:cNvPicPr>
             <a:picLocks noGrp="1"/>
           </p:cNvPicPr>
@@ -11719,7 +12256,7 @@
       </p:pic>
       <p:sp>
         <p:nvSpPr>
-          <p:cNvPr id="8" name=""/>
+          <p:cNvPr id="9" name=""/>
           <p:cNvSpPr>
             <a:spLocks noGrp="1"/>
           </p:cNvSpPr>
@@ -11787,7 +12324,7 @@
       </p:sp>
       <p:pic>
         <p:nvPicPr>
-          <p:cNvPr id="9" name="" descr=""/>
+          <p:cNvPr id="10" name="" descr=""/>
           <p:cNvPicPr>
             <a:picLocks noGrp="1"/>
           </p:cNvPicPr>
@@ -11813,7 +12350,7 @@
       </p:pic>
       <p:sp>
         <p:nvSpPr>
-          <p:cNvPr id="10" name=""/>
+          <p:cNvPr id="11" name=""/>
           <p:cNvSpPr>
             <a:spLocks noGrp="1"/>
           </p:cNvSpPr>
@@ -11881,7 +12418,7 @@
       </p:sp>
       <p:pic>
         <p:nvPicPr>
-          <p:cNvPr id="11" name="" descr=""/>
+          <p:cNvPr id="12" name="" descr=""/>
           <p:cNvPicPr>
             <a:picLocks noGrp="1"/>
           </p:cNvPicPr>
@@ -11907,7 +12444,7 @@
       </p:pic>
       <p:sp>
         <p:nvSpPr>
-          <p:cNvPr id="12" name=""/>
+          <p:cNvPr id="13" name=""/>
           <p:cNvSpPr>
             <a:spLocks noGrp="1"/>
           </p:cNvSpPr>
@@ -11975,7 +12512,7 @@
       </p:sp>
       <p:pic>
         <p:nvPicPr>
-          <p:cNvPr id="13" name="" descr=""/>
+          <p:cNvPr id="14" name="" descr=""/>
           <p:cNvPicPr>
             <a:picLocks noGrp="1"/>
           </p:cNvPicPr>
@@ -12001,7 +12538,7 @@
       </p:pic>
       <p:sp>
         <p:nvSpPr>
-          <p:cNvPr id="14" name=""/>
+          <p:cNvPr id="15" name=""/>
           <p:cNvSpPr>
             <a:spLocks noGrp="1"/>
           </p:cNvSpPr>
@@ -12069,7 +12606,7 @@
       </p:sp>
       <p:pic>
         <p:nvPicPr>
-          <p:cNvPr id="15" name="" descr=""/>
+          <p:cNvPr id="16" name="" descr=""/>
           <p:cNvPicPr>
             <a:picLocks noGrp="1"/>
           </p:cNvPicPr>
@@ -12095,7 +12632,7 @@
       </p:pic>
       <p:sp>
         <p:nvSpPr>
-          <p:cNvPr id="16" name=""/>
+          <p:cNvPr id="17" name=""/>
           <p:cNvSpPr>
             <a:spLocks noGrp="1"/>
           </p:cNvSpPr>
@@ -12163,7 +12700,7 @@
       </p:sp>
       <p:pic>
         <p:nvPicPr>
-          <p:cNvPr id="17" name="" descr=""/>
+          <p:cNvPr id="18" name="" descr=""/>
           <p:cNvPicPr>
             <a:picLocks noGrp="1"/>
           </p:cNvPicPr>
@@ -12189,7 +12726,7 @@
       </p:pic>
       <p:sp>
         <p:nvSpPr>
-          <p:cNvPr id="18" name=""/>
+          <p:cNvPr id="19" name=""/>
           <p:cNvSpPr>
             <a:spLocks noGrp="1"/>
           </p:cNvSpPr>
@@ -12257,7 +12794,7 @@
       </p:sp>
       <p:pic>
         <p:nvPicPr>
-          <p:cNvPr id="19" name="" descr=""/>
+          <p:cNvPr id="20" name="" descr=""/>
           <p:cNvPicPr>
             <a:picLocks noGrp="1"/>
           </p:cNvPicPr>
@@ -12308,34 +12845,213 @@
       </p:grpSpPr>
       <p:sp>
         <p:nvSpPr>
-          <p:cNvPr id="2" name="Title 1"/>
+          <p:cNvPr id="2" name=""/>
           <p:cNvSpPr>
             <a:spLocks noGrp="1"/>
           </p:cNvSpPr>
           <p:nvPr>
-            <p:ph type="title"/>
+            <p:ph/>
           </p:nvPr>
         </p:nvSpPr>
         <p:spPr>
           <a:xfrm>
-            <a:off x="457200" y="274638"/>
-            <a:ext cx="8229600" cy="1143000"/>
+            <a:off x="457200" y="237744"/>
+            <a:ext cx="11155680" cy="310896"/>
           </a:xfrm>
+          <a:solidFill>
+            <a:srgbClr val="FFFFFF">
+              <a:alpha val="0"/>
+            </a:srgbClr>
+          </a:solidFill>
         </p:spPr>
         <p:txBody>
           <a:bodyPr/>
           <a:lstStyle/>
           <a:p>
+            <a:pPr algn="l" marL="0" marR="0">
+              <a:lnSpc>
+                <a:spcPct val="100000"/>
+              </a:lnSpc>
+              <a:spcBef>
+                <a:spcPts val="0"/>
+              </a:spcBef>
+              <a:spcAft>
+                <a:spcPts val="0"/>
+              </a:spcAft>
+              <a:buNone/>
+            </a:pPr>
             <a:r>
-              <a:rPr/>
-              <a:t>[DM] DRB Statistical Auto Report</a:t>
+              <a:rPr cap="none" sz="2000" i="0" b="1" u="none" strike="noStrike">
+                <a:solidFill>
+                  <a:srgbClr val="111111">
+                    <a:alpha val="100000"/>
+                  </a:srgbClr>
+                </a:solidFill>
+                <a:latin typeface="Arial"/>
+                <a:cs typeface="Arial"/>
+                <a:ea typeface="Arial"/>
+                <a:sym typeface="Arial"/>
+              </a:rPr>
+              <a:t>[DM] Data Review Board Auto Report</a:t>
+            </a:r>
+          </a:p>
+        </p:txBody>
+      </p:sp>
+      <p:sp>
+        <p:nvSpPr>
+          <p:cNvPr id="3" name=""/>
+          <p:cNvSpPr>
+            <a:spLocks noGrp="1"/>
+          </p:cNvSpPr>
+          <p:nvPr>
+            <p:ph/>
+          </p:nvPr>
+        </p:nvSpPr>
+        <p:spPr>
+          <a:xfrm>
+            <a:off x="457200" y="676656"/>
+            <a:ext cx="11155680" cy="640080"/>
+          </a:xfrm>
+          <a:solidFill>
+            <a:srgbClr val="FFFFFF">
+              <a:alpha val="0"/>
+            </a:srgbClr>
+          </a:solidFill>
+        </p:spPr>
+        <p:txBody>
+          <a:bodyPr/>
+          <a:lstStyle/>
+          <a:p>
+            <a:pPr algn="l" marL="0" marR="0">
+              <a:lnSpc>
+                <a:spcPct val="100000"/>
+              </a:lnSpc>
+              <a:spcBef>
+                <a:spcPts val="0"/>
+              </a:spcBef>
+              <a:spcAft>
+                <a:spcPts val="0"/>
+              </a:spcAft>
+              <a:buNone/>
+            </a:pPr>
+            <a:r>
+              <a:rPr cap="none" sz="1100" i="0" b="1" u="none" strike="noStrike">
+                <a:solidFill>
+                  <a:srgbClr val="333333">
+                    <a:alpha val="100000"/>
+                  </a:srgbClr>
+                </a:solidFill>
+                <a:latin typeface="Arial"/>
+                <a:cs typeface="Arial"/>
+                <a:ea typeface="Arial"/>
+                <a:sym typeface="Arial"/>
+              </a:rPr>
+              <a:t>■</a:t>
+            </a:r>
+            <a:r>
+              <a:rPr cap="none" sz="1100" i="0" b="0" u="none" strike="noStrike">
+                <a:solidFill>
+                  <a:srgbClr val="333333">
+                    <a:alpha val="100000"/>
+                  </a:srgbClr>
+                </a:solidFill>
+                <a:latin typeface="Arial"/>
+                <a:cs typeface="Arial"/>
+                <a:ea typeface="Arial"/>
+                <a:sym typeface="Arial"/>
+              </a:rPr>
+              <a:t> comment</a:t>
+            </a:r>
+          </a:p>
+          <a:p>
+            <a:pPr algn="l" marL="0" marR="0">
+              <a:lnSpc>
+                <a:spcPct val="100000"/>
+              </a:lnSpc>
+              <a:spcBef>
+                <a:spcPts val="0"/>
+              </a:spcBef>
+              <a:spcAft>
+                <a:spcPts val="0"/>
+              </a:spcAft>
+              <a:buNone/>
+            </a:pPr>
+            <a:r>
+              <a:rPr cap="none" sz="1100" i="0" b="1" u="none" strike="noStrike">
+                <a:solidFill>
+                  <a:srgbClr val="333333">
+                    <a:alpha val="100000"/>
+                  </a:srgbClr>
+                </a:solidFill>
+                <a:latin typeface="Arial"/>
+                <a:cs typeface="Arial"/>
+                <a:ea typeface="Arial"/>
+                <a:sym typeface="Arial"/>
+              </a:rPr>
+              <a:t>■</a:t>
+            </a:r>
+            <a:r>
+              <a:rPr cap="none" sz="1100" i="0" b="0" u="none" strike="noStrike">
+                <a:solidFill>
+                  <a:srgbClr val="333333">
+                    <a:alpha val="100000"/>
+                  </a:srgbClr>
+                </a:solidFill>
+                <a:latin typeface="Arial"/>
+                <a:cs typeface="Arial"/>
+                <a:ea typeface="Arial"/>
+                <a:sym typeface="Arial"/>
+              </a:rPr>
+              <a:t> comment</a:t>
+            </a:r>
+          </a:p>
+          <a:p>
+            <a:pPr algn="l" marL="0" marR="0">
+              <a:lnSpc>
+                <a:spcPct val="100000"/>
+              </a:lnSpc>
+              <a:spcBef>
+                <a:spcPts val="0"/>
+              </a:spcBef>
+              <a:spcAft>
+                <a:spcPts val="0"/>
+              </a:spcAft>
+              <a:buNone/>
+            </a:pPr>
+            <a:r>
+              <a:rPr cap="none" sz="1100" i="0" b="1" u="none" strike="noStrike">
+                <a:solidFill>
+                  <a:srgbClr val="333333">
+                    <a:alpha val="100000"/>
+                  </a:srgbClr>
+                </a:solidFill>
+                <a:latin typeface="Arial"/>
+                <a:cs typeface="Arial"/>
+                <a:ea typeface="Arial"/>
+                <a:sym typeface="Arial"/>
+              </a:rPr>
+              <a:t>■</a:t>
+            </a:r>
+            <a:r>
+              <a:rPr cap="none" sz="1100" i="0" b="0" u="none" strike="noStrike">
+                <a:solidFill>
+                  <a:srgbClr val="333333">
+                    <a:alpha val="100000"/>
+                  </a:srgbClr>
+                </a:solidFill>
+                <a:latin typeface="Arial"/>
+                <a:cs typeface="Arial"/>
+                <a:ea typeface="Arial"/>
+                <a:sym typeface="Arial"/>
+              </a:rPr>
+              <a:t> comment</a:t>
             </a:r>
           </a:p>
         </p:txBody>
       </p:sp>
       <p:graphicFrame>
         <p:nvGraphicFramePr>
-          <p:cNvPr id="3" name=""/>
+          <p:cNvPr id="4" name=""/>
           <p:cNvGraphicFramePr>
             <a:graphicFrameLocks noGrp="true"/>
           </p:cNvGraphicFramePr>
@@ -14040,7 +14756,7 @@
       </p:graphicFrame>
       <p:sp>
         <p:nvSpPr>
-          <p:cNvPr id="4" name=""/>
+          <p:cNvPr id="5" name=""/>
           <p:cNvSpPr>
             <a:spLocks noGrp="1"/>
           </p:cNvSpPr>
@@ -14108,7 +14824,7 @@
       </p:sp>
       <p:pic>
         <p:nvPicPr>
-          <p:cNvPr id="5" name="" descr=""/>
+          <p:cNvPr id="6" name="" descr=""/>
           <p:cNvPicPr>
             <a:picLocks noGrp="1"/>
           </p:cNvPicPr>
@@ -14134,7 +14850,7 @@
       </p:pic>
       <p:sp>
         <p:nvSpPr>
-          <p:cNvPr id="6" name=""/>
+          <p:cNvPr id="7" name=""/>
           <p:cNvSpPr>
             <a:spLocks noGrp="1"/>
           </p:cNvSpPr>
@@ -14202,7 +14918,7 @@
       </p:sp>
       <p:pic>
         <p:nvPicPr>
-          <p:cNvPr id="7" name="" descr=""/>
+          <p:cNvPr id="8" name="" descr=""/>
           <p:cNvPicPr>
             <a:picLocks noGrp="1"/>
           </p:cNvPicPr>
@@ -14228,7 +14944,7 @@
       </p:pic>
       <p:sp>
         <p:nvSpPr>
-          <p:cNvPr id="8" name=""/>
+          <p:cNvPr id="9" name=""/>
           <p:cNvSpPr>
             <a:spLocks noGrp="1"/>
           </p:cNvSpPr>
@@ -14296,7 +15012,7 @@
       </p:sp>
       <p:pic>
         <p:nvPicPr>
-          <p:cNvPr id="9" name="" descr=""/>
+          <p:cNvPr id="10" name="" descr=""/>
           <p:cNvPicPr>
             <a:picLocks noGrp="1"/>
           </p:cNvPicPr>
@@ -14322,7 +15038,7 @@
       </p:pic>
       <p:sp>
         <p:nvSpPr>
-          <p:cNvPr id="10" name=""/>
+          <p:cNvPr id="11" name=""/>
           <p:cNvSpPr>
             <a:spLocks noGrp="1"/>
           </p:cNvSpPr>
@@ -14390,7 +15106,7 @@
       </p:sp>
       <p:pic>
         <p:nvPicPr>
-          <p:cNvPr id="11" name="" descr=""/>
+          <p:cNvPr id="12" name="" descr=""/>
           <p:cNvPicPr>
             <a:picLocks noGrp="1"/>
           </p:cNvPicPr>
@@ -14416,7 +15132,7 @@
       </p:pic>
       <p:sp>
         <p:nvSpPr>
-          <p:cNvPr id="12" name=""/>
+          <p:cNvPr id="13" name=""/>
           <p:cNvSpPr>
             <a:spLocks noGrp="1"/>
           </p:cNvSpPr>
@@ -14484,7 +15200,7 @@
       </p:sp>
       <p:pic>
         <p:nvPicPr>
-          <p:cNvPr id="13" name="" descr=""/>
+          <p:cNvPr id="14" name="" descr=""/>
           <p:cNvPicPr>
             <a:picLocks noGrp="1"/>
           </p:cNvPicPr>
@@ -14510,7 +15226,7 @@
       </p:pic>
       <p:sp>
         <p:nvSpPr>
-          <p:cNvPr id="14" name=""/>
+          <p:cNvPr id="15" name=""/>
           <p:cNvSpPr>
             <a:spLocks noGrp="1"/>
           </p:cNvSpPr>
@@ -14578,7 +15294,7 @@
       </p:sp>
       <p:pic>
         <p:nvPicPr>
-          <p:cNvPr id="15" name="" descr=""/>
+          <p:cNvPr id="16" name="" descr=""/>
           <p:cNvPicPr>
             <a:picLocks noGrp="1"/>
           </p:cNvPicPr>
@@ -14604,7 +15320,7 @@
       </p:pic>
       <p:sp>
         <p:nvSpPr>
-          <p:cNvPr id="16" name=""/>
+          <p:cNvPr id="17" name=""/>
           <p:cNvSpPr>
             <a:spLocks noGrp="1"/>
           </p:cNvSpPr>
@@ -14672,7 +15388,7 @@
       </p:sp>
       <p:pic>
         <p:nvPicPr>
-          <p:cNvPr id="17" name="" descr=""/>
+          <p:cNvPr id="18" name="" descr=""/>
           <p:cNvPicPr>
             <a:picLocks noGrp="1"/>
           </p:cNvPicPr>
@@ -14698,7 +15414,7 @@
       </p:pic>
       <p:sp>
         <p:nvSpPr>
-          <p:cNvPr id="18" name=""/>
+          <p:cNvPr id="19" name=""/>
           <p:cNvSpPr>
             <a:spLocks noGrp="1"/>
           </p:cNvSpPr>
@@ -14766,7 +15482,7 @@
       </p:sp>
       <p:pic>
         <p:nvPicPr>
-          <p:cNvPr id="19" name="" descr=""/>
+          <p:cNvPr id="20" name="" descr=""/>
           <p:cNvPicPr>
             <a:picLocks noGrp="1"/>
           </p:cNvPicPr>
@@ -14817,34 +15533,213 @@
       </p:grpSpPr>
       <p:sp>
         <p:nvSpPr>
-          <p:cNvPr id="2" name="Title 1"/>
+          <p:cNvPr id="2" name=""/>
           <p:cNvSpPr>
             <a:spLocks noGrp="1"/>
           </p:cNvSpPr>
           <p:nvPr>
-            <p:ph type="title"/>
+            <p:ph/>
           </p:nvPr>
         </p:nvSpPr>
         <p:spPr>
           <a:xfrm>
-            <a:off x="457200" y="274638"/>
-            <a:ext cx="8229600" cy="1143000"/>
+            <a:off x="457200" y="237744"/>
+            <a:ext cx="11155680" cy="310896"/>
           </a:xfrm>
+          <a:solidFill>
+            <a:srgbClr val="FFFFFF">
+              <a:alpha val="0"/>
+            </a:srgbClr>
+          </a:solidFill>
         </p:spPr>
         <p:txBody>
           <a:bodyPr/>
           <a:lstStyle/>
           <a:p>
+            <a:pPr algn="l" marL="0" marR="0">
+              <a:lnSpc>
+                <a:spcPct val="100000"/>
+              </a:lnSpc>
+              <a:spcBef>
+                <a:spcPts val="0"/>
+              </a:spcBef>
+              <a:spcAft>
+                <a:spcPts val="0"/>
+              </a:spcAft>
+              <a:buNone/>
+            </a:pPr>
             <a:r>
-              <a:rPr/>
-              <a:t>[DM] DRB Statistical Auto Report</a:t>
+              <a:rPr cap="none" sz="2000" i="0" b="1" u="none" strike="noStrike">
+                <a:solidFill>
+                  <a:srgbClr val="111111">
+                    <a:alpha val="100000"/>
+                  </a:srgbClr>
+                </a:solidFill>
+                <a:latin typeface="Arial"/>
+                <a:cs typeface="Arial"/>
+                <a:ea typeface="Arial"/>
+                <a:sym typeface="Arial"/>
+              </a:rPr>
+              <a:t>[DM] Data Review Board Auto Report</a:t>
+            </a:r>
+          </a:p>
+        </p:txBody>
+      </p:sp>
+      <p:sp>
+        <p:nvSpPr>
+          <p:cNvPr id="3" name=""/>
+          <p:cNvSpPr>
+            <a:spLocks noGrp="1"/>
+          </p:cNvSpPr>
+          <p:nvPr>
+            <p:ph/>
+          </p:nvPr>
+        </p:nvSpPr>
+        <p:spPr>
+          <a:xfrm>
+            <a:off x="457200" y="676656"/>
+            <a:ext cx="11155680" cy="640080"/>
+          </a:xfrm>
+          <a:solidFill>
+            <a:srgbClr val="FFFFFF">
+              <a:alpha val="0"/>
+            </a:srgbClr>
+          </a:solidFill>
+        </p:spPr>
+        <p:txBody>
+          <a:bodyPr/>
+          <a:lstStyle/>
+          <a:p>
+            <a:pPr algn="l" marL="0" marR="0">
+              <a:lnSpc>
+                <a:spcPct val="100000"/>
+              </a:lnSpc>
+              <a:spcBef>
+                <a:spcPts val="0"/>
+              </a:spcBef>
+              <a:spcAft>
+                <a:spcPts val="0"/>
+              </a:spcAft>
+              <a:buNone/>
+            </a:pPr>
+            <a:r>
+              <a:rPr cap="none" sz="1100" i="0" b="1" u="none" strike="noStrike">
+                <a:solidFill>
+                  <a:srgbClr val="333333">
+                    <a:alpha val="100000"/>
+                  </a:srgbClr>
+                </a:solidFill>
+                <a:latin typeface="Arial"/>
+                <a:cs typeface="Arial"/>
+                <a:ea typeface="Arial"/>
+                <a:sym typeface="Arial"/>
+              </a:rPr>
+              <a:t>■</a:t>
+            </a:r>
+            <a:r>
+              <a:rPr cap="none" sz="1100" i="0" b="0" u="none" strike="noStrike">
+                <a:solidFill>
+                  <a:srgbClr val="333333">
+                    <a:alpha val="100000"/>
+                  </a:srgbClr>
+                </a:solidFill>
+                <a:latin typeface="Arial"/>
+                <a:cs typeface="Arial"/>
+                <a:ea typeface="Arial"/>
+                <a:sym typeface="Arial"/>
+              </a:rPr>
+              <a:t> comment</a:t>
+            </a:r>
+          </a:p>
+          <a:p>
+            <a:pPr algn="l" marL="0" marR="0">
+              <a:lnSpc>
+                <a:spcPct val="100000"/>
+              </a:lnSpc>
+              <a:spcBef>
+                <a:spcPts val="0"/>
+              </a:spcBef>
+              <a:spcAft>
+                <a:spcPts val="0"/>
+              </a:spcAft>
+              <a:buNone/>
+            </a:pPr>
+            <a:r>
+              <a:rPr cap="none" sz="1100" i="0" b="1" u="none" strike="noStrike">
+                <a:solidFill>
+                  <a:srgbClr val="333333">
+                    <a:alpha val="100000"/>
+                  </a:srgbClr>
+                </a:solidFill>
+                <a:latin typeface="Arial"/>
+                <a:cs typeface="Arial"/>
+                <a:ea typeface="Arial"/>
+                <a:sym typeface="Arial"/>
+              </a:rPr>
+              <a:t>■</a:t>
+            </a:r>
+            <a:r>
+              <a:rPr cap="none" sz="1100" i="0" b="0" u="none" strike="noStrike">
+                <a:solidFill>
+                  <a:srgbClr val="333333">
+                    <a:alpha val="100000"/>
+                  </a:srgbClr>
+                </a:solidFill>
+                <a:latin typeface="Arial"/>
+                <a:cs typeface="Arial"/>
+                <a:ea typeface="Arial"/>
+                <a:sym typeface="Arial"/>
+              </a:rPr>
+              <a:t> comment</a:t>
+            </a:r>
+          </a:p>
+          <a:p>
+            <a:pPr algn="l" marL="0" marR="0">
+              <a:lnSpc>
+                <a:spcPct val="100000"/>
+              </a:lnSpc>
+              <a:spcBef>
+                <a:spcPts val="0"/>
+              </a:spcBef>
+              <a:spcAft>
+                <a:spcPts val="0"/>
+              </a:spcAft>
+              <a:buNone/>
+            </a:pPr>
+            <a:r>
+              <a:rPr cap="none" sz="1100" i="0" b="1" u="none" strike="noStrike">
+                <a:solidFill>
+                  <a:srgbClr val="333333">
+                    <a:alpha val="100000"/>
+                  </a:srgbClr>
+                </a:solidFill>
+                <a:latin typeface="Arial"/>
+                <a:cs typeface="Arial"/>
+                <a:ea typeface="Arial"/>
+                <a:sym typeface="Arial"/>
+              </a:rPr>
+              <a:t>■</a:t>
+            </a:r>
+            <a:r>
+              <a:rPr cap="none" sz="1100" i="0" b="0" u="none" strike="noStrike">
+                <a:solidFill>
+                  <a:srgbClr val="333333">
+                    <a:alpha val="100000"/>
+                  </a:srgbClr>
+                </a:solidFill>
+                <a:latin typeface="Arial"/>
+                <a:cs typeface="Arial"/>
+                <a:ea typeface="Arial"/>
+                <a:sym typeface="Arial"/>
+              </a:rPr>
+              <a:t> comment</a:t>
             </a:r>
           </a:p>
         </p:txBody>
       </p:sp>
       <p:graphicFrame>
         <p:nvGraphicFramePr>
-          <p:cNvPr id="3" name=""/>
+          <p:cNvPr id="4" name=""/>
           <p:cNvGraphicFramePr>
             <a:graphicFrameLocks noGrp="true"/>
           </p:cNvGraphicFramePr>
@@ -16549,7 +17444,7 @@
       </p:graphicFrame>
       <p:sp>
         <p:nvSpPr>
-          <p:cNvPr id="4" name=""/>
+          <p:cNvPr id="5" name=""/>
           <p:cNvSpPr>
             <a:spLocks noGrp="1"/>
           </p:cNvSpPr>
@@ -16617,7 +17512,7 @@
       </p:sp>
       <p:pic>
         <p:nvPicPr>
-          <p:cNvPr id="5" name="" descr=""/>
+          <p:cNvPr id="6" name="" descr=""/>
           <p:cNvPicPr>
             <a:picLocks noGrp="1"/>
           </p:cNvPicPr>
@@ -16643,7 +17538,7 @@
       </p:pic>
       <p:sp>
         <p:nvSpPr>
-          <p:cNvPr id="6" name=""/>
+          <p:cNvPr id="7" name=""/>
           <p:cNvSpPr>
             <a:spLocks noGrp="1"/>
           </p:cNvSpPr>
@@ -16711,7 +17606,7 @@
       </p:sp>
       <p:pic>
         <p:nvPicPr>
-          <p:cNvPr id="7" name="" descr=""/>
+          <p:cNvPr id="8" name="" descr=""/>
           <p:cNvPicPr>
             <a:picLocks noGrp="1"/>
           </p:cNvPicPr>
@@ -16737,7 +17632,7 @@
       </p:pic>
       <p:sp>
         <p:nvSpPr>
-          <p:cNvPr id="8" name=""/>
+          <p:cNvPr id="9" name=""/>
           <p:cNvSpPr>
             <a:spLocks noGrp="1"/>
           </p:cNvSpPr>
@@ -16805,7 +17700,7 @@
       </p:sp>
       <p:pic>
         <p:nvPicPr>
-          <p:cNvPr id="9" name="" descr=""/>
+          <p:cNvPr id="10" name="" descr=""/>
           <p:cNvPicPr>
             <a:picLocks noGrp="1"/>
           </p:cNvPicPr>
@@ -16831,7 +17726,7 @@
       </p:pic>
       <p:sp>
         <p:nvSpPr>
-          <p:cNvPr id="10" name=""/>
+          <p:cNvPr id="11" name=""/>
           <p:cNvSpPr>
             <a:spLocks noGrp="1"/>
           </p:cNvSpPr>
@@ -16899,7 +17794,7 @@
       </p:sp>
       <p:pic>
         <p:nvPicPr>
-          <p:cNvPr id="11" name="" descr=""/>
+          <p:cNvPr id="12" name="" descr=""/>
           <p:cNvPicPr>
             <a:picLocks noGrp="1"/>
           </p:cNvPicPr>
@@ -16925,7 +17820,7 @@
       </p:pic>
       <p:sp>
         <p:nvSpPr>
-          <p:cNvPr id="12" name=""/>
+          <p:cNvPr id="13" name=""/>
           <p:cNvSpPr>
             <a:spLocks noGrp="1"/>
           </p:cNvSpPr>
@@ -16993,7 +17888,7 @@
       </p:sp>
       <p:pic>
         <p:nvPicPr>
-          <p:cNvPr id="13" name="" descr=""/>
+          <p:cNvPr id="14" name="" descr=""/>
           <p:cNvPicPr>
             <a:picLocks noGrp="1"/>
           </p:cNvPicPr>
@@ -17019,7 +17914,7 @@
       </p:pic>
       <p:sp>
         <p:nvSpPr>
-          <p:cNvPr id="14" name=""/>
+          <p:cNvPr id="15" name=""/>
           <p:cNvSpPr>
             <a:spLocks noGrp="1"/>
           </p:cNvSpPr>
@@ -17087,7 +17982,7 @@
       </p:sp>
       <p:pic>
         <p:nvPicPr>
-          <p:cNvPr id="15" name="" descr=""/>
+          <p:cNvPr id="16" name="" descr=""/>
           <p:cNvPicPr>
             <a:picLocks noGrp="1"/>
           </p:cNvPicPr>
@@ -17113,7 +18008,7 @@
       </p:pic>
       <p:sp>
         <p:nvSpPr>
-          <p:cNvPr id="16" name=""/>
+          <p:cNvPr id="17" name=""/>
           <p:cNvSpPr>
             <a:spLocks noGrp="1"/>
           </p:cNvSpPr>
@@ -17181,7 +18076,7 @@
       </p:sp>
       <p:pic>
         <p:nvPicPr>
-          <p:cNvPr id="17" name="" descr=""/>
+          <p:cNvPr id="18" name="" descr=""/>
           <p:cNvPicPr>
             <a:picLocks noGrp="1"/>
           </p:cNvPicPr>
@@ -17207,7 +18102,7 @@
       </p:pic>
       <p:sp>
         <p:nvSpPr>
-          <p:cNvPr id="18" name=""/>
+          <p:cNvPr id="19" name=""/>
           <p:cNvSpPr>
             <a:spLocks noGrp="1"/>
           </p:cNvSpPr>
@@ -17275,7 +18170,7 @@
       </p:sp>
       <p:pic>
         <p:nvPicPr>
-          <p:cNvPr id="19" name="" descr=""/>
+          <p:cNvPr id="20" name="" descr=""/>
           <p:cNvPicPr>
             <a:picLocks noGrp="1"/>
           </p:cNvPicPr>
@@ -17326,34 +18221,213 @@
       </p:grpSpPr>
       <p:sp>
         <p:nvSpPr>
-          <p:cNvPr id="2" name="Title 1"/>
+          <p:cNvPr id="2" name=""/>
           <p:cNvSpPr>
             <a:spLocks noGrp="1"/>
           </p:cNvSpPr>
           <p:nvPr>
-            <p:ph type="title"/>
+            <p:ph/>
           </p:nvPr>
         </p:nvSpPr>
         <p:spPr>
           <a:xfrm>
-            <a:off x="457200" y="274638"/>
-            <a:ext cx="8229600" cy="1143000"/>
+            <a:off x="457200" y="237744"/>
+            <a:ext cx="11155680" cy="310896"/>
           </a:xfrm>
+          <a:solidFill>
+            <a:srgbClr val="FFFFFF">
+              <a:alpha val="0"/>
+            </a:srgbClr>
+          </a:solidFill>
         </p:spPr>
         <p:txBody>
           <a:bodyPr/>
           <a:lstStyle/>
           <a:p>
+            <a:pPr algn="l" marL="0" marR="0">
+              <a:lnSpc>
+                <a:spcPct val="100000"/>
+              </a:lnSpc>
+              <a:spcBef>
+                <a:spcPts val="0"/>
+              </a:spcBef>
+              <a:spcAft>
+                <a:spcPts val="0"/>
+              </a:spcAft>
+              <a:buNone/>
+            </a:pPr>
             <a:r>
-              <a:rPr/>
-              <a:t>[DM] DRB Statistical Auto Report</a:t>
+              <a:rPr cap="none" sz="2000" i="0" b="1" u="none" strike="noStrike">
+                <a:solidFill>
+                  <a:srgbClr val="111111">
+                    <a:alpha val="100000"/>
+                  </a:srgbClr>
+                </a:solidFill>
+                <a:latin typeface="Arial"/>
+                <a:cs typeface="Arial"/>
+                <a:ea typeface="Arial"/>
+                <a:sym typeface="Arial"/>
+              </a:rPr>
+              <a:t>[DM] Data Review Board Auto Report</a:t>
+            </a:r>
+          </a:p>
+        </p:txBody>
+      </p:sp>
+      <p:sp>
+        <p:nvSpPr>
+          <p:cNvPr id="3" name=""/>
+          <p:cNvSpPr>
+            <a:spLocks noGrp="1"/>
+          </p:cNvSpPr>
+          <p:nvPr>
+            <p:ph/>
+          </p:nvPr>
+        </p:nvSpPr>
+        <p:spPr>
+          <a:xfrm>
+            <a:off x="457200" y="676656"/>
+            <a:ext cx="11155680" cy="640080"/>
+          </a:xfrm>
+          <a:solidFill>
+            <a:srgbClr val="FFFFFF">
+              <a:alpha val="0"/>
+            </a:srgbClr>
+          </a:solidFill>
+        </p:spPr>
+        <p:txBody>
+          <a:bodyPr/>
+          <a:lstStyle/>
+          <a:p>
+            <a:pPr algn="l" marL="0" marR="0">
+              <a:lnSpc>
+                <a:spcPct val="100000"/>
+              </a:lnSpc>
+              <a:spcBef>
+                <a:spcPts val="0"/>
+              </a:spcBef>
+              <a:spcAft>
+                <a:spcPts val="0"/>
+              </a:spcAft>
+              <a:buNone/>
+            </a:pPr>
+            <a:r>
+              <a:rPr cap="none" sz="1100" i="0" b="1" u="none" strike="noStrike">
+                <a:solidFill>
+                  <a:srgbClr val="333333">
+                    <a:alpha val="100000"/>
+                  </a:srgbClr>
+                </a:solidFill>
+                <a:latin typeface="Arial"/>
+                <a:cs typeface="Arial"/>
+                <a:ea typeface="Arial"/>
+                <a:sym typeface="Arial"/>
+              </a:rPr>
+              <a:t>■</a:t>
+            </a:r>
+            <a:r>
+              <a:rPr cap="none" sz="1100" i="0" b="0" u="none" strike="noStrike">
+                <a:solidFill>
+                  <a:srgbClr val="333333">
+                    <a:alpha val="100000"/>
+                  </a:srgbClr>
+                </a:solidFill>
+                <a:latin typeface="Arial"/>
+                <a:cs typeface="Arial"/>
+                <a:ea typeface="Arial"/>
+                <a:sym typeface="Arial"/>
+              </a:rPr>
+              <a:t> comment</a:t>
+            </a:r>
+          </a:p>
+          <a:p>
+            <a:pPr algn="l" marL="0" marR="0">
+              <a:lnSpc>
+                <a:spcPct val="100000"/>
+              </a:lnSpc>
+              <a:spcBef>
+                <a:spcPts val="0"/>
+              </a:spcBef>
+              <a:spcAft>
+                <a:spcPts val="0"/>
+              </a:spcAft>
+              <a:buNone/>
+            </a:pPr>
+            <a:r>
+              <a:rPr cap="none" sz="1100" i="0" b="1" u="none" strike="noStrike">
+                <a:solidFill>
+                  <a:srgbClr val="333333">
+                    <a:alpha val="100000"/>
+                  </a:srgbClr>
+                </a:solidFill>
+                <a:latin typeface="Arial"/>
+                <a:cs typeface="Arial"/>
+                <a:ea typeface="Arial"/>
+                <a:sym typeface="Arial"/>
+              </a:rPr>
+              <a:t>■</a:t>
+            </a:r>
+            <a:r>
+              <a:rPr cap="none" sz="1100" i="0" b="0" u="none" strike="noStrike">
+                <a:solidFill>
+                  <a:srgbClr val="333333">
+                    <a:alpha val="100000"/>
+                  </a:srgbClr>
+                </a:solidFill>
+                <a:latin typeface="Arial"/>
+                <a:cs typeface="Arial"/>
+                <a:ea typeface="Arial"/>
+                <a:sym typeface="Arial"/>
+              </a:rPr>
+              <a:t> comment</a:t>
+            </a:r>
+          </a:p>
+          <a:p>
+            <a:pPr algn="l" marL="0" marR="0">
+              <a:lnSpc>
+                <a:spcPct val="100000"/>
+              </a:lnSpc>
+              <a:spcBef>
+                <a:spcPts val="0"/>
+              </a:spcBef>
+              <a:spcAft>
+                <a:spcPts val="0"/>
+              </a:spcAft>
+              <a:buNone/>
+            </a:pPr>
+            <a:r>
+              <a:rPr cap="none" sz="1100" i="0" b="1" u="none" strike="noStrike">
+                <a:solidFill>
+                  <a:srgbClr val="333333">
+                    <a:alpha val="100000"/>
+                  </a:srgbClr>
+                </a:solidFill>
+                <a:latin typeface="Arial"/>
+                <a:cs typeface="Arial"/>
+                <a:ea typeface="Arial"/>
+                <a:sym typeface="Arial"/>
+              </a:rPr>
+              <a:t>■</a:t>
+            </a:r>
+            <a:r>
+              <a:rPr cap="none" sz="1100" i="0" b="0" u="none" strike="noStrike">
+                <a:solidFill>
+                  <a:srgbClr val="333333">
+                    <a:alpha val="100000"/>
+                  </a:srgbClr>
+                </a:solidFill>
+                <a:latin typeface="Arial"/>
+                <a:cs typeface="Arial"/>
+                <a:ea typeface="Arial"/>
+                <a:sym typeface="Arial"/>
+              </a:rPr>
+              <a:t> comment</a:t>
             </a:r>
           </a:p>
         </p:txBody>
       </p:sp>
       <p:graphicFrame>
         <p:nvGraphicFramePr>
-          <p:cNvPr id="3" name=""/>
+          <p:cNvPr id="4" name=""/>
           <p:cNvGraphicFramePr>
             <a:graphicFrameLocks noGrp="true"/>
           </p:cNvGraphicFramePr>
@@ -19058,7 +20132,7 @@
       </p:graphicFrame>
       <p:sp>
         <p:nvSpPr>
-          <p:cNvPr id="4" name=""/>
+          <p:cNvPr id="5" name=""/>
           <p:cNvSpPr>
             <a:spLocks noGrp="1"/>
           </p:cNvSpPr>
@@ -19126,7 +20200,7 @@
       </p:sp>
       <p:pic>
         <p:nvPicPr>
-          <p:cNvPr id="5" name="" descr=""/>
+          <p:cNvPr id="6" name="" descr=""/>
           <p:cNvPicPr>
             <a:picLocks noGrp="1"/>
           </p:cNvPicPr>
@@ -19152,7 +20226,7 @@
       </p:pic>
       <p:sp>
         <p:nvSpPr>
-          <p:cNvPr id="6" name=""/>
+          <p:cNvPr id="7" name=""/>
           <p:cNvSpPr>
             <a:spLocks noGrp="1"/>
           </p:cNvSpPr>
@@ -19220,7 +20294,7 @@
       </p:sp>
       <p:pic>
         <p:nvPicPr>
-          <p:cNvPr id="7" name="" descr=""/>
+          <p:cNvPr id="8" name="" descr=""/>
           <p:cNvPicPr>
             <a:picLocks noGrp="1"/>
           </p:cNvPicPr>
@@ -19246,7 +20320,7 @@
       </p:pic>
       <p:sp>
         <p:nvSpPr>
-          <p:cNvPr id="8" name=""/>
+          <p:cNvPr id="9" name=""/>
           <p:cNvSpPr>
             <a:spLocks noGrp="1"/>
           </p:cNvSpPr>
@@ -19314,7 +20388,7 @@
       </p:sp>
       <p:pic>
         <p:nvPicPr>
-          <p:cNvPr id="9" name="" descr=""/>
+          <p:cNvPr id="10" name="" descr=""/>
           <p:cNvPicPr>
             <a:picLocks noGrp="1"/>
           </p:cNvPicPr>
@@ -19340,7 +20414,7 @@
       </p:pic>
       <p:sp>
         <p:nvSpPr>
-          <p:cNvPr id="10" name=""/>
+          <p:cNvPr id="11" name=""/>
           <p:cNvSpPr>
             <a:spLocks noGrp="1"/>
           </p:cNvSpPr>
@@ -19408,7 +20482,7 @@
       </p:sp>
       <p:pic>
         <p:nvPicPr>
-          <p:cNvPr id="11" name="" descr=""/>
+          <p:cNvPr id="12" name="" descr=""/>
           <p:cNvPicPr>
             <a:picLocks noGrp="1"/>
           </p:cNvPicPr>
@@ -19434,7 +20508,7 @@
       </p:pic>
       <p:sp>
         <p:nvSpPr>
-          <p:cNvPr id="12" name=""/>
+          <p:cNvPr id="13" name=""/>
           <p:cNvSpPr>
             <a:spLocks noGrp="1"/>
           </p:cNvSpPr>
@@ -19502,7 +20576,7 @@
       </p:sp>
       <p:pic>
         <p:nvPicPr>
-          <p:cNvPr id="13" name="" descr=""/>
+          <p:cNvPr id="14" name="" descr=""/>
           <p:cNvPicPr>
             <a:picLocks noGrp="1"/>
           </p:cNvPicPr>
@@ -19528,7 +20602,7 @@
       </p:pic>
       <p:sp>
         <p:nvSpPr>
-          <p:cNvPr id="14" name=""/>
+          <p:cNvPr id="15" name=""/>
           <p:cNvSpPr>
             <a:spLocks noGrp="1"/>
           </p:cNvSpPr>
@@ -19596,7 +20670,7 @@
       </p:sp>
       <p:pic>
         <p:nvPicPr>
-          <p:cNvPr id="15" name="" descr=""/>
+          <p:cNvPr id="16" name="" descr=""/>
           <p:cNvPicPr>
             <a:picLocks noGrp="1"/>
           </p:cNvPicPr>
@@ -19622,7 +20696,7 @@
       </p:pic>
       <p:sp>
         <p:nvSpPr>
-          <p:cNvPr id="16" name=""/>
+          <p:cNvPr id="17" name=""/>
           <p:cNvSpPr>
             <a:spLocks noGrp="1"/>
           </p:cNvSpPr>
@@ -19690,7 +20764,7 @@
       </p:sp>
       <p:pic>
         <p:nvPicPr>
-          <p:cNvPr id="17" name="" descr=""/>
+          <p:cNvPr id="18" name="" descr=""/>
           <p:cNvPicPr>
             <a:picLocks noGrp="1"/>
           </p:cNvPicPr>
@@ -19716,7 +20790,7 @@
       </p:pic>
       <p:sp>
         <p:nvSpPr>
-          <p:cNvPr id="18" name=""/>
+          <p:cNvPr id="19" name=""/>
           <p:cNvSpPr>
             <a:spLocks noGrp="1"/>
           </p:cNvSpPr>
@@ -19784,7 +20858,7 @@
       </p:sp>
       <p:pic>
         <p:nvPicPr>
-          <p:cNvPr id="19" name="" descr=""/>
+          <p:cNvPr id="20" name="" descr=""/>
           <p:cNvPicPr>
             <a:picLocks noGrp="1"/>
           </p:cNvPicPr>
@@ -19835,34 +20909,213 @@
       </p:grpSpPr>
       <p:sp>
         <p:nvSpPr>
-          <p:cNvPr id="2" name="Title 1"/>
+          <p:cNvPr id="2" name=""/>
           <p:cNvSpPr>
             <a:spLocks noGrp="1"/>
           </p:cNvSpPr>
           <p:nvPr>
-            <p:ph type="title"/>
+            <p:ph/>
           </p:nvPr>
         </p:nvSpPr>
         <p:spPr>
           <a:xfrm>
-            <a:off x="457200" y="274638"/>
-            <a:ext cx="8229600" cy="1143000"/>
+            <a:off x="457200" y="237744"/>
+            <a:ext cx="11155680" cy="310896"/>
           </a:xfrm>
+          <a:solidFill>
+            <a:srgbClr val="FFFFFF">
+              <a:alpha val="0"/>
+            </a:srgbClr>
+          </a:solidFill>
         </p:spPr>
         <p:txBody>
           <a:bodyPr/>
           <a:lstStyle/>
           <a:p>
+            <a:pPr algn="l" marL="0" marR="0">
+              <a:lnSpc>
+                <a:spcPct val="100000"/>
+              </a:lnSpc>
+              <a:spcBef>
+                <a:spcPts val="0"/>
+              </a:spcBef>
+              <a:spcAft>
+                <a:spcPts val="0"/>
+              </a:spcAft>
+              <a:buNone/>
+            </a:pPr>
             <a:r>
-              <a:rPr/>
-              <a:t>[DM] DRB Statistical Auto Report</a:t>
+              <a:rPr cap="none" sz="2000" i="0" b="1" u="none" strike="noStrike">
+                <a:solidFill>
+                  <a:srgbClr val="111111">
+                    <a:alpha val="100000"/>
+                  </a:srgbClr>
+                </a:solidFill>
+                <a:latin typeface="Arial"/>
+                <a:cs typeface="Arial"/>
+                <a:ea typeface="Arial"/>
+                <a:sym typeface="Arial"/>
+              </a:rPr>
+              <a:t>[DM] Data Review Board Auto Report</a:t>
+            </a:r>
+          </a:p>
+        </p:txBody>
+      </p:sp>
+      <p:sp>
+        <p:nvSpPr>
+          <p:cNvPr id="3" name=""/>
+          <p:cNvSpPr>
+            <a:spLocks noGrp="1"/>
+          </p:cNvSpPr>
+          <p:nvPr>
+            <p:ph/>
+          </p:nvPr>
+        </p:nvSpPr>
+        <p:spPr>
+          <a:xfrm>
+            <a:off x="457200" y="676656"/>
+            <a:ext cx="11155680" cy="640080"/>
+          </a:xfrm>
+          <a:solidFill>
+            <a:srgbClr val="FFFFFF">
+              <a:alpha val="0"/>
+            </a:srgbClr>
+          </a:solidFill>
+        </p:spPr>
+        <p:txBody>
+          <a:bodyPr/>
+          <a:lstStyle/>
+          <a:p>
+            <a:pPr algn="l" marL="0" marR="0">
+              <a:lnSpc>
+                <a:spcPct val="100000"/>
+              </a:lnSpc>
+              <a:spcBef>
+                <a:spcPts val="0"/>
+              </a:spcBef>
+              <a:spcAft>
+                <a:spcPts val="0"/>
+              </a:spcAft>
+              <a:buNone/>
+            </a:pPr>
+            <a:r>
+              <a:rPr cap="none" sz="1100" i="0" b="1" u="none" strike="noStrike">
+                <a:solidFill>
+                  <a:srgbClr val="333333">
+                    <a:alpha val="100000"/>
+                  </a:srgbClr>
+                </a:solidFill>
+                <a:latin typeface="Arial"/>
+                <a:cs typeface="Arial"/>
+                <a:ea typeface="Arial"/>
+                <a:sym typeface="Arial"/>
+              </a:rPr>
+              <a:t>■</a:t>
+            </a:r>
+            <a:r>
+              <a:rPr cap="none" sz="1100" i="0" b="0" u="none" strike="noStrike">
+                <a:solidFill>
+                  <a:srgbClr val="333333">
+                    <a:alpha val="100000"/>
+                  </a:srgbClr>
+                </a:solidFill>
+                <a:latin typeface="Arial"/>
+                <a:cs typeface="Arial"/>
+                <a:ea typeface="Arial"/>
+                <a:sym typeface="Arial"/>
+              </a:rPr>
+              <a:t> comment</a:t>
+            </a:r>
+          </a:p>
+          <a:p>
+            <a:pPr algn="l" marL="0" marR="0">
+              <a:lnSpc>
+                <a:spcPct val="100000"/>
+              </a:lnSpc>
+              <a:spcBef>
+                <a:spcPts val="0"/>
+              </a:spcBef>
+              <a:spcAft>
+                <a:spcPts val="0"/>
+              </a:spcAft>
+              <a:buNone/>
+            </a:pPr>
+            <a:r>
+              <a:rPr cap="none" sz="1100" i="0" b="1" u="none" strike="noStrike">
+                <a:solidFill>
+                  <a:srgbClr val="333333">
+                    <a:alpha val="100000"/>
+                  </a:srgbClr>
+                </a:solidFill>
+                <a:latin typeface="Arial"/>
+                <a:cs typeface="Arial"/>
+                <a:ea typeface="Arial"/>
+                <a:sym typeface="Arial"/>
+              </a:rPr>
+              <a:t>■</a:t>
+            </a:r>
+            <a:r>
+              <a:rPr cap="none" sz="1100" i="0" b="0" u="none" strike="noStrike">
+                <a:solidFill>
+                  <a:srgbClr val="333333">
+                    <a:alpha val="100000"/>
+                  </a:srgbClr>
+                </a:solidFill>
+                <a:latin typeface="Arial"/>
+                <a:cs typeface="Arial"/>
+                <a:ea typeface="Arial"/>
+                <a:sym typeface="Arial"/>
+              </a:rPr>
+              <a:t> comment</a:t>
+            </a:r>
+          </a:p>
+          <a:p>
+            <a:pPr algn="l" marL="0" marR="0">
+              <a:lnSpc>
+                <a:spcPct val="100000"/>
+              </a:lnSpc>
+              <a:spcBef>
+                <a:spcPts val="0"/>
+              </a:spcBef>
+              <a:spcAft>
+                <a:spcPts val="0"/>
+              </a:spcAft>
+              <a:buNone/>
+            </a:pPr>
+            <a:r>
+              <a:rPr cap="none" sz="1100" i="0" b="1" u="none" strike="noStrike">
+                <a:solidFill>
+                  <a:srgbClr val="333333">
+                    <a:alpha val="100000"/>
+                  </a:srgbClr>
+                </a:solidFill>
+                <a:latin typeface="Arial"/>
+                <a:cs typeface="Arial"/>
+                <a:ea typeface="Arial"/>
+                <a:sym typeface="Arial"/>
+              </a:rPr>
+              <a:t>■</a:t>
+            </a:r>
+            <a:r>
+              <a:rPr cap="none" sz="1100" i="0" b="0" u="none" strike="noStrike">
+                <a:solidFill>
+                  <a:srgbClr val="333333">
+                    <a:alpha val="100000"/>
+                  </a:srgbClr>
+                </a:solidFill>
+                <a:latin typeface="Arial"/>
+                <a:cs typeface="Arial"/>
+                <a:ea typeface="Arial"/>
+                <a:sym typeface="Arial"/>
+              </a:rPr>
+              <a:t> comment</a:t>
             </a:r>
           </a:p>
         </p:txBody>
       </p:sp>
       <p:graphicFrame>
         <p:nvGraphicFramePr>
-          <p:cNvPr id="3" name=""/>
+          <p:cNvPr id="4" name=""/>
           <p:cNvGraphicFramePr>
             <a:graphicFrameLocks noGrp="true"/>
           </p:cNvGraphicFramePr>
@@ -21567,7 +22820,7 @@
       </p:graphicFrame>
       <p:sp>
         <p:nvSpPr>
-          <p:cNvPr id="4" name=""/>
+          <p:cNvPr id="5" name=""/>
           <p:cNvSpPr>
             <a:spLocks noGrp="1"/>
           </p:cNvSpPr>
@@ -21635,7 +22888,7 @@
       </p:sp>
       <p:pic>
         <p:nvPicPr>
-          <p:cNvPr id="5" name="" descr=""/>
+          <p:cNvPr id="6" name="" descr=""/>
           <p:cNvPicPr>
             <a:picLocks noGrp="1"/>
           </p:cNvPicPr>
@@ -21661,7 +22914,7 @@
       </p:pic>
       <p:sp>
         <p:nvSpPr>
-          <p:cNvPr id="6" name=""/>
+          <p:cNvPr id="7" name=""/>
           <p:cNvSpPr>
             <a:spLocks noGrp="1"/>
           </p:cNvSpPr>
@@ -21729,7 +22982,7 @@
       </p:sp>
       <p:pic>
         <p:nvPicPr>
-          <p:cNvPr id="7" name="" descr=""/>
+          <p:cNvPr id="8" name="" descr=""/>
           <p:cNvPicPr>
             <a:picLocks noGrp="1"/>
           </p:cNvPicPr>
@@ -21755,7 +23008,7 @@
       </p:pic>
       <p:sp>
         <p:nvSpPr>
-          <p:cNvPr id="8" name=""/>
+          <p:cNvPr id="9" name=""/>
           <p:cNvSpPr>
             <a:spLocks noGrp="1"/>
           </p:cNvSpPr>
@@ -21823,7 +23076,7 @@
       </p:sp>
       <p:pic>
         <p:nvPicPr>
-          <p:cNvPr id="9" name="" descr=""/>
+          <p:cNvPr id="10" name="" descr=""/>
           <p:cNvPicPr>
             <a:picLocks noGrp="1"/>
           </p:cNvPicPr>
@@ -21849,7 +23102,7 @@
       </p:pic>
       <p:sp>
         <p:nvSpPr>
-          <p:cNvPr id="10" name=""/>
+          <p:cNvPr id="11" name=""/>
           <p:cNvSpPr>
             <a:spLocks noGrp="1"/>
           </p:cNvSpPr>
@@ -21917,7 +23170,7 @@
       </p:sp>
       <p:pic>
         <p:nvPicPr>
-          <p:cNvPr id="11" name="" descr=""/>
+          <p:cNvPr id="12" name="" descr=""/>
           <p:cNvPicPr>
             <a:picLocks noGrp="1"/>
           </p:cNvPicPr>
@@ -21943,7 +23196,7 @@
       </p:pic>
       <p:sp>
         <p:nvSpPr>
-          <p:cNvPr id="12" name=""/>
+          <p:cNvPr id="13" name=""/>
           <p:cNvSpPr>
             <a:spLocks noGrp="1"/>
           </p:cNvSpPr>
@@ -22011,7 +23264,7 @@
       </p:sp>
       <p:pic>
         <p:nvPicPr>
-          <p:cNvPr id="13" name="" descr=""/>
+          <p:cNvPr id="14" name="" descr=""/>
           <p:cNvPicPr>
             <a:picLocks noGrp="1"/>
           </p:cNvPicPr>
@@ -22037,7 +23290,7 @@
       </p:pic>
       <p:sp>
         <p:nvSpPr>
-          <p:cNvPr id="14" name=""/>
+          <p:cNvPr id="15" name=""/>
           <p:cNvSpPr>
             <a:spLocks noGrp="1"/>
           </p:cNvSpPr>
@@ -22105,7 +23358,7 @@
       </p:sp>
       <p:pic>
         <p:nvPicPr>
-          <p:cNvPr id="15" name="" descr=""/>
+          <p:cNvPr id="16" name="" descr=""/>
           <p:cNvPicPr>
             <a:picLocks noGrp="1"/>
           </p:cNvPicPr>
@@ -22131,7 +23384,7 @@
       </p:pic>
       <p:sp>
         <p:nvSpPr>
-          <p:cNvPr id="16" name=""/>
+          <p:cNvPr id="17" name=""/>
           <p:cNvSpPr>
             <a:spLocks noGrp="1"/>
           </p:cNvSpPr>
@@ -22199,7 +23452,7 @@
       </p:sp>
       <p:pic>
         <p:nvPicPr>
-          <p:cNvPr id="17" name="" descr=""/>
+          <p:cNvPr id="18" name="" descr=""/>
           <p:cNvPicPr>
             <a:picLocks noGrp="1"/>
           </p:cNvPicPr>
@@ -22225,7 +23478,7 @@
       </p:pic>
       <p:sp>
         <p:nvSpPr>
-          <p:cNvPr id="18" name=""/>
+          <p:cNvPr id="19" name=""/>
           <p:cNvSpPr>
             <a:spLocks noGrp="1"/>
           </p:cNvSpPr>
@@ -22293,7 +23546,7 @@
       </p:sp>
       <p:pic>
         <p:nvPicPr>
-          <p:cNvPr id="19" name="" descr=""/>
+          <p:cNvPr id="20" name="" descr=""/>
           <p:cNvPicPr>
             <a:picLocks noGrp="1"/>
           </p:cNvPicPr>

--- a/output/Sigma_Summary_Latest.pptx
+++ b/output/Sigma_Summary_Latest.pptx
@@ -12818,6 +12818,88 @@
           </a:prstGeom>
         </p:spPr>
       </p:pic>
+      <p:sp>
+        <p:nvSpPr>
+          <p:cNvPr id="21" name=""/>
+          <p:cNvSpPr>
+            <a:spLocks noGrp="1"/>
+          </p:cNvSpPr>
+          <p:nvPr>
+            <p:ph/>
+          </p:nvPr>
+        </p:nvSpPr>
+        <p:spPr>
+          <a:xfrm>
+            <a:off x="4642866" y="6446520"/>
+            <a:ext cx="2903220" cy="219456"/>
+          </a:xfrm>
+          <a:solidFill>
+            <a:srgbClr val="FFFFFF">
+              <a:alpha val="0"/>
+            </a:srgbClr>
+          </a:solidFill>
+        </p:spPr>
+        <p:txBody>
+          <a:bodyPr/>
+          <a:lstStyle/>
+          <a:p>
+            <a:pPr algn="ctr" marL="0" marR="0">
+              <a:lnSpc>
+                <a:spcPct val="100000"/>
+              </a:lnSpc>
+              <a:spcBef>
+                <a:spcPts val="0"/>
+              </a:spcBef>
+              <a:spcAft>
+                <a:spcPts val="0"/>
+              </a:spcAft>
+              <a:buNone/>
+            </a:pPr>
+            <a:r>
+              <a:rPr cap="none" sz="1000" i="0" b="1" u="none" strike="noStrike">
+                <a:solidFill>
+                  <a:srgbClr val="6489FA">
+                    <a:alpha val="100000"/>
+                  </a:srgbClr>
+                </a:solidFill>
+                <a:latin typeface="Arial"/>
+                <a:cs typeface="Arial"/>
+                <a:ea typeface="Arial"/>
+                <a:sym typeface="Arial"/>
+              </a:rPr>
+              <a:t>● A (REF, 16매)</a:t>
+            </a:r>
+            <a:r>
+              <a:rPr cap="none" sz="1000" i="0" b="0" u="none" strike="noStrike">
+                <a:solidFill>
+                  <a:srgbClr val="333333">
+                    <a:alpha val="100000"/>
+                  </a:srgbClr>
+                </a:solidFill>
+                <a:latin typeface="Arial"/>
+                <a:cs typeface="Arial"/>
+                <a:ea typeface="Arial"/>
+                <a:sym typeface="Arial"/>
+              </a:rPr>
+              <a:t>    </a:t>
+            </a:r>
+            <a:r>
+              <a:rPr cap="none" sz="1000" i="0" b="1" u="none" strike="noStrike">
+                <a:solidFill>
+                  <a:srgbClr val="FA7864">
+                    <a:alpha val="100000"/>
+                  </a:srgbClr>
+                </a:solidFill>
+                <a:latin typeface="Arial"/>
+                <a:cs typeface="Arial"/>
+                <a:ea typeface="Arial"/>
+                <a:sym typeface="Arial"/>
+              </a:rPr>
+              <a:t>● B (TARGET, 10매)</a:t>
+            </a:r>
+          </a:p>
+        </p:txBody>
+      </p:sp>
     </p:spTree>
   </p:cSld>
   <p:clrMapOvr>
@@ -15506,6 +15588,88 @@
           </a:prstGeom>
         </p:spPr>
       </p:pic>
+      <p:sp>
+        <p:nvSpPr>
+          <p:cNvPr id="21" name=""/>
+          <p:cNvSpPr>
+            <a:spLocks noGrp="1"/>
+          </p:cNvSpPr>
+          <p:nvPr>
+            <p:ph/>
+          </p:nvPr>
+        </p:nvSpPr>
+        <p:spPr>
+          <a:xfrm>
+            <a:off x="4642866" y="6446520"/>
+            <a:ext cx="2903220" cy="219456"/>
+          </a:xfrm>
+          <a:solidFill>
+            <a:srgbClr val="FFFFFF">
+              <a:alpha val="0"/>
+            </a:srgbClr>
+          </a:solidFill>
+        </p:spPr>
+        <p:txBody>
+          <a:bodyPr/>
+          <a:lstStyle/>
+          <a:p>
+            <a:pPr algn="ctr" marL="0" marR="0">
+              <a:lnSpc>
+                <a:spcPct val="100000"/>
+              </a:lnSpc>
+              <a:spcBef>
+                <a:spcPts val="0"/>
+              </a:spcBef>
+              <a:spcAft>
+                <a:spcPts val="0"/>
+              </a:spcAft>
+              <a:buNone/>
+            </a:pPr>
+            <a:r>
+              <a:rPr cap="none" sz="1000" i="0" b="1" u="none" strike="noStrike">
+                <a:solidFill>
+                  <a:srgbClr val="6489FA">
+                    <a:alpha val="100000"/>
+                  </a:srgbClr>
+                </a:solidFill>
+                <a:latin typeface="Arial"/>
+                <a:cs typeface="Arial"/>
+                <a:ea typeface="Arial"/>
+                <a:sym typeface="Arial"/>
+              </a:rPr>
+              <a:t>● A (REF, 16매)</a:t>
+            </a:r>
+            <a:r>
+              <a:rPr cap="none" sz="1000" i="0" b="0" u="none" strike="noStrike">
+                <a:solidFill>
+                  <a:srgbClr val="333333">
+                    <a:alpha val="100000"/>
+                  </a:srgbClr>
+                </a:solidFill>
+                <a:latin typeface="Arial"/>
+                <a:cs typeface="Arial"/>
+                <a:ea typeface="Arial"/>
+                <a:sym typeface="Arial"/>
+              </a:rPr>
+              <a:t>    </a:t>
+            </a:r>
+            <a:r>
+              <a:rPr cap="none" sz="1000" i="0" b="1" u="none" strike="noStrike">
+                <a:solidFill>
+                  <a:srgbClr val="FA7864">
+                    <a:alpha val="100000"/>
+                  </a:srgbClr>
+                </a:solidFill>
+                <a:latin typeface="Arial"/>
+                <a:cs typeface="Arial"/>
+                <a:ea typeface="Arial"/>
+                <a:sym typeface="Arial"/>
+              </a:rPr>
+              <a:t>● B (TARGET, 10매)</a:t>
+            </a:r>
+          </a:p>
+        </p:txBody>
+      </p:sp>
     </p:spTree>
   </p:cSld>
   <p:clrMapOvr>
@@ -18194,6 +18358,88 @@
           </a:prstGeom>
         </p:spPr>
       </p:pic>
+      <p:sp>
+        <p:nvSpPr>
+          <p:cNvPr id="21" name=""/>
+          <p:cNvSpPr>
+            <a:spLocks noGrp="1"/>
+          </p:cNvSpPr>
+          <p:nvPr>
+            <p:ph/>
+          </p:nvPr>
+        </p:nvSpPr>
+        <p:spPr>
+          <a:xfrm>
+            <a:off x="4642866" y="6446520"/>
+            <a:ext cx="2903220" cy="219456"/>
+          </a:xfrm>
+          <a:solidFill>
+            <a:srgbClr val="FFFFFF">
+              <a:alpha val="0"/>
+            </a:srgbClr>
+          </a:solidFill>
+        </p:spPr>
+        <p:txBody>
+          <a:bodyPr/>
+          <a:lstStyle/>
+          <a:p>
+            <a:pPr algn="ctr" marL="0" marR="0">
+              <a:lnSpc>
+                <a:spcPct val="100000"/>
+              </a:lnSpc>
+              <a:spcBef>
+                <a:spcPts val="0"/>
+              </a:spcBef>
+              <a:spcAft>
+                <a:spcPts val="0"/>
+              </a:spcAft>
+              <a:buNone/>
+            </a:pPr>
+            <a:r>
+              <a:rPr cap="none" sz="1000" i="0" b="1" u="none" strike="noStrike">
+                <a:solidFill>
+                  <a:srgbClr val="6489FA">
+                    <a:alpha val="100000"/>
+                  </a:srgbClr>
+                </a:solidFill>
+                <a:latin typeface="Arial"/>
+                <a:cs typeface="Arial"/>
+                <a:ea typeface="Arial"/>
+                <a:sym typeface="Arial"/>
+              </a:rPr>
+              <a:t>● A (REF, 16매)</a:t>
+            </a:r>
+            <a:r>
+              <a:rPr cap="none" sz="1000" i="0" b="0" u="none" strike="noStrike">
+                <a:solidFill>
+                  <a:srgbClr val="333333">
+                    <a:alpha val="100000"/>
+                  </a:srgbClr>
+                </a:solidFill>
+                <a:latin typeface="Arial"/>
+                <a:cs typeface="Arial"/>
+                <a:ea typeface="Arial"/>
+                <a:sym typeface="Arial"/>
+              </a:rPr>
+              <a:t>    </a:t>
+            </a:r>
+            <a:r>
+              <a:rPr cap="none" sz="1000" i="0" b="1" u="none" strike="noStrike">
+                <a:solidFill>
+                  <a:srgbClr val="FA7864">
+                    <a:alpha val="100000"/>
+                  </a:srgbClr>
+                </a:solidFill>
+                <a:latin typeface="Arial"/>
+                <a:cs typeface="Arial"/>
+                <a:ea typeface="Arial"/>
+                <a:sym typeface="Arial"/>
+              </a:rPr>
+              <a:t>● B (TARGET, 10매)</a:t>
+            </a:r>
+          </a:p>
+        </p:txBody>
+      </p:sp>
     </p:spTree>
   </p:cSld>
   <p:clrMapOvr>
@@ -20882,6 +21128,88 @@
           </a:prstGeom>
         </p:spPr>
       </p:pic>
+      <p:sp>
+        <p:nvSpPr>
+          <p:cNvPr id="21" name=""/>
+          <p:cNvSpPr>
+            <a:spLocks noGrp="1"/>
+          </p:cNvSpPr>
+          <p:nvPr>
+            <p:ph/>
+          </p:nvPr>
+        </p:nvSpPr>
+        <p:spPr>
+          <a:xfrm>
+            <a:off x="4642866" y="6446520"/>
+            <a:ext cx="2903220" cy="219456"/>
+          </a:xfrm>
+          <a:solidFill>
+            <a:srgbClr val="FFFFFF">
+              <a:alpha val="0"/>
+            </a:srgbClr>
+          </a:solidFill>
+        </p:spPr>
+        <p:txBody>
+          <a:bodyPr/>
+          <a:lstStyle/>
+          <a:p>
+            <a:pPr algn="ctr" marL="0" marR="0">
+              <a:lnSpc>
+                <a:spcPct val="100000"/>
+              </a:lnSpc>
+              <a:spcBef>
+                <a:spcPts val="0"/>
+              </a:spcBef>
+              <a:spcAft>
+                <a:spcPts val="0"/>
+              </a:spcAft>
+              <a:buNone/>
+            </a:pPr>
+            <a:r>
+              <a:rPr cap="none" sz="1000" i="0" b="1" u="none" strike="noStrike">
+                <a:solidFill>
+                  <a:srgbClr val="6489FA">
+                    <a:alpha val="100000"/>
+                  </a:srgbClr>
+                </a:solidFill>
+                <a:latin typeface="Arial"/>
+                <a:cs typeface="Arial"/>
+                <a:ea typeface="Arial"/>
+                <a:sym typeface="Arial"/>
+              </a:rPr>
+              <a:t>● A (REF, 16매)</a:t>
+            </a:r>
+            <a:r>
+              <a:rPr cap="none" sz="1000" i="0" b="0" u="none" strike="noStrike">
+                <a:solidFill>
+                  <a:srgbClr val="333333">
+                    <a:alpha val="100000"/>
+                  </a:srgbClr>
+                </a:solidFill>
+                <a:latin typeface="Arial"/>
+                <a:cs typeface="Arial"/>
+                <a:ea typeface="Arial"/>
+                <a:sym typeface="Arial"/>
+              </a:rPr>
+              <a:t>    </a:t>
+            </a:r>
+            <a:r>
+              <a:rPr cap="none" sz="1000" i="0" b="1" u="none" strike="noStrike">
+                <a:solidFill>
+                  <a:srgbClr val="FA7864">
+                    <a:alpha val="100000"/>
+                  </a:srgbClr>
+                </a:solidFill>
+                <a:latin typeface="Arial"/>
+                <a:cs typeface="Arial"/>
+                <a:ea typeface="Arial"/>
+                <a:sym typeface="Arial"/>
+              </a:rPr>
+              <a:t>● B (TARGET, 10매)</a:t>
+            </a:r>
+          </a:p>
+        </p:txBody>
+      </p:sp>
     </p:spTree>
   </p:cSld>
   <p:clrMapOvr>
@@ -23570,6 +23898,88 @@
           </a:prstGeom>
         </p:spPr>
       </p:pic>
+      <p:sp>
+        <p:nvSpPr>
+          <p:cNvPr id="21" name=""/>
+          <p:cNvSpPr>
+            <a:spLocks noGrp="1"/>
+          </p:cNvSpPr>
+          <p:nvPr>
+            <p:ph/>
+          </p:nvPr>
+        </p:nvSpPr>
+        <p:spPr>
+          <a:xfrm>
+            <a:off x="4642866" y="6446520"/>
+            <a:ext cx="2903220" cy="219456"/>
+          </a:xfrm>
+          <a:solidFill>
+            <a:srgbClr val="FFFFFF">
+              <a:alpha val="0"/>
+            </a:srgbClr>
+          </a:solidFill>
+        </p:spPr>
+        <p:txBody>
+          <a:bodyPr/>
+          <a:lstStyle/>
+          <a:p>
+            <a:pPr algn="ctr" marL="0" marR="0">
+              <a:lnSpc>
+                <a:spcPct val="100000"/>
+              </a:lnSpc>
+              <a:spcBef>
+                <a:spcPts val="0"/>
+              </a:spcBef>
+              <a:spcAft>
+                <a:spcPts val="0"/>
+              </a:spcAft>
+              <a:buNone/>
+            </a:pPr>
+            <a:r>
+              <a:rPr cap="none" sz="1000" i="0" b="1" u="none" strike="noStrike">
+                <a:solidFill>
+                  <a:srgbClr val="6489FA">
+                    <a:alpha val="100000"/>
+                  </a:srgbClr>
+                </a:solidFill>
+                <a:latin typeface="Arial"/>
+                <a:cs typeface="Arial"/>
+                <a:ea typeface="Arial"/>
+                <a:sym typeface="Arial"/>
+              </a:rPr>
+              <a:t>● A (REF, 16매)</a:t>
+            </a:r>
+            <a:r>
+              <a:rPr cap="none" sz="1000" i="0" b="0" u="none" strike="noStrike">
+                <a:solidFill>
+                  <a:srgbClr val="333333">
+                    <a:alpha val="100000"/>
+                  </a:srgbClr>
+                </a:solidFill>
+                <a:latin typeface="Arial"/>
+                <a:cs typeface="Arial"/>
+                <a:ea typeface="Arial"/>
+                <a:sym typeface="Arial"/>
+              </a:rPr>
+              <a:t>    </a:t>
+            </a:r>
+            <a:r>
+              <a:rPr cap="none" sz="1000" i="0" b="1" u="none" strike="noStrike">
+                <a:solidFill>
+                  <a:srgbClr val="FA7864">
+                    <a:alpha val="100000"/>
+                  </a:srgbClr>
+                </a:solidFill>
+                <a:latin typeface="Arial"/>
+                <a:cs typeface="Arial"/>
+                <a:ea typeface="Arial"/>
+                <a:sym typeface="Arial"/>
+              </a:rPr>
+              <a:t>● B (TARGET, 10매)</a:t>
+            </a:r>
+          </a:p>
+        </p:txBody>
+      </p:sp>
     </p:spTree>
   </p:cSld>
   <p:clrMapOvr>
